--- a/docs/slides/final-presentation.pptx
+++ b/docs/slides/final-presentation.pptx
@@ -3163,7 +3163,7 @@
                   <a:srgbClr val="1E1B4B"/>
                 </a:solidFill>
               </a:rPr>
-              <a:t>Slide 1 — Project Overview</a:t>
+              <a:t>Slide 1 — The Problem, the Customer, the Value</a:t>
             </a:r>
           </a:p>
         </p:txBody>
@@ -3196,7 +3196,7 @@
                   <a:srgbClr val="4F46E5"/>
                 </a:solidFill>
               </a:rPr>
-              <a:t>Flask E-Commerce Application</a:t>
+              <a:t>The Problem</a:t>
             </a:r>
           </a:p>
         </p:txBody>
@@ -3229,7 +3229,7 @@
                   <a:srgbClr val="1E1B4B"/>
                 </a:solidFill>
               </a:rPr>
-              <a:t>A server-rendered e-commerce platform demonstrating full-stack web development and cloud computing concepts.</a:t>
+              <a:t>Small online sellers get punished for their best days.</a:t>
             </a:r>
           </a:p>
         </p:txBody>
@@ -3262,7 +3262,7 @@
                   <a:srgbClr val="1E1B4B"/>
                 </a:solidFill>
               </a:rPr>
-              <a:t>What it does - Complete storefront: browse → review → cart → checkout → order management - Admin back office: products, users, orders, complaints - Runs behind a custom round-robin load balancer across multiple live instances</a:t>
+              <a:t>A hosted storefront on a single server handles an ordinary Tuesday fine. Then a product gets featured, a post takes off, a holiday lands — traffic spikes 10x and the site slows, times out, or falls over. The busiest hour of the year becomes the hour customers cannot buy.</a:t>
             </a:r>
           </a:p>
         </p:txBody>
@@ -3295,7 +3295,7 @@
                   <a:srgbClr val="1E1B4B"/>
                 </a:solidFill>
               </a:rPr>
-              <a:t>Why it is built this way - Server-rendered (Jinja2), so every page load is a real HTTP request that can be watched traversing the load balancer to a specific backend - Security treated as a first-class concern from the first commit, not retrofitted</a:t>
+              <a:t>The usual escape routes both cost real money: pay year-round for capacity you need twice a year, or rebuild on a platform that takes 3% of every sale forever.</a:t>
             </a:r>
           </a:p>
         </p:txBody>
@@ -3308,7 +3308,7 @@
         </p:nvSpPr>
         <p:spPr>
           <a:xfrm>
-            <a:off x="548640" y="2201988"/>
+            <a:off x="548640" y="2256852"/>
             <a:ext cx="5394960" cy="274320"/>
           </a:xfrm>
           <a:prstGeom prst="rect">
@@ -3323,12 +3323,12 @@
           <a:lstStyle/>
           <a:p>
             <a:r>
-              <a:rPr sz="1150" b="0">
+              <a:rPr sz="1500" b="1">
                 <a:solidFill>
-                  <a:srgbClr val="1E1B4B"/>
+                  <a:srgbClr val="4F46E5"/>
                 </a:solidFill>
               </a:rPr>
-              <a:t>By the numbers</a:t>
+              <a:t>Ideal Customer Profile</a:t>
             </a:r>
           </a:p>
         </p:txBody>
@@ -3342,7 +3342,7 @@
           <p:nvPr/>
         </p:nvGraphicFramePr>
         <p:xfrm>
-          <a:off x="548640" y="2508883"/>
+          <a:off x="548640" y="2578035"/>
           <a:ext cx="5394960" cy="1426464"/>
         </p:xfrm>
         <a:graphic>
@@ -3411,30 +3411,30 @@
                         </a:defRPr>
                       </a:pPr>
                       <a:r>
-                        <a:t>Data models</a:t>
-                      </a:r>
-                    </a:p>
-                  </a:txBody>
-                  <a:tcPr>
-                    <a:solidFill>
-                      <a:srgbClr val="FFFFFF"/>
-                    </a:solidFill>
-                  </a:tcPr>
-                </a:tc>
-                <a:tc>
-                  <a:txBody>
-                    <a:bodyPr/>
-                    <a:lstStyle/>
-                    <a:p>
-                      <a:pPr>
-                        <a:defRPr sz="950">
-                          <a:solidFill>
-                            <a:srgbClr val="1E1B4B"/>
-                          </a:solidFill>
-                        </a:defRPr>
-                      </a:pPr>
-                      <a:r>
-                        <a:t>7</a:t>
+                        <a:t>Who</a:t>
+                      </a:r>
+                    </a:p>
+                  </a:txBody>
+                  <a:tcPr>
+                    <a:solidFill>
+                      <a:srgbClr val="FFFFFF"/>
+                    </a:solidFill>
+                  </a:tcPr>
+                </a:tc>
+                <a:tc>
+                  <a:txBody>
+                    <a:bodyPr/>
+                    <a:lstStyle/>
+                    <a:p>
+                      <a:pPr>
+                        <a:defRPr sz="950">
+                          <a:solidFill>
+                            <a:srgbClr val="1E1B4B"/>
+                          </a:solidFill>
+                        </a:defRPr>
+                      </a:pPr>
+                      <a:r>
+                        <a:t>Independent sellers — 10 to 500 SKUs, 1–3 person team</a:t>
                       </a:r>
                     </a:p>
                   </a:txBody>
@@ -3459,30 +3459,30 @@
                         </a:defRPr>
                       </a:pPr>
                       <a:r>
-                        <a:t>Route blueprints</a:t>
-                      </a:r>
-                    </a:p>
-                  </a:txBody>
-                  <a:tcPr>
-                    <a:solidFill>
-                      <a:srgbClr val="FFFFFF"/>
-                    </a:solidFill>
-                  </a:tcPr>
-                </a:tc>
-                <a:tc>
-                  <a:txBody>
-                    <a:bodyPr/>
-                    <a:lstStyle/>
-                    <a:p>
-                      <a:pPr>
-                        <a:defRPr sz="950">
-                          <a:solidFill>
-                            <a:srgbClr val="1E1B4B"/>
-                          </a:solidFill>
-                        </a:defRPr>
-                      </a:pPr>
-                      <a:r>
-                        <a:t>7</a:t>
+                        <a:t>Revenue</a:t>
+                      </a:r>
+                    </a:p>
+                  </a:txBody>
+                  <a:tcPr>
+                    <a:solidFill>
+                      <a:srgbClr val="FFFFFF"/>
+                    </a:solidFill>
+                  </a:tcPr>
+                </a:tc>
+                <a:tc>
+                  <a:txBody>
+                    <a:bodyPr/>
+                    <a:lstStyle/>
+                    <a:p>
+                      <a:pPr>
+                        <a:defRPr sz="950">
+                          <a:solidFill>
+                            <a:srgbClr val="1E1B4B"/>
+                          </a:solidFill>
+                        </a:defRPr>
+                      </a:pPr>
+                      <a:r>
+                        <a:t>$50K–$2M annually</a:t>
                       </a:r>
                     </a:p>
                   </a:txBody>
@@ -3507,30 +3507,30 @@
                         </a:defRPr>
                       </a:pPr>
                       <a:r>
-                        <a:t>Automated tests</a:t>
-                      </a:r>
-                    </a:p>
-                  </a:txBody>
-                  <a:tcPr>
-                    <a:solidFill>
-                      <a:srgbClr val="FFFFFF"/>
-                    </a:solidFill>
-                  </a:tcPr>
-                </a:tc>
-                <a:tc>
-                  <a:txBody>
-                    <a:bodyPr/>
-                    <a:lstStyle/>
-                    <a:p>
-                      <a:pPr>
-                        <a:defRPr sz="950">
-                          <a:solidFill>
-                            <a:srgbClr val="1E1B4B"/>
-                          </a:solidFill>
-                        </a:defRPr>
-                      </a:pPr>
-                      <a:r>
-                        <a:t>131 passing</a:t>
+                        <a:t>Traffic</a:t>
+                      </a:r>
+                    </a:p>
+                  </a:txBody>
+                  <a:tcPr>
+                    <a:solidFill>
+                      <a:srgbClr val="FFFFFF"/>
+                    </a:solidFill>
+                  </a:tcPr>
+                </a:tc>
+                <a:tc>
+                  <a:txBody>
+                    <a:bodyPr/>
+                    <a:lstStyle/>
+                    <a:p>
+                      <a:pPr>
+                        <a:defRPr sz="950">
+                          <a:solidFill>
+                            <a:srgbClr val="1E1B4B"/>
+                          </a:solidFill>
+                        </a:defRPr>
+                      </a:pPr>
+                      <a:r>
+                        <a:t>Spiky: quiet baseline, sharp promotional peaks</a:t>
                       </a:r>
                     </a:p>
                   </a:txBody>
@@ -3555,30 +3555,30 @@
                         </a:defRPr>
                       </a:pPr>
                       <a:r>
-                        <a:t>Cross-browser checks</a:t>
-                      </a:r>
-                    </a:p>
-                  </a:txBody>
-                  <a:tcPr>
-                    <a:solidFill>
-                      <a:srgbClr val="FFFFFF"/>
-                    </a:solidFill>
-                  </a:tcPr>
-                </a:tc>
-                <a:tc>
-                  <a:txBody>
-                    <a:bodyPr/>
-                    <a:lstStyle/>
-                    <a:p>
-                      <a:pPr>
-                        <a:defRPr sz="950">
-                          <a:solidFill>
-                            <a:srgbClr val="1E1B4B"/>
-                          </a:solidFill>
-                        </a:defRPr>
-                      </a:pPr>
-                      <a:r>
-                        <a:t>99/99 passing</a:t>
+                        <a:t>Pain</a:t>
+                      </a:r>
+                    </a:p>
+                  </a:txBody>
+                  <a:tcPr>
+                    <a:solidFill>
+                      <a:srgbClr val="FFFFFF"/>
+                    </a:solidFill>
+                  </a:tcPr>
+                </a:tc>
+                <a:tc>
+                  <a:txBody>
+                    <a:bodyPr/>
+                    <a:lstStyle/>
+                    <a:p>
+                      <a:pPr>
+                        <a:defRPr sz="950">
+                          <a:solidFill>
+                            <a:srgbClr val="1E1B4B"/>
+                          </a:solidFill>
+                        </a:defRPr>
+                      </a:pPr>
+                      <a:r>
+                        <a:t>Downtime during peaks; margin lost to platform fees</a:t>
                       </a:r>
                     </a:p>
                   </a:txBody>
@@ -3603,30 +3603,30 @@
                         </a:defRPr>
                       </a:pPr>
                       <a:r>
-                        <a:t>Development span</a:t>
-                      </a:r>
-                    </a:p>
-                  </a:txBody>
-                  <a:tcPr>
-                    <a:solidFill>
-                      <a:srgbClr val="FFFFFF"/>
-                    </a:solidFill>
-                  </a:tcPr>
-                </a:tc>
-                <a:tc>
-                  <a:txBody>
-                    <a:bodyPr/>
-                    <a:lstStyle/>
-                    <a:p>
-                      <a:pPr>
-                        <a:defRPr sz="950">
-                          <a:solidFill>
-                            <a:srgbClr val="1E1B4B"/>
-                          </a:solidFill>
-                        </a:defRPr>
-                      </a:pPr>
-                      <a:r>
-                        <a:t>~5 months</a:t>
+                        <a:t>Technical depth</a:t>
+                      </a:r>
+                    </a:p>
+                  </a:txBody>
+                  <a:tcPr>
+                    <a:solidFill>
+                      <a:srgbClr val="FFFFFF"/>
+                    </a:solidFill>
+                  </a:tcPr>
+                </a:tc>
+                <a:tc>
+                  <a:txBody>
+                    <a:bodyPr/>
+                    <a:lstStyle/>
+                    <a:p>
+                      <a:pPr>
+                        <a:defRPr sz="950">
+                          <a:solidFill>
+                            <a:srgbClr val="1E1B4B"/>
+                          </a:solidFill>
+                        </a:defRPr>
+                      </a:pPr>
+                      <a:r>
+                        <a:t>Comfortable deploying, no dedicated DevOps staff</a:t>
                       </a:r>
                     </a:p>
                   </a:txBody>
@@ -3644,6 +3644,204 @@
       <p:sp>
         <p:nvSpPr>
           <p:cNvPr id="10" name="TextBox 9"/>
+          <p:cNvSpPr txBox="1"/>
+          <p:nvPr/>
+        </p:nvSpPr>
+        <p:spPr>
+          <a:xfrm>
+            <a:off x="548640" y="4187379"/>
+            <a:ext cx="5394960" cy="274320"/>
+          </a:xfrm>
+          <a:prstGeom prst="rect">
+            <a:avLst/>
+          </a:prstGeom>
+          <a:noFill/>
+        </p:spPr>
+        <p:txBody>
+          <a:bodyPr wrap="square">
+            <a:spAutoFit/>
+          </a:bodyPr>
+          <a:lstStyle/>
+          <a:p>
+            <a:r>
+              <a:rPr sz="1500" b="1">
+                <a:solidFill>
+                  <a:srgbClr val="4F46E5"/>
+                </a:solidFill>
+              </a:rPr>
+              <a:t>Value Proposition</a:t>
+            </a:r>
+          </a:p>
+        </p:txBody>
+      </p:sp>
+      <p:sp>
+        <p:nvSpPr>
+          <p:cNvPr id="11" name="TextBox 10"/>
+          <p:cNvSpPr txBox="1"/>
+          <p:nvPr/>
+        </p:nvSpPr>
+        <p:spPr>
+          <a:xfrm>
+            <a:off x="548640" y="4471986"/>
+            <a:ext cx="5394960" cy="274320"/>
+          </a:xfrm>
+          <a:prstGeom prst="rect">
+            <a:avLst/>
+          </a:prstGeom>
+          <a:noFill/>
+        </p:spPr>
+        <p:txBody>
+          <a:bodyPr wrap="square">
+            <a:spAutoFit/>
+          </a:bodyPr>
+          <a:lstStyle/>
+          <a:p>
+            <a:r>
+              <a:rPr sz="1150" b="0">
+                <a:solidFill>
+                  <a:srgbClr val="1E1B4B"/>
+                </a:solidFill>
+              </a:rPr>
+              <a:t>Capacity that follows demand, on infrastructure you own.</a:t>
+            </a:r>
+          </a:p>
+        </p:txBody>
+      </p:sp>
+      <p:sp>
+        <p:nvSpPr>
+          <p:cNvPr id="12" name="TextBox 11"/>
+          <p:cNvSpPr txBox="1"/>
+          <p:nvPr/>
+        </p:nvSpPr>
+        <p:spPr>
+          <a:xfrm>
+            <a:off x="548640" y="4742305"/>
+            <a:ext cx="5394960" cy="274320"/>
+          </a:xfrm>
+          <a:prstGeom prst="rect">
+            <a:avLst/>
+          </a:prstGeom>
+          <a:noFill/>
+        </p:spPr>
+        <p:txBody>
+          <a:bodyPr wrap="square">
+            <a:spAutoFit/>
+          </a:bodyPr>
+          <a:lstStyle/>
+          <a:p>
+            <a:r>
+              <a:rPr sz="1100" b="0">
+                <a:solidFill>
+                  <a:srgbClr val="1E1B4B"/>
+                </a:solidFill>
+              </a:rPr>
+              <a:t>•  Scales horizontally under load — add an instance and it serves traffic within 5 seconds, no restart, no config change</a:t>
+            </a:r>
+          </a:p>
+        </p:txBody>
+      </p:sp>
+      <p:sp>
+        <p:nvSpPr>
+          <p:cNvPr id="13" name="TextBox 12"/>
+          <p:cNvSpPr txBox="1"/>
+          <p:nvPr/>
+        </p:nvSpPr>
+        <p:spPr>
+          <a:xfrm>
+            <a:off x="548640" y="4958332"/>
+            <a:ext cx="5394960" cy="274320"/>
+          </a:xfrm>
+          <a:prstGeom prst="rect">
+            <a:avLst/>
+          </a:prstGeom>
+          <a:noFill/>
+        </p:spPr>
+        <p:txBody>
+          <a:bodyPr wrap="square">
+            <a:spAutoFit/>
+          </a:bodyPr>
+          <a:lstStyle/>
+          <a:p>
+            <a:r>
+              <a:rPr sz="1100" b="0">
+                <a:solidFill>
+                  <a:srgbClr val="1E1B4B"/>
+                </a:solidFill>
+              </a:rPr>
+              <a:t>•  Degrades gracefully — a failed instance leaves rotation automatically; the storefront stays up</a:t>
+            </a:r>
+          </a:p>
+        </p:txBody>
+      </p:sp>
+      <p:sp>
+        <p:nvSpPr>
+          <p:cNvPr id="14" name="TextBox 13"/>
+          <p:cNvSpPr txBox="1"/>
+          <p:nvPr/>
+        </p:nvSpPr>
+        <p:spPr>
+          <a:xfrm>
+            <a:off x="548640" y="5174359"/>
+            <a:ext cx="5394960" cy="274320"/>
+          </a:xfrm>
+          <a:prstGeom prst="rect">
+            <a:avLst/>
+          </a:prstGeom>
+          <a:noFill/>
+        </p:spPr>
+        <p:txBody>
+          <a:bodyPr wrap="square">
+            <a:spAutoFit/>
+          </a:bodyPr>
+          <a:lstStyle/>
+          <a:p>
+            <a:r>
+              <a:rPr sz="1100" b="0">
+                <a:solidFill>
+                  <a:srgbClr val="1E1B4B"/>
+                </a:solidFill>
+              </a:rPr>
+              <a:t>•  Owned, not rented — runs on any host; no per-transaction fee</a:t>
+            </a:r>
+          </a:p>
+        </p:txBody>
+      </p:sp>
+      <p:sp>
+        <p:nvSpPr>
+          <p:cNvPr id="15" name="TextBox 14"/>
+          <p:cNvSpPr txBox="1"/>
+          <p:nvPr/>
+        </p:nvSpPr>
+        <p:spPr>
+          <a:xfrm>
+            <a:off x="548640" y="5390386"/>
+            <a:ext cx="5394960" cy="274320"/>
+          </a:xfrm>
+          <a:prstGeom prst="rect">
+            <a:avLst/>
+          </a:prstGeom>
+          <a:noFill/>
+        </p:spPr>
+        <p:txBody>
+          <a:bodyPr wrap="square">
+            <a:spAutoFit/>
+          </a:bodyPr>
+          <a:lstStyle/>
+          <a:p>
+            <a:r>
+              <a:rPr sz="1100" b="0">
+                <a:solidFill>
+                  <a:srgbClr val="1E1B4B"/>
+                </a:solidFill>
+              </a:rPr>
+              <a:t>•  Complete out of the box — catalog, reviews, cart, checkout, orders, returns, and an admin back office</a:t>
+            </a:r>
+          </a:p>
+        </p:txBody>
+      </p:sp>
+      <p:sp>
+        <p:nvSpPr>
+          <p:cNvPr id="16" name="TextBox 15"/>
           <p:cNvSpPr txBox="1"/>
           <p:nvPr/>
         </p:nvSpPr>
@@ -3676,7 +3874,7 @@
       </p:sp>
       <p:sp>
         <p:nvSpPr>
-          <p:cNvPr id="11" name="TextBox 10"/>
+          <p:cNvPr id="17" name="TextBox 16"/>
           <p:cNvSpPr txBox="1"/>
           <p:nvPr/>
         </p:nvSpPr>
@@ -3796,7 +3994,7 @@
                   <a:srgbClr val="1E1B4B"/>
                 </a:solidFill>
               </a:rPr>
-              <a:t>Slide 2 — Application Features</a:t>
+              <a:t>Slide 2 — Methods and Features</a:t>
             </a:r>
           </a:p>
         </p:txBody>
@@ -3829,7 +4027,7 @@
                   <a:srgbClr val="4F46E5"/>
                 </a:solidFill>
               </a:rPr>
-              <a:t>Core Functionality</a:t>
+              <a:t>How It Was Built</a:t>
             </a:r>
           </a:p>
         </p:txBody>
@@ -3862,7 +4060,7 @@
                   <a:srgbClr val="1E1B4B"/>
                 </a:solidFill>
               </a:rPr>
-              <a:t>User management - Registration and login with PBKDF2-SHA256 password hashing - Signed, expiring password-reset tokens (single-use) - Role-based access control via is_admin + @admin_required</a:t>
+              <a:t>Approach: server-rendered Flask, built in five phases over ~5 months — scaffold, foundation, storefront, depth, cloud. CI enforced from phase 2: every push runs the test suite and a Docker build.</a:t>
             </a:r>
           </a:p>
         </p:txBody>
@@ -3895,7 +4093,7 @@
                   <a:srgbClr val="1E1B4B"/>
                 </a:solidFill>
               </a:rPr>
-              <a:t>Catalog and reviews - Product listing, detail pages, many-to-many tag filtering - JSON API (GET/POST/PUT/DELETE /products), admin-gated for writes - Star ratings with a database-level one-review-per-user constraint</a:t>
+              <a:t>Why server-rendered rather than a SPA: every page load is a real HTTP request, so routing through the load balancer to a specific instance is directly observable — the property the project exists to demonstrate.</a:t>
             </a:r>
           </a:p>
         </p:txBody>
@@ -3928,7 +4126,7 @@
                   <a:srgbClr val="1E1B4B"/>
                 </a:solidFill>
               </a:rPr>
-              <a:t>Cart and checkout - Session-backed cart with live badge, quantity updates, removal - Mock checkout — no real payment processed, no card data stored - Validation on both sides: HTML5 in the browser, re-validated on the server</a:t>
+              <a:t>Stack: Python 3.12 · Flask 3.x · SQLAlchemy · Flask-Login · Jinja2 · pytest · Docker · GitHub Actions</a:t>
             </a:r>
           </a:p>
         </p:txBody>
@@ -3941,7 +4139,7 @@
         </p:nvSpPr>
         <p:spPr>
           <a:xfrm>
-            <a:off x="548640" y="2201988"/>
+            <a:off x="548640" y="2256852"/>
             <a:ext cx="5394960" cy="274320"/>
           </a:xfrm>
           <a:prstGeom prst="rect">
@@ -3956,19 +4154,543 @@
           <a:lstStyle/>
           <a:p>
             <a:r>
+              <a:rPr sz="1500" b="1">
+                <a:solidFill>
+                  <a:srgbClr val="4F46E5"/>
+                </a:solidFill>
+              </a:rPr>
+              <a:t>What It Does</a:t>
+            </a:r>
+          </a:p>
+        </p:txBody>
+      </p:sp>
+      <p:graphicFrame>
+        <p:nvGraphicFramePr>
+          <p:cNvPr id="9" name="Table 8"/>
+          <p:cNvGraphicFramePr>
+            <a:graphicFrameLocks noGrp="1"/>
+          </p:cNvGraphicFramePr>
+          <p:nvPr/>
+        </p:nvGraphicFramePr>
+        <p:xfrm>
+          <a:off x="548640" y="2578035"/>
+          <a:ext cx="5394960" cy="2139696"/>
+        </p:xfrm>
+        <a:graphic>
+          <a:graphicData uri="http://schemas.openxmlformats.org/drawingml/2006/table">
+            <a:tbl>
+              <a:tblPr firstRow="1" bandRow="1">
+                <a:tableStyleId>{5C22544A-7EE6-4342-B048-85BDC9FD1C3A}</a:tableStyleId>
+              </a:tblPr>
+              <a:tblGrid>
+                <a:gridCol w="2697480"/>
+                <a:gridCol w="2697480"/>
+              </a:tblGrid>
+              <a:tr h="237744">
+                <a:tc>
+                  <a:txBody>
+                    <a:bodyPr/>
+                    <a:lstStyle/>
+                    <a:p>
+                      <a:pPr>
+                        <a:defRPr sz="1000" b="1">
+                          <a:solidFill>
+                            <a:srgbClr val="1E1B4B"/>
+                          </a:solidFill>
+                        </a:defRPr>
+                      </a:pPr>
+                      <a:r>
+                        <a:t>Area</a:t>
+                      </a:r>
+                    </a:p>
+                  </a:txBody>
+                  <a:tcPr>
+                    <a:solidFill>
+                      <a:srgbClr val="EEF2FF"/>
+                    </a:solidFill>
+                  </a:tcPr>
+                </a:tc>
+                <a:tc>
+                  <a:txBody>
+                    <a:bodyPr/>
+                    <a:lstStyle/>
+                    <a:p>
+                      <a:pPr>
+                        <a:defRPr sz="1000" b="1">
+                          <a:solidFill>
+                            <a:srgbClr val="1E1B4B"/>
+                          </a:solidFill>
+                        </a:defRPr>
+                      </a:pPr>
+                      <a:r>
+                        <a:t>Capability</a:t>
+                      </a:r>
+                    </a:p>
+                  </a:txBody>
+                  <a:tcPr>
+                    <a:solidFill>
+                      <a:srgbClr val="EEF2FF"/>
+                    </a:solidFill>
+                  </a:tcPr>
+                </a:tc>
+              </a:tr>
+              <a:tr h="237744">
+                <a:tc>
+                  <a:txBody>
+                    <a:bodyPr/>
+                    <a:lstStyle/>
+                    <a:p>
+                      <a:pPr>
+                        <a:defRPr sz="950">
+                          <a:solidFill>
+                            <a:srgbClr val="1E1B4B"/>
+                          </a:solidFill>
+                        </a:defRPr>
+                      </a:pPr>
+                      <a:r>
+                        <a:t>Accounts</a:t>
+                      </a:r>
+                    </a:p>
+                  </a:txBody>
+                  <a:tcPr>
+                    <a:solidFill>
+                      <a:srgbClr val="FFFFFF"/>
+                    </a:solidFill>
+                  </a:tcPr>
+                </a:tc>
+                <a:tc>
+                  <a:txBody>
+                    <a:bodyPr/>
+                    <a:lstStyle/>
+                    <a:p>
+                      <a:pPr>
+                        <a:defRPr sz="950">
+                          <a:solidFill>
+                            <a:srgbClr val="1E1B4B"/>
+                          </a:solidFill>
+                        </a:defRPr>
+                      </a:pPr>
+                      <a:r>
+                        <a:t>Registration, login, signed single-use password reset</a:t>
+                      </a:r>
+                    </a:p>
+                  </a:txBody>
+                  <a:tcPr>
+                    <a:solidFill>
+                      <a:srgbClr val="FFFFFF"/>
+                    </a:solidFill>
+                  </a:tcPr>
+                </a:tc>
+              </a:tr>
+              <a:tr h="237744">
+                <a:tc>
+                  <a:txBody>
+                    <a:bodyPr/>
+                    <a:lstStyle/>
+                    <a:p>
+                      <a:pPr>
+                        <a:defRPr sz="950">
+                          <a:solidFill>
+                            <a:srgbClr val="1E1B4B"/>
+                          </a:solidFill>
+                        </a:defRPr>
+                      </a:pPr>
+                      <a:r>
+                        <a:t>Catalog</a:t>
+                      </a:r>
+                    </a:p>
+                  </a:txBody>
+                  <a:tcPr>
+                    <a:solidFill>
+                      <a:srgbClr val="FFFFFF"/>
+                    </a:solidFill>
+                  </a:tcPr>
+                </a:tc>
+                <a:tc>
+                  <a:txBody>
+                    <a:bodyPr/>
+                    <a:lstStyle/>
+                    <a:p>
+                      <a:pPr>
+                        <a:defRPr sz="950">
+                          <a:solidFill>
+                            <a:srgbClr val="1E1B4B"/>
+                          </a:solidFill>
+                        </a:defRPr>
+                      </a:pPr>
+                      <a:r>
+                        <a:t>Products, images, many-to-many tag filtering, JSON API</a:t>
+                      </a:r>
+                    </a:p>
+                  </a:txBody>
+                  <a:tcPr>
+                    <a:solidFill>
+                      <a:srgbClr val="FFFFFF"/>
+                    </a:solidFill>
+                  </a:tcPr>
+                </a:tc>
+              </a:tr>
+              <a:tr h="237744">
+                <a:tc>
+                  <a:txBody>
+                    <a:bodyPr/>
+                    <a:lstStyle/>
+                    <a:p>
+                      <a:pPr>
+                        <a:defRPr sz="950">
+                          <a:solidFill>
+                            <a:srgbClr val="1E1B4B"/>
+                          </a:solidFill>
+                        </a:defRPr>
+                      </a:pPr>
+                      <a:r>
+                        <a:t>Reviews</a:t>
+                      </a:r>
+                    </a:p>
+                  </a:txBody>
+                  <a:tcPr>
+                    <a:solidFill>
+                      <a:srgbClr val="FFFFFF"/>
+                    </a:solidFill>
+                  </a:tcPr>
+                </a:tc>
+                <a:tc>
+                  <a:txBody>
+                    <a:bodyPr/>
+                    <a:lstStyle/>
+                    <a:p>
+                      <a:pPr>
+                        <a:defRPr sz="950">
+                          <a:solidFill>
+                            <a:srgbClr val="1E1B4B"/>
+                          </a:solidFill>
+                        </a:defRPr>
+                      </a:pPr>
+                      <a:r>
+                        <a:t>1–5 star ratings, one per user per product, editable</a:t>
+                      </a:r>
+                    </a:p>
+                  </a:txBody>
+                  <a:tcPr>
+                    <a:solidFill>
+                      <a:srgbClr val="FFFFFF"/>
+                    </a:solidFill>
+                  </a:tcPr>
+                </a:tc>
+              </a:tr>
+              <a:tr h="237744">
+                <a:tc>
+                  <a:txBody>
+                    <a:bodyPr/>
+                    <a:lstStyle/>
+                    <a:p>
+                      <a:pPr>
+                        <a:defRPr sz="950">
+                          <a:solidFill>
+                            <a:srgbClr val="1E1B4B"/>
+                          </a:solidFill>
+                        </a:defRPr>
+                      </a:pPr>
+                      <a:r>
+                        <a:t>Cart</a:t>
+                      </a:r>
+                    </a:p>
+                  </a:txBody>
+                  <a:tcPr>
+                    <a:solidFill>
+                      <a:srgbClr val="FFFFFF"/>
+                    </a:solidFill>
+                  </a:tcPr>
+                </a:tc>
+                <a:tc>
+                  <a:txBody>
+                    <a:bodyPr/>
+                    <a:lstStyle/>
+                    <a:p>
+                      <a:pPr>
+                        <a:defRPr sz="950">
+                          <a:solidFill>
+                            <a:srgbClr val="1E1B4B"/>
+                          </a:solidFill>
+                        </a:defRPr>
+                      </a:pPr>
+                      <a:r>
+                        <a:t>Session-backed, live badge, quantity updates</a:t>
+                      </a:r>
+                    </a:p>
+                  </a:txBody>
+                  <a:tcPr>
+                    <a:solidFill>
+                      <a:srgbClr val="FFFFFF"/>
+                    </a:solidFill>
+                  </a:tcPr>
+                </a:tc>
+              </a:tr>
+              <a:tr h="237744">
+                <a:tc>
+                  <a:txBody>
+                    <a:bodyPr/>
+                    <a:lstStyle/>
+                    <a:p>
+                      <a:pPr>
+                        <a:defRPr sz="950">
+                          <a:solidFill>
+                            <a:srgbClr val="1E1B4B"/>
+                          </a:solidFill>
+                        </a:defRPr>
+                      </a:pPr>
+                      <a:r>
+                        <a:t>Checkout</a:t>
+                      </a:r>
+                    </a:p>
+                  </a:txBody>
+                  <a:tcPr>
+                    <a:solidFill>
+                      <a:srgbClr val="FFFFFF"/>
+                    </a:solidFill>
+                  </a:tcPr>
+                </a:tc>
+                <a:tc>
+                  <a:txBody>
+                    <a:bodyPr/>
+                    <a:lstStyle/>
+                    <a:p>
+                      <a:pPr>
+                        <a:defRPr sz="950">
+                          <a:solidFill>
+                            <a:srgbClr val="1E1B4B"/>
+                          </a:solidFill>
+                        </a:defRPr>
+                      </a:pPr>
+                      <a:r>
+                        <a:t>Address + mock payment — no card data stored</a:t>
+                      </a:r>
+                    </a:p>
+                  </a:txBody>
+                  <a:tcPr>
+                    <a:solidFill>
+                      <a:srgbClr val="FFFFFF"/>
+                    </a:solidFill>
+                  </a:tcPr>
+                </a:tc>
+              </a:tr>
+              <a:tr h="237744">
+                <a:tc>
+                  <a:txBody>
+                    <a:bodyPr/>
+                    <a:lstStyle/>
+                    <a:p>
+                      <a:pPr>
+                        <a:defRPr sz="950">
+                          <a:solidFill>
+                            <a:srgbClr val="1E1B4B"/>
+                          </a:solidFill>
+                        </a:defRPr>
+                      </a:pPr>
+                      <a:r>
+                        <a:t>Orders</a:t>
+                      </a:r>
+                    </a:p>
+                  </a:txBody>
+                  <a:tcPr>
+                    <a:solidFill>
+                      <a:srgbClr val="FFFFFF"/>
+                    </a:solidFill>
+                  </a:tcPr>
+                </a:tc>
+                <a:tc>
+                  <a:txBody>
+                    <a:bodyPr/>
+                    <a:lstStyle/>
+                    <a:p>
+                      <a:pPr>
+                        <a:defRPr sz="950">
+                          <a:solidFill>
+                            <a:srgbClr val="1E1B4B"/>
+                          </a:solidFill>
+                        </a:defRPr>
+                      </a:pPr>
+                      <a:r>
+                        <a:t>History, detail, Buy Again, returns, complaints</a:t>
+                      </a:r>
+                    </a:p>
+                  </a:txBody>
+                  <a:tcPr>
+                    <a:solidFill>
+                      <a:srgbClr val="FFFFFF"/>
+                    </a:solidFill>
+                  </a:tcPr>
+                </a:tc>
+              </a:tr>
+              <a:tr h="237744">
+                <a:tc>
+                  <a:txBody>
+                    <a:bodyPr/>
+                    <a:lstStyle/>
+                    <a:p>
+                      <a:pPr>
+                        <a:defRPr sz="950">
+                          <a:solidFill>
+                            <a:srgbClr val="1E1B4B"/>
+                          </a:solidFill>
+                        </a:defRPr>
+                      </a:pPr>
+                      <a:r>
+                        <a:t>Admin</a:t>
+                      </a:r>
+                    </a:p>
+                  </a:txBody>
+                  <a:tcPr>
+                    <a:solidFill>
+                      <a:srgbClr val="FFFFFF"/>
+                    </a:solidFill>
+                  </a:tcPr>
+                </a:tc>
+                <a:tc>
+                  <a:txBody>
+                    <a:bodyPr/>
+                    <a:lstStyle/>
+                    <a:p>
+                      <a:pPr>
+                        <a:defRPr sz="950">
+                          <a:solidFill>
+                            <a:srgbClr val="1E1B4B"/>
+                          </a:solidFill>
+                        </a:defRPr>
+                      </a:pPr>
+                      <a:r>
+                        <a:t>Product CRUD, bulk seeding, user promotion, complaints queue</a:t>
+                      </a:r>
+                    </a:p>
+                  </a:txBody>
+                  <a:tcPr>
+                    <a:solidFill>
+                      <a:srgbClr val="FFFFFF"/>
+                    </a:solidFill>
+                  </a:tcPr>
+                </a:tc>
+              </a:tr>
+              <a:tr h="237744">
+                <a:tc>
+                  <a:txBody>
+                    <a:bodyPr/>
+                    <a:lstStyle/>
+                    <a:p>
+                      <a:pPr>
+                        <a:defRPr sz="950">
+                          <a:solidFill>
+                            <a:srgbClr val="1E1B4B"/>
+                          </a:solidFill>
+                        </a:defRPr>
+                      </a:pPr>
+                      <a:r>
+                        <a:t>Infrastructure</a:t>
+                      </a:r>
+                    </a:p>
+                  </a:txBody>
+                  <a:tcPr>
+                    <a:solidFill>
+                      <a:srgbClr val="FFFFFF"/>
+                    </a:solidFill>
+                  </a:tcPr>
+                </a:tc>
+                <a:tc>
+                  <a:txBody>
+                    <a:bodyPr/>
+                    <a:lstStyle/>
+                    <a:p>
+                      <a:pPr>
+                        <a:defRPr sz="950">
+                          <a:solidFill>
+                            <a:srgbClr val="1E1B4B"/>
+                          </a:solidFill>
+                        </a:defRPr>
+                      </a:pPr>
+                      <a:r>
+                        <a:t>Round-robin load balancer, health checks, auto-discovery</a:t>
+                      </a:r>
+                    </a:p>
+                  </a:txBody>
+                  <a:tcPr>
+                    <a:solidFill>
+                      <a:srgbClr val="FFFFFF"/>
+                    </a:solidFill>
+                  </a:tcPr>
+                </a:tc>
+              </a:tr>
+            </a:tbl>
+          </a:graphicData>
+        </a:graphic>
+      </p:graphicFrame>
+      <p:sp>
+        <p:nvSpPr>
+          <p:cNvPr id="10" name="TextBox 9"/>
+          <p:cNvSpPr txBox="1"/>
+          <p:nvPr/>
+        </p:nvSpPr>
+        <p:spPr>
+          <a:xfrm>
+            <a:off x="548640" y="4900611"/>
+            <a:ext cx="5394960" cy="274320"/>
+          </a:xfrm>
+          <a:prstGeom prst="rect">
+            <a:avLst/>
+          </a:prstGeom>
+          <a:noFill/>
+        </p:spPr>
+        <p:txBody>
+          <a:bodyPr wrap="square">
+            <a:spAutoFit/>
+          </a:bodyPr>
+          <a:lstStyle/>
+          <a:p>
+            <a:r>
+              <a:rPr sz="1500" b="1">
+                <a:solidFill>
+                  <a:srgbClr val="4F46E5"/>
+                </a:solidFill>
+              </a:rPr>
+              <a:t>Security, Built In From the Start</a:t>
+            </a:r>
+          </a:p>
+        </p:txBody>
+      </p:sp>
+      <p:sp>
+        <p:nvSpPr>
+          <p:cNvPr id="11" name="TextBox 10"/>
+          <p:cNvSpPr txBox="1"/>
+          <p:nvPr/>
+        </p:nvSpPr>
+        <p:spPr>
+          <a:xfrm>
+            <a:off x="6400800" y="1051560"/>
+            <a:ext cx="5394960" cy="274320"/>
+          </a:xfrm>
+          <a:prstGeom prst="rect">
+            <a:avLst/>
+          </a:prstGeom>
+          <a:noFill/>
+        </p:spPr>
+        <p:txBody>
+          <a:bodyPr wrap="square">
+            <a:spAutoFit/>
+          </a:bodyPr>
+          <a:lstStyle/>
+          <a:p>
+            <a:r>
               <a:rPr sz="1150" b="0">
                 <a:solidFill>
                   <a:srgbClr val="1E1B4B"/>
                 </a:solidFill>
               </a:rPr>
-              <a:t>Orders - History, detail, Buy Again, return requests, complaints - Ownership-enforced: another user's order returns 403 Forbidden</a:t>
-            </a:r>
-          </a:p>
-        </p:txBody>
-      </p:sp>
-      <p:sp>
-        <p:nvSpPr>
-          <p:cNvPr id="9" name="TextBox 8"/>
+              <a:t>CSRF on every state-changing POST · PBKDF2-SHA256 password hashing · field whitelisting against mass assignment · ownership-checked orders — not merely login-checked · role-gated admin via @admin_required</a:t>
+            </a:r>
+          </a:p>
+        </p:txBody>
+      </p:sp>
+      <p:sp>
+        <p:nvSpPr>
+          <p:cNvPr id="12" name="TextBox 11"/>
           <p:cNvSpPr txBox="1"/>
           <p:nvPr/>
         </p:nvSpPr>
@@ -4001,7 +4723,7 @@
       </p:sp>
       <p:sp>
         <p:nvSpPr>
-          <p:cNvPr id="10" name="TextBox 9"/>
+          <p:cNvPr id="13" name="TextBox 12"/>
           <p:cNvSpPr txBox="1"/>
           <p:nvPr/>
         </p:nvSpPr>
@@ -4121,7 +4843,7 @@
                   <a:srgbClr val="1E1B4B"/>
                 </a:solidFill>
               </a:rPr>
-              <a:t>Slide 3 — System Architecture</a:t>
+              <a:t>Slide 3 — Code Review, Challenges, Solutions</a:t>
             </a:r>
           </a:p>
         </p:txBody>
@@ -4154,210 +4876,22 @@
                   <a:srgbClr val="4F46E5"/>
                 </a:solidFill>
               </a:rPr>
-              <a:t>Four-Tier Design</a:t>
-            </a:r>
-          </a:p>
-        </p:txBody>
-      </p:sp>
-      <p:sp>
-        <p:nvSpPr>
-          <p:cNvPr id="5" name="TextBox 4"/>
-          <p:cNvSpPr txBox="1"/>
-          <p:nvPr/>
-        </p:nvSpPr>
-        <p:spPr>
-          <a:xfrm>
-            <a:off x="548640" y="1391031"/>
-            <a:ext cx="5394960" cy="274320"/>
-          </a:xfrm>
-          <a:prstGeom prst="rect">
-            <a:avLst/>
-          </a:prstGeom>
-          <a:noFill/>
-        </p:spPr>
-        <p:txBody>
-          <a:bodyPr wrap="none">
-            <a:spAutoFit/>
-          </a:bodyPr>
-          <a:lstStyle/>
-          <a:p>
-            <a:r>
-              <a:rPr sz="850">
-                <a:solidFill>
-                  <a:srgbClr val="555F7A"/>
-                </a:solidFill>
-                <a:latin typeface="Menlo"/>
-              </a:rPr>
-              <a:t>   Desktop / Tablet / Mobile browsers</a:t>
-            </a:r>
-          </a:p>
-          <a:p>
-            <a:r>
-              <a:rPr sz="850">
-                <a:solidFill>
-                  <a:srgbClr val="555F7A"/>
-                </a:solidFill>
-                <a:latin typeface="Menlo"/>
-              </a:rPr>
-              <a:t>                  |</a:t>
-            </a:r>
-          </a:p>
-          <a:p>
-            <a:r>
-              <a:rPr sz="850">
-                <a:solidFill>
-                  <a:srgbClr val="555F7A"/>
-                </a:solidFill>
-                <a:latin typeface="Menlo"/>
-              </a:rPr>
-              <a:t>     Load Balancer (:8000)  &lt;-- health-check thread</a:t>
-            </a:r>
-          </a:p>
-          <a:p>
-            <a:r>
-              <a:rPr sz="850">
-                <a:solidFill>
-                  <a:srgbClr val="555F7A"/>
-                </a:solidFill>
-                <a:latin typeface="Menlo"/>
-              </a:rPr>
-              <a:t>     round-robin + auto-discovery   scans :5000-5010 every 5s</a:t>
-            </a:r>
-          </a:p>
-          <a:p>
-            <a:r>
-              <a:rPr sz="850">
-                <a:solidFill>
-                  <a:srgbClr val="555F7A"/>
-                </a:solidFill>
-                <a:latin typeface="Menlo"/>
-              </a:rPr>
-              <a:t>          /       |       \</a:t>
-            </a:r>
-          </a:p>
-          <a:p>
-            <a:r>
-              <a:rPr sz="850">
-                <a:solidFill>
-                  <a:srgbClr val="555F7A"/>
-                </a:solidFill>
-                <a:latin typeface="Menlo"/>
-              </a:rPr>
-              <a:t>   Instance1  Instance2  Instance3   &lt;-- added/removed at runtime</a:t>
-            </a:r>
-          </a:p>
-          <a:p>
-            <a:r>
-              <a:rPr sz="850">
-                <a:solidFill>
-                  <a:srgbClr val="555F7A"/>
-                </a:solidFill>
-                <a:latin typeface="Menlo"/>
-              </a:rPr>
-              <a:t>     :5000      :5001      :5002</a:t>
-            </a:r>
-          </a:p>
-          <a:p>
-            <a:r>
-              <a:rPr sz="850">
-                <a:solidFill>
-                  <a:srgbClr val="555F7A"/>
-                </a:solidFill>
-                <a:latin typeface="Menlo"/>
-              </a:rPr>
-              <a:t>        |          |          |</a:t>
-            </a:r>
-          </a:p>
-          <a:p>
-            <a:r>
-              <a:rPr sz="850">
-                <a:solidFill>
-                  <a:srgbClr val="555F7A"/>
-                </a:solidFill>
-                <a:latin typeface="Menlo"/>
-              </a:rPr>
-              <a:t>     app1.db    app2.db    app3.db</a:t>
-            </a:r>
-          </a:p>
-        </p:txBody>
-      </p:sp>
-      <p:sp>
-        <p:nvSpPr>
-          <p:cNvPr id="6" name="TextBox 5"/>
-          <p:cNvSpPr txBox="1"/>
-          <p:nvPr/>
-        </p:nvSpPr>
-        <p:spPr>
-          <a:xfrm>
-            <a:off x="548640" y="2762631"/>
-            <a:ext cx="5394960" cy="274320"/>
-          </a:xfrm>
-          <a:prstGeom prst="rect">
-            <a:avLst/>
-          </a:prstGeom>
-          <a:noFill/>
-        </p:spPr>
-        <p:txBody>
-          <a:bodyPr wrap="square">
-            <a:spAutoFit/>
-          </a:bodyPr>
-          <a:lstStyle/>
-          <a:p>
-            <a:r>
-              <a:rPr sz="1150" b="0">
-                <a:solidFill>
-                  <a:srgbClr val="1E1B4B"/>
-                </a:solidFill>
-              </a:rPr>
-              <a:t>Stack: Python 3.12 · Flask 3.x · SQLAlchemy · Flask-Login · Jinja2 · pytest · Docker · GitHub Actions · Codio</a:t>
-            </a:r>
-          </a:p>
-        </p:txBody>
-      </p:sp>
-      <p:sp>
-        <p:nvSpPr>
-          <p:cNvPr id="7" name="TextBox 6"/>
-          <p:cNvSpPr txBox="1"/>
-          <p:nvPr/>
-        </p:nvSpPr>
-        <p:spPr>
-          <a:xfrm>
-            <a:off x="548640" y="3032950"/>
-            <a:ext cx="5394960" cy="274320"/>
-          </a:xfrm>
-          <a:prstGeom prst="rect">
-            <a:avLst/>
-          </a:prstGeom>
-          <a:noFill/>
-        </p:spPr>
-        <p:txBody>
-          <a:bodyPr wrap="square">
-            <a:spAutoFit/>
-          </a:bodyPr>
-          <a:lstStyle/>
-          <a:p>
-            <a:r>
-              <a:rPr sz="1150" b="0">
-                <a:solidFill>
-                  <a:srgbClr val="1E1B4B"/>
-                </a:solidFill>
-              </a:rPr>
-              <a:t>Load balancer implements three cloud concepts</a:t>
+              <a:t>Architecture Decisions Under Review</a:t>
             </a:r>
           </a:p>
         </p:txBody>
       </p:sp>
       <p:graphicFrame>
         <p:nvGraphicFramePr>
-          <p:cNvPr id="8" name="Table 7"/>
+          <p:cNvPr id="5" name="Table 4"/>
           <p:cNvGraphicFramePr>
             <a:graphicFrameLocks noGrp="1"/>
           </p:cNvGraphicFramePr>
           <p:nvPr/>
         </p:nvGraphicFramePr>
         <p:xfrm>
-          <a:off x="548640" y="3339845"/>
-          <a:ext cx="5394960" cy="950976"/>
+          <a:off x="548640" y="1427607"/>
+          <a:ext cx="5394960" cy="1188720"/>
         </p:xfrm>
         <a:graphic>
           <a:graphicData uri="http://schemas.openxmlformats.org/drawingml/2006/table">
@@ -4366,8 +4900,9 @@
                 <a:tableStyleId>{5C22544A-7EE6-4342-B048-85BDC9FD1C3A}</a:tableStyleId>
               </a:tblPr>
               <a:tblGrid>
-                <a:gridCol w="2697480"/>
-                <a:gridCol w="2697480"/>
+                <a:gridCol w="1798320"/>
+                <a:gridCol w="1798320"/>
+                <a:gridCol w="1798320"/>
               </a:tblGrid>
               <a:tr h="237744">
                 <a:tc>
@@ -4383,7 +4918,7 @@
                         </a:defRPr>
                       </a:pPr>
                       <a:r>
-                        <a:t>Concept</a:t>
+                        <a:t>Decision</a:t>
                       </a:r>
                     </a:p>
                   </a:txBody>
@@ -4406,7 +4941,30 @@
                         </a:defRPr>
                       </a:pPr>
                       <a:r>
-                        <a:t>Implementation</a:t>
+                        <a:t>Why</a:t>
+                      </a:r>
+                    </a:p>
+                  </a:txBody>
+                  <a:tcPr>
+                    <a:solidFill>
+                      <a:srgbClr val="EEF2FF"/>
+                    </a:solidFill>
+                  </a:tcPr>
+                </a:tc>
+                <a:tc>
+                  <a:txBody>
+                    <a:bodyPr/>
+                    <a:lstStyle/>
+                    <a:p>
+                      <a:pPr>
+                        <a:defRPr sz="1000" b="1">
+                          <a:solidFill>
+                            <a:srgbClr val="1E1B4B"/>
+                          </a:solidFill>
+                        </a:defRPr>
+                      </a:pPr>
+                      <a:r>
+                        <a:t>Trade-off accepted</a:t>
                       </a:r>
                     </a:p>
                   </a:txBody>
@@ -4431,30 +4989,53 @@
                         </a:defRPr>
                       </a:pPr>
                       <a:r>
-                        <a:t>Round-robin</a:t>
-                      </a:r>
-                    </a:p>
-                  </a:txBody>
-                  <a:tcPr>
-                    <a:solidFill>
-                      <a:srgbClr val="FFFFFF"/>
-                    </a:solidFill>
-                  </a:tcPr>
-                </a:tc>
-                <a:tc>
-                  <a:txBody>
-                    <a:bodyPr/>
-                    <a:lstStyle/>
-                    <a:p>
-                      <a:pPr>
-                        <a:defRPr sz="950">
-                          <a:solidFill>
-                            <a:srgbClr val="1E1B4B"/>
-                          </a:solidFill>
-                        </a:defRPr>
-                      </a:pPr>
-                      <a:r>
-                        <a:t>itertools.count() cycles the healthy pool</a:t>
+                        <a:t>create_app() factory</a:t>
+                      </a:r>
+                    </a:p>
+                  </a:txBody>
+                  <a:tcPr>
+                    <a:solidFill>
+                      <a:srgbClr val="FFFFFF"/>
+                    </a:solidFill>
+                  </a:tcPr>
+                </a:tc>
+                <a:tc>
+                  <a:txBody>
+                    <a:bodyPr/>
+                    <a:lstStyle/>
+                    <a:p>
+                      <a:pPr>
+                        <a:defRPr sz="950">
+                          <a:solidFill>
+                            <a:srgbClr val="1E1B4B"/>
+                          </a:solidFill>
+                        </a:defRPr>
+                      </a:pPr>
+                      <a:r>
+                        <a:t>Injectable test config</a:t>
+                      </a:r>
+                    </a:p>
+                  </a:txBody>
+                  <a:tcPr>
+                    <a:solidFill>
+                      <a:srgbClr val="FFFFFF"/>
+                    </a:solidFill>
+                  </a:tcPr>
+                </a:tc>
+                <a:tc>
+                  <a:txBody>
+                    <a:bodyPr/>
+                    <a:lstStyle/>
+                    <a:p>
+                      <a:pPr>
+                        <a:defRPr sz="950">
+                          <a:solidFill>
+                            <a:srgbClr val="1E1B4B"/>
+                          </a:solidFill>
+                        </a:defRPr>
+                      </a:pPr>
+                      <a:r>
+                        <a:t>More indirection than a flat module</a:t>
                       </a:r>
                     </a:p>
                   </a:txBody>
@@ -4479,30 +5060,53 @@
                         </a:defRPr>
                       </a:pPr>
                       <a:r>
-                        <a:t>Health checking</a:t>
-                      </a:r>
-                    </a:p>
-                  </a:txBody>
-                  <a:tcPr>
-                    <a:solidFill>
-                      <a:srgbClr val="FFFFFF"/>
-                    </a:solidFill>
-                  </a:tcPr>
-                </a:tc>
-                <a:tc>
-                  <a:txBody>
-                    <a:bodyPr/>
-                    <a:lstStyle/>
-                    <a:p>
-                      <a:pPr>
-                        <a:defRPr sz="950">
-                          <a:solidFill>
-                            <a:srgbClr val="1E1B4B"/>
-                          </a:solidFill>
-                        </a:defRPr>
-                      </a:pPr>
-                      <a:r>
-                        <a:t>Daemon thread probes every 5s, 2s timeout</a:t>
+                        <a:t>One DB per instance</a:t>
+                      </a:r>
+                    </a:p>
+                  </a:txBody>
+                  <a:tcPr>
+                    <a:solidFill>
+                      <a:srgbClr val="FFFFFF"/>
+                    </a:solidFill>
+                  </a:tcPr>
+                </a:tc>
+                <a:tc>
+                  <a:txBody>
+                    <a:bodyPr/>
+                    <a:lstStyle/>
+                    <a:p>
+                      <a:pPr>
+                        <a:defRPr sz="950">
+                          <a:solidFill>
+                            <a:srgbClr val="1E1B4B"/>
+                          </a:solidFill>
+                        </a:defRPr>
+                      </a:pPr>
+                      <a:r>
+                        <a:t>SQLite locks under concurrent writes</a:t>
+                      </a:r>
+                    </a:p>
+                  </a:txBody>
+                  <a:tcPr>
+                    <a:solidFill>
+                      <a:srgbClr val="FFFFFF"/>
+                    </a:solidFill>
+                  </a:tcPr>
+                </a:tc>
+                <a:tc>
+                  <a:txBody>
+                    <a:bodyPr/>
+                    <a:lstStyle/>
+                    <a:p>
+                      <a:pPr>
+                        <a:defRPr sz="950">
+                          <a:solidFill>
+                            <a:srgbClr val="1E1B4B"/>
+                          </a:solidFill>
+                        </a:defRPr>
+                      </a:pPr>
+                      <a:r>
+                        <a:t>Data differs per instance — documented, not hidden</a:t>
                       </a:r>
                     </a:p>
                   </a:txBody>
@@ -4527,30 +5131,124 @@
                         </a:defRPr>
                       </a:pPr>
                       <a:r>
-                        <a:t>Auto-scaling</a:t>
-                      </a:r>
-                    </a:p>
-                  </a:txBody>
-                  <a:tcPr>
-                    <a:solidFill>
-                      <a:srgbClr val="FFFFFF"/>
-                    </a:solidFill>
-                  </a:tcPr>
-                </a:tc>
-                <a:tc>
-                  <a:txBody>
-                    <a:bodyPr/>
-                    <a:lstStyle/>
-                    <a:p>
-                      <a:pPr>
-                        <a:defRPr sz="950">
-                          <a:solidFill>
-                            <a:srgbClr val="1E1B4B"/>
-                          </a:solidFill>
-                        </a:defRPr>
-                      </a:pPr>
-                      <a:r>
-                        <a:t>Scans a port range — instances join/leave automatically</a:t>
+                        <a:t>Port-range scanning</a:t>
+                      </a:r>
+                    </a:p>
+                  </a:txBody>
+                  <a:tcPr>
+                    <a:solidFill>
+                      <a:srgbClr val="FFFFFF"/>
+                    </a:solidFill>
+                  </a:tcPr>
+                </a:tc>
+                <a:tc>
+                  <a:txBody>
+                    <a:bodyPr/>
+                    <a:lstStyle/>
+                    <a:p>
+                      <a:pPr>
+                        <a:defRPr sz="950">
+                          <a:solidFill>
+                            <a:srgbClr val="1E1B4B"/>
+                          </a:solidFill>
+                        </a:defRPr>
+                      </a:pPr>
+                      <a:r>
+                        <a:t>Shows dynamic membership without extra infra</a:t>
+                      </a:r>
+                    </a:p>
+                  </a:txBody>
+                  <a:tcPr>
+                    <a:solidFill>
+                      <a:srgbClr val="FFFFFF"/>
+                    </a:solidFill>
+                  </a:tcPr>
+                </a:tc>
+                <a:tc>
+                  <a:txBody>
+                    <a:bodyPr/>
+                    <a:lstStyle/>
+                    <a:p>
+                      <a:pPr>
+                        <a:defRPr sz="950">
+                          <a:solidFill>
+                            <a:srgbClr val="1E1B4B"/>
+                          </a:solidFill>
+                        </a:defRPr>
+                      </a:pPr>
+                      <a:r>
+                        <a:t>A simulation; real systems use a service registry</a:t>
+                      </a:r>
+                    </a:p>
+                  </a:txBody>
+                  <a:tcPr>
+                    <a:solidFill>
+                      <a:srgbClr val="FFFFFF"/>
+                    </a:solidFill>
+                  </a:tcPr>
+                </a:tc>
+              </a:tr>
+              <a:tr h="237744">
+                <a:tc>
+                  <a:txBody>
+                    <a:bodyPr/>
+                    <a:lstStyle/>
+                    <a:p>
+                      <a:pPr>
+                        <a:defRPr sz="950">
+                          <a:solidFill>
+                            <a:srgbClr val="1E1B4B"/>
+                          </a:solidFill>
+                        </a:defRPr>
+                      </a:pPr>
+                      <a:r>
+                        <a:t>Split requirements files</a:t>
+                      </a:r>
+                    </a:p>
+                  </a:txBody>
+                  <a:tcPr>
+                    <a:solidFill>
+                      <a:srgbClr val="FFFFFF"/>
+                    </a:solidFill>
+                  </a:tcPr>
+                </a:tc>
+                <a:tc>
+                  <a:txBody>
+                    <a:bodyPr/>
+                    <a:lstStyle/>
+                    <a:p>
+                      <a:pPr>
+                        <a:defRPr sz="950">
+                          <a:solidFill>
+                            <a:srgbClr val="1E1B4B"/>
+                          </a:solidFill>
+                        </a:defRPr>
+                      </a:pPr>
+                      <a:r>
+                        <a:t>psycopg2 needs compilers the image lacks</a:t>
+                      </a:r>
+                    </a:p>
+                  </a:txBody>
+                  <a:tcPr>
+                    <a:solidFill>
+                      <a:srgbClr val="FFFFFF"/>
+                    </a:solidFill>
+                  </a:tcPr>
+                </a:tc>
+                <a:tc>
+                  <a:txBody>
+                    <a:bodyPr/>
+                    <a:lstStyle/>
+                    <a:p>
+                      <a:pPr>
+                        <a:defRPr sz="950">
+                          <a:solidFill>
+                            <a:srgbClr val="1E1B4B"/>
+                          </a:solidFill>
+                        </a:defRPr>
+                      </a:pPr>
+                      <a:r>
+                        <a:t>Two files to keep in sync</a:t>
                       </a:r>
                     </a:p>
                   </a:txBody>
@@ -4567,13 +5265,13 @@
       </p:graphicFrame>
       <p:sp>
         <p:nvSpPr>
-          <p:cNvPr id="9" name="TextBox 8"/>
+          <p:cNvPr id="6" name="TextBox 5"/>
           <p:cNvSpPr txBox="1"/>
           <p:nvPr/>
         </p:nvSpPr>
         <p:spPr>
           <a:xfrm>
-            <a:off x="548640" y="4418837"/>
+            <a:off x="548640" y="2799207"/>
             <a:ext cx="5394960" cy="274320"/>
           </a:xfrm>
           <a:prstGeom prst="rect">
@@ -4588,12 +5286,111 @@
           <a:lstStyle/>
           <a:p>
             <a:r>
+              <a:rPr sz="1500" b="1">
+                <a:solidFill>
+                  <a:srgbClr val="4F46E5"/>
+                </a:solidFill>
+              </a:rPr>
+              <a:t>Challenges and How They Were Solved</a:t>
+            </a:r>
+          </a:p>
+        </p:txBody>
+      </p:sp>
+      <p:sp>
+        <p:nvSpPr>
+          <p:cNvPr id="7" name="TextBox 6"/>
+          <p:cNvSpPr txBox="1"/>
+          <p:nvPr/>
+        </p:nvSpPr>
+        <p:spPr>
+          <a:xfrm>
+            <a:off x="548640" y="3083814"/>
+            <a:ext cx="5394960" cy="274320"/>
+          </a:xfrm>
+          <a:prstGeom prst="rect">
+            <a:avLst/>
+          </a:prstGeom>
+          <a:noFill/>
+        </p:spPr>
+        <p:txBody>
+          <a:bodyPr wrap="square">
+            <a:spAutoFit/>
+          </a:bodyPr>
+          <a:lstStyle/>
+          <a:p>
+            <a:r>
               <a:rPr sz="1150" b="0">
                 <a:solidFill>
                   <a:srgbClr val="1E1B4B"/>
                 </a:solidFill>
               </a:rPr>
-              <a:t>Hop-by-hop headers stripped per RFC 7230. Zero healthy backends → 503, not a crash.</a:t>
+              <a:t>A flat app.py could not be tested. Importing it built a live app bound to the dev database. Restructured into an application factory accepting a test config — the change that made all 131 tests possible.</a:t>
+            </a:r>
+          </a:p>
+        </p:txBody>
+      </p:sp>
+      <p:sp>
+        <p:nvSpPr>
+          <p:cNvPr id="8" name="TextBox 7"/>
+          <p:cNvSpPr txBox="1"/>
+          <p:nvPr/>
+        </p:nvSpPr>
+        <p:spPr>
+          <a:xfrm>
+            <a:off x="548640" y="3354133"/>
+            <a:ext cx="5394960" cy="274320"/>
+          </a:xfrm>
+          <a:prstGeom prst="rect">
+            <a:avLst/>
+          </a:prstGeom>
+          <a:noFill/>
+        </p:spPr>
+        <p:txBody>
+          <a:bodyPr wrap="square">
+            <a:spAutoFit/>
+          </a:bodyPr>
+          <a:lstStyle/>
+          <a:p>
+            <a:r>
+              <a:rPr sz="1150" b="0">
+                <a:solidFill>
+                  <a:srgbClr val="1E1B4B"/>
+                </a:solidFill>
+              </a:rPr>
+              <a:t>A static backend list demonstrated nothing. Round-robin across fixed targets shows distribution but not elasticity. Added a health-check thread scanning a port range, so instances join and leave rotation on their own.</a:t>
+            </a:r>
+          </a:p>
+        </p:txBody>
+      </p:sp>
+      <p:sp>
+        <p:nvSpPr>
+          <p:cNvPr id="9" name="TextBox 8"/>
+          <p:cNvSpPr txBox="1"/>
+          <p:nvPr/>
+        </p:nvSpPr>
+        <p:spPr>
+          <a:xfrm>
+            <a:off x="548640" y="3624452"/>
+            <a:ext cx="5394960" cy="274320"/>
+          </a:xfrm>
+          <a:prstGeom prst="rect">
+            <a:avLst/>
+          </a:prstGeom>
+          <a:noFill/>
+        </p:spPr>
+        <p:txBody>
+          <a:bodyPr wrap="square">
+            <a:spAutoFit/>
+          </a:bodyPr>
+          <a:lstStyle/>
+          <a:p>
+            <a:r>
+              <a:rPr sz="1150" b="0">
+                <a:solidFill>
+                  <a:srgbClr val="1E1B4B"/>
+                </a:solidFill>
+              </a:rPr>
+              <a:t>SQLite locked under multi-instance writes. Gave each backend its own database file — an explicit trade-off, documented in the README rather than buried.</a:t>
             </a:r>
           </a:p>
         </p:txBody>
@@ -4601,6 +5398,138 @@
       <p:sp>
         <p:nvSpPr>
           <p:cNvPr id="10" name="TextBox 9"/>
+          <p:cNvSpPr txBox="1"/>
+          <p:nvPr/>
+        </p:nvSpPr>
+        <p:spPr>
+          <a:xfrm>
+            <a:off x="548640" y="3894771"/>
+            <a:ext cx="5394960" cy="274320"/>
+          </a:xfrm>
+          <a:prstGeom prst="rect">
+            <a:avLst/>
+          </a:prstGeom>
+          <a:noFill/>
+        </p:spPr>
+        <p:txBody>
+          <a:bodyPr wrap="square">
+            <a:spAutoFit/>
+          </a:bodyPr>
+          <a:lstStyle/>
+          <a:p>
+            <a:r>
+              <a:rPr sz="1150" b="0">
+                <a:solidFill>
+                  <a:srgbClr val="1E1B4B"/>
+                </a:solidFill>
+              </a:rPr>
+              <a:t>Docker rebuilt dependencies on every source edit. Reordered the Dockerfile: copy requirements → install → then copy source.</a:t>
+            </a:r>
+          </a:p>
+        </p:txBody>
+      </p:sp>
+      <p:sp>
+        <p:nvSpPr>
+          <p:cNvPr id="11" name="TextBox 10"/>
+          <p:cNvSpPr txBox="1"/>
+          <p:nvPr/>
+        </p:nvSpPr>
+        <p:spPr>
+          <a:xfrm>
+            <a:off x="548640" y="4219954"/>
+            <a:ext cx="5394960" cy="274320"/>
+          </a:xfrm>
+          <a:prstGeom prst="rect">
+            <a:avLst/>
+          </a:prstGeom>
+          <a:noFill/>
+        </p:spPr>
+        <p:txBody>
+          <a:bodyPr wrap="square">
+            <a:spAutoFit/>
+          </a:bodyPr>
+          <a:lstStyle/>
+          <a:p>
+            <a:r>
+              <a:rPr sz="1500" b="1">
+                <a:solidFill>
+                  <a:srgbClr val="4F46E5"/>
+                </a:solidFill>
+              </a:rPr>
+              <a:t>Caught in Final Review</a:t>
+            </a:r>
+          </a:p>
+        </p:txBody>
+      </p:sp>
+      <p:sp>
+        <p:nvSpPr>
+          <p:cNvPr id="12" name="TextBox 11"/>
+          <p:cNvSpPr txBox="1"/>
+          <p:nvPr/>
+        </p:nvSpPr>
+        <p:spPr>
+          <a:xfrm>
+            <a:off x="548640" y="4504561"/>
+            <a:ext cx="5394960" cy="274320"/>
+          </a:xfrm>
+          <a:prstGeom prst="rect">
+            <a:avLst/>
+          </a:prstGeom>
+          <a:noFill/>
+        </p:spPr>
+        <p:txBody>
+          <a:bodyPr wrap="square">
+            <a:spAutoFit/>
+          </a:bodyPr>
+          <a:lstStyle/>
+          <a:p>
+            <a:r>
+              <a:rPr sz="1150" b="0">
+                <a:solidFill>
+                  <a:srgbClr val="1E1B4B"/>
+                </a:solidFill>
+              </a:rPr>
+              <a:t>The stylesheet had a viewport meta tag but zero media queries. On a 375px screen the nav needed 552px against 343px available — "Logout" was clipped off-screen and unreachable.</a:t>
+            </a:r>
+          </a:p>
+        </p:txBody>
+      </p:sp>
+      <p:sp>
+        <p:nvSpPr>
+          <p:cNvPr id="13" name="TextBox 12"/>
+          <p:cNvSpPr txBox="1"/>
+          <p:nvPr/>
+        </p:nvSpPr>
+        <p:spPr>
+          <a:xfrm>
+            <a:off x="548640" y="4774880"/>
+            <a:ext cx="5394960" cy="274320"/>
+          </a:xfrm>
+          <a:prstGeom prst="rect">
+            <a:avLst/>
+          </a:prstGeom>
+          <a:noFill/>
+        </p:spPr>
+        <p:txBody>
+          <a:bodyPr wrap="square">
+            <a:spAutoFit/>
+          </a:bodyPr>
+          <a:lstStyle/>
+          <a:p>
+            <a:r>
+              <a:rPr sz="1150" b="0">
+                <a:solidFill>
+                  <a:srgbClr val="1E1B4B"/>
+                </a:solidFill>
+              </a:rPr>
+              <a:t>It survived earlier passes because a screenshot looked fine: the browser zoomed out to fit, reporting a 568px viewport for a 375px device. Measuring scrollWidth against clientWidth exposed it. Verify by measurement, not by eye.</a:t>
+            </a:r>
+          </a:p>
+        </p:txBody>
+      </p:sp>
+      <p:sp>
+        <p:nvSpPr>
+          <p:cNvPr id="14" name="TextBox 13"/>
           <p:cNvSpPr txBox="1"/>
           <p:nvPr/>
         </p:nvSpPr>
@@ -4633,7 +5562,7 @@
       </p:sp>
       <p:sp>
         <p:nvSpPr>
-          <p:cNvPr id="11" name="TextBox 10"/>
+          <p:cNvPr id="15" name="TextBox 14"/>
           <p:cNvSpPr txBox="1"/>
           <p:nvPr/>
         </p:nvSpPr>
@@ -4753,7 +5682,7 @@
                   <a:srgbClr val="1E1B4B"/>
                 </a:solidFill>
               </a:rPr>
-              <a:t>Slide 4 — Challenges and Solutions</a:t>
+              <a:t>Slide 4 — From Defect to Verified Fix</a:t>
             </a:r>
           </a:p>
         </p:txBody>
@@ -4786,7 +5715,7 @@
                   <a:srgbClr val="4F46E5"/>
                 </a:solidFill>
               </a:rPr>
-              <a:t>Problems Worked Through</a:t>
+              <a:t>Five Issues Found, Fixed, and Re-Verified</a:t>
             </a:r>
           </a:p>
         </p:txBody>
@@ -4810,8 +5739,10 @@
                 <a:tableStyleId>{5C22544A-7EE6-4342-B048-85BDC9FD1C3A}</a:tableStyleId>
               </a:tblPr>
               <a:tblGrid>
-                <a:gridCol w="2697480"/>
-                <a:gridCol w="2697480"/>
+                <a:gridCol w="1348740"/>
+                <a:gridCol w="1348740"/>
+                <a:gridCol w="1348740"/>
+                <a:gridCol w="1348740"/>
               </a:tblGrid>
               <a:tr h="237744">
                 <a:tc>
@@ -4827,7 +5758,7 @@
                         </a:defRPr>
                       </a:pPr>
                       <a:r>
-                        <a:t>Challenge</a:t>
+                        <a:t>#</a:t>
                       </a:r>
                     </a:p>
                   </a:txBody>
@@ -4850,7 +5781,53 @@
                         </a:defRPr>
                       </a:pPr>
                       <a:r>
-                        <a:t>Resolution</a:t>
+                        <a:t>Issue</a:t>
+                      </a:r>
+                    </a:p>
+                  </a:txBody>
+                  <a:tcPr>
+                    <a:solidFill>
+                      <a:srgbClr val="EEF2FF"/>
+                    </a:solidFill>
+                  </a:tcPr>
+                </a:tc>
+                <a:tc>
+                  <a:txBody>
+                    <a:bodyPr/>
+                    <a:lstStyle/>
+                    <a:p>
+                      <a:pPr>
+                        <a:defRPr sz="1000" b="1">
+                          <a:solidFill>
+                            <a:srgbClr val="1E1B4B"/>
+                          </a:solidFill>
+                        </a:defRPr>
+                      </a:pPr>
+                      <a:r>
+                        <a:t>Impact</a:t>
+                      </a:r>
+                    </a:p>
+                  </a:txBody>
+                  <a:tcPr>
+                    <a:solidFill>
+                      <a:srgbClr val="EEF2FF"/>
+                    </a:solidFill>
+                  </a:tcPr>
+                </a:tc>
+                <a:tc>
+                  <a:txBody>
+                    <a:bodyPr/>
+                    <a:lstStyle/>
+                    <a:p>
+                      <a:pPr>
+                        <a:defRPr sz="1000" b="1">
+                          <a:solidFill>
+                            <a:srgbClr val="1E1B4B"/>
+                          </a:solidFill>
+                        </a:defRPr>
+                      </a:pPr>
+                      <a:r>
+                        <a:t>Fix</a:t>
                       </a:r>
                     </a:p>
                   </a:txBody>
@@ -4875,30 +5852,76 @@
                         </a:defRPr>
                       </a:pPr>
                       <a:r>
-                        <a:t>Flat app.py could not be tested</a:t>
-                      </a:r>
-                    </a:p>
-                  </a:txBody>
-                  <a:tcPr>
-                    <a:solidFill>
-                      <a:srgbClr val="FFFFFF"/>
-                    </a:solidFill>
-                  </a:tcPr>
-                </a:tc>
-                <a:tc>
-                  <a:txBody>
-                    <a:bodyPr/>
-                    <a:lstStyle/>
-                    <a:p>
-                      <a:pPr>
-                        <a:defRPr sz="950">
-                          <a:solidFill>
-                            <a:srgbClr val="1E1B4B"/>
-                          </a:solidFill>
-                        </a:defRPr>
-                      </a:pPr>
-                      <a:r>
-                        <a:t>Restructured into create_app() factory accepting a test config — this is what made 131 tests possible</a:t>
+                        <a:t>1</a:t>
+                      </a:r>
+                    </a:p>
+                  </a:txBody>
+                  <a:tcPr>
+                    <a:solidFill>
+                      <a:srgbClr val="FFFFFF"/>
+                    </a:solidFill>
+                  </a:tcPr>
+                </a:tc>
+                <a:tc>
+                  <a:txBody>
+                    <a:bodyPr/>
+                    <a:lstStyle/>
+                    <a:p>
+                      <a:pPr>
+                        <a:defRPr sz="950">
+                          <a:solidFill>
+                            <a:srgbClr val="1E1B4B"/>
+                          </a:solidFill>
+                        </a:defRPr>
+                      </a:pPr>
+                      <a:r>
+                        <a:t>Nav overflowed; "Logout" clipped</a:t>
+                      </a:r>
+                    </a:p>
+                  </a:txBody>
+                  <a:tcPr>
+                    <a:solidFill>
+                      <a:srgbClr val="FFFFFF"/>
+                    </a:solidFill>
+                  </a:tcPr>
+                </a:tc>
+                <a:tc>
+                  <a:txBody>
+                    <a:bodyPr/>
+                    <a:lstStyle/>
+                    <a:p>
+                      <a:pPr>
+                        <a:defRPr sz="950">
+                          <a:solidFill>
+                            <a:srgbClr val="1E1B4B"/>
+                          </a:solidFill>
+                        </a:defRPr>
+                      </a:pPr>
+                      <a:r>
+                        <a:t>Control unreachable on mobile</a:t>
+                      </a:r>
+                    </a:p>
+                  </a:txBody>
+                  <a:tcPr>
+                    <a:solidFill>
+                      <a:srgbClr val="FFFFFF"/>
+                    </a:solidFill>
+                  </a:tcPr>
+                </a:tc>
+                <a:tc>
+                  <a:txBody>
+                    <a:bodyPr/>
+                    <a:lstStyle/>
+                    <a:p>
+                      <a:pPr>
+                        <a:defRPr sz="950">
+                          <a:solidFill>
+                            <a:srgbClr val="1E1B4B"/>
+                          </a:solidFill>
+                        </a:defRPr>
+                      </a:pPr>
+                      <a:r>
+                        <a:t>flex-wrap + media query</a:t>
                       </a:r>
                     </a:p>
                   </a:txBody>
@@ -4923,30 +5946,76 @@
                         </a:defRPr>
                       </a:pPr>
                       <a:r>
-                        <a:t>psycopg2-binary broke the Docker build</a:t>
-                      </a:r>
-                    </a:p>
-                  </a:txBody>
-                  <a:tcPr>
-                    <a:solidFill>
-                      <a:srgbClr val="FFFFFF"/>
-                    </a:solidFill>
-                  </a:tcPr>
-                </a:tc>
-                <a:tc>
-                  <a:txBody>
-                    <a:bodyPr/>
-                    <a:lstStyle/>
-                    <a:p>
-                      <a:pPr>
-                        <a:defRPr sz="950">
-                          <a:solidFill>
-                            <a:srgbClr val="1E1B4B"/>
-                          </a:solidFill>
-                        </a:defRPr>
-                      </a:pPr>
-                      <a:r>
-                        <a:t>Split requirements; image installs a SQLite-only file</a:t>
+                        <a:t>2</a:t>
+                      </a:r>
+                    </a:p>
+                  </a:txBody>
+                  <a:tcPr>
+                    <a:solidFill>
+                      <a:srgbClr val="FFFFFF"/>
+                    </a:solidFill>
+                  </a:tcPr>
+                </a:tc>
+                <a:tc>
+                  <a:txBody>
+                    <a:bodyPr/>
+                    <a:lstStyle/>
+                    <a:p>
+                      <a:pPr>
+                        <a:defRPr sz="950">
+                          <a:solidFill>
+                            <a:srgbClr val="1E1B4B"/>
+                          </a:solidFill>
+                        </a:defRPr>
+                      </a:pPr>
+                      <a:r>
+                        <a:t>Forms 5px past viewport</a:t>
+                      </a:r>
+                    </a:p>
+                  </a:txBody>
+                  <a:tcPr>
+                    <a:solidFill>
+                      <a:srgbClr val="FFFFFF"/>
+                    </a:solidFill>
+                  </a:tcPr>
+                </a:tc>
+                <a:tc>
+                  <a:txBody>
+                    <a:bodyPr/>
+                    <a:lstStyle/>
+                    <a:p>
+                      <a:pPr>
+                        <a:defRPr sz="950">
+                          <a:solidFill>
+                            <a:srgbClr val="1E1B4B"/>
+                          </a:solidFill>
+                        </a:defRPr>
+                      </a:pPr>
+                      <a:r>
+                        <a:t>Horizontal scroll on 3 pages</a:t>
+                      </a:r>
+                    </a:p>
+                  </a:txBody>
+                  <a:tcPr>
+                    <a:solidFill>
+                      <a:srgbClr val="FFFFFF"/>
+                    </a:solidFill>
+                  </a:tcPr>
+                </a:tc>
+                <a:tc>
+                  <a:txBody>
+                    <a:bodyPr/>
+                    <a:lstStyle/>
+                    <a:p>
+                      <a:pPr>
+                        <a:defRPr sz="950">
+                          <a:solidFill>
+                            <a:srgbClr val="1E1B4B"/>
+                          </a:solidFill>
+                        </a:defRPr>
+                      </a:pPr>
+                      <a:r>
+                        <a:t>Global box-sizing: border-box</a:t>
                       </a:r>
                     </a:p>
                   </a:txBody>
@@ -4971,30 +6040,76 @@
                         </a:defRPr>
                       </a:pPr>
                       <a:r>
-                        <a:t>Docker rebuilt deps on every source edit</a:t>
-                      </a:r>
-                    </a:p>
-                  </a:txBody>
-                  <a:tcPr>
-                    <a:solidFill>
-                      <a:srgbClr val="FFFFFF"/>
-                    </a:solidFill>
-                  </a:tcPr>
-                </a:tc>
-                <a:tc>
-                  <a:txBody>
-                    <a:bodyPr/>
-                    <a:lstStyle/>
-                    <a:p>
-                      <a:pPr>
-                        <a:defRPr sz="950">
-                          <a:solidFill>
-                            <a:srgbClr val="1E1B4B"/>
-                          </a:solidFill>
-                        </a:defRPr>
-                      </a:pPr>
-                      <a:r>
-                        <a:t>Copy requirements → install → *then* copy source</a:t>
+                        <a:t>3</a:t>
+                      </a:r>
+                    </a:p>
+                  </a:txBody>
+                  <a:tcPr>
+                    <a:solidFill>
+                      <a:srgbClr val="FFFFFF"/>
+                    </a:solidFill>
+                  </a:tcPr>
+                </a:tc>
+                <a:tc>
+                  <a:txBody>
+                    <a:bodyPr/>
+                    <a:lstStyle/>
+                    <a:p>
+                      <a:pPr>
+                        <a:defRPr sz="950">
+                          <a:solidFill>
+                            <a:srgbClr val="1E1B4B"/>
+                          </a:solidFill>
+                        </a:defRPr>
+                      </a:pPr>
+                      <a:r>
+                        <a:t>Hero image forced 412px</a:t>
+                      </a:r>
+                    </a:p>
+                  </a:txBody>
+                  <a:tcPr>
+                    <a:solidFill>
+                      <a:srgbClr val="FFFFFF"/>
+                    </a:solidFill>
+                  </a:tcPr>
+                </a:tc>
+                <a:tc>
+                  <a:txBody>
+                    <a:bodyPr/>
+                    <a:lstStyle/>
+                    <a:p>
+                      <a:pPr>
+                        <a:defRPr sz="950">
+                          <a:solidFill>
+                            <a:srgbClr val="1E1B4B"/>
+                          </a:solidFill>
+                        </a:defRPr>
+                      </a:pPr>
+                      <a:r>
+                        <a:t>Horizontal scroll</a:t>
+                      </a:r>
+                    </a:p>
+                  </a:txBody>
+                  <a:tcPr>
+                    <a:solidFill>
+                      <a:srgbClr val="FFFFFF"/>
+                    </a:solidFill>
+                  </a:tcPr>
+                </a:tc>
+                <a:tc>
+                  <a:txBody>
+                    <a:bodyPr/>
+                    <a:lstStyle/>
+                    <a:p>
+                      <a:pPr>
+                        <a:defRPr sz="950">
+                          <a:solidFill>
+                            <a:srgbClr val="1E1B4B"/>
+                          </a:solidFill>
+                        </a:defRPr>
+                      </a:pPr>
+                      <a:r>
+                        <a:t>Fluid width with a cap</a:t>
                       </a:r>
                     </a:p>
                   </a:txBody>
@@ -5019,30 +6134,76 @@
                         </a:defRPr>
                       </a:pPr>
                       <a:r>
-                        <a:t>Static backend list showed no elasticity</a:t>
-                      </a:r>
-                    </a:p>
-                  </a:txBody>
-                  <a:tcPr>
-                    <a:solidFill>
-                      <a:srgbClr val="FFFFFF"/>
-                    </a:solidFill>
-                  </a:tcPr>
-                </a:tc>
-                <a:tc>
-                  <a:txBody>
-                    <a:bodyPr/>
-                    <a:lstStyle/>
-                    <a:p>
-                      <a:pPr>
-                        <a:defRPr sz="950">
-                          <a:solidFill>
-                            <a:srgbClr val="1E1B4B"/>
-                          </a:solidFill>
-                        </a:defRPr>
-                      </a:pPr>
-                      <a:r>
-                        <a:t>Port-range scanning + health checks for true dynamic membership</a:t>
+                        <a:t>4</a:t>
+                      </a:r>
+                    </a:p>
+                  </a:txBody>
+                  <a:tcPr>
+                    <a:solidFill>
+                      <a:srgbClr val="FFFFFF"/>
+                    </a:solidFill>
+                  </a:tcPr>
+                </a:tc>
+                <a:tc>
+                  <a:txBody>
+                    <a:bodyPr/>
+                    <a:lstStyle/>
+                    <a:p>
+                      <a:pPr>
+                        <a:defRPr sz="950">
+                          <a:solidFill>
+                            <a:srgbClr val="1E1B4B"/>
+                          </a:solidFill>
+                        </a:defRPr>
+                      </a:pPr>
+                      <a:r>
+                        <a:t>Admin tables stretched page</a:t>
+                      </a:r>
+                    </a:p>
+                  </a:txBody>
+                  <a:tcPr>
+                    <a:solidFill>
+                      <a:srgbClr val="FFFFFF"/>
+                    </a:solidFill>
+                  </a:tcPr>
+                </a:tc>
+                <a:tc>
+                  <a:txBody>
+                    <a:bodyPr/>
+                    <a:lstStyle/>
+                    <a:p>
+                      <a:pPr>
+                        <a:defRPr sz="950">
+                          <a:solidFill>
+                            <a:srgbClr val="1E1B4B"/>
+                          </a:solidFill>
+                        </a:defRPr>
+                      </a:pPr>
+                      <a:r>
+                        <a:t>Horizontal scroll</a:t>
+                      </a:r>
+                    </a:p>
+                  </a:txBody>
+                  <a:tcPr>
+                    <a:solidFill>
+                      <a:srgbClr val="FFFFFF"/>
+                    </a:solidFill>
+                  </a:tcPr>
+                </a:tc>
+                <a:tc>
+                  <a:txBody>
+                    <a:bodyPr/>
+                    <a:lstStyle/>
+                    <a:p>
+                      <a:pPr>
+                        <a:defRPr sz="950">
+                          <a:solidFill>
+                            <a:srgbClr val="1E1B4B"/>
+                          </a:solidFill>
+                        </a:defRPr>
+                      </a:pPr>
+                      <a:r>
+                        <a:t>Dedicated scroll container</a:t>
                       </a:r>
                     </a:p>
                   </a:txBody>
@@ -5067,30 +6228,76 @@
                         </a:defRPr>
                       </a:pPr>
                       <a:r>
-                        <a:t>SQLite locked under multi-instance writes</a:t>
-                      </a:r>
-                    </a:p>
-                  </a:txBody>
-                  <a:tcPr>
-                    <a:solidFill>
-                      <a:srgbClr val="FFFFFF"/>
-                    </a:solidFill>
-                  </a:tcPr>
-                </a:tc>
-                <a:tc>
-                  <a:txBody>
-                    <a:bodyPr/>
-                    <a:lstStyle/>
-                    <a:p>
-                      <a:pPr>
-                        <a:defRPr sz="950">
-                          <a:solidFill>
-                            <a:srgbClr val="1E1B4B"/>
-                          </a:solidFill>
-                        </a:defRPr>
-                      </a:pPr>
-                      <a:r>
-                        <a:t>One database file per instance — a documented trade-off, not a hidden bug</a:t>
+                        <a:t>5</a:t>
+                      </a:r>
+                    </a:p>
+                  </a:txBody>
+                  <a:tcPr>
+                    <a:solidFill>
+                      <a:srgbClr val="FFFFFF"/>
+                    </a:solidFill>
+                  </a:tcPr>
+                </a:tc>
+                <a:tc>
+                  <a:txBody>
+                    <a:bodyPr/>
+                    <a:lstStyle/>
+                    <a:p>
+                      <a:pPr>
+                        <a:defRPr sz="950">
+                          <a:solidFill>
+                            <a:srgbClr val="1E1B4B"/>
+                          </a:solidFill>
+                        </a:defRPr>
+                      </a:pPr>
+                      <a:r>
+                        <a:t>Catalog 5.8s on Slow 3G</a:t>
+                      </a:r>
+                    </a:p>
+                  </a:txBody>
+                  <a:tcPr>
+                    <a:solidFill>
+                      <a:srgbClr val="FFFFFF"/>
+                    </a:solidFill>
+                  </a:tcPr>
+                </a:tc>
+                <a:tc>
+                  <a:txBody>
+                    <a:bodyPr/>
+                    <a:lstStyle/>
+                    <a:p>
+                      <a:pPr>
+                        <a:defRPr sz="950">
+                          <a:solidFill>
+                            <a:srgbClr val="1E1B4B"/>
+                          </a:solidFill>
+                        </a:defRPr>
+                      </a:pPr>
+                      <a:r>
+                        <a:t>Perceived performance</a:t>
+                      </a:r>
+                    </a:p>
+                  </a:txBody>
+                  <a:tcPr>
+                    <a:solidFill>
+                      <a:srgbClr val="FFFFFF"/>
+                    </a:solidFill>
+                  </a:tcPr>
+                </a:tc>
+                <a:tc>
+                  <a:txBody>
+                    <a:bodyPr/>
+                    <a:lstStyle/>
+                    <a:p>
+                      <a:pPr>
+                        <a:defRPr sz="950">
+                          <a:solidFill>
+                            <a:srgbClr val="1E1B4B"/>
+                          </a:solidFill>
+                        </a:defRPr>
+                      </a:pPr>
+                      <a:r>
+                        <a:t>Lazy-loaded thumbnails</a:t>
                       </a:r>
                     </a:p>
                   </a:txBody>
@@ -5113,7 +6320,7 @@
         </p:nvSpPr>
         <p:spPr>
           <a:xfrm>
-            <a:off x="548640" y="2982087"/>
+            <a:off x="548640" y="3036951"/>
             <a:ext cx="5394960" cy="274320"/>
           </a:xfrm>
           <a:prstGeom prst="rect">
@@ -5128,26 +6335,125 @@
           <a:lstStyle/>
           <a:p>
             <a:r>
+              <a:rPr sz="1500" b="1">
+                <a:solidFill>
+                  <a:srgbClr val="4F46E5"/>
+                </a:solidFill>
+              </a:rPr>
+              <a:t>Two Root Causes, Not Five Bugs</a:t>
+            </a:r>
+          </a:p>
+        </p:txBody>
+      </p:sp>
+      <p:sp>
+        <p:nvSpPr>
+          <p:cNvPr id="7" name="TextBox 6"/>
+          <p:cNvSpPr txBox="1"/>
+          <p:nvPr/>
+        </p:nvSpPr>
+        <p:spPr>
+          <a:xfrm>
+            <a:off x="548640" y="3321558"/>
+            <a:ext cx="5394960" cy="274320"/>
+          </a:xfrm>
+          <a:prstGeom prst="rect">
+            <a:avLst/>
+          </a:prstGeom>
+          <a:noFill/>
+        </p:spPr>
+        <p:txBody>
+          <a:bodyPr wrap="square">
+            <a:spAutoFit/>
+          </a:bodyPr>
+          <a:lstStyle/>
+          <a:p>
+            <a:r>
               <a:rPr sz="1150" b="0">
                 <a:solidFill>
                   <a:srgbClr val="1E1B4B"/>
                 </a:solidFill>
               </a:rPr>
-              <a:t>Found and fixed during final testing</a:t>
+              <a:t>Issues 2–4 share one cause: the default content-box model, where width: 100% plus padding exceeds the parent. One line — box-sizing: border-box — fixed three pages.</a:t>
+            </a:r>
+          </a:p>
+        </p:txBody>
+      </p:sp>
+      <p:sp>
+        <p:nvSpPr>
+          <p:cNvPr id="8" name="TextBox 7"/>
+          <p:cNvSpPr txBox="1"/>
+          <p:nvPr/>
+        </p:nvSpPr>
+        <p:spPr>
+          <a:xfrm>
+            <a:off x="548640" y="3591877"/>
+            <a:ext cx="5394960" cy="274320"/>
+          </a:xfrm>
+          <a:prstGeom prst="rect">
+            <a:avLst/>
+          </a:prstGeom>
+          <a:noFill/>
+        </p:spPr>
+        <p:txBody>
+          <a:bodyPr wrap="square">
+            <a:spAutoFit/>
+          </a:bodyPr>
+          <a:lstStyle/>
+          <a:p>
+            <a:r>
+              <a:rPr sz="1150" b="0">
+                <a:solidFill>
+                  <a:srgbClr val="1E1B4B"/>
+                </a:solidFill>
+              </a:rPr>
+              <a:t>Issue 5 was nine full-size images fetched eagerly, including those far below the fold.</a:t>
+            </a:r>
+          </a:p>
+        </p:txBody>
+      </p:sp>
+      <p:sp>
+        <p:nvSpPr>
+          <p:cNvPr id="9" name="TextBox 8"/>
+          <p:cNvSpPr txBox="1"/>
+          <p:nvPr/>
+        </p:nvSpPr>
+        <p:spPr>
+          <a:xfrm>
+            <a:off x="548640" y="3917060"/>
+            <a:ext cx="5394960" cy="274320"/>
+          </a:xfrm>
+          <a:prstGeom prst="rect">
+            <a:avLst/>
+          </a:prstGeom>
+          <a:noFill/>
+        </p:spPr>
+        <p:txBody>
+          <a:bodyPr wrap="square">
+            <a:spAutoFit/>
+          </a:bodyPr>
+          <a:lstStyle/>
+          <a:p>
+            <a:r>
+              <a:rPr sz="1500" b="1">
+                <a:solidFill>
+                  <a:srgbClr val="4F46E5"/>
+                </a:solidFill>
+              </a:rPr>
+              <a:t>Measured Outcome</a:t>
             </a:r>
           </a:p>
         </p:txBody>
       </p:sp>
       <p:graphicFrame>
         <p:nvGraphicFramePr>
-          <p:cNvPr id="7" name="Table 6"/>
+          <p:cNvPr id="10" name="Table 9"/>
           <p:cNvGraphicFramePr>
             <a:graphicFrameLocks noGrp="1"/>
           </p:cNvGraphicFramePr>
           <p:nvPr/>
         </p:nvGraphicFramePr>
         <p:xfrm>
-          <a:off x="548640" y="3288982"/>
+          <a:off x="548640" y="4238243"/>
           <a:ext cx="5394960" cy="950976"/>
         </p:xfrm>
         <a:graphic>
@@ -5175,7 +6481,7 @@
                         </a:defRPr>
                       </a:pPr>
                       <a:r>
-                        <a:t>Issue</a:t>
+                        <a:t>Metric</a:t>
                       </a:r>
                     </a:p>
                   </a:txBody>
@@ -5198,7 +6504,7 @@
                         </a:defRPr>
                       </a:pPr>
                       <a:r>
-                        <a:t>Impact</a:t>
+                        <a:t>Before</a:t>
                       </a:r>
                     </a:p>
                   </a:txBody>
@@ -5221,7 +6527,7 @@
                         </a:defRPr>
                       </a:pPr>
                       <a:r>
-                        <a:t>Fix</a:t>
+                        <a:t>After</a:t>
                       </a:r>
                     </a:p>
                   </a:txBody>
@@ -5246,53 +6552,53 @@
                         </a:defRPr>
                       </a:pPr>
                       <a:r>
-                        <a:t>Nav overflowed on phones — "Logout" clipped off-screen</a:t>
-                      </a:r>
-                    </a:p>
-                  </a:txBody>
-                  <a:tcPr>
-                    <a:solidFill>
-                      <a:srgbClr val="FFFFFF"/>
-                    </a:solidFill>
-                  </a:tcPr>
-                </a:tc>
-                <a:tc>
-                  <a:txBody>
-                    <a:bodyPr/>
-                    <a:lstStyle/>
-                    <a:p>
-                      <a:pPr>
-                        <a:defRPr sz="950">
-                          <a:solidFill>
-                            <a:srgbClr val="1E1B4B"/>
-                          </a:solidFill>
-                        </a:defRPr>
-                      </a:pPr>
-                      <a:r>
-                        <a:t>Control unreachable</a:t>
-                      </a:r>
-                    </a:p>
-                  </a:txBody>
-                  <a:tcPr>
-                    <a:solidFill>
-                      <a:srgbClr val="FFFFFF"/>
-                    </a:solidFill>
-                  </a:tcPr>
-                </a:tc>
-                <a:tc>
-                  <a:txBody>
-                    <a:bodyPr/>
-                    <a:lstStyle/>
-                    <a:p>
-                      <a:pPr>
-                        <a:defRPr sz="950">
-                          <a:solidFill>
-                            <a:srgbClr val="1E1B4B"/>
-                          </a:solidFill>
-                        </a:defRPr>
-                      </a:pPr>
-                      <a:r>
-                        <a:t>flex-wrap + media query</a:t>
+                        <a:t>Catalog load, Slow 3G</a:t>
+                      </a:r>
+                    </a:p>
+                  </a:txBody>
+                  <a:tcPr>
+                    <a:solidFill>
+                      <a:srgbClr val="FFFFFF"/>
+                    </a:solidFill>
+                  </a:tcPr>
+                </a:tc>
+                <a:tc>
+                  <a:txBody>
+                    <a:bodyPr/>
+                    <a:lstStyle/>
+                    <a:p>
+                      <a:pPr>
+                        <a:defRPr sz="950">
+                          <a:solidFill>
+                            <a:srgbClr val="1E1B4B"/>
+                          </a:solidFill>
+                        </a:defRPr>
+                      </a:pPr>
+                      <a:r>
+                        <a:t>5,834 ms</a:t>
+                      </a:r>
+                    </a:p>
+                  </a:txBody>
+                  <a:tcPr>
+                    <a:solidFill>
+                      <a:srgbClr val="FFFFFF"/>
+                    </a:solidFill>
+                  </a:tcPr>
+                </a:tc>
+                <a:tc>
+                  <a:txBody>
+                    <a:bodyPr/>
+                    <a:lstStyle/>
+                    <a:p>
+                      <a:pPr>
+                        <a:defRPr sz="950">
+                          <a:solidFill>
+                            <a:srgbClr val="1E1B4B"/>
+                          </a:solidFill>
+                        </a:defRPr>
+                      </a:pPr>
+                      <a:r>
+                        <a:t>968 ms (83% faster)</a:t>
                       </a:r>
                     </a:p>
                   </a:txBody>
@@ -5317,53 +6623,53 @@
                         </a:defRPr>
                       </a:pPr>
                       <a:r>
-                        <a:t>Forms 5px wider than viewport</a:t>
-                      </a:r>
-                    </a:p>
-                  </a:txBody>
-                  <a:tcPr>
-                    <a:solidFill>
-                      <a:srgbClr val="FFFFFF"/>
-                    </a:solidFill>
-                  </a:tcPr>
-                </a:tc>
-                <a:tc>
-                  <a:txBody>
-                    <a:bodyPr/>
-                    <a:lstStyle/>
-                    <a:p>
-                      <a:pPr>
-                        <a:defRPr sz="950">
-                          <a:solidFill>
-                            <a:srgbClr val="1E1B4B"/>
-                          </a:solidFill>
-                        </a:defRPr>
-                      </a:pPr>
-                      <a:r>
-                        <a:t>Horizontal scroll</a:t>
-                      </a:r>
-                    </a:p>
-                  </a:txBody>
-                  <a:tcPr>
-                    <a:solidFill>
-                      <a:srgbClr val="FFFFFF"/>
-                    </a:solidFill>
-                  </a:tcPr>
-                </a:tc>
-                <a:tc>
-                  <a:txBody>
-                    <a:bodyPr/>
-                    <a:lstStyle/>
-                    <a:p>
-                      <a:pPr>
-                        <a:defRPr sz="950">
-                          <a:solidFill>
-                            <a:srgbClr val="1E1B4B"/>
-                          </a:solidFill>
-                        </a:defRPr>
-                      </a:pPr>
-                      <a:r>
-                        <a:t>Global box-sizing: border-box</a:t>
+                        <a:t>Pages overflowing at 375px</a:t>
+                      </a:r>
+                    </a:p>
+                  </a:txBody>
+                  <a:tcPr>
+                    <a:solidFill>
+                      <a:srgbClr val="FFFFFF"/>
+                    </a:solidFill>
+                  </a:tcPr>
+                </a:tc>
+                <a:tc>
+                  <a:txBody>
+                    <a:bodyPr/>
+                    <a:lstStyle/>
+                    <a:p>
+                      <a:pPr>
+                        <a:defRPr sz="950">
+                          <a:solidFill>
+                            <a:srgbClr val="1E1B4B"/>
+                          </a:solidFill>
+                        </a:defRPr>
+                      </a:pPr>
+                      <a:r>
+                        <a:t>4 of 12</a:t>
+                      </a:r>
+                    </a:p>
+                  </a:txBody>
+                  <a:tcPr>
+                    <a:solidFill>
+                      <a:srgbClr val="FFFFFF"/>
+                    </a:solidFill>
+                  </a:tcPr>
+                </a:tc>
+                <a:tc>
+                  <a:txBody>
+                    <a:bodyPr/>
+                    <a:lstStyle/>
+                    <a:p>
+                      <a:pPr>
+                        <a:defRPr sz="950">
+                          <a:solidFill>
+                            <a:srgbClr val="1E1B4B"/>
+                          </a:solidFill>
+                        </a:defRPr>
+                      </a:pPr>
+                      <a:r>
+                        <a:t>0 of 12</a:t>
                       </a:r>
                     </a:p>
                   </a:txBody>
@@ -5388,53 +6694,53 @@
                         </a:defRPr>
                       </a:pPr>
                       <a:r>
-                        <a:t>Catalog took 5.8s on Slow 3G</a:t>
-                      </a:r>
-                    </a:p>
-                  </a:txBody>
-                  <a:tcPr>
-                    <a:solidFill>
-                      <a:srgbClr val="FFFFFF"/>
-                    </a:solidFill>
-                  </a:tcPr>
-                </a:tc>
-                <a:tc>
-                  <a:txBody>
-                    <a:bodyPr/>
-                    <a:lstStyle/>
-                    <a:p>
-                      <a:pPr>
-                        <a:defRPr sz="950">
-                          <a:solidFill>
-                            <a:srgbClr val="1E1B4B"/>
-                          </a:solidFill>
-                        </a:defRPr>
-                      </a:pPr>
-                      <a:r>
-                        <a:t>Perceived performance</a:t>
-                      </a:r>
-                    </a:p>
-                  </a:txBody>
-                  <a:tcPr>
-                    <a:solidFill>
-                      <a:srgbClr val="FFFFFF"/>
-                    </a:solidFill>
-                  </a:tcPr>
-                </a:tc>
-                <a:tc>
-                  <a:txBody>
-                    <a:bodyPr/>
-                    <a:lstStyle/>
-                    <a:p>
-                      <a:pPr>
-                        <a:defRPr sz="950">
-                          <a:solidFill>
-                            <a:srgbClr val="1E1B4B"/>
-                          </a:solidFill>
-                        </a:defRPr>
-                      </a:pPr>
-                      <a:r>
-                        <a:t>Lazy-loaded thumbnails → 968ms (83% faster)</a:t>
+                        <a:t>Nav overflow at 375px</a:t>
+                      </a:r>
+                    </a:p>
+                  </a:txBody>
+                  <a:tcPr>
+                    <a:solidFill>
+                      <a:srgbClr val="FFFFFF"/>
+                    </a:solidFill>
+                  </a:tcPr>
+                </a:tc>
+                <a:tc>
+                  <a:txBody>
+                    <a:bodyPr/>
+                    <a:lstStyle/>
+                    <a:p>
+                      <a:pPr>
+                        <a:defRPr sz="950">
+                          <a:solidFill>
+                            <a:srgbClr val="1E1B4B"/>
+                          </a:solidFill>
+                        </a:defRPr>
+                      </a:pPr>
+                      <a:r>
+                        <a:t>552px into 343px</a:t>
+                      </a:r>
+                    </a:p>
+                  </a:txBody>
+                  <a:tcPr>
+                    <a:solidFill>
+                      <a:srgbClr val="FFFFFF"/>
+                    </a:solidFill>
+                  </a:tcPr>
+                </a:tc>
+                <a:tc>
+                  <a:txBody>
+                    <a:bodyPr/>
+                    <a:lstStyle/>
+                    <a:p>
+                      <a:pPr>
+                        <a:defRPr sz="950">
+                          <a:solidFill>
+                            <a:srgbClr val="1E1B4B"/>
+                          </a:solidFill>
+                        </a:defRPr>
+                      </a:pPr>
+                      <a:r>
+                        <a:t>No overflow</a:t>
                       </a:r>
                     </a:p>
                   </a:txBody>
@@ -5451,7 +6757,40 @@
       </p:graphicFrame>
       <p:sp>
         <p:nvSpPr>
-          <p:cNvPr id="8" name="TextBox 7"/>
+          <p:cNvPr id="11" name="TextBox 10"/>
+          <p:cNvSpPr txBox="1"/>
+          <p:nvPr/>
+        </p:nvSpPr>
+        <p:spPr>
+          <a:xfrm>
+            <a:off x="6400800" y="1051560"/>
+            <a:ext cx="5394960" cy="274320"/>
+          </a:xfrm>
+          <a:prstGeom prst="rect">
+            <a:avLst/>
+          </a:prstGeom>
+          <a:noFill/>
+        </p:spPr>
+        <p:txBody>
+          <a:bodyPr wrap="square">
+            <a:spAutoFit/>
+          </a:bodyPr>
+          <a:lstStyle/>
+          <a:p>
+            <a:r>
+              <a:rPr sz="1150" b="0">
+                <a:solidFill>
+                  <a:srgbClr val="1E1B4B"/>
+                </a:solidFill>
+              </a:rPr>
+              <a:t>Every fix was re-verified by the same instrumented measurement that found it — not by looking again.</a:t>
+            </a:r>
+          </a:p>
+        </p:txBody>
+      </p:sp>
+      <p:sp>
+        <p:nvSpPr>
+          <p:cNvPr id="12" name="TextBox 11"/>
           <p:cNvSpPr txBox="1"/>
           <p:nvPr/>
         </p:nvSpPr>
@@ -5484,7 +6823,7 @@
       </p:sp>
       <p:sp>
         <p:nvSpPr>
-          <p:cNvPr id="9" name="TextBox 8"/>
+          <p:cNvPr id="13" name="TextBox 12"/>
           <p:cNvSpPr txBox="1"/>
           <p:nvPr/>
         </p:nvSpPr>
@@ -5604,7 +6943,7 @@
                   <a:srgbClr val="1E1B4B"/>
                 </a:solidFill>
               </a:rPr>
-              <a:t>Slide 5 — Testing and Results</a:t>
+              <a:t>Slide 5 — Proof: Elastic Capacity in Action</a:t>
             </a:r>
           </a:p>
         </p:txBody>
@@ -5637,7 +6976,7 @@
                   <a:srgbClr val="4F46E5"/>
                 </a:solidFill>
               </a:rPr>
-              <a:t>Four Levels of Verification</a:t>
+              <a:t>The Claim, Demonstrated</a:t>
             </a:r>
           </a:p>
         </p:txBody>
@@ -5670,20 +7009,44 @@
                   <a:srgbClr val="1E1B4B"/>
                 </a:solidFill>
               </a:rPr>
-              <a:t>1. Automated suite — 131 pytest tests passing In-memory SQLite fixtures; runs in CI on every push and PR alongside a Docker build.</a:t>
-            </a:r>
-          </a:p>
-        </p:txBody>
-      </p:sp>
-      <p:sp>
-        <p:nvSpPr>
-          <p:cNvPr id="6" name="TextBox 5"/>
-          <p:cNvSpPr txBox="1"/>
+              <a:t>Slide 1 promised capacity that follows demand. This is that behavior, captured live — a third instance joining and leaving a running pool with no restart and no configuration change.</a:t>
+            </a:r>
+          </a:p>
+        </p:txBody>
+      </p:sp>
+      <p:pic>
+        <p:nvPicPr>
+          <p:cNvPr id="6" name="Picture 5" descr="13-load-balancer.png"/>
+          <p:cNvPicPr>
+            <a:picLocks noChangeAspect="1"/>
+          </p:cNvPicPr>
           <p:nvPr/>
-        </p:nvSpPr>
+        </p:nvPicPr>
+        <p:blipFill>
+          <a:blip r:embed="rId2"/>
+          <a:stretch>
+            <a:fillRect/>
+          </a:stretch>
+        </p:blipFill>
         <p:spPr>
           <a:xfrm>
             <a:off x="548640" y="1661350"/>
+            <a:ext cx="3847927" cy="2834640"/>
+          </a:xfrm>
+          <a:prstGeom prst="rect">
+            <a:avLst/>
+          </a:prstGeom>
+        </p:spPr>
+      </p:pic>
+      <p:sp>
+        <p:nvSpPr>
+          <p:cNvPr id="7" name="TextBox 6"/>
+          <p:cNvSpPr txBox="1"/>
+          <p:nvPr/>
+        </p:nvSpPr>
+        <p:spPr>
+          <a:xfrm>
+            <a:off x="548640" y="4678870"/>
             <a:ext cx="5394960" cy="274320"/>
           </a:xfrm>
           <a:prstGeom prst="rect">
@@ -5698,27 +7061,27 @@
           <a:lstStyle/>
           <a:p>
             <a:r>
-              <a:rPr sz="1150" b="0">
+              <a:rPr sz="1500" b="1">
                 <a:solidFill>
-                  <a:srgbClr val="1E1B4B"/>
+                  <a:srgbClr val="4F46E5"/>
                 </a:solidFill>
               </a:rPr>
-              <a:t>2. Cross-browser — 99/99 checks passing</a:t>
+              <a:t>What the Log Shows</a:t>
             </a:r>
           </a:p>
         </p:txBody>
       </p:sp>
       <p:graphicFrame>
         <p:nvGraphicFramePr>
-          <p:cNvPr id="7" name="Table 6"/>
+          <p:cNvPr id="8" name="Table 7"/>
           <p:cNvGraphicFramePr>
             <a:graphicFrameLocks noGrp="1"/>
           </p:cNvGraphicFramePr>
           <p:nvPr/>
         </p:nvGraphicFramePr>
         <p:xfrm>
-          <a:off x="548640" y="1968245"/>
-          <a:ext cx="5394960" cy="950976"/>
+          <a:off x="548640" y="5000053"/>
+          <a:ext cx="5394960" cy="1188720"/>
         </p:xfrm>
         <a:graphic>
           <a:graphicData uri="http://schemas.openxmlformats.org/drawingml/2006/table">
@@ -5727,12 +7090,9 @@
                 <a:tableStyleId>{5C22544A-7EE6-4342-B048-85BDC9FD1C3A}</a:tableStyleId>
               </a:tblPr>
               <a:tblGrid>
-                <a:gridCol w="899160"/>
-                <a:gridCol w="899160"/>
-                <a:gridCol w="899160"/>
-                <a:gridCol w="899160"/>
-                <a:gridCol w="899160"/>
-                <a:gridCol w="899160"/>
+                <a:gridCol w="1798320"/>
+                <a:gridCol w="1798320"/>
+                <a:gridCol w="1798320"/>
               </a:tblGrid>
               <a:tr h="237744">
                 <a:tc>
@@ -5748,7 +7108,7 @@
                         </a:defRPr>
                       </a:pPr>
                       <a:r>
-                        <a:t>Engine</a:t>
+                        <a:t>Phase</a:t>
                       </a:r>
                     </a:p>
                   </a:txBody>
@@ -5771,7 +7131,7 @@
                         </a:defRPr>
                       </a:pPr>
                       <a:r>
-                        <a:t>Represents</a:t>
+                        <a:t>Event</a:t>
                       </a:r>
                     </a:p>
                   </a:txBody>
@@ -5794,76 +7154,7 @@
                         </a:defRPr>
                       </a:pPr>
                       <a:r>
-                        <a:t>Purchase flow</a:t>
-                      </a:r>
-                    </a:p>
-                  </a:txBody>
-                  <a:tcPr>
-                    <a:solidFill>
-                      <a:srgbClr val="EEF2FF"/>
-                    </a:solidFill>
-                  </a:tcPr>
-                </a:tc>
-                <a:tc>
-                  <a:txBody>
-                    <a:bodyPr/>
-                    <a:lstStyle/>
-                    <a:p>
-                      <a:pPr>
-                        <a:defRPr sz="1000" b="1">
-                          <a:solidFill>
-                            <a:srgbClr val="1E1B4B"/>
-                          </a:solidFill>
-                        </a:defRPr>
-                      </a:pPr>
-                      <a:r>
-                        <a:t>Validation</a:t>
-                      </a:r>
-                    </a:p>
-                  </a:txBody>
-                  <a:tcPr>
-                    <a:solidFill>
-                      <a:srgbClr val="EEF2FF"/>
-                    </a:solidFill>
-                  </a:tcPr>
-                </a:tc>
-                <a:tc>
-                  <a:txBody>
-                    <a:bodyPr/>
-                    <a:lstStyle/>
-                    <a:p>
-                      <a:pPr>
-                        <a:defRPr sz="1000" b="1">
-                          <a:solidFill>
-                            <a:srgbClr val="1E1B4B"/>
-                          </a:solidFill>
-                        </a:defRPr>
-                      </a:pPr>
-                      <a:r>
-                        <a:t>403 gate</a:t>
-                      </a:r>
-                    </a:p>
-                  </a:txBody>
-                  <a:tcPr>
-                    <a:solidFill>
-                      <a:srgbClr val="EEF2FF"/>
-                    </a:solidFill>
-                  </a:tcPr>
-                </a:tc>
-                <a:tc>
-                  <a:txBody>
-                    <a:bodyPr/>
-                    <a:lstStyle/>
-                    <a:p>
-                      <a:pPr>
-                        <a:defRPr sz="1000" b="1">
-                          <a:solidFill>
-                            <a:srgbClr val="1E1B4B"/>
-                          </a:solidFill>
-                        </a:defRPr>
-                      </a:pPr>
-                      <a:r>
-                        <a:t>Responsive</a:t>
+                        <a:t>Behavior</a:t>
                       </a:r>
                     </a:p>
                   </a:txBody>
@@ -5888,122 +7179,53 @@
                         </a:defRPr>
                       </a:pPr>
                       <a:r>
-                        <a:t>Chromium</a:t>
-                      </a:r>
-                    </a:p>
-                  </a:txBody>
-                  <a:tcPr>
-                    <a:solidFill>
-                      <a:srgbClr val="FFFFFF"/>
-                    </a:solidFill>
-                  </a:tcPr>
-                </a:tc>
-                <a:tc>
-                  <a:txBody>
-                    <a:bodyPr/>
-                    <a:lstStyle/>
-                    <a:p>
-                      <a:pPr>
-                        <a:defRPr sz="950">
-                          <a:solidFill>
-                            <a:srgbClr val="1E1B4B"/>
-                          </a:solidFill>
-                        </a:defRPr>
-                      </a:pPr>
-                      <a:r>
-                        <a:t>Chrome, Edge</a:t>
-                      </a:r>
-                    </a:p>
-                  </a:txBody>
-                  <a:tcPr>
-                    <a:solidFill>
-                      <a:srgbClr val="FFFFFF"/>
-                    </a:solidFill>
-                  </a:tcPr>
-                </a:tc>
-                <a:tc>
-                  <a:txBody>
-                    <a:bodyPr/>
-                    <a:lstStyle/>
-                    <a:p>
-                      <a:pPr>
-                        <a:defRPr sz="950">
-                          <a:solidFill>
-                            <a:srgbClr val="1E1B4B"/>
-                          </a:solidFill>
-                        </a:defRPr>
-                      </a:pPr>
-                      <a:r>
-                        <a:t>Pass</a:t>
-                      </a:r>
-                    </a:p>
-                  </a:txBody>
-                  <a:tcPr>
-                    <a:solidFill>
-                      <a:srgbClr val="FFFFFF"/>
-                    </a:solidFill>
-                  </a:tcPr>
-                </a:tc>
-                <a:tc>
-                  <a:txBody>
-                    <a:bodyPr/>
-                    <a:lstStyle/>
-                    <a:p>
-                      <a:pPr>
-                        <a:defRPr sz="950">
-                          <a:solidFill>
-                            <a:srgbClr val="1E1B4B"/>
-                          </a:solidFill>
-                        </a:defRPr>
-                      </a:pPr>
-                      <a:r>
-                        <a:t>Pass</a:t>
-                      </a:r>
-                    </a:p>
-                  </a:txBody>
-                  <a:tcPr>
-                    <a:solidFill>
-                      <a:srgbClr val="FFFFFF"/>
-                    </a:solidFill>
-                  </a:tcPr>
-                </a:tc>
-                <a:tc>
-                  <a:txBody>
-                    <a:bodyPr/>
-                    <a:lstStyle/>
-                    <a:p>
-                      <a:pPr>
-                        <a:defRPr sz="950">
-                          <a:solidFill>
-                            <a:srgbClr val="1E1B4B"/>
-                          </a:solidFill>
-                        </a:defRPr>
-                      </a:pPr>
-                      <a:r>
-                        <a:t>Pass</a:t>
-                      </a:r>
-                    </a:p>
-                  </a:txBody>
-                  <a:tcPr>
-                    <a:solidFill>
-                      <a:srgbClr val="FFFFFF"/>
-                    </a:solidFill>
-                  </a:tcPr>
-                </a:tc>
-                <a:tc>
-                  <a:txBody>
-                    <a:bodyPr/>
-                    <a:lstStyle/>
-                    <a:p>
-                      <a:pPr>
-                        <a:defRPr sz="950">
-                          <a:solidFill>
-                            <a:srgbClr val="1E1B4B"/>
-                          </a:solidFill>
-                        </a:defRPr>
-                      </a:pPr>
-                      <a:r>
-                        <a:t>Pass</a:t>
+                        <a:t>Steady state</a:t>
+                      </a:r>
+                    </a:p>
+                  </a:txBody>
+                  <a:tcPr>
+                    <a:solidFill>
+                      <a:srgbClr val="FFFFFF"/>
+                    </a:solidFill>
+                  </a:tcPr>
+                </a:tc>
+                <a:tc>
+                  <a:txBody>
+                    <a:bodyPr/>
+                    <a:lstStyle/>
+                    <a:p>
+                      <a:pPr>
+                        <a:defRPr sz="950">
+                          <a:solidFill>
+                            <a:srgbClr val="1E1B4B"/>
+                          </a:solidFill>
+                        </a:defRPr>
+                      </a:pPr>
+                      <a:r>
+                        <a:t>2 backends</a:t>
+                      </a:r>
+                    </a:p>
+                  </a:txBody>
+                  <a:tcPr>
+                    <a:solidFill>
+                      <a:srgbClr val="FFFFFF"/>
+                    </a:solidFill>
+                  </a:tcPr>
+                </a:tc>
+                <a:tc>
+                  <a:txBody>
+                    <a:bodyPr/>
+                    <a:lstStyle/>
+                    <a:p>
+                      <a:pPr>
+                        <a:defRPr sz="950">
+                          <a:solidFill>
+                            <a:srgbClr val="1E1B4B"/>
+                          </a:solidFill>
+                        </a:defRPr>
+                      </a:pPr>
+                      <a:r>
+                        <a:t>Requests alternate 5001 / 5002</a:t>
                       </a:r>
                     </a:p>
                   </a:txBody>
@@ -6028,122 +7250,53 @@
                         </a:defRPr>
                       </a:pPr>
                       <a:r>
-                        <a:t>Firefox</a:t>
-                      </a:r>
-                    </a:p>
-                  </a:txBody>
-                  <a:tcPr>
-                    <a:solidFill>
-                      <a:srgbClr val="FFFFFF"/>
-                    </a:solidFill>
-                  </a:tcPr>
-                </a:tc>
-                <a:tc>
-                  <a:txBody>
-                    <a:bodyPr/>
-                    <a:lstStyle/>
-                    <a:p>
-                      <a:pPr>
-                        <a:defRPr sz="950">
-                          <a:solidFill>
-                            <a:srgbClr val="1E1B4B"/>
-                          </a:solidFill>
-                        </a:defRPr>
-                      </a:pPr>
-                      <a:r>
-                        <a:t>Firefox</a:t>
-                      </a:r>
-                    </a:p>
-                  </a:txBody>
-                  <a:tcPr>
-                    <a:solidFill>
-                      <a:srgbClr val="FFFFFF"/>
-                    </a:solidFill>
-                  </a:tcPr>
-                </a:tc>
-                <a:tc>
-                  <a:txBody>
-                    <a:bodyPr/>
-                    <a:lstStyle/>
-                    <a:p>
-                      <a:pPr>
-                        <a:defRPr sz="950">
-                          <a:solidFill>
-                            <a:srgbClr val="1E1B4B"/>
-                          </a:solidFill>
-                        </a:defRPr>
-                      </a:pPr>
-                      <a:r>
-                        <a:t>Pass</a:t>
-                      </a:r>
-                    </a:p>
-                  </a:txBody>
-                  <a:tcPr>
-                    <a:solidFill>
-                      <a:srgbClr val="FFFFFF"/>
-                    </a:solidFill>
-                  </a:tcPr>
-                </a:tc>
-                <a:tc>
-                  <a:txBody>
-                    <a:bodyPr/>
-                    <a:lstStyle/>
-                    <a:p>
-                      <a:pPr>
-                        <a:defRPr sz="950">
-                          <a:solidFill>
-                            <a:srgbClr val="1E1B4B"/>
-                          </a:solidFill>
-                        </a:defRPr>
-                      </a:pPr>
-                      <a:r>
-                        <a:t>Pass</a:t>
-                      </a:r>
-                    </a:p>
-                  </a:txBody>
-                  <a:tcPr>
-                    <a:solidFill>
-                      <a:srgbClr val="FFFFFF"/>
-                    </a:solidFill>
-                  </a:tcPr>
-                </a:tc>
-                <a:tc>
-                  <a:txBody>
-                    <a:bodyPr/>
-                    <a:lstStyle/>
-                    <a:p>
-                      <a:pPr>
-                        <a:defRPr sz="950">
-                          <a:solidFill>
-                            <a:srgbClr val="1E1B4B"/>
-                          </a:solidFill>
-                        </a:defRPr>
-                      </a:pPr>
-                      <a:r>
-                        <a:t>Pass</a:t>
-                      </a:r>
-                    </a:p>
-                  </a:txBody>
-                  <a:tcPr>
-                    <a:solidFill>
-                      <a:srgbClr val="FFFFFF"/>
-                    </a:solidFill>
-                  </a:tcPr>
-                </a:tc>
-                <a:tc>
-                  <a:txBody>
-                    <a:bodyPr/>
-                    <a:lstStyle/>
-                    <a:p>
-                      <a:pPr>
-                        <a:defRPr sz="950">
-                          <a:solidFill>
-                            <a:srgbClr val="1E1B4B"/>
-                          </a:solidFill>
-                        </a:defRPr>
-                      </a:pPr>
-                      <a:r>
-                        <a:t>Pass</a:t>
+                        <a:t>Scale up</a:t>
+                      </a:r>
+                    </a:p>
+                  </a:txBody>
+                  <a:tcPr>
+                    <a:solidFill>
+                      <a:srgbClr val="FFFFFF"/>
+                    </a:solidFill>
+                  </a:tcPr>
+                </a:tc>
+                <a:tc>
+                  <a:txBody>
+                    <a:bodyPr/>
+                    <a:lstStyle/>
+                    <a:p>
+                      <a:pPr>
+                        <a:defRPr sz="950">
+                          <a:solidFill>
+                            <a:srgbClr val="1E1B4B"/>
+                          </a:solidFill>
+                        </a:defRPr>
+                      </a:pPr>
+                      <a:r>
+                        <a:t>Instance started on :5003</a:t>
+                      </a:r>
+                    </a:p>
+                  </a:txBody>
+                  <a:tcPr>
+                    <a:solidFill>
+                      <a:srgbClr val="FFFFFF"/>
+                    </a:solidFill>
+                  </a:tcPr>
+                </a:tc>
+                <a:tc>
+                  <a:txBody>
+                    <a:bodyPr/>
+                    <a:lstStyle/>
+                    <a:p>
+                      <a:pPr>
+                        <a:defRPr sz="950">
+                          <a:solidFill>
+                            <a:srgbClr val="1E1B4B"/>
+                          </a:solidFill>
+                        </a:defRPr>
+                      </a:pPr>
+                      <a:r>
+                        <a:t>Detected in one 5s interval, joins rotation</a:t>
                       </a:r>
                     </a:p>
                   </a:txBody>
@@ -6168,122 +7321,124 @@
                         </a:defRPr>
                       </a:pPr>
                       <a:r>
-                        <a:t>WebKit</a:t>
-                      </a:r>
-                    </a:p>
-                  </a:txBody>
-                  <a:tcPr>
-                    <a:solidFill>
-                      <a:srgbClr val="FFFFFF"/>
-                    </a:solidFill>
-                  </a:tcPr>
-                </a:tc>
-                <a:tc>
-                  <a:txBody>
-                    <a:bodyPr/>
-                    <a:lstStyle/>
-                    <a:p>
-                      <a:pPr>
-                        <a:defRPr sz="950">
-                          <a:solidFill>
-                            <a:srgbClr val="1E1B4B"/>
-                          </a:solidFill>
-                        </a:defRPr>
-                      </a:pPr>
-                      <a:r>
-                        <a:t>Safari</a:t>
-                      </a:r>
-                    </a:p>
-                  </a:txBody>
-                  <a:tcPr>
-                    <a:solidFill>
-                      <a:srgbClr val="FFFFFF"/>
-                    </a:solidFill>
-                  </a:tcPr>
-                </a:tc>
-                <a:tc>
-                  <a:txBody>
-                    <a:bodyPr/>
-                    <a:lstStyle/>
-                    <a:p>
-                      <a:pPr>
-                        <a:defRPr sz="950">
-                          <a:solidFill>
-                            <a:srgbClr val="1E1B4B"/>
-                          </a:solidFill>
-                        </a:defRPr>
-                      </a:pPr>
-                      <a:r>
-                        <a:t>Pass</a:t>
-                      </a:r>
-                    </a:p>
-                  </a:txBody>
-                  <a:tcPr>
-                    <a:solidFill>
-                      <a:srgbClr val="FFFFFF"/>
-                    </a:solidFill>
-                  </a:tcPr>
-                </a:tc>
-                <a:tc>
-                  <a:txBody>
-                    <a:bodyPr/>
-                    <a:lstStyle/>
-                    <a:p>
-                      <a:pPr>
-                        <a:defRPr sz="950">
-                          <a:solidFill>
-                            <a:srgbClr val="1E1B4B"/>
-                          </a:solidFill>
-                        </a:defRPr>
-                      </a:pPr>
-                      <a:r>
-                        <a:t>Pass</a:t>
-                      </a:r>
-                    </a:p>
-                  </a:txBody>
-                  <a:tcPr>
-                    <a:solidFill>
-                      <a:srgbClr val="FFFFFF"/>
-                    </a:solidFill>
-                  </a:tcPr>
-                </a:tc>
-                <a:tc>
-                  <a:txBody>
-                    <a:bodyPr/>
-                    <a:lstStyle/>
-                    <a:p>
-                      <a:pPr>
-                        <a:defRPr sz="950">
-                          <a:solidFill>
-                            <a:srgbClr val="1E1B4B"/>
-                          </a:solidFill>
-                        </a:defRPr>
-                      </a:pPr>
-                      <a:r>
-                        <a:t>Pass</a:t>
-                      </a:r>
-                    </a:p>
-                  </a:txBody>
-                  <a:tcPr>
-                    <a:solidFill>
-                      <a:srgbClr val="FFFFFF"/>
-                    </a:solidFill>
-                  </a:tcPr>
-                </a:tc>
-                <a:tc>
-                  <a:txBody>
-                    <a:bodyPr/>
-                    <a:lstStyle/>
-                    <a:p>
-                      <a:pPr>
-                        <a:defRPr sz="950">
-                          <a:solidFill>
-                            <a:srgbClr val="1E1B4B"/>
-                          </a:solidFill>
-                        </a:defRPr>
-                      </a:pPr>
-                      <a:r>
-                        <a:t>Pass</a:t>
+                        <a:t>Scale down</a:t>
+                      </a:r>
+                    </a:p>
+                  </a:txBody>
+                  <a:tcPr>
+                    <a:solidFill>
+                      <a:srgbClr val="FFFFFF"/>
+                    </a:solidFill>
+                  </a:tcPr>
+                </a:tc>
+                <a:tc>
+                  <a:txBody>
+                    <a:bodyPr/>
+                    <a:lstStyle/>
+                    <a:p>
+                      <a:pPr>
+                        <a:defRPr sz="950">
+                          <a:solidFill>
+                            <a:srgbClr val="1E1B4B"/>
+                          </a:solidFill>
+                        </a:defRPr>
+                      </a:pPr>
+                      <a:r>
+                        <a:t>:5003 killed</a:t>
+                      </a:r>
+                    </a:p>
+                  </a:txBody>
+                  <a:tcPr>
+                    <a:solidFill>
+                      <a:srgbClr val="FFFFFF"/>
+                    </a:solidFill>
+                  </a:tcPr>
+                </a:tc>
+                <a:tc>
+                  <a:txBody>
+                    <a:bodyPr/>
+                    <a:lstStyle/>
+                    <a:p>
+                      <a:pPr>
+                        <a:defRPr sz="950">
+                          <a:solidFill>
+                            <a:srgbClr val="1E1B4B"/>
+                          </a:solidFill>
+                        </a:defRPr>
+                      </a:pPr>
+                      <a:r>
+                        <a:t>Evicted; traffic returns to 2 backends</a:t>
+                      </a:r>
+                    </a:p>
+                  </a:txBody>
+                  <a:tcPr>
+                    <a:solidFill>
+                      <a:srgbClr val="FFFFFF"/>
+                    </a:solidFill>
+                  </a:tcPr>
+                </a:tc>
+              </a:tr>
+              <a:tr h="237744">
+                <a:tc>
+                  <a:txBody>
+                    <a:bodyPr/>
+                    <a:lstStyle/>
+                    <a:p>
+                      <a:pPr>
+                        <a:defRPr sz="950">
+                          <a:solidFill>
+                            <a:srgbClr val="1E1B4B"/>
+                          </a:solidFill>
+                        </a:defRPr>
+                      </a:pPr>
+                      <a:r>
+                        <a:t>Total failure</a:t>
+                      </a:r>
+                    </a:p>
+                  </a:txBody>
+                  <a:tcPr>
+                    <a:solidFill>
+                      <a:srgbClr val="FFFFFF"/>
+                    </a:solidFill>
+                  </a:tcPr>
+                </a:tc>
+                <a:tc>
+                  <a:txBody>
+                    <a:bodyPr/>
+                    <a:lstStyle/>
+                    <a:p>
+                      <a:pPr>
+                        <a:defRPr sz="950">
+                          <a:solidFill>
+                            <a:srgbClr val="1E1B4B"/>
+                          </a:solidFill>
+                        </a:defRPr>
+                      </a:pPr>
+                      <a:r>
+                        <a:t>All backends down</a:t>
+                      </a:r>
+                    </a:p>
+                  </a:txBody>
+                  <a:tcPr>
+                    <a:solidFill>
+                      <a:srgbClr val="FFFFFF"/>
+                    </a:solidFill>
+                  </a:tcPr>
+                </a:tc>
+                <a:tc>
+                  <a:txBody>
+                    <a:bodyPr/>
+                    <a:lstStyle/>
+                    <a:p>
+                      <a:pPr>
+                        <a:defRPr sz="950">
+                          <a:solidFill>
+                            <a:srgbClr val="1E1B4B"/>
+                          </a:solidFill>
+                        </a:defRPr>
+                      </a:pPr>
+                      <a:r>
+                        <a:t>HTTP 503 — degrades, does not crash</a:t>
                       </a:r>
                     </a:p>
                   </a:txBody>
@@ -6300,13 +7455,13 @@
       </p:graphicFrame>
       <p:sp>
         <p:nvSpPr>
-          <p:cNvPr id="8" name="TextBox 7"/>
+          <p:cNvPr id="9" name="TextBox 8"/>
           <p:cNvSpPr txBox="1"/>
           <p:nvPr/>
         </p:nvSpPr>
         <p:spPr>
           <a:xfrm>
-            <a:off x="548640" y="3047237"/>
+            <a:off x="6400800" y="1106424"/>
             <a:ext cx="5394960" cy="274320"/>
           </a:xfrm>
           <a:prstGeom prst="rect">
@@ -6321,45 +7476,12 @@
           <a:lstStyle/>
           <a:p>
             <a:r>
-              <a:rPr sz="1150" b="0">
+              <a:rPr sz="1500" b="1">
                 <a:solidFill>
-                  <a:srgbClr val="1E1B4B"/>
+                  <a:srgbClr val="4F46E5"/>
                 </a:solidFill>
               </a:rPr>
-              <a:t>3. Responsive — zero overflow across 12 pages × 3 widths Measured programmatically (scrollWidth vs viewport), not judged by eye — which is how the nav clipping was caught when a screenshot had masked it.</a:t>
-            </a:r>
-          </a:p>
-        </p:txBody>
-      </p:sp>
-      <p:sp>
-        <p:nvSpPr>
-          <p:cNvPr id="9" name="TextBox 8"/>
-          <p:cNvSpPr txBox="1"/>
-          <p:nvPr/>
-        </p:nvSpPr>
-        <p:spPr>
-          <a:xfrm>
-            <a:off x="548640" y="3317556"/>
-            <a:ext cx="5394960" cy="274320"/>
-          </a:xfrm>
-          <a:prstGeom prst="rect">
-            <a:avLst/>
-          </a:prstGeom>
-          <a:noFill/>
-        </p:spPr>
-        <p:txBody>
-          <a:bodyPr wrap="square">
-            <a:spAutoFit/>
-          </a:bodyPr>
-          <a:lstStyle/>
-          <a:p>
-            <a:r>
-              <a:rPr sz="1150" b="0">
-                <a:solidFill>
-                  <a:srgbClr val="1E1B4B"/>
-                </a:solidFill>
-              </a:rPr>
-              <a:t>4. Infrastructure — load balancer verified</a:t>
+              <a:t>Verification at Four Levels</a:t>
             </a:r>
           </a:p>
         </p:txBody>
@@ -6373,7 +7495,7 @@
           <p:nvPr/>
         </p:nvGraphicFramePr>
         <p:xfrm>
-          <a:off x="548640" y="3624451"/>
+          <a:off x="6400800" y="1427607"/>
           <a:ext cx="5394960" cy="1188720"/>
         </p:xfrm>
         <a:graphic>
@@ -6383,8 +7505,9 @@
                 <a:tableStyleId>{5C22544A-7EE6-4342-B048-85BDC9FD1C3A}</a:tableStyleId>
               </a:tblPr>
               <a:tblGrid>
-                <a:gridCol w="2697480"/>
-                <a:gridCol w="2697480"/>
+                <a:gridCol w="1798320"/>
+                <a:gridCol w="1798320"/>
+                <a:gridCol w="1798320"/>
               </a:tblGrid>
               <a:tr h="237744">
                 <a:tc>
@@ -6400,7 +7523,30 @@
                         </a:defRPr>
                       </a:pPr>
                       <a:r>
-                        <a:t>Scenario</a:t>
+                        <a:t>Level</a:t>
+                      </a:r>
+                    </a:p>
+                  </a:txBody>
+                  <a:tcPr>
+                    <a:solidFill>
+                      <a:srgbClr val="EEF2FF"/>
+                    </a:solidFill>
+                  </a:tcPr>
+                </a:tc>
+                <a:tc>
+                  <a:txBody>
+                    <a:bodyPr/>
+                    <a:lstStyle/>
+                    <a:p>
+                      <a:pPr>
+                        <a:defRPr sz="1000" b="1">
+                          <a:solidFill>
+                            <a:srgbClr val="1E1B4B"/>
+                          </a:solidFill>
+                        </a:defRPr>
+                      </a:pPr>
+                      <a:r>
+                        <a:t>Method</a:t>
                       </a:r>
                     </a:p>
                   </a:txBody>
@@ -6448,30 +7594,53 @@
                         </a:defRPr>
                       </a:pPr>
                       <a:r>
-                        <a:t>Round-robin across 2 backends</a:t>
-                      </a:r>
-                    </a:p>
-                  </a:txBody>
-                  <a:tcPr>
-                    <a:solidFill>
-                      <a:srgbClr val="FFFFFF"/>
-                    </a:solidFill>
-                  </a:tcPr>
-                </a:tc>
-                <a:tc>
-                  <a:txBody>
-                    <a:bodyPr/>
-                    <a:lstStyle/>
-                    <a:p>
-                      <a:pPr>
-                        <a:defRPr sz="950">
-                          <a:solidFill>
-                            <a:srgbClr val="1E1B4B"/>
-                          </a:solidFill>
-                        </a:defRPr>
-                      </a:pPr>
-                      <a:r>
-                        <a:t>Perfect alternation</a:t>
+                        <a:t>Unit / integration</a:t>
+                      </a:r>
+                    </a:p>
+                  </a:txBody>
+                  <a:tcPr>
+                    <a:solidFill>
+                      <a:srgbClr val="FFFFFF"/>
+                    </a:solidFill>
+                  </a:tcPr>
+                </a:tc>
+                <a:tc>
+                  <a:txBody>
+                    <a:bodyPr/>
+                    <a:lstStyle/>
+                    <a:p>
+                      <a:pPr>
+                        <a:defRPr sz="950">
+                          <a:solidFill>
+                            <a:srgbClr val="1E1B4B"/>
+                          </a:solidFill>
+                        </a:defRPr>
+                      </a:pPr>
+                      <a:r>
+                        <a:t>pytest, in-memory SQLite</a:t>
+                      </a:r>
+                    </a:p>
+                  </a:txBody>
+                  <a:tcPr>
+                    <a:solidFill>
+                      <a:srgbClr val="FFFFFF"/>
+                    </a:solidFill>
+                  </a:tcPr>
+                </a:tc>
+                <a:tc>
+                  <a:txBody>
+                    <a:bodyPr/>
+                    <a:lstStyle/>
+                    <a:p>
+                      <a:pPr>
+                        <a:defRPr sz="950">
+                          <a:solidFill>
+                            <a:srgbClr val="1E1B4B"/>
+                          </a:solidFill>
+                        </a:defRPr>
+                      </a:pPr>
+                      <a:r>
+                        <a:t>131 passing</a:t>
                       </a:r>
                     </a:p>
                   </a:txBody>
@@ -6496,30 +7665,53 @@
                         </a:defRPr>
                       </a:pPr>
                       <a:r>
-                        <a:t>Scale up — 3rd instance started at runtime</a:t>
-                      </a:r>
-                    </a:p>
-                  </a:txBody>
-                  <a:tcPr>
-                    <a:solidFill>
-                      <a:srgbClr val="FFFFFF"/>
-                    </a:solidFill>
-                  </a:tcPr>
-                </a:tc>
-                <a:tc>
-                  <a:txBody>
-                    <a:bodyPr/>
-                    <a:lstStyle/>
-                    <a:p>
-                      <a:pPr>
-                        <a:defRPr sz="950">
-                          <a:solidFill>
-                            <a:srgbClr val="1E1B4B"/>
-                          </a:solidFill>
-                        </a:defRPr>
-                      </a:pPr>
-                      <a:r>
-                        <a:t>Joined rotation automatically</a:t>
+                        <a:t>Cross-browser</a:t>
+                      </a:r>
+                    </a:p>
+                  </a:txBody>
+                  <a:tcPr>
+                    <a:solidFill>
+                      <a:srgbClr val="FFFFFF"/>
+                    </a:solidFill>
+                  </a:tcPr>
+                </a:tc>
+                <a:tc>
+                  <a:txBody>
+                    <a:bodyPr/>
+                    <a:lstStyle/>
+                    <a:p>
+                      <a:pPr>
+                        <a:defRPr sz="950">
+                          <a:solidFill>
+                            <a:srgbClr val="1E1B4B"/>
+                          </a:solidFill>
+                        </a:defRPr>
+                      </a:pPr>
+                      <a:r>
+                        <a:t>Real purchase flow: Chromium, Firefox, WebKit</a:t>
+                      </a:r>
+                    </a:p>
+                  </a:txBody>
+                  <a:tcPr>
+                    <a:solidFill>
+                      <a:srgbClr val="FFFFFF"/>
+                    </a:solidFill>
+                  </a:tcPr>
+                </a:tc>
+                <a:tc>
+                  <a:txBody>
+                    <a:bodyPr/>
+                    <a:lstStyle/>
+                    <a:p>
+                      <a:pPr>
+                        <a:defRPr sz="950">
+                          <a:solidFill>
+                            <a:srgbClr val="1E1B4B"/>
+                          </a:solidFill>
+                        </a:defRPr>
+                      </a:pPr>
+                      <a:r>
+                        <a:t>99/99 passing</a:t>
                       </a:r>
                     </a:p>
                   </a:txBody>
@@ -6544,30 +7736,53 @@
                         </a:defRPr>
                       </a:pPr>
                       <a:r>
-                        <a:t>Scale down — instance killed</a:t>
-                      </a:r>
-                    </a:p>
-                  </a:txBody>
-                  <a:tcPr>
-                    <a:solidFill>
-                      <a:srgbClr val="FFFFFF"/>
-                    </a:solidFill>
-                  </a:tcPr>
-                </a:tc>
-                <a:tc>
-                  <a:txBody>
-                    <a:bodyPr/>
-                    <a:lstStyle/>
-                    <a:p>
-                      <a:pPr>
-                        <a:defRPr sz="950">
-                          <a:solidFill>
-                            <a:srgbClr val="1E1B4B"/>
-                          </a:solidFill>
-                        </a:defRPr>
-                      </a:pPr>
-                      <a:r>
-                        <a:t>Evicted from rotation</a:t>
+                        <a:t>Responsive</a:t>
+                      </a:r>
+                    </a:p>
+                  </a:txBody>
+                  <a:tcPr>
+                    <a:solidFill>
+                      <a:srgbClr val="FFFFFF"/>
+                    </a:solidFill>
+                  </a:tcPr>
+                </a:tc>
+                <a:tc>
+                  <a:txBody>
+                    <a:bodyPr/>
+                    <a:lstStyle/>
+                    <a:p>
+                      <a:pPr>
+                        <a:defRPr sz="950">
+                          <a:solidFill>
+                            <a:srgbClr val="1E1B4B"/>
+                          </a:solidFill>
+                        </a:defRPr>
+                      </a:pPr>
+                      <a:r>
+                        <a:t>scrollWidth measured, 12 pages × 3 widths</a:t>
+                      </a:r>
+                    </a:p>
+                  </a:txBody>
+                  <a:tcPr>
+                    <a:solidFill>
+                      <a:srgbClr val="FFFFFF"/>
+                    </a:solidFill>
+                  </a:tcPr>
+                </a:tc>
+                <a:tc>
+                  <a:txBody>
+                    <a:bodyPr/>
+                    <a:lstStyle/>
+                    <a:p>
+                      <a:pPr>
+                        <a:defRPr sz="950">
+                          <a:solidFill>
+                            <a:srgbClr val="1E1B4B"/>
+                          </a:solidFill>
+                        </a:defRPr>
+                      </a:pPr>
+                      <a:r>
+                        <a:t>Zero overflow</a:t>
                       </a:r>
                     </a:p>
                   </a:txBody>
@@ -6592,30 +7807,53 @@
                         </a:defRPr>
                       </a:pPr>
                       <a:r>
-                        <a:t>Total failure — all backends down</a:t>
-                      </a:r>
-                    </a:p>
-                  </a:txBody>
-                  <a:tcPr>
-                    <a:solidFill>
-                      <a:srgbClr val="FFFFFF"/>
-                    </a:solidFill>
-                  </a:tcPr>
-                </a:tc>
-                <a:tc>
-                  <a:txBody>
-                    <a:bodyPr/>
-                    <a:lstStyle/>
-                    <a:p>
-                      <a:pPr>
-                        <a:defRPr sz="950">
-                          <a:solidFill>
-                            <a:srgbClr val="1E1B4B"/>
-                          </a:solidFill>
-                        </a:defRPr>
-                      </a:pPr>
-                      <a:r>
-                        <a:t>HTTP 503, no crash</a:t>
+                        <a:t>Infrastructure</a:t>
+                      </a:r>
+                    </a:p>
+                  </a:txBody>
+                  <a:tcPr>
+                    <a:solidFill>
+                      <a:srgbClr val="FFFFFF"/>
+                    </a:solidFill>
+                  </a:tcPr>
+                </a:tc>
+                <a:tc>
+                  <a:txBody>
+                    <a:bodyPr/>
+                    <a:lstStyle/>
+                    <a:p>
+                      <a:pPr>
+                        <a:defRPr sz="950">
+                          <a:solidFill>
+                            <a:srgbClr val="1E1B4B"/>
+                          </a:solidFill>
+                        </a:defRPr>
+                      </a:pPr>
+                      <a:r>
+                        <a:t>Scale up, scale down, total failure</a:t>
+                      </a:r>
+                    </a:p>
+                  </a:txBody>
+                  <a:tcPr>
+                    <a:solidFill>
+                      <a:srgbClr val="FFFFFF"/>
+                    </a:solidFill>
+                  </a:tcPr>
+                </a:tc>
+                <a:tc>
+                  <a:txBody>
+                    <a:bodyPr/>
+                    <a:lstStyle/>
+                    <a:p>
+                      <a:pPr>
+                        <a:defRPr sz="950">
+                          <a:solidFill>
+                            <a:srgbClr val="1E1B4B"/>
+                          </a:solidFill>
+                        </a:defRPr>
+                      </a:pPr>
+                      <a:r>
+                        <a:t>All scenarios pass</a:t>
                       </a:r>
                     </a:p>
                   </a:txBody>
@@ -6638,7 +7876,7 @@
         </p:nvSpPr>
         <p:spPr>
           <a:xfrm>
-            <a:off x="548640" y="4996051"/>
+            <a:off x="6400800" y="2799207"/>
             <a:ext cx="5394960" cy="274320"/>
           </a:xfrm>
           <a:prstGeom prst="rect">
@@ -6658,7 +7896,7 @@
                   <a:srgbClr val="4F46E5"/>
                 </a:solidFill>
               </a:rPr>
-              <a:t>Outcome</a:t>
+              <a:t>Bottom Line</a:t>
             </a:r>
           </a:p>
         </p:txBody>
@@ -6671,7 +7909,7 @@
         </p:nvSpPr>
         <p:spPr>
           <a:xfrm>
-            <a:off x="6400800" y="1051560"/>
+            <a:off x="6400800" y="3083814"/>
             <a:ext cx="5394960" cy="274320"/>
           </a:xfrm>
           <a:prstGeom prst="rect">
@@ -6691,7 +7929,7 @@
                   <a:srgbClr val="1E1B4B"/>
                 </a:solidFill>
               </a:rPr>
-              <a:t>A functional, tested, documented e-commerce application that demonstrates horizontal scaling, health-checked load balancing, and auto-scaling behavior — with every issue found in final testing fixed and re-verified.</a:t>
+              <a:t>A small seller's storefront survives its best day — capacity joins in seconds, failure is absorbed rather than propagated, and every claim here is backed by a test that can be re-run.</a:t>
             </a:r>
           </a:p>
         </p:txBody>
@@ -6704,7 +7942,7 @@
         </p:nvSpPr>
         <p:spPr>
           <a:xfrm>
-            <a:off x="6400800" y="1321879"/>
+            <a:off x="6400800" y="3354133"/>
             <a:ext cx="5394960" cy="274320"/>
           </a:xfrm>
           <a:prstGeom prst="rect">

--- a/docs/slides/final-presentation.pptx
+++ b/docs/slides/final-presentation.pptx
@@ -3163,7 +3163,7 @@
                   <a:srgbClr val="1E1B4B"/>
                 </a:solidFill>
               </a:rPr>
-              <a:t>Slide 1 — The Problem, the Customer, the Value</a:t>
+              <a:t>Slide 1 — The Cloud Problem and the Approach</a:t>
             </a:r>
           </a:p>
         </p:txBody>
@@ -3196,7 +3196,7 @@
                   <a:srgbClr val="4F46E5"/>
                 </a:solidFill>
               </a:rPr>
-              <a:t>The Problem</a:t>
+              <a:t>The Problem Cloud Architecture Solves Here</a:t>
             </a:r>
           </a:p>
         </p:txBody>
@@ -3229,7 +3229,7 @@
                   <a:srgbClr val="1E1B4B"/>
                 </a:solidFill>
               </a:rPr>
-              <a:t>Small online sellers get punished for their best days.</a:t>
+              <a:t>A storefront on one server fails at exactly the wrong moment: a product gets featured, traffic spikes 10x, and the busiest hour becomes the hour customers cannot buy. Vertical scaling is capacity you pay for year-round and still outgrow in a spike.</a:t>
             </a:r>
           </a:p>
         </p:txBody>
@@ -3262,7 +3262,7 @@
                   <a:srgbClr val="1E1B4B"/>
                 </a:solidFill>
               </a:rPr>
-              <a:t>A hosted storefront on a single server handles an ordinary Tuesday fine. Then a product gets featured, a post takes off, a holiday lands — traffic spikes 10x and the site slows, times out, or falls over. The busiest hour of the year becomes the hour customers cannot buy.</a:t>
+              <a:t>The cloud answer is horizontal: many small identical instances behind a load balancer, added and removed as demand moves.</a:t>
             </a:r>
           </a:p>
         </p:txBody>
@@ -3275,7 +3275,7 @@
         </p:nvSpPr>
         <p:spPr>
           <a:xfrm>
-            <a:off x="548640" y="1931669"/>
+            <a:off x="548640" y="1986533"/>
             <a:ext cx="5394960" cy="274320"/>
           </a:xfrm>
           <a:prstGeom prst="rect">
@@ -3290,12 +3290,12 @@
           <a:lstStyle/>
           <a:p>
             <a:r>
-              <a:rPr sz="1150" b="0">
-                <a:solidFill>
-                  <a:srgbClr val="1E1B4B"/>
+              <a:rPr sz="1500" b="1">
+                <a:solidFill>
+                  <a:srgbClr val="4F46E5"/>
                 </a:solidFill>
               </a:rPr>
-              <a:t>The usual escape routes both cost real money: pay year-round for capacity you need twice a year, or rebuild on a platform that takes 3% of every sale forever.</a:t>
+              <a:t>What That Requires of the Application</a:t>
             </a:r>
           </a:p>
         </p:txBody>
@@ -3308,7 +3308,7 @@
         </p:nvSpPr>
         <p:spPr>
           <a:xfrm>
-            <a:off x="548640" y="2256852"/>
+            <a:off x="548640" y="2271140"/>
             <a:ext cx="5394960" cy="274320"/>
           </a:xfrm>
           <a:prstGeom prst="rect">
@@ -3323,12 +3323,12 @@
           <a:lstStyle/>
           <a:p>
             <a:r>
-              <a:rPr sz="1500" b="1">
-                <a:solidFill>
-                  <a:srgbClr val="4F46E5"/>
+              <a:rPr sz="1150" b="0">
+                <a:solidFill>
+                  <a:srgbClr val="1E1B4B"/>
                 </a:solidFill>
               </a:rPr>
-              <a:t>Ideal Customer Profile</a:t>
+              <a:t>Horizontal scaling is not a deployment trick — it constrains how the app is written. Three properties had to hold:</a:t>
             </a:r>
           </a:p>
         </p:txBody>
@@ -3343,1555 +3343,7 @@
         </p:nvGraphicFramePr>
         <p:xfrm>
           <a:off x="548640" y="2578035"/>
-          <a:ext cx="5394960" cy="1426464"/>
-        </p:xfrm>
-        <a:graphic>
-          <a:graphicData uri="http://schemas.openxmlformats.org/drawingml/2006/table">
-            <a:tbl>
-              <a:tblPr firstRow="1" bandRow="1">
-                <a:tableStyleId>{5C22544A-7EE6-4342-B048-85BDC9FD1C3A}</a:tableStyleId>
-              </a:tblPr>
-              <a:tblGrid>
-                <a:gridCol w="2697480"/>
-                <a:gridCol w="2697480"/>
-              </a:tblGrid>
-              <a:tr h="237744">
-                <a:tc>
-                  <a:txBody>
-                    <a:bodyPr/>
-                    <a:lstStyle/>
-                    <a:p>
-                      <a:pPr>
-                        <a:defRPr sz="1000" b="1">
-                          <a:solidFill>
-                            <a:srgbClr val="1E1B4B"/>
-                          </a:solidFill>
-                        </a:defRPr>
-                      </a:pPr>
-                    </a:p>
-                  </a:txBody>
-                  <a:tcPr>
-                    <a:solidFill>
-                      <a:srgbClr val="EEF2FF"/>
-                    </a:solidFill>
-                  </a:tcPr>
-                </a:tc>
-                <a:tc>
-                  <a:txBody>
-                    <a:bodyPr/>
-                    <a:lstStyle/>
-                    <a:p>
-                      <a:pPr>
-                        <a:defRPr sz="1000" b="1">
-                          <a:solidFill>
-                            <a:srgbClr val="1E1B4B"/>
-                          </a:solidFill>
-                        </a:defRPr>
-                      </a:pPr>
-                    </a:p>
-                  </a:txBody>
-                  <a:tcPr>
-                    <a:solidFill>
-                      <a:srgbClr val="EEF2FF"/>
-                    </a:solidFill>
-                  </a:tcPr>
-                </a:tc>
-              </a:tr>
-              <a:tr h="237744">
-                <a:tc>
-                  <a:txBody>
-                    <a:bodyPr/>
-                    <a:lstStyle/>
-                    <a:p>
-                      <a:pPr>
-                        <a:defRPr sz="950">
-                          <a:solidFill>
-                            <a:srgbClr val="1E1B4B"/>
-                          </a:solidFill>
-                        </a:defRPr>
-                      </a:pPr>
-                      <a:r>
-                        <a:t>Who</a:t>
-                      </a:r>
-                    </a:p>
-                  </a:txBody>
-                  <a:tcPr>
-                    <a:solidFill>
-                      <a:srgbClr val="FFFFFF"/>
-                    </a:solidFill>
-                  </a:tcPr>
-                </a:tc>
-                <a:tc>
-                  <a:txBody>
-                    <a:bodyPr/>
-                    <a:lstStyle/>
-                    <a:p>
-                      <a:pPr>
-                        <a:defRPr sz="950">
-                          <a:solidFill>
-                            <a:srgbClr val="1E1B4B"/>
-                          </a:solidFill>
-                        </a:defRPr>
-                      </a:pPr>
-                      <a:r>
-                        <a:t>Independent sellers — 10 to 500 SKUs, 1–3 person team</a:t>
-                      </a:r>
-                    </a:p>
-                  </a:txBody>
-                  <a:tcPr>
-                    <a:solidFill>
-                      <a:srgbClr val="FFFFFF"/>
-                    </a:solidFill>
-                  </a:tcPr>
-                </a:tc>
-              </a:tr>
-              <a:tr h="237744">
-                <a:tc>
-                  <a:txBody>
-                    <a:bodyPr/>
-                    <a:lstStyle/>
-                    <a:p>
-                      <a:pPr>
-                        <a:defRPr sz="950">
-                          <a:solidFill>
-                            <a:srgbClr val="1E1B4B"/>
-                          </a:solidFill>
-                        </a:defRPr>
-                      </a:pPr>
-                      <a:r>
-                        <a:t>Revenue</a:t>
-                      </a:r>
-                    </a:p>
-                  </a:txBody>
-                  <a:tcPr>
-                    <a:solidFill>
-                      <a:srgbClr val="FFFFFF"/>
-                    </a:solidFill>
-                  </a:tcPr>
-                </a:tc>
-                <a:tc>
-                  <a:txBody>
-                    <a:bodyPr/>
-                    <a:lstStyle/>
-                    <a:p>
-                      <a:pPr>
-                        <a:defRPr sz="950">
-                          <a:solidFill>
-                            <a:srgbClr val="1E1B4B"/>
-                          </a:solidFill>
-                        </a:defRPr>
-                      </a:pPr>
-                      <a:r>
-                        <a:t>$50K–$2M annually</a:t>
-                      </a:r>
-                    </a:p>
-                  </a:txBody>
-                  <a:tcPr>
-                    <a:solidFill>
-                      <a:srgbClr val="FFFFFF"/>
-                    </a:solidFill>
-                  </a:tcPr>
-                </a:tc>
-              </a:tr>
-              <a:tr h="237744">
-                <a:tc>
-                  <a:txBody>
-                    <a:bodyPr/>
-                    <a:lstStyle/>
-                    <a:p>
-                      <a:pPr>
-                        <a:defRPr sz="950">
-                          <a:solidFill>
-                            <a:srgbClr val="1E1B4B"/>
-                          </a:solidFill>
-                        </a:defRPr>
-                      </a:pPr>
-                      <a:r>
-                        <a:t>Traffic</a:t>
-                      </a:r>
-                    </a:p>
-                  </a:txBody>
-                  <a:tcPr>
-                    <a:solidFill>
-                      <a:srgbClr val="FFFFFF"/>
-                    </a:solidFill>
-                  </a:tcPr>
-                </a:tc>
-                <a:tc>
-                  <a:txBody>
-                    <a:bodyPr/>
-                    <a:lstStyle/>
-                    <a:p>
-                      <a:pPr>
-                        <a:defRPr sz="950">
-                          <a:solidFill>
-                            <a:srgbClr val="1E1B4B"/>
-                          </a:solidFill>
-                        </a:defRPr>
-                      </a:pPr>
-                      <a:r>
-                        <a:t>Spiky: quiet baseline, sharp promotional peaks</a:t>
-                      </a:r>
-                    </a:p>
-                  </a:txBody>
-                  <a:tcPr>
-                    <a:solidFill>
-                      <a:srgbClr val="FFFFFF"/>
-                    </a:solidFill>
-                  </a:tcPr>
-                </a:tc>
-              </a:tr>
-              <a:tr h="237744">
-                <a:tc>
-                  <a:txBody>
-                    <a:bodyPr/>
-                    <a:lstStyle/>
-                    <a:p>
-                      <a:pPr>
-                        <a:defRPr sz="950">
-                          <a:solidFill>
-                            <a:srgbClr val="1E1B4B"/>
-                          </a:solidFill>
-                        </a:defRPr>
-                      </a:pPr>
-                      <a:r>
-                        <a:t>Pain</a:t>
-                      </a:r>
-                    </a:p>
-                  </a:txBody>
-                  <a:tcPr>
-                    <a:solidFill>
-                      <a:srgbClr val="FFFFFF"/>
-                    </a:solidFill>
-                  </a:tcPr>
-                </a:tc>
-                <a:tc>
-                  <a:txBody>
-                    <a:bodyPr/>
-                    <a:lstStyle/>
-                    <a:p>
-                      <a:pPr>
-                        <a:defRPr sz="950">
-                          <a:solidFill>
-                            <a:srgbClr val="1E1B4B"/>
-                          </a:solidFill>
-                        </a:defRPr>
-                      </a:pPr>
-                      <a:r>
-                        <a:t>Downtime during peaks; margin lost to platform fees</a:t>
-                      </a:r>
-                    </a:p>
-                  </a:txBody>
-                  <a:tcPr>
-                    <a:solidFill>
-                      <a:srgbClr val="FFFFFF"/>
-                    </a:solidFill>
-                  </a:tcPr>
-                </a:tc>
-              </a:tr>
-              <a:tr h="237744">
-                <a:tc>
-                  <a:txBody>
-                    <a:bodyPr/>
-                    <a:lstStyle/>
-                    <a:p>
-                      <a:pPr>
-                        <a:defRPr sz="950">
-                          <a:solidFill>
-                            <a:srgbClr val="1E1B4B"/>
-                          </a:solidFill>
-                        </a:defRPr>
-                      </a:pPr>
-                      <a:r>
-                        <a:t>Technical depth</a:t>
-                      </a:r>
-                    </a:p>
-                  </a:txBody>
-                  <a:tcPr>
-                    <a:solidFill>
-                      <a:srgbClr val="FFFFFF"/>
-                    </a:solidFill>
-                  </a:tcPr>
-                </a:tc>
-                <a:tc>
-                  <a:txBody>
-                    <a:bodyPr/>
-                    <a:lstStyle/>
-                    <a:p>
-                      <a:pPr>
-                        <a:defRPr sz="950">
-                          <a:solidFill>
-                            <a:srgbClr val="1E1B4B"/>
-                          </a:solidFill>
-                        </a:defRPr>
-                      </a:pPr>
-                      <a:r>
-                        <a:t>Comfortable deploying, no dedicated DevOps staff</a:t>
-                      </a:r>
-                    </a:p>
-                  </a:txBody>
-                  <a:tcPr>
-                    <a:solidFill>
-                      <a:srgbClr val="FFFFFF"/>
-                    </a:solidFill>
-                  </a:tcPr>
-                </a:tc>
-              </a:tr>
-            </a:tbl>
-          </a:graphicData>
-        </a:graphic>
-      </p:graphicFrame>
-      <p:sp>
-        <p:nvSpPr>
-          <p:cNvPr id="10" name="TextBox 9"/>
-          <p:cNvSpPr txBox="1"/>
-          <p:nvPr/>
-        </p:nvSpPr>
-        <p:spPr>
-          <a:xfrm>
-            <a:off x="548640" y="4187379"/>
-            <a:ext cx="5394960" cy="274320"/>
-          </a:xfrm>
-          <a:prstGeom prst="rect">
-            <a:avLst/>
-          </a:prstGeom>
-          <a:noFill/>
-        </p:spPr>
-        <p:txBody>
-          <a:bodyPr wrap="square">
-            <a:spAutoFit/>
-          </a:bodyPr>
-          <a:lstStyle/>
-          <a:p>
-            <a:r>
-              <a:rPr sz="1500" b="1">
-                <a:solidFill>
-                  <a:srgbClr val="4F46E5"/>
-                </a:solidFill>
-              </a:rPr>
-              <a:t>Value Proposition</a:t>
-            </a:r>
-          </a:p>
-        </p:txBody>
-      </p:sp>
-      <p:sp>
-        <p:nvSpPr>
-          <p:cNvPr id="11" name="TextBox 10"/>
-          <p:cNvSpPr txBox="1"/>
-          <p:nvPr/>
-        </p:nvSpPr>
-        <p:spPr>
-          <a:xfrm>
-            <a:off x="548640" y="4471986"/>
-            <a:ext cx="5394960" cy="274320"/>
-          </a:xfrm>
-          <a:prstGeom prst="rect">
-            <a:avLst/>
-          </a:prstGeom>
-          <a:noFill/>
-        </p:spPr>
-        <p:txBody>
-          <a:bodyPr wrap="square">
-            <a:spAutoFit/>
-          </a:bodyPr>
-          <a:lstStyle/>
-          <a:p>
-            <a:r>
-              <a:rPr sz="1150" b="0">
-                <a:solidFill>
-                  <a:srgbClr val="1E1B4B"/>
-                </a:solidFill>
-              </a:rPr>
-              <a:t>Capacity that follows demand, on infrastructure you own.</a:t>
-            </a:r>
-          </a:p>
-        </p:txBody>
-      </p:sp>
-      <p:sp>
-        <p:nvSpPr>
-          <p:cNvPr id="12" name="TextBox 11"/>
-          <p:cNvSpPr txBox="1"/>
-          <p:nvPr/>
-        </p:nvSpPr>
-        <p:spPr>
-          <a:xfrm>
-            <a:off x="548640" y="4742305"/>
-            <a:ext cx="5394960" cy="274320"/>
-          </a:xfrm>
-          <a:prstGeom prst="rect">
-            <a:avLst/>
-          </a:prstGeom>
-          <a:noFill/>
-        </p:spPr>
-        <p:txBody>
-          <a:bodyPr wrap="square">
-            <a:spAutoFit/>
-          </a:bodyPr>
-          <a:lstStyle/>
-          <a:p>
-            <a:r>
-              <a:rPr sz="1100" b="0">
-                <a:solidFill>
-                  <a:srgbClr val="1E1B4B"/>
-                </a:solidFill>
-              </a:rPr>
-              <a:t>•  Scales horizontally under load — add an instance and it serves traffic within 5 seconds, no restart, no config change</a:t>
-            </a:r>
-          </a:p>
-        </p:txBody>
-      </p:sp>
-      <p:sp>
-        <p:nvSpPr>
-          <p:cNvPr id="13" name="TextBox 12"/>
-          <p:cNvSpPr txBox="1"/>
-          <p:nvPr/>
-        </p:nvSpPr>
-        <p:spPr>
-          <a:xfrm>
-            <a:off x="548640" y="4958332"/>
-            <a:ext cx="5394960" cy="274320"/>
-          </a:xfrm>
-          <a:prstGeom prst="rect">
-            <a:avLst/>
-          </a:prstGeom>
-          <a:noFill/>
-        </p:spPr>
-        <p:txBody>
-          <a:bodyPr wrap="square">
-            <a:spAutoFit/>
-          </a:bodyPr>
-          <a:lstStyle/>
-          <a:p>
-            <a:r>
-              <a:rPr sz="1100" b="0">
-                <a:solidFill>
-                  <a:srgbClr val="1E1B4B"/>
-                </a:solidFill>
-              </a:rPr>
-              <a:t>•  Degrades gracefully — a failed instance leaves rotation automatically; the storefront stays up</a:t>
-            </a:r>
-          </a:p>
-        </p:txBody>
-      </p:sp>
-      <p:sp>
-        <p:nvSpPr>
-          <p:cNvPr id="14" name="TextBox 13"/>
-          <p:cNvSpPr txBox="1"/>
-          <p:nvPr/>
-        </p:nvSpPr>
-        <p:spPr>
-          <a:xfrm>
-            <a:off x="548640" y="5174359"/>
-            <a:ext cx="5394960" cy="274320"/>
-          </a:xfrm>
-          <a:prstGeom prst="rect">
-            <a:avLst/>
-          </a:prstGeom>
-          <a:noFill/>
-        </p:spPr>
-        <p:txBody>
-          <a:bodyPr wrap="square">
-            <a:spAutoFit/>
-          </a:bodyPr>
-          <a:lstStyle/>
-          <a:p>
-            <a:r>
-              <a:rPr sz="1100" b="0">
-                <a:solidFill>
-                  <a:srgbClr val="1E1B4B"/>
-                </a:solidFill>
-              </a:rPr>
-              <a:t>•  Owned, not rented — runs on any host; no per-transaction fee</a:t>
-            </a:r>
-          </a:p>
-        </p:txBody>
-      </p:sp>
-      <p:sp>
-        <p:nvSpPr>
-          <p:cNvPr id="15" name="TextBox 14"/>
-          <p:cNvSpPr txBox="1"/>
-          <p:nvPr/>
-        </p:nvSpPr>
-        <p:spPr>
-          <a:xfrm>
-            <a:off x="548640" y="5390386"/>
-            <a:ext cx="5394960" cy="274320"/>
-          </a:xfrm>
-          <a:prstGeom prst="rect">
-            <a:avLst/>
-          </a:prstGeom>
-          <a:noFill/>
-        </p:spPr>
-        <p:txBody>
-          <a:bodyPr wrap="square">
-            <a:spAutoFit/>
-          </a:bodyPr>
-          <a:lstStyle/>
-          <a:p>
-            <a:r>
-              <a:rPr sz="1100" b="0">
-                <a:solidFill>
-                  <a:srgbClr val="1E1B4B"/>
-                </a:solidFill>
-              </a:rPr>
-              <a:t>•  Complete out of the box — catalog, reviews, cart, checkout, orders, returns, and an admin back office</a:t>
-            </a:r>
-          </a:p>
-        </p:txBody>
-      </p:sp>
-      <p:sp>
-        <p:nvSpPr>
-          <p:cNvPr id="16" name="TextBox 15"/>
-          <p:cNvSpPr txBox="1"/>
-          <p:nvPr/>
-        </p:nvSpPr>
-        <p:spPr>
-          <a:xfrm>
-            <a:off x="548640" y="6446520"/>
-            <a:ext cx="6400800" cy="274320"/>
-          </a:xfrm>
-          <a:prstGeom prst="rect">
-            <a:avLst/>
-          </a:prstGeom>
-          <a:noFill/>
-        </p:spPr>
-        <p:txBody>
-          <a:bodyPr wrap="square">
-            <a:spAutoFit/>
-          </a:bodyPr>
-          <a:lstStyle/>
-          <a:p>
-            <a:r>
-              <a:rPr sz="900" b="0">
-                <a:solidFill>
-                  <a:srgbClr val="8890A8"/>
-                </a:solidFill>
-              </a:rPr>
-              <a:t>Flask E-Commerce — Cloud Computing (UCBX)</a:t>
-            </a:r>
-          </a:p>
-        </p:txBody>
-      </p:sp>
-      <p:sp>
-        <p:nvSpPr>
-          <p:cNvPr id="17" name="TextBox 16"/>
-          <p:cNvSpPr txBox="1"/>
-          <p:nvPr/>
-        </p:nvSpPr>
-        <p:spPr>
-          <a:xfrm>
-            <a:off x="11155680" y="6446520"/>
-            <a:ext cx="548640" cy="274320"/>
-          </a:xfrm>
-          <a:prstGeom prst="rect">
-            <a:avLst/>
-          </a:prstGeom>
-          <a:noFill/>
-        </p:spPr>
-        <p:txBody>
-          <a:bodyPr wrap="square">
-            <a:spAutoFit/>
-          </a:bodyPr>
-          <a:lstStyle/>
-          <a:p>
-            <a:r>
-              <a:rPr sz="900" b="0">
-                <a:solidFill>
-                  <a:srgbClr val="8890A8"/>
-                </a:solidFill>
-              </a:rPr>
-              <a:t>1 / 5</a:t>
-            </a:r>
-          </a:p>
-        </p:txBody>
-      </p:sp>
-    </p:spTree>
-  </p:cSld>
-  <p:clrMapOvr>
-    <a:masterClrMapping/>
-  </p:clrMapOvr>
-</p:sld>
-</file>
-
-<file path=ppt/slides/slide2.xml><?xml version="1.0" encoding="utf-8"?>
-<p:sld xmlns:a="http://schemas.openxmlformats.org/drawingml/2006/main" xmlns:p="http://schemas.openxmlformats.org/presentationml/2006/main" xmlns:r="http://schemas.openxmlformats.org/officeDocument/2006/relationships">
-  <p:cSld>
-    <p:spTree>
-      <p:nvGrpSpPr>
-        <p:cNvPr id="1" name=""/>
-        <p:cNvGrpSpPr/>
-        <p:nvPr/>
-      </p:nvGrpSpPr>
-      <p:grpSpPr/>
-      <p:sp>
-        <p:nvSpPr>
-          <p:cNvPr id="2" name="Rectangle 1"/>
-          <p:cNvSpPr/>
-          <p:nvPr/>
-        </p:nvSpPr>
-        <p:spPr>
-          <a:xfrm>
-            <a:off x="0" y="0"/>
-            <a:ext cx="12191695" cy="82296"/>
-          </a:xfrm>
-          <a:prstGeom prst="rect">
-            <a:avLst/>
-          </a:prstGeom>
-          <a:solidFill>
-            <a:srgbClr val="4F46E5"/>
-          </a:solidFill>
-          <a:ln>
-            <a:noFill/>
-          </a:ln>
-        </p:spPr>
-        <p:style>
-          <a:lnRef idx="1">
-            <a:schemeClr val="accent1"/>
-          </a:lnRef>
-          <a:fillRef idx="3">
-            <a:schemeClr val="accent1"/>
-          </a:fillRef>
-          <a:effectRef idx="2">
-            <a:schemeClr val="accent1"/>
-          </a:effectRef>
-          <a:fontRef idx="minor">
-            <a:schemeClr val="lt1"/>
-          </a:fontRef>
-        </p:style>
-        <p:txBody>
-          <a:bodyPr rtlCol="0" anchor="ctr"/>
-          <a:lstStyle/>
-          <a:p>
-            <a:pPr algn="ctr"/>
-          </a:p>
-        </p:txBody>
-      </p:sp>
-      <p:sp>
-        <p:nvSpPr>
-          <p:cNvPr id="3" name="TextBox 2"/>
-          <p:cNvSpPr txBox="1"/>
-          <p:nvPr/>
-        </p:nvSpPr>
-        <p:spPr>
-          <a:xfrm>
-            <a:off x="548640" y="274320"/>
-            <a:ext cx="11064240" cy="274320"/>
-          </a:xfrm>
-          <a:prstGeom prst="rect">
-            <a:avLst/>
-          </a:prstGeom>
-          <a:noFill/>
-        </p:spPr>
-        <p:txBody>
-          <a:bodyPr wrap="square">
-            <a:spAutoFit/>
-          </a:bodyPr>
-          <a:lstStyle/>
-          <a:p>
-            <a:r>
-              <a:rPr sz="2600" b="1">
-                <a:solidFill>
-                  <a:srgbClr val="1E1B4B"/>
-                </a:solidFill>
-              </a:rPr>
-              <a:t>Slide 2 — Methods and Features</a:t>
-            </a:r>
-          </a:p>
-        </p:txBody>
-      </p:sp>
-      <p:sp>
-        <p:nvSpPr>
-          <p:cNvPr id="4" name="TextBox 3"/>
-          <p:cNvSpPr txBox="1"/>
-          <p:nvPr/>
-        </p:nvSpPr>
-        <p:spPr>
-          <a:xfrm>
-            <a:off x="548640" y="1106424"/>
-            <a:ext cx="5394960" cy="274320"/>
-          </a:xfrm>
-          <a:prstGeom prst="rect">
-            <a:avLst/>
-          </a:prstGeom>
-          <a:noFill/>
-        </p:spPr>
-        <p:txBody>
-          <a:bodyPr wrap="square">
-            <a:spAutoFit/>
-          </a:bodyPr>
-          <a:lstStyle/>
-          <a:p>
-            <a:r>
-              <a:rPr sz="1500" b="1">
-                <a:solidFill>
-                  <a:srgbClr val="4F46E5"/>
-                </a:solidFill>
-              </a:rPr>
-              <a:t>How It Was Built</a:t>
-            </a:r>
-          </a:p>
-        </p:txBody>
-      </p:sp>
-      <p:sp>
-        <p:nvSpPr>
-          <p:cNvPr id="5" name="TextBox 4"/>
-          <p:cNvSpPr txBox="1"/>
-          <p:nvPr/>
-        </p:nvSpPr>
-        <p:spPr>
-          <a:xfrm>
-            <a:off x="548640" y="1391031"/>
-            <a:ext cx="5394960" cy="274320"/>
-          </a:xfrm>
-          <a:prstGeom prst="rect">
-            <a:avLst/>
-          </a:prstGeom>
-          <a:noFill/>
-        </p:spPr>
-        <p:txBody>
-          <a:bodyPr wrap="square">
-            <a:spAutoFit/>
-          </a:bodyPr>
-          <a:lstStyle/>
-          <a:p>
-            <a:r>
-              <a:rPr sz="1150" b="0">
-                <a:solidFill>
-                  <a:srgbClr val="1E1B4B"/>
-                </a:solidFill>
-              </a:rPr>
-              <a:t>Approach: server-rendered Flask, built in five phases over ~5 months — scaffold, foundation, storefront, depth, cloud. CI enforced from phase 2: every push runs the test suite and a Docker build.</a:t>
-            </a:r>
-          </a:p>
-        </p:txBody>
-      </p:sp>
-      <p:sp>
-        <p:nvSpPr>
-          <p:cNvPr id="6" name="TextBox 5"/>
-          <p:cNvSpPr txBox="1"/>
-          <p:nvPr/>
-        </p:nvSpPr>
-        <p:spPr>
-          <a:xfrm>
-            <a:off x="548640" y="1661350"/>
-            <a:ext cx="5394960" cy="274320"/>
-          </a:xfrm>
-          <a:prstGeom prst="rect">
-            <a:avLst/>
-          </a:prstGeom>
-          <a:noFill/>
-        </p:spPr>
-        <p:txBody>
-          <a:bodyPr wrap="square">
-            <a:spAutoFit/>
-          </a:bodyPr>
-          <a:lstStyle/>
-          <a:p>
-            <a:r>
-              <a:rPr sz="1150" b="0">
-                <a:solidFill>
-                  <a:srgbClr val="1E1B4B"/>
-                </a:solidFill>
-              </a:rPr>
-              <a:t>Why server-rendered rather than a SPA: every page load is a real HTTP request, so routing through the load balancer to a specific instance is directly observable — the property the project exists to demonstrate.</a:t>
-            </a:r>
-          </a:p>
-        </p:txBody>
-      </p:sp>
-      <p:sp>
-        <p:nvSpPr>
-          <p:cNvPr id="7" name="TextBox 6"/>
-          <p:cNvSpPr txBox="1"/>
-          <p:nvPr/>
-        </p:nvSpPr>
-        <p:spPr>
-          <a:xfrm>
-            <a:off x="548640" y="1931669"/>
-            <a:ext cx="5394960" cy="274320"/>
-          </a:xfrm>
-          <a:prstGeom prst="rect">
-            <a:avLst/>
-          </a:prstGeom>
-          <a:noFill/>
-        </p:spPr>
-        <p:txBody>
-          <a:bodyPr wrap="square">
-            <a:spAutoFit/>
-          </a:bodyPr>
-          <a:lstStyle/>
-          <a:p>
-            <a:r>
-              <a:rPr sz="1150" b="0">
-                <a:solidFill>
-                  <a:srgbClr val="1E1B4B"/>
-                </a:solidFill>
-              </a:rPr>
-              <a:t>Stack: Python 3.12 · Flask 3.x · SQLAlchemy · Flask-Login · Jinja2 · pytest · Docker · GitHub Actions</a:t>
-            </a:r>
-          </a:p>
-        </p:txBody>
-      </p:sp>
-      <p:sp>
-        <p:nvSpPr>
-          <p:cNvPr id="8" name="TextBox 7"/>
-          <p:cNvSpPr txBox="1"/>
-          <p:nvPr/>
-        </p:nvSpPr>
-        <p:spPr>
-          <a:xfrm>
-            <a:off x="548640" y="2256852"/>
-            <a:ext cx="5394960" cy="274320"/>
-          </a:xfrm>
-          <a:prstGeom prst="rect">
-            <a:avLst/>
-          </a:prstGeom>
-          <a:noFill/>
-        </p:spPr>
-        <p:txBody>
-          <a:bodyPr wrap="square">
-            <a:spAutoFit/>
-          </a:bodyPr>
-          <a:lstStyle/>
-          <a:p>
-            <a:r>
-              <a:rPr sz="1500" b="1">
-                <a:solidFill>
-                  <a:srgbClr val="4F46E5"/>
-                </a:solidFill>
-              </a:rPr>
-              <a:t>What It Does</a:t>
-            </a:r>
-          </a:p>
-        </p:txBody>
-      </p:sp>
-      <p:graphicFrame>
-        <p:nvGraphicFramePr>
-          <p:cNvPr id="9" name="Table 8"/>
-          <p:cNvGraphicFramePr>
-            <a:graphicFrameLocks noGrp="1"/>
-          </p:cNvGraphicFramePr>
-          <p:nvPr/>
-        </p:nvGraphicFramePr>
-        <p:xfrm>
-          <a:off x="548640" y="2578035"/>
-          <a:ext cx="5394960" cy="2139696"/>
-        </p:xfrm>
-        <a:graphic>
-          <a:graphicData uri="http://schemas.openxmlformats.org/drawingml/2006/table">
-            <a:tbl>
-              <a:tblPr firstRow="1" bandRow="1">
-                <a:tableStyleId>{5C22544A-7EE6-4342-B048-85BDC9FD1C3A}</a:tableStyleId>
-              </a:tblPr>
-              <a:tblGrid>
-                <a:gridCol w="2697480"/>
-                <a:gridCol w="2697480"/>
-              </a:tblGrid>
-              <a:tr h="237744">
-                <a:tc>
-                  <a:txBody>
-                    <a:bodyPr/>
-                    <a:lstStyle/>
-                    <a:p>
-                      <a:pPr>
-                        <a:defRPr sz="1000" b="1">
-                          <a:solidFill>
-                            <a:srgbClr val="1E1B4B"/>
-                          </a:solidFill>
-                        </a:defRPr>
-                      </a:pPr>
-                      <a:r>
-                        <a:t>Area</a:t>
-                      </a:r>
-                    </a:p>
-                  </a:txBody>
-                  <a:tcPr>
-                    <a:solidFill>
-                      <a:srgbClr val="EEF2FF"/>
-                    </a:solidFill>
-                  </a:tcPr>
-                </a:tc>
-                <a:tc>
-                  <a:txBody>
-                    <a:bodyPr/>
-                    <a:lstStyle/>
-                    <a:p>
-                      <a:pPr>
-                        <a:defRPr sz="1000" b="1">
-                          <a:solidFill>
-                            <a:srgbClr val="1E1B4B"/>
-                          </a:solidFill>
-                        </a:defRPr>
-                      </a:pPr>
-                      <a:r>
-                        <a:t>Capability</a:t>
-                      </a:r>
-                    </a:p>
-                  </a:txBody>
-                  <a:tcPr>
-                    <a:solidFill>
-                      <a:srgbClr val="EEF2FF"/>
-                    </a:solidFill>
-                  </a:tcPr>
-                </a:tc>
-              </a:tr>
-              <a:tr h="237744">
-                <a:tc>
-                  <a:txBody>
-                    <a:bodyPr/>
-                    <a:lstStyle/>
-                    <a:p>
-                      <a:pPr>
-                        <a:defRPr sz="950">
-                          <a:solidFill>
-                            <a:srgbClr val="1E1B4B"/>
-                          </a:solidFill>
-                        </a:defRPr>
-                      </a:pPr>
-                      <a:r>
-                        <a:t>Accounts</a:t>
-                      </a:r>
-                    </a:p>
-                  </a:txBody>
-                  <a:tcPr>
-                    <a:solidFill>
-                      <a:srgbClr val="FFFFFF"/>
-                    </a:solidFill>
-                  </a:tcPr>
-                </a:tc>
-                <a:tc>
-                  <a:txBody>
-                    <a:bodyPr/>
-                    <a:lstStyle/>
-                    <a:p>
-                      <a:pPr>
-                        <a:defRPr sz="950">
-                          <a:solidFill>
-                            <a:srgbClr val="1E1B4B"/>
-                          </a:solidFill>
-                        </a:defRPr>
-                      </a:pPr>
-                      <a:r>
-                        <a:t>Registration, login, signed single-use password reset</a:t>
-                      </a:r>
-                    </a:p>
-                  </a:txBody>
-                  <a:tcPr>
-                    <a:solidFill>
-                      <a:srgbClr val="FFFFFF"/>
-                    </a:solidFill>
-                  </a:tcPr>
-                </a:tc>
-              </a:tr>
-              <a:tr h="237744">
-                <a:tc>
-                  <a:txBody>
-                    <a:bodyPr/>
-                    <a:lstStyle/>
-                    <a:p>
-                      <a:pPr>
-                        <a:defRPr sz="950">
-                          <a:solidFill>
-                            <a:srgbClr val="1E1B4B"/>
-                          </a:solidFill>
-                        </a:defRPr>
-                      </a:pPr>
-                      <a:r>
-                        <a:t>Catalog</a:t>
-                      </a:r>
-                    </a:p>
-                  </a:txBody>
-                  <a:tcPr>
-                    <a:solidFill>
-                      <a:srgbClr val="FFFFFF"/>
-                    </a:solidFill>
-                  </a:tcPr>
-                </a:tc>
-                <a:tc>
-                  <a:txBody>
-                    <a:bodyPr/>
-                    <a:lstStyle/>
-                    <a:p>
-                      <a:pPr>
-                        <a:defRPr sz="950">
-                          <a:solidFill>
-                            <a:srgbClr val="1E1B4B"/>
-                          </a:solidFill>
-                        </a:defRPr>
-                      </a:pPr>
-                      <a:r>
-                        <a:t>Products, images, many-to-many tag filtering, JSON API</a:t>
-                      </a:r>
-                    </a:p>
-                  </a:txBody>
-                  <a:tcPr>
-                    <a:solidFill>
-                      <a:srgbClr val="FFFFFF"/>
-                    </a:solidFill>
-                  </a:tcPr>
-                </a:tc>
-              </a:tr>
-              <a:tr h="237744">
-                <a:tc>
-                  <a:txBody>
-                    <a:bodyPr/>
-                    <a:lstStyle/>
-                    <a:p>
-                      <a:pPr>
-                        <a:defRPr sz="950">
-                          <a:solidFill>
-                            <a:srgbClr val="1E1B4B"/>
-                          </a:solidFill>
-                        </a:defRPr>
-                      </a:pPr>
-                      <a:r>
-                        <a:t>Reviews</a:t>
-                      </a:r>
-                    </a:p>
-                  </a:txBody>
-                  <a:tcPr>
-                    <a:solidFill>
-                      <a:srgbClr val="FFFFFF"/>
-                    </a:solidFill>
-                  </a:tcPr>
-                </a:tc>
-                <a:tc>
-                  <a:txBody>
-                    <a:bodyPr/>
-                    <a:lstStyle/>
-                    <a:p>
-                      <a:pPr>
-                        <a:defRPr sz="950">
-                          <a:solidFill>
-                            <a:srgbClr val="1E1B4B"/>
-                          </a:solidFill>
-                        </a:defRPr>
-                      </a:pPr>
-                      <a:r>
-                        <a:t>1–5 star ratings, one per user per product, editable</a:t>
-                      </a:r>
-                    </a:p>
-                  </a:txBody>
-                  <a:tcPr>
-                    <a:solidFill>
-                      <a:srgbClr val="FFFFFF"/>
-                    </a:solidFill>
-                  </a:tcPr>
-                </a:tc>
-              </a:tr>
-              <a:tr h="237744">
-                <a:tc>
-                  <a:txBody>
-                    <a:bodyPr/>
-                    <a:lstStyle/>
-                    <a:p>
-                      <a:pPr>
-                        <a:defRPr sz="950">
-                          <a:solidFill>
-                            <a:srgbClr val="1E1B4B"/>
-                          </a:solidFill>
-                        </a:defRPr>
-                      </a:pPr>
-                      <a:r>
-                        <a:t>Cart</a:t>
-                      </a:r>
-                    </a:p>
-                  </a:txBody>
-                  <a:tcPr>
-                    <a:solidFill>
-                      <a:srgbClr val="FFFFFF"/>
-                    </a:solidFill>
-                  </a:tcPr>
-                </a:tc>
-                <a:tc>
-                  <a:txBody>
-                    <a:bodyPr/>
-                    <a:lstStyle/>
-                    <a:p>
-                      <a:pPr>
-                        <a:defRPr sz="950">
-                          <a:solidFill>
-                            <a:srgbClr val="1E1B4B"/>
-                          </a:solidFill>
-                        </a:defRPr>
-                      </a:pPr>
-                      <a:r>
-                        <a:t>Session-backed, live badge, quantity updates</a:t>
-                      </a:r>
-                    </a:p>
-                  </a:txBody>
-                  <a:tcPr>
-                    <a:solidFill>
-                      <a:srgbClr val="FFFFFF"/>
-                    </a:solidFill>
-                  </a:tcPr>
-                </a:tc>
-              </a:tr>
-              <a:tr h="237744">
-                <a:tc>
-                  <a:txBody>
-                    <a:bodyPr/>
-                    <a:lstStyle/>
-                    <a:p>
-                      <a:pPr>
-                        <a:defRPr sz="950">
-                          <a:solidFill>
-                            <a:srgbClr val="1E1B4B"/>
-                          </a:solidFill>
-                        </a:defRPr>
-                      </a:pPr>
-                      <a:r>
-                        <a:t>Checkout</a:t>
-                      </a:r>
-                    </a:p>
-                  </a:txBody>
-                  <a:tcPr>
-                    <a:solidFill>
-                      <a:srgbClr val="FFFFFF"/>
-                    </a:solidFill>
-                  </a:tcPr>
-                </a:tc>
-                <a:tc>
-                  <a:txBody>
-                    <a:bodyPr/>
-                    <a:lstStyle/>
-                    <a:p>
-                      <a:pPr>
-                        <a:defRPr sz="950">
-                          <a:solidFill>
-                            <a:srgbClr val="1E1B4B"/>
-                          </a:solidFill>
-                        </a:defRPr>
-                      </a:pPr>
-                      <a:r>
-                        <a:t>Address + mock payment — no card data stored</a:t>
-                      </a:r>
-                    </a:p>
-                  </a:txBody>
-                  <a:tcPr>
-                    <a:solidFill>
-                      <a:srgbClr val="FFFFFF"/>
-                    </a:solidFill>
-                  </a:tcPr>
-                </a:tc>
-              </a:tr>
-              <a:tr h="237744">
-                <a:tc>
-                  <a:txBody>
-                    <a:bodyPr/>
-                    <a:lstStyle/>
-                    <a:p>
-                      <a:pPr>
-                        <a:defRPr sz="950">
-                          <a:solidFill>
-                            <a:srgbClr val="1E1B4B"/>
-                          </a:solidFill>
-                        </a:defRPr>
-                      </a:pPr>
-                      <a:r>
-                        <a:t>Orders</a:t>
-                      </a:r>
-                    </a:p>
-                  </a:txBody>
-                  <a:tcPr>
-                    <a:solidFill>
-                      <a:srgbClr val="FFFFFF"/>
-                    </a:solidFill>
-                  </a:tcPr>
-                </a:tc>
-                <a:tc>
-                  <a:txBody>
-                    <a:bodyPr/>
-                    <a:lstStyle/>
-                    <a:p>
-                      <a:pPr>
-                        <a:defRPr sz="950">
-                          <a:solidFill>
-                            <a:srgbClr val="1E1B4B"/>
-                          </a:solidFill>
-                        </a:defRPr>
-                      </a:pPr>
-                      <a:r>
-                        <a:t>History, detail, Buy Again, returns, complaints</a:t>
-                      </a:r>
-                    </a:p>
-                  </a:txBody>
-                  <a:tcPr>
-                    <a:solidFill>
-                      <a:srgbClr val="FFFFFF"/>
-                    </a:solidFill>
-                  </a:tcPr>
-                </a:tc>
-              </a:tr>
-              <a:tr h="237744">
-                <a:tc>
-                  <a:txBody>
-                    <a:bodyPr/>
-                    <a:lstStyle/>
-                    <a:p>
-                      <a:pPr>
-                        <a:defRPr sz="950">
-                          <a:solidFill>
-                            <a:srgbClr val="1E1B4B"/>
-                          </a:solidFill>
-                        </a:defRPr>
-                      </a:pPr>
-                      <a:r>
-                        <a:t>Admin</a:t>
-                      </a:r>
-                    </a:p>
-                  </a:txBody>
-                  <a:tcPr>
-                    <a:solidFill>
-                      <a:srgbClr val="FFFFFF"/>
-                    </a:solidFill>
-                  </a:tcPr>
-                </a:tc>
-                <a:tc>
-                  <a:txBody>
-                    <a:bodyPr/>
-                    <a:lstStyle/>
-                    <a:p>
-                      <a:pPr>
-                        <a:defRPr sz="950">
-                          <a:solidFill>
-                            <a:srgbClr val="1E1B4B"/>
-                          </a:solidFill>
-                        </a:defRPr>
-                      </a:pPr>
-                      <a:r>
-                        <a:t>Product CRUD, bulk seeding, user promotion, complaints queue</a:t>
-                      </a:r>
-                    </a:p>
-                  </a:txBody>
-                  <a:tcPr>
-                    <a:solidFill>
-                      <a:srgbClr val="FFFFFF"/>
-                    </a:solidFill>
-                  </a:tcPr>
-                </a:tc>
-              </a:tr>
-              <a:tr h="237744">
-                <a:tc>
-                  <a:txBody>
-                    <a:bodyPr/>
-                    <a:lstStyle/>
-                    <a:p>
-                      <a:pPr>
-                        <a:defRPr sz="950">
-                          <a:solidFill>
-                            <a:srgbClr val="1E1B4B"/>
-                          </a:solidFill>
-                        </a:defRPr>
-                      </a:pPr>
-                      <a:r>
-                        <a:t>Infrastructure</a:t>
-                      </a:r>
-                    </a:p>
-                  </a:txBody>
-                  <a:tcPr>
-                    <a:solidFill>
-                      <a:srgbClr val="FFFFFF"/>
-                    </a:solidFill>
-                  </a:tcPr>
-                </a:tc>
-                <a:tc>
-                  <a:txBody>
-                    <a:bodyPr/>
-                    <a:lstStyle/>
-                    <a:p>
-                      <a:pPr>
-                        <a:defRPr sz="950">
-                          <a:solidFill>
-                            <a:srgbClr val="1E1B4B"/>
-                          </a:solidFill>
-                        </a:defRPr>
-                      </a:pPr>
-                      <a:r>
-                        <a:t>Round-robin load balancer, health checks, auto-discovery</a:t>
-                      </a:r>
-                    </a:p>
-                  </a:txBody>
-                  <a:tcPr>
-                    <a:solidFill>
-                      <a:srgbClr val="FFFFFF"/>
-                    </a:solidFill>
-                  </a:tcPr>
-                </a:tc>
-              </a:tr>
-            </a:tbl>
-          </a:graphicData>
-        </a:graphic>
-      </p:graphicFrame>
-      <p:sp>
-        <p:nvSpPr>
-          <p:cNvPr id="10" name="TextBox 9"/>
-          <p:cNvSpPr txBox="1"/>
-          <p:nvPr/>
-        </p:nvSpPr>
-        <p:spPr>
-          <a:xfrm>
-            <a:off x="548640" y="4900611"/>
-            <a:ext cx="5394960" cy="274320"/>
-          </a:xfrm>
-          <a:prstGeom prst="rect">
-            <a:avLst/>
-          </a:prstGeom>
-          <a:noFill/>
-        </p:spPr>
-        <p:txBody>
-          <a:bodyPr wrap="square">
-            <a:spAutoFit/>
-          </a:bodyPr>
-          <a:lstStyle/>
-          <a:p>
-            <a:r>
-              <a:rPr sz="1500" b="1">
-                <a:solidFill>
-                  <a:srgbClr val="4F46E5"/>
-                </a:solidFill>
-              </a:rPr>
-              <a:t>Security, Built In From the Start</a:t>
-            </a:r>
-          </a:p>
-        </p:txBody>
-      </p:sp>
-      <p:sp>
-        <p:nvSpPr>
-          <p:cNvPr id="11" name="TextBox 10"/>
-          <p:cNvSpPr txBox="1"/>
-          <p:nvPr/>
-        </p:nvSpPr>
-        <p:spPr>
-          <a:xfrm>
-            <a:off x="6400800" y="1051560"/>
-            <a:ext cx="5394960" cy="274320"/>
-          </a:xfrm>
-          <a:prstGeom prst="rect">
-            <a:avLst/>
-          </a:prstGeom>
-          <a:noFill/>
-        </p:spPr>
-        <p:txBody>
-          <a:bodyPr wrap="square">
-            <a:spAutoFit/>
-          </a:bodyPr>
-          <a:lstStyle/>
-          <a:p>
-            <a:r>
-              <a:rPr sz="1150" b="0">
-                <a:solidFill>
-                  <a:srgbClr val="1E1B4B"/>
-                </a:solidFill>
-              </a:rPr>
-              <a:t>CSRF on every state-changing POST · PBKDF2-SHA256 password hashing · field whitelisting against mass assignment · ownership-checked orders — not merely login-checked · role-gated admin via @admin_required</a:t>
-            </a:r>
-          </a:p>
-        </p:txBody>
-      </p:sp>
-      <p:sp>
-        <p:nvSpPr>
-          <p:cNvPr id="12" name="TextBox 11"/>
-          <p:cNvSpPr txBox="1"/>
-          <p:nvPr/>
-        </p:nvSpPr>
-        <p:spPr>
-          <a:xfrm>
-            <a:off x="548640" y="6446520"/>
-            <a:ext cx="6400800" cy="274320"/>
-          </a:xfrm>
-          <a:prstGeom prst="rect">
-            <a:avLst/>
-          </a:prstGeom>
-          <a:noFill/>
-        </p:spPr>
-        <p:txBody>
-          <a:bodyPr wrap="square">
-            <a:spAutoFit/>
-          </a:bodyPr>
-          <a:lstStyle/>
-          <a:p>
-            <a:r>
-              <a:rPr sz="900" b="0">
-                <a:solidFill>
-                  <a:srgbClr val="8890A8"/>
-                </a:solidFill>
-              </a:rPr>
-              <a:t>Flask E-Commerce — Cloud Computing (UCBX)</a:t>
-            </a:r>
-          </a:p>
-        </p:txBody>
-      </p:sp>
-      <p:sp>
-        <p:nvSpPr>
-          <p:cNvPr id="13" name="TextBox 12"/>
-          <p:cNvSpPr txBox="1"/>
-          <p:nvPr/>
-        </p:nvSpPr>
-        <p:spPr>
-          <a:xfrm>
-            <a:off x="11155680" y="6446520"/>
-            <a:ext cx="548640" cy="274320"/>
-          </a:xfrm>
-          <a:prstGeom prst="rect">
-            <a:avLst/>
-          </a:prstGeom>
-          <a:noFill/>
-        </p:spPr>
-        <p:txBody>
-          <a:bodyPr wrap="square">
-            <a:spAutoFit/>
-          </a:bodyPr>
-          <a:lstStyle/>
-          <a:p>
-            <a:r>
-              <a:rPr sz="900" b="0">
-                <a:solidFill>
-                  <a:srgbClr val="8890A8"/>
-                </a:solidFill>
-              </a:rPr>
-              <a:t>2 / 5</a:t>
-            </a:r>
-          </a:p>
-        </p:txBody>
-      </p:sp>
-    </p:spTree>
-  </p:cSld>
-  <p:clrMapOvr>
-    <a:masterClrMapping/>
-  </p:clrMapOvr>
-</p:sld>
-</file>
-
-<file path=ppt/slides/slide3.xml><?xml version="1.0" encoding="utf-8"?>
-<p:sld xmlns:a="http://schemas.openxmlformats.org/drawingml/2006/main" xmlns:p="http://schemas.openxmlformats.org/presentationml/2006/main" xmlns:r="http://schemas.openxmlformats.org/officeDocument/2006/relationships">
-  <p:cSld>
-    <p:spTree>
-      <p:nvGrpSpPr>
-        <p:cNvPr id="1" name=""/>
-        <p:cNvGrpSpPr/>
-        <p:nvPr/>
-      </p:nvGrpSpPr>
-      <p:grpSpPr/>
-      <p:sp>
-        <p:nvSpPr>
-          <p:cNvPr id="2" name="Rectangle 1"/>
-          <p:cNvSpPr/>
-          <p:nvPr/>
-        </p:nvSpPr>
-        <p:spPr>
-          <a:xfrm>
-            <a:off x="0" y="0"/>
-            <a:ext cx="12191695" cy="82296"/>
-          </a:xfrm>
-          <a:prstGeom prst="rect">
-            <a:avLst/>
-          </a:prstGeom>
-          <a:solidFill>
-            <a:srgbClr val="4F46E5"/>
-          </a:solidFill>
-          <a:ln>
-            <a:noFill/>
-          </a:ln>
-        </p:spPr>
-        <p:style>
-          <a:lnRef idx="1">
-            <a:schemeClr val="accent1"/>
-          </a:lnRef>
-          <a:fillRef idx="3">
-            <a:schemeClr val="accent1"/>
-          </a:fillRef>
-          <a:effectRef idx="2">
-            <a:schemeClr val="accent1"/>
-          </a:effectRef>
-          <a:fontRef idx="minor">
-            <a:schemeClr val="lt1"/>
-          </a:fontRef>
-        </p:style>
-        <p:txBody>
-          <a:bodyPr rtlCol="0" anchor="ctr"/>
-          <a:lstStyle/>
-          <a:p>
-            <a:pPr algn="ctr"/>
-          </a:p>
-        </p:txBody>
-      </p:sp>
-      <p:sp>
-        <p:nvSpPr>
-          <p:cNvPr id="3" name="TextBox 2"/>
-          <p:cNvSpPr txBox="1"/>
-          <p:nvPr/>
-        </p:nvSpPr>
-        <p:spPr>
-          <a:xfrm>
-            <a:off x="548640" y="274320"/>
-            <a:ext cx="11064240" cy="274320"/>
-          </a:xfrm>
-          <a:prstGeom prst="rect">
-            <a:avLst/>
-          </a:prstGeom>
-          <a:noFill/>
-        </p:spPr>
-        <p:txBody>
-          <a:bodyPr wrap="square">
-            <a:spAutoFit/>
-          </a:bodyPr>
-          <a:lstStyle/>
-          <a:p>
-            <a:r>
-              <a:rPr sz="2600" b="1">
-                <a:solidFill>
-                  <a:srgbClr val="1E1B4B"/>
-                </a:solidFill>
-              </a:rPr>
-              <a:t>Slide 3 — Code Review, Challenges, Solutions</a:t>
-            </a:r>
-          </a:p>
-        </p:txBody>
-      </p:sp>
-      <p:sp>
-        <p:nvSpPr>
-          <p:cNvPr id="4" name="TextBox 3"/>
-          <p:cNvSpPr txBox="1"/>
-          <p:nvPr/>
-        </p:nvSpPr>
-        <p:spPr>
-          <a:xfrm>
-            <a:off x="548640" y="1106424"/>
-            <a:ext cx="5394960" cy="274320"/>
-          </a:xfrm>
-          <a:prstGeom prst="rect">
-            <a:avLst/>
-          </a:prstGeom>
-          <a:noFill/>
-        </p:spPr>
-        <p:txBody>
-          <a:bodyPr wrap="square">
-            <a:spAutoFit/>
-          </a:bodyPr>
-          <a:lstStyle/>
-          <a:p>
-            <a:r>
-              <a:rPr sz="1500" b="1">
-                <a:solidFill>
-                  <a:srgbClr val="4F46E5"/>
-                </a:solidFill>
-              </a:rPr>
-              <a:t>Architecture Decisions Under Review</a:t>
-            </a:r>
-          </a:p>
-        </p:txBody>
-      </p:sp>
-      <p:graphicFrame>
-        <p:nvGraphicFramePr>
-          <p:cNvPr id="5" name="Table 4"/>
-          <p:cNvGraphicFramePr>
-            <a:graphicFrameLocks noGrp="1"/>
-          </p:cNvGraphicFramePr>
-          <p:nvPr/>
-        </p:nvGraphicFramePr>
-        <p:xfrm>
-          <a:off x="548640" y="1427607"/>
-          <a:ext cx="5394960" cy="1188720"/>
+          <a:ext cx="5394960" cy="950976"/>
         </p:xfrm>
         <a:graphic>
           <a:graphicData uri="http://schemas.openxmlformats.org/drawingml/2006/table">
@@ -4918,7 +3370,7 @@
                         </a:defRPr>
                       </a:pPr>
                       <a:r>
-                        <a:t>Decision</a:t>
+                        <a:t>Requirement</a:t>
                       </a:r>
                     </a:p>
                   </a:txBody>
@@ -4941,7 +3393,7 @@
                         </a:defRPr>
                       </a:pPr>
                       <a:r>
-                        <a:t>Why</a:t>
+                        <a:t>Why it matters</a:t>
                       </a:r>
                     </a:p>
                   </a:txBody>
@@ -4964,7 +3416,7 @@
                         </a:defRPr>
                       </a:pPr>
                       <a:r>
-                        <a:t>Trade-off accepted</a:t>
+                        <a:t>How it was met</a:t>
                       </a:r>
                     </a:p>
                   </a:txBody>
@@ -4989,7 +3441,7 @@
                         </a:defRPr>
                       </a:pPr>
                       <a:r>
-                        <a:t>create_app() factory</a:t>
+                        <a:t>Stateless app tier</a:t>
                       </a:r>
                     </a:p>
                   </a:txBody>
@@ -5012,7 +3464,7 @@
                         </a:defRPr>
                       </a:pPr>
                       <a:r>
-                        <a:t>Injectable test config</a:t>
+                        <a:t>Any instance must serve any request</a:t>
                       </a:r>
                     </a:p>
                   </a:txBody>
@@ -5035,7 +3487,7 @@
                         </a:defRPr>
                       </a:pPr>
                       <a:r>
-                        <a:t>More indirection than a flat module</a:t>
+                        <a:t>Session in a signed cookie, not server memory</a:t>
                       </a:r>
                     </a:p>
                   </a:txBody>
@@ -5060,7 +3512,7 @@
                         </a:defRPr>
                       </a:pPr>
                       <a:r>
-                        <a:t>One DB per instance</a:t>
+                        <a:t>Externalized config</a:t>
                       </a:r>
                     </a:p>
                   </a:txBody>
@@ -5083,7 +3535,7 @@
                         </a:defRPr>
                       </a:pPr>
                       <a:r>
-                        <a:t>SQLite locks under concurrent writes</a:t>
+                        <a:t>One image, many environments</a:t>
                       </a:r>
                     </a:p>
                   </a:txBody>
@@ -5106,7 +3558,7 @@
                         </a:defRPr>
                       </a:pPr>
                       <a:r>
-                        <a:t>Data differs per instance — documented, not hidden</a:t>
+                        <a:t>All config from environment variables</a:t>
                       </a:r>
                     </a:p>
                   </a:txBody>
@@ -5131,7 +3583,7 @@
                         </a:defRPr>
                       </a:pPr>
                       <a:r>
-                        <a:t>Port-range scanning</a:t>
+                        <a:t>Health-reporting instances</a:t>
                       </a:r>
                     </a:p>
                   </a:txBody>
@@ -5154,7 +3606,7 @@
                         </a:defRPr>
                       </a:pPr>
                       <a:r>
-                        <a:t>Shows dynamic membership without extra infra</a:t>
+                        <a:t>The balancer must know who is alive</a:t>
                       </a:r>
                     </a:p>
                   </a:txBody>
@@ -5177,7 +3629,454 @@
                         </a:defRPr>
                       </a:pPr>
                       <a:r>
-                        <a:t>A simulation; real systems use a service registry</a:t>
+                        <a:t>HTTP probe per instance every 5s</a:t>
+                      </a:r>
+                    </a:p>
+                  </a:txBody>
+                  <a:tcPr>
+                    <a:solidFill>
+                      <a:srgbClr val="FFFFFF"/>
+                    </a:solidFill>
+                  </a:tcPr>
+                </a:tc>
+              </a:tr>
+            </a:tbl>
+          </a:graphicData>
+        </a:graphic>
+      </p:graphicFrame>
+      <p:sp>
+        <p:nvSpPr>
+          <p:cNvPr id="10" name="TextBox 9"/>
+          <p:cNvSpPr txBox="1"/>
+          <p:nvPr/>
+        </p:nvSpPr>
+        <p:spPr>
+          <a:xfrm>
+            <a:off x="548640" y="3711891"/>
+            <a:ext cx="5394960" cy="274320"/>
+          </a:xfrm>
+          <a:prstGeom prst="rect">
+            <a:avLst/>
+          </a:prstGeom>
+          <a:noFill/>
+        </p:spPr>
+        <p:txBody>
+          <a:bodyPr wrap="square">
+            <a:spAutoFit/>
+          </a:bodyPr>
+          <a:lstStyle/>
+          <a:p>
+            <a:r>
+              <a:rPr sz="1500" b="1">
+                <a:solidFill>
+                  <a:srgbClr val="4F46E5"/>
+                </a:solidFill>
+              </a:rPr>
+              <a:t>Cloud Concepts Implemented</a:t>
+            </a:r>
+          </a:p>
+        </p:txBody>
+      </p:sp>
+      <p:sp>
+        <p:nvSpPr>
+          <p:cNvPr id="11" name="TextBox 10"/>
+          <p:cNvSpPr txBox="1"/>
+          <p:nvPr/>
+        </p:nvSpPr>
+        <p:spPr>
+          <a:xfrm>
+            <a:off x="548640" y="3996498"/>
+            <a:ext cx="5394960" cy="274320"/>
+          </a:xfrm>
+          <a:prstGeom prst="rect">
+            <a:avLst/>
+          </a:prstGeom>
+          <a:noFill/>
+        </p:spPr>
+        <p:txBody>
+          <a:bodyPr wrap="square">
+            <a:spAutoFit/>
+          </a:bodyPr>
+          <a:lstStyle/>
+          <a:p>
+            <a:r>
+              <a:rPr sz="1150" b="0">
+                <a:solidFill>
+                  <a:srgbClr val="1E1B4B"/>
+                </a:solidFill>
+              </a:rPr>
+              <a:t>Load balancing · health checking · auto-scaling simulation · stateless application tier · CDN-offloaded assets · role-based access control · containerization · CI/CD</a:t>
+            </a:r>
+          </a:p>
+        </p:txBody>
+      </p:sp>
+      <p:sp>
+        <p:nvSpPr>
+          <p:cNvPr id="12" name="TextBox 11"/>
+          <p:cNvSpPr txBox="1"/>
+          <p:nvPr/>
+        </p:nvSpPr>
+        <p:spPr>
+          <a:xfrm>
+            <a:off x="548640" y="4266817"/>
+            <a:ext cx="5394960" cy="274320"/>
+          </a:xfrm>
+          <a:prstGeom prst="rect">
+            <a:avLst/>
+          </a:prstGeom>
+          <a:noFill/>
+        </p:spPr>
+        <p:txBody>
+          <a:bodyPr wrap="square">
+            <a:spAutoFit/>
+          </a:bodyPr>
+          <a:lstStyle/>
+          <a:p>
+            <a:r>
+              <a:rPr sz="1150" b="0">
+                <a:solidFill>
+                  <a:srgbClr val="1E1B4B"/>
+                </a:solidFill>
+              </a:rPr>
+              <a:t>Each is covered in the slides that follow, with the trade-offs stated rather than hidden.</a:t>
+            </a:r>
+          </a:p>
+        </p:txBody>
+      </p:sp>
+      <p:sp>
+        <p:nvSpPr>
+          <p:cNvPr id="13" name="TextBox 12"/>
+          <p:cNvSpPr txBox="1"/>
+          <p:nvPr/>
+        </p:nvSpPr>
+        <p:spPr>
+          <a:xfrm>
+            <a:off x="548640" y="6446520"/>
+            <a:ext cx="6400800" cy="274320"/>
+          </a:xfrm>
+          <a:prstGeom prst="rect">
+            <a:avLst/>
+          </a:prstGeom>
+          <a:noFill/>
+        </p:spPr>
+        <p:txBody>
+          <a:bodyPr wrap="square">
+            <a:spAutoFit/>
+          </a:bodyPr>
+          <a:lstStyle/>
+          <a:p>
+            <a:r>
+              <a:rPr sz="900" b="0">
+                <a:solidFill>
+                  <a:srgbClr val="8890A8"/>
+                </a:solidFill>
+              </a:rPr>
+              <a:t>Flask E-Commerce — Cloud Computing (UCBX)</a:t>
+            </a:r>
+          </a:p>
+        </p:txBody>
+      </p:sp>
+      <p:sp>
+        <p:nvSpPr>
+          <p:cNvPr id="14" name="TextBox 13"/>
+          <p:cNvSpPr txBox="1"/>
+          <p:nvPr/>
+        </p:nvSpPr>
+        <p:spPr>
+          <a:xfrm>
+            <a:off x="11155680" y="6446520"/>
+            <a:ext cx="548640" cy="274320"/>
+          </a:xfrm>
+          <a:prstGeom prst="rect">
+            <a:avLst/>
+          </a:prstGeom>
+          <a:noFill/>
+        </p:spPr>
+        <p:txBody>
+          <a:bodyPr wrap="square">
+            <a:spAutoFit/>
+          </a:bodyPr>
+          <a:lstStyle/>
+          <a:p>
+            <a:r>
+              <a:rPr sz="900" b="0">
+                <a:solidFill>
+                  <a:srgbClr val="8890A8"/>
+                </a:solidFill>
+              </a:rPr>
+              <a:t>1 / 5</a:t>
+            </a:r>
+          </a:p>
+        </p:txBody>
+      </p:sp>
+    </p:spTree>
+  </p:cSld>
+  <p:clrMapOvr>
+    <a:masterClrMapping/>
+  </p:clrMapOvr>
+</p:sld>
+</file>
+
+<file path=ppt/slides/slide2.xml><?xml version="1.0" encoding="utf-8"?>
+<p:sld xmlns:a="http://schemas.openxmlformats.org/drawingml/2006/main" xmlns:p="http://schemas.openxmlformats.org/presentationml/2006/main" xmlns:r="http://schemas.openxmlformats.org/officeDocument/2006/relationships">
+  <p:cSld>
+    <p:spTree>
+      <p:nvGrpSpPr>
+        <p:cNvPr id="1" name=""/>
+        <p:cNvGrpSpPr/>
+        <p:nvPr/>
+      </p:nvGrpSpPr>
+      <p:grpSpPr/>
+      <p:sp>
+        <p:nvSpPr>
+          <p:cNvPr id="2" name="Rectangle 1"/>
+          <p:cNvSpPr/>
+          <p:nvPr/>
+        </p:nvSpPr>
+        <p:spPr>
+          <a:xfrm>
+            <a:off x="0" y="0"/>
+            <a:ext cx="12191695" cy="82296"/>
+          </a:xfrm>
+          <a:prstGeom prst="rect">
+            <a:avLst/>
+          </a:prstGeom>
+          <a:solidFill>
+            <a:srgbClr val="4F46E5"/>
+          </a:solidFill>
+          <a:ln>
+            <a:noFill/>
+          </a:ln>
+        </p:spPr>
+        <p:style>
+          <a:lnRef idx="1">
+            <a:schemeClr val="accent1"/>
+          </a:lnRef>
+          <a:fillRef idx="3">
+            <a:schemeClr val="accent1"/>
+          </a:fillRef>
+          <a:effectRef idx="2">
+            <a:schemeClr val="accent1"/>
+          </a:effectRef>
+          <a:fontRef idx="minor">
+            <a:schemeClr val="lt1"/>
+          </a:fontRef>
+        </p:style>
+        <p:txBody>
+          <a:bodyPr rtlCol="0" anchor="ctr"/>
+          <a:lstStyle/>
+          <a:p>
+            <a:pPr algn="ctr"/>
+          </a:p>
+        </p:txBody>
+      </p:sp>
+      <p:sp>
+        <p:nvSpPr>
+          <p:cNvPr id="3" name="TextBox 2"/>
+          <p:cNvSpPr txBox="1"/>
+          <p:nvPr/>
+        </p:nvSpPr>
+        <p:spPr>
+          <a:xfrm>
+            <a:off x="548640" y="274320"/>
+            <a:ext cx="11064240" cy="274320"/>
+          </a:xfrm>
+          <a:prstGeom prst="rect">
+            <a:avLst/>
+          </a:prstGeom>
+          <a:noFill/>
+        </p:spPr>
+        <p:txBody>
+          <a:bodyPr wrap="square">
+            <a:spAutoFit/>
+          </a:bodyPr>
+          <a:lstStyle/>
+          <a:p>
+            <a:r>
+              <a:rPr sz="2600" b="1">
+                <a:solidFill>
+                  <a:srgbClr val="1E1B4B"/>
+                </a:solidFill>
+              </a:rPr>
+              <a:t>Slide 2 — Load Balancer and Elastic Capacity</a:t>
+            </a:r>
+          </a:p>
+        </p:txBody>
+      </p:sp>
+      <p:sp>
+        <p:nvSpPr>
+          <p:cNvPr id="4" name="TextBox 3"/>
+          <p:cNvSpPr txBox="1"/>
+          <p:nvPr/>
+        </p:nvSpPr>
+        <p:spPr>
+          <a:xfrm>
+            <a:off x="548640" y="1106424"/>
+            <a:ext cx="5394960" cy="274320"/>
+          </a:xfrm>
+          <a:prstGeom prst="rect">
+            <a:avLst/>
+          </a:prstGeom>
+          <a:noFill/>
+        </p:spPr>
+        <p:txBody>
+          <a:bodyPr wrap="square">
+            <a:spAutoFit/>
+          </a:bodyPr>
+          <a:lstStyle/>
+          <a:p>
+            <a:r>
+              <a:rPr sz="1500" b="1">
+                <a:solidFill>
+                  <a:srgbClr val="4F46E5"/>
+                </a:solidFill>
+              </a:rPr>
+              <a:t>Design</a:t>
+            </a:r>
+          </a:p>
+        </p:txBody>
+      </p:sp>
+      <p:sp>
+        <p:nvSpPr>
+          <p:cNvPr id="5" name="TextBox 4"/>
+          <p:cNvSpPr txBox="1"/>
+          <p:nvPr/>
+        </p:nvSpPr>
+        <p:spPr>
+          <a:xfrm>
+            <a:off x="548640" y="1391031"/>
+            <a:ext cx="5394960" cy="274320"/>
+          </a:xfrm>
+          <a:prstGeom prst="rect">
+            <a:avLst/>
+          </a:prstGeom>
+          <a:noFill/>
+        </p:spPr>
+        <p:txBody>
+          <a:bodyPr wrap="square">
+            <a:spAutoFit/>
+          </a:bodyPr>
+          <a:lstStyle/>
+          <a:p>
+            <a:r>
+              <a:rPr sz="1150" b="0">
+                <a:solidFill>
+                  <a:srgbClr val="1E1B4B"/>
+                </a:solidFill>
+              </a:rPr>
+              <a:t>load_balancer/load_balancer.py — a Flask reverse proxy on :8000 implementing four behaviors:</a:t>
+            </a:r>
+          </a:p>
+        </p:txBody>
+      </p:sp>
+      <p:graphicFrame>
+        <p:nvGraphicFramePr>
+          <p:cNvPr id="6" name="Table 5"/>
+          <p:cNvGraphicFramePr>
+            <a:graphicFrameLocks noGrp="1"/>
+          </p:cNvGraphicFramePr>
+          <p:nvPr/>
+        </p:nvGraphicFramePr>
+        <p:xfrm>
+          <a:off x="548640" y="1697926"/>
+          <a:ext cx="5394960" cy="1188720"/>
+        </p:xfrm>
+        <a:graphic>
+          <a:graphicData uri="http://schemas.openxmlformats.org/drawingml/2006/table">
+            <a:tbl>
+              <a:tblPr firstRow="1" bandRow="1">
+                <a:tableStyleId>{5C22544A-7EE6-4342-B048-85BDC9FD1C3A}</a:tableStyleId>
+              </a:tblPr>
+              <a:tblGrid>
+                <a:gridCol w="2697480"/>
+                <a:gridCol w="2697480"/>
+              </a:tblGrid>
+              <a:tr h="237744">
+                <a:tc>
+                  <a:txBody>
+                    <a:bodyPr/>
+                    <a:lstStyle/>
+                    <a:p>
+                      <a:pPr>
+                        <a:defRPr sz="1000" b="1">
+                          <a:solidFill>
+                            <a:srgbClr val="1E1B4B"/>
+                          </a:solidFill>
+                        </a:defRPr>
+                      </a:pPr>
+                      <a:r>
+                        <a:t>Behavior</a:t>
+                      </a:r>
+                    </a:p>
+                  </a:txBody>
+                  <a:tcPr>
+                    <a:solidFill>
+                      <a:srgbClr val="EEF2FF"/>
+                    </a:solidFill>
+                  </a:tcPr>
+                </a:tc>
+                <a:tc>
+                  <a:txBody>
+                    <a:bodyPr/>
+                    <a:lstStyle/>
+                    <a:p>
+                      <a:pPr>
+                        <a:defRPr sz="1000" b="1">
+                          <a:solidFill>
+                            <a:srgbClr val="1E1B4B"/>
+                          </a:solidFill>
+                        </a:defRPr>
+                      </a:pPr>
+                      <a:r>
+                        <a:t>Implementation</a:t>
+                      </a:r>
+                    </a:p>
+                  </a:txBody>
+                  <a:tcPr>
+                    <a:solidFill>
+                      <a:srgbClr val="EEF2FF"/>
+                    </a:solidFill>
+                  </a:tcPr>
+                </a:tc>
+              </a:tr>
+              <a:tr h="237744">
+                <a:tc>
+                  <a:txBody>
+                    <a:bodyPr/>
+                    <a:lstStyle/>
+                    <a:p>
+                      <a:pPr>
+                        <a:defRPr sz="950">
+                          <a:solidFill>
+                            <a:srgbClr val="1E1B4B"/>
+                          </a:solidFill>
+                        </a:defRPr>
+                      </a:pPr>
+                      <a:r>
+                        <a:t>Round-robin</a:t>
+                      </a:r>
+                    </a:p>
+                  </a:txBody>
+                  <a:tcPr>
+                    <a:solidFill>
+                      <a:srgbClr val="FFFFFF"/>
+                    </a:solidFill>
+                  </a:tcPr>
+                </a:tc>
+                <a:tc>
+                  <a:txBody>
+                    <a:bodyPr/>
+                    <a:lstStyle/>
+                    <a:p>
+                      <a:pPr>
+                        <a:defRPr sz="950">
+                          <a:solidFill>
+                            <a:srgbClr val="1E1B4B"/>
+                          </a:solidFill>
+                        </a:defRPr>
+                      </a:pPr>
+                      <a:r>
+                        <a:t>itertools.count() cycles the healthy pool</a:t>
                       </a:r>
                     </a:p>
                   </a:txBody>
@@ -5202,7 +4101,7 @@
                         </a:defRPr>
                       </a:pPr>
                       <a:r>
-                        <a:t>Split requirements files</a:t>
+                        <a:t>Health checking</a:t>
                       </a:r>
                     </a:p>
                   </a:txBody>
@@ -5225,7 +4124,32 @@
                         </a:defRPr>
                       </a:pPr>
                       <a:r>
-                        <a:t>psycopg2 needs compilers the image lacks</a:t>
+                        <a:t>Daemon thread probes each backend every 5s, 2s timeout</a:t>
+                      </a:r>
+                    </a:p>
+                  </a:txBody>
+                  <a:tcPr>
+                    <a:solidFill>
+                      <a:srgbClr val="FFFFFF"/>
+                    </a:solidFill>
+                  </a:tcPr>
+                </a:tc>
+              </a:tr>
+              <a:tr h="237744">
+                <a:tc>
+                  <a:txBody>
+                    <a:bodyPr/>
+                    <a:lstStyle/>
+                    <a:p>
+                      <a:pPr>
+                        <a:defRPr sz="950">
+                          <a:solidFill>
+                            <a:srgbClr val="1E1B4B"/>
+                          </a:solidFill>
+                        </a:defRPr>
+                      </a:pPr>
+                      <a:r>
+                        <a:t>Auto-scaling</a:t>
                       </a:r>
                     </a:p>
                   </a:txBody>
@@ -5248,7 +4172,55 @@
                         </a:defRPr>
                       </a:pPr>
                       <a:r>
-                        <a:t>Two files to keep in sync</a:t>
+                        <a:t>Scans ports 5000–5010; instances join/leave on their own</a:t>
+                      </a:r>
+                    </a:p>
+                  </a:txBody>
+                  <a:tcPr>
+                    <a:solidFill>
+                      <a:srgbClr val="FFFFFF"/>
+                    </a:solidFill>
+                  </a:tcPr>
+                </a:tc>
+              </a:tr>
+              <a:tr h="237744">
+                <a:tc>
+                  <a:txBody>
+                    <a:bodyPr/>
+                    <a:lstStyle/>
+                    <a:p>
+                      <a:pPr>
+                        <a:defRPr sz="950">
+                          <a:solidFill>
+                            <a:srgbClr val="1E1B4B"/>
+                          </a:solidFill>
+                        </a:defRPr>
+                      </a:pPr>
+                      <a:r>
+                        <a:t>Retry on failure</a:t>
+                      </a:r>
+                    </a:p>
+                  </a:txBody>
+                  <a:tcPr>
+                    <a:solidFill>
+                      <a:srgbClr val="FFFFFF"/>
+                    </a:solidFill>
+                  </a:tcPr>
+                </a:tc>
+                <a:tc>
+                  <a:txBody>
+                    <a:bodyPr/>
+                    <a:lstStyle/>
+                    <a:p>
+                      <a:pPr>
+                        <a:defRPr sz="950">
+                          <a:solidFill>
+                            <a:srgbClr val="1E1B4B"/>
+                          </a:solidFill>
+                        </a:defRPr>
+                      </a:pPr>
+                      <a:r>
+                        <a:t>A request to a dead backend re-dispatches to the next</a:t>
                       </a:r>
                     </a:p>
                   </a:txBody>
@@ -5265,13 +4237,13 @@
       </p:graphicFrame>
       <p:sp>
         <p:nvSpPr>
-          <p:cNvPr id="6" name="TextBox 5"/>
+          <p:cNvPr id="7" name="TextBox 6"/>
           <p:cNvSpPr txBox="1"/>
           <p:nvPr/>
         </p:nvSpPr>
         <p:spPr>
           <a:xfrm>
-            <a:off x="548640" y="2799207"/>
+            <a:off x="548640" y="3014662"/>
             <a:ext cx="5394960" cy="274320"/>
           </a:xfrm>
           <a:prstGeom prst="rect">
@@ -5286,25 +4258,25 @@
           <a:lstStyle/>
           <a:p>
             <a:r>
-              <a:rPr sz="1500" b="1">
-                <a:solidFill>
-                  <a:srgbClr val="4F46E5"/>
+              <a:rPr sz="1150" b="0">
+                <a:solidFill>
+                  <a:srgbClr val="1E1B4B"/>
                 </a:solidFill>
               </a:rPr>
-              <a:t>Challenges and How They Were Solved</a:t>
-            </a:r>
-          </a:p>
-        </p:txBody>
-      </p:sp>
-      <p:sp>
-        <p:nvSpPr>
-          <p:cNvPr id="7" name="TextBox 6"/>
+              <a:t>Hop-by-hop headers (connection, transfer-encoding, content-length) are stripped per RFC 7230 rather than blindly forwarded.</a:t>
+            </a:r>
+          </a:p>
+        </p:txBody>
+      </p:sp>
+      <p:sp>
+        <p:nvSpPr>
+          <p:cNvPr id="8" name="TextBox 7"/>
           <p:cNvSpPr txBox="1"/>
           <p:nvPr/>
         </p:nvSpPr>
         <p:spPr>
           <a:xfrm>
-            <a:off x="548640" y="3083814"/>
+            <a:off x="548640" y="3339845"/>
             <a:ext cx="5394960" cy="274320"/>
           </a:xfrm>
           <a:prstGeom prst="rect">
@@ -5319,418 +4291,27 @@
           <a:lstStyle/>
           <a:p>
             <a:r>
-              <a:rPr sz="1150" b="0">
-                <a:solidFill>
-                  <a:srgbClr val="1E1B4B"/>
+              <a:rPr sz="1500" b="1">
+                <a:solidFill>
+                  <a:srgbClr val="4F46E5"/>
                 </a:solidFill>
               </a:rPr>
-              <a:t>A flat app.py could not be tested. Importing it built a live app bound to the dev database. Restructured into an application factory accepting a test config — the change that made all 131 tests possible.</a:t>
-            </a:r>
-          </a:p>
-        </p:txBody>
-      </p:sp>
-      <p:sp>
-        <p:nvSpPr>
-          <p:cNvPr id="8" name="TextBox 7"/>
-          <p:cNvSpPr txBox="1"/>
-          <p:nvPr/>
-        </p:nvSpPr>
-        <p:spPr>
-          <a:xfrm>
-            <a:off x="548640" y="3354133"/>
-            <a:ext cx="5394960" cy="274320"/>
-          </a:xfrm>
-          <a:prstGeom prst="rect">
-            <a:avLst/>
-          </a:prstGeom>
-          <a:noFill/>
-        </p:spPr>
-        <p:txBody>
-          <a:bodyPr wrap="square">
-            <a:spAutoFit/>
-          </a:bodyPr>
-          <a:lstStyle/>
-          <a:p>
-            <a:r>
-              <a:rPr sz="1150" b="0">
-                <a:solidFill>
-                  <a:srgbClr val="1E1B4B"/>
-                </a:solidFill>
-              </a:rPr>
-              <a:t>A static backend list demonstrated nothing. Round-robin across fixed targets shows distribution but not elasticity. Added a health-check thread scanning a port range, so instances join and leave rotation on their own.</a:t>
-            </a:r>
-          </a:p>
-        </p:txBody>
-      </p:sp>
-      <p:sp>
-        <p:nvSpPr>
-          <p:cNvPr id="9" name="TextBox 8"/>
-          <p:cNvSpPr txBox="1"/>
-          <p:nvPr/>
-        </p:nvSpPr>
-        <p:spPr>
-          <a:xfrm>
-            <a:off x="548640" y="3624452"/>
-            <a:ext cx="5394960" cy="274320"/>
-          </a:xfrm>
-          <a:prstGeom prst="rect">
-            <a:avLst/>
-          </a:prstGeom>
-          <a:noFill/>
-        </p:spPr>
-        <p:txBody>
-          <a:bodyPr wrap="square">
-            <a:spAutoFit/>
-          </a:bodyPr>
-          <a:lstStyle/>
-          <a:p>
-            <a:r>
-              <a:rPr sz="1150" b="0">
-                <a:solidFill>
-                  <a:srgbClr val="1E1B4B"/>
-                </a:solidFill>
-              </a:rPr>
-              <a:t>SQLite locked under multi-instance writes. Gave each backend its own database file — an explicit trade-off, documented in the README rather than buried.</a:t>
-            </a:r>
-          </a:p>
-        </p:txBody>
-      </p:sp>
-      <p:sp>
-        <p:nvSpPr>
-          <p:cNvPr id="10" name="TextBox 9"/>
-          <p:cNvSpPr txBox="1"/>
-          <p:nvPr/>
-        </p:nvSpPr>
-        <p:spPr>
-          <a:xfrm>
-            <a:off x="548640" y="3894771"/>
-            <a:ext cx="5394960" cy="274320"/>
-          </a:xfrm>
-          <a:prstGeom prst="rect">
-            <a:avLst/>
-          </a:prstGeom>
-          <a:noFill/>
-        </p:spPr>
-        <p:txBody>
-          <a:bodyPr wrap="square">
-            <a:spAutoFit/>
-          </a:bodyPr>
-          <a:lstStyle/>
-          <a:p>
-            <a:r>
-              <a:rPr sz="1150" b="0">
-                <a:solidFill>
-                  <a:srgbClr val="1E1B4B"/>
-                </a:solidFill>
-              </a:rPr>
-              <a:t>Docker rebuilt dependencies on every source edit. Reordered the Dockerfile: copy requirements → install → then copy source.</a:t>
-            </a:r>
-          </a:p>
-        </p:txBody>
-      </p:sp>
-      <p:sp>
-        <p:nvSpPr>
-          <p:cNvPr id="11" name="TextBox 10"/>
-          <p:cNvSpPr txBox="1"/>
-          <p:nvPr/>
-        </p:nvSpPr>
-        <p:spPr>
-          <a:xfrm>
-            <a:off x="548640" y="4219954"/>
-            <a:ext cx="5394960" cy="274320"/>
-          </a:xfrm>
-          <a:prstGeom prst="rect">
-            <a:avLst/>
-          </a:prstGeom>
-          <a:noFill/>
-        </p:spPr>
-        <p:txBody>
-          <a:bodyPr wrap="square">
-            <a:spAutoFit/>
-          </a:bodyPr>
-          <a:lstStyle/>
-          <a:p>
-            <a:r>
-              <a:rPr sz="1500" b="1">
-                <a:solidFill>
-                  <a:srgbClr val="4F46E5"/>
-                </a:solidFill>
-              </a:rPr>
-              <a:t>Caught in Final Review</a:t>
-            </a:r>
-          </a:p>
-        </p:txBody>
-      </p:sp>
-      <p:sp>
-        <p:nvSpPr>
-          <p:cNvPr id="12" name="TextBox 11"/>
-          <p:cNvSpPr txBox="1"/>
-          <p:nvPr/>
-        </p:nvSpPr>
-        <p:spPr>
-          <a:xfrm>
-            <a:off x="548640" y="4504561"/>
-            <a:ext cx="5394960" cy="274320"/>
-          </a:xfrm>
-          <a:prstGeom prst="rect">
-            <a:avLst/>
-          </a:prstGeom>
-          <a:noFill/>
-        </p:spPr>
-        <p:txBody>
-          <a:bodyPr wrap="square">
-            <a:spAutoFit/>
-          </a:bodyPr>
-          <a:lstStyle/>
-          <a:p>
-            <a:r>
-              <a:rPr sz="1150" b="0">
-                <a:solidFill>
-                  <a:srgbClr val="1E1B4B"/>
-                </a:solidFill>
-              </a:rPr>
-              <a:t>The stylesheet had a viewport meta tag but zero media queries. On a 375px screen the nav needed 552px against 343px available — "Logout" was clipped off-screen and unreachable.</a:t>
-            </a:r>
-          </a:p>
-        </p:txBody>
-      </p:sp>
-      <p:sp>
-        <p:nvSpPr>
-          <p:cNvPr id="13" name="TextBox 12"/>
-          <p:cNvSpPr txBox="1"/>
-          <p:nvPr/>
-        </p:nvSpPr>
-        <p:spPr>
-          <a:xfrm>
-            <a:off x="548640" y="4774880"/>
-            <a:ext cx="5394960" cy="274320"/>
-          </a:xfrm>
-          <a:prstGeom prst="rect">
-            <a:avLst/>
-          </a:prstGeom>
-          <a:noFill/>
-        </p:spPr>
-        <p:txBody>
-          <a:bodyPr wrap="square">
-            <a:spAutoFit/>
-          </a:bodyPr>
-          <a:lstStyle/>
-          <a:p>
-            <a:r>
-              <a:rPr sz="1150" b="0">
-                <a:solidFill>
-                  <a:srgbClr val="1E1B4B"/>
-                </a:solidFill>
-              </a:rPr>
-              <a:t>It survived earlier passes because a screenshot looked fine: the browser zoomed out to fit, reporting a 568px viewport for a 375px device. Measuring scrollWidth against clientWidth exposed it. Verify by measurement, not by eye.</a:t>
-            </a:r>
-          </a:p>
-        </p:txBody>
-      </p:sp>
-      <p:sp>
-        <p:nvSpPr>
-          <p:cNvPr id="14" name="TextBox 13"/>
-          <p:cNvSpPr txBox="1"/>
-          <p:nvPr/>
-        </p:nvSpPr>
-        <p:spPr>
-          <a:xfrm>
-            <a:off x="548640" y="6446520"/>
-            <a:ext cx="6400800" cy="274320"/>
-          </a:xfrm>
-          <a:prstGeom prst="rect">
-            <a:avLst/>
-          </a:prstGeom>
-          <a:noFill/>
-        </p:spPr>
-        <p:txBody>
-          <a:bodyPr wrap="square">
-            <a:spAutoFit/>
-          </a:bodyPr>
-          <a:lstStyle/>
-          <a:p>
-            <a:r>
-              <a:rPr sz="900" b="0">
-                <a:solidFill>
-                  <a:srgbClr val="8890A8"/>
-                </a:solidFill>
-              </a:rPr>
-              <a:t>Flask E-Commerce — Cloud Computing (UCBX)</a:t>
-            </a:r>
-          </a:p>
-        </p:txBody>
-      </p:sp>
-      <p:sp>
-        <p:nvSpPr>
-          <p:cNvPr id="15" name="TextBox 14"/>
-          <p:cNvSpPr txBox="1"/>
-          <p:nvPr/>
-        </p:nvSpPr>
-        <p:spPr>
-          <a:xfrm>
-            <a:off x="11155680" y="6446520"/>
-            <a:ext cx="548640" cy="274320"/>
-          </a:xfrm>
-          <a:prstGeom prst="rect">
-            <a:avLst/>
-          </a:prstGeom>
-          <a:noFill/>
-        </p:spPr>
-        <p:txBody>
-          <a:bodyPr wrap="square">
-            <a:spAutoFit/>
-          </a:bodyPr>
-          <a:lstStyle/>
-          <a:p>
-            <a:r>
-              <a:rPr sz="900" b="0">
-                <a:solidFill>
-                  <a:srgbClr val="8890A8"/>
-                </a:solidFill>
-              </a:rPr>
-              <a:t>3 / 5</a:t>
-            </a:r>
-          </a:p>
-        </p:txBody>
-      </p:sp>
-    </p:spTree>
-  </p:cSld>
-  <p:clrMapOvr>
-    <a:masterClrMapping/>
-  </p:clrMapOvr>
-</p:sld>
-</file>
-
-<file path=ppt/slides/slide4.xml><?xml version="1.0" encoding="utf-8"?>
-<p:sld xmlns:a="http://schemas.openxmlformats.org/drawingml/2006/main" xmlns:p="http://schemas.openxmlformats.org/presentationml/2006/main" xmlns:r="http://schemas.openxmlformats.org/officeDocument/2006/relationships">
-  <p:cSld>
-    <p:spTree>
-      <p:nvGrpSpPr>
-        <p:cNvPr id="1" name=""/>
-        <p:cNvGrpSpPr/>
-        <p:nvPr/>
-      </p:nvGrpSpPr>
-      <p:grpSpPr/>
-      <p:sp>
-        <p:nvSpPr>
-          <p:cNvPr id="2" name="Rectangle 1"/>
-          <p:cNvSpPr/>
-          <p:nvPr/>
-        </p:nvSpPr>
-        <p:spPr>
-          <a:xfrm>
-            <a:off x="0" y="0"/>
-            <a:ext cx="12191695" cy="82296"/>
-          </a:xfrm>
-          <a:prstGeom prst="rect">
-            <a:avLst/>
-          </a:prstGeom>
-          <a:solidFill>
-            <a:srgbClr val="4F46E5"/>
-          </a:solidFill>
-          <a:ln>
-            <a:noFill/>
-          </a:ln>
-        </p:spPr>
-        <p:style>
-          <a:lnRef idx="1">
-            <a:schemeClr val="accent1"/>
-          </a:lnRef>
-          <a:fillRef idx="3">
-            <a:schemeClr val="accent1"/>
-          </a:fillRef>
-          <a:effectRef idx="2">
-            <a:schemeClr val="accent1"/>
-          </a:effectRef>
-          <a:fontRef idx="minor">
-            <a:schemeClr val="lt1"/>
-          </a:fontRef>
-        </p:style>
-        <p:txBody>
-          <a:bodyPr rtlCol="0" anchor="ctr"/>
-          <a:lstStyle/>
-          <a:p>
-            <a:pPr algn="ctr"/>
-          </a:p>
-        </p:txBody>
-      </p:sp>
-      <p:sp>
-        <p:nvSpPr>
-          <p:cNvPr id="3" name="TextBox 2"/>
-          <p:cNvSpPr txBox="1"/>
-          <p:nvPr/>
-        </p:nvSpPr>
-        <p:spPr>
-          <a:xfrm>
-            <a:off x="548640" y="274320"/>
-            <a:ext cx="11064240" cy="274320"/>
-          </a:xfrm>
-          <a:prstGeom prst="rect">
-            <a:avLst/>
-          </a:prstGeom>
-          <a:noFill/>
-        </p:spPr>
-        <p:txBody>
-          <a:bodyPr wrap="square">
-            <a:spAutoFit/>
-          </a:bodyPr>
-          <a:lstStyle/>
-          <a:p>
-            <a:r>
-              <a:rPr sz="2600" b="1">
-                <a:solidFill>
-                  <a:srgbClr val="1E1B4B"/>
-                </a:solidFill>
-              </a:rPr>
-              <a:t>Slide 4 — From Defect to Verified Fix</a:t>
-            </a:r>
-          </a:p>
-        </p:txBody>
-      </p:sp>
-      <p:sp>
-        <p:nvSpPr>
-          <p:cNvPr id="4" name="TextBox 3"/>
-          <p:cNvSpPr txBox="1"/>
-          <p:nvPr/>
-        </p:nvSpPr>
-        <p:spPr>
-          <a:xfrm>
-            <a:off x="548640" y="1106424"/>
-            <a:ext cx="5394960" cy="274320"/>
-          </a:xfrm>
-          <a:prstGeom prst="rect">
-            <a:avLst/>
-          </a:prstGeom>
-          <a:noFill/>
-        </p:spPr>
-        <p:txBody>
-          <a:bodyPr wrap="square">
-            <a:spAutoFit/>
-          </a:bodyPr>
-          <a:lstStyle/>
-          <a:p>
-            <a:r>
-              <a:rPr sz="1500" b="1">
-                <a:solidFill>
-                  <a:srgbClr val="4F46E5"/>
-                </a:solidFill>
-              </a:rPr>
-              <a:t>Five Issues Found, Fixed, and Re-Verified</a:t>
+              <a:t>Failure Behavior</a:t>
             </a:r>
           </a:p>
         </p:txBody>
       </p:sp>
       <p:graphicFrame>
         <p:nvGraphicFramePr>
-          <p:cNvPr id="5" name="Table 4"/>
+          <p:cNvPr id="9" name="Table 8"/>
           <p:cNvGraphicFramePr>
             <a:graphicFrameLocks noGrp="1"/>
           </p:cNvGraphicFramePr>
           <p:nvPr/>
         </p:nvGraphicFramePr>
         <p:xfrm>
-          <a:off x="548640" y="1427607"/>
-          <a:ext cx="5394960" cy="1426464"/>
+          <a:off x="548640" y="3661028"/>
+          <a:ext cx="5394960" cy="950976"/>
         </p:xfrm>
         <a:graphic>
           <a:graphicData uri="http://schemas.openxmlformats.org/drawingml/2006/table">
@@ -5739,10 +4320,8 @@
                 <a:tableStyleId>{5C22544A-7EE6-4342-B048-85BDC9FD1C3A}</a:tableStyleId>
               </a:tblPr>
               <a:tblGrid>
-                <a:gridCol w="1348740"/>
-                <a:gridCol w="1348740"/>
-                <a:gridCol w="1348740"/>
-                <a:gridCol w="1348740"/>
+                <a:gridCol w="2697480"/>
+                <a:gridCol w="2697480"/>
               </a:tblGrid>
               <a:tr h="237744">
                 <a:tc>
@@ -5758,7 +4337,7 @@
                         </a:defRPr>
                       </a:pPr>
                       <a:r>
-                        <a:t>#</a:t>
+                        <a:t>Condition</a:t>
                       </a:r>
                     </a:p>
                   </a:txBody>
@@ -5781,53 +4360,7 @@
                         </a:defRPr>
                       </a:pPr>
                       <a:r>
-                        <a:t>Issue</a:t>
-                      </a:r>
-                    </a:p>
-                  </a:txBody>
-                  <a:tcPr>
-                    <a:solidFill>
-                      <a:srgbClr val="EEF2FF"/>
-                    </a:solidFill>
-                  </a:tcPr>
-                </a:tc>
-                <a:tc>
-                  <a:txBody>
-                    <a:bodyPr/>
-                    <a:lstStyle/>
-                    <a:p>
-                      <a:pPr>
-                        <a:defRPr sz="1000" b="1">
-                          <a:solidFill>
-                            <a:srgbClr val="1E1B4B"/>
-                          </a:solidFill>
-                        </a:defRPr>
-                      </a:pPr>
-                      <a:r>
-                        <a:t>Impact</a:t>
-                      </a:r>
-                    </a:p>
-                  </a:txBody>
-                  <a:tcPr>
-                    <a:solidFill>
-                      <a:srgbClr val="EEF2FF"/>
-                    </a:solidFill>
-                  </a:tcPr>
-                </a:tc>
-                <a:tc>
-                  <a:txBody>
-                    <a:bodyPr/>
-                    <a:lstStyle/>
-                    <a:p>
-                      <a:pPr>
-                        <a:defRPr sz="1000" b="1">
-                          <a:solidFill>
-                            <a:srgbClr val="1E1B4B"/>
-                          </a:solidFill>
-                        </a:defRPr>
-                      </a:pPr>
-                      <a:r>
-                        <a:t>Fix</a:t>
+                        <a:t>Response</a:t>
                       </a:r>
                     </a:p>
                   </a:txBody>
@@ -5852,7 +4385,7 @@
                         </a:defRPr>
                       </a:pPr>
                       <a:r>
-                        <a:t>1</a:t>
+                        <a:t>Backend dies mid-request</a:t>
                       </a:r>
                     </a:p>
                   </a:txBody>
@@ -5875,53 +4408,7 @@
                         </a:defRPr>
                       </a:pPr>
                       <a:r>
-                        <a:t>Nav overflowed; "Logout" clipped</a:t>
-                      </a:r>
-                    </a:p>
-                  </a:txBody>
-                  <a:tcPr>
-                    <a:solidFill>
-                      <a:srgbClr val="FFFFFF"/>
-                    </a:solidFill>
-                  </a:tcPr>
-                </a:tc>
-                <a:tc>
-                  <a:txBody>
-                    <a:bodyPr/>
-                    <a:lstStyle/>
-                    <a:p>
-                      <a:pPr>
-                        <a:defRPr sz="950">
-                          <a:solidFill>
-                            <a:srgbClr val="1E1B4B"/>
-                          </a:solidFill>
-                        </a:defRPr>
-                      </a:pPr>
-                      <a:r>
-                        <a:t>Control unreachable on mobile</a:t>
-                      </a:r>
-                    </a:p>
-                  </a:txBody>
-                  <a:tcPr>
-                    <a:solidFill>
-                      <a:srgbClr val="FFFFFF"/>
-                    </a:solidFill>
-                  </a:tcPr>
-                </a:tc>
-                <a:tc>
-                  <a:txBody>
-                    <a:bodyPr/>
-                    <a:lstStyle/>
-                    <a:p>
-                      <a:pPr>
-                        <a:defRPr sz="950">
-                          <a:solidFill>
-                            <a:srgbClr val="1E1B4B"/>
-                          </a:solidFill>
-                        </a:defRPr>
-                      </a:pPr>
-                      <a:r>
-                        <a:t>flex-wrap + media query</a:t>
+                        <a:t>Retry next target; client never sees the failure</a:t>
                       </a:r>
                     </a:p>
                   </a:txBody>
@@ -5946,7 +4433,7 @@
                         </a:defRPr>
                       </a:pPr>
                       <a:r>
-                        <a:t>2</a:t>
+                        <a:t>All retries exhausted</a:t>
                       </a:r>
                     </a:p>
                   </a:txBody>
@@ -5969,53 +4456,7 @@
                         </a:defRPr>
                       </a:pPr>
                       <a:r>
-                        <a:t>Forms 5px past viewport</a:t>
-                      </a:r>
-                    </a:p>
-                  </a:txBody>
-                  <a:tcPr>
-                    <a:solidFill>
-                      <a:srgbClr val="FFFFFF"/>
-                    </a:solidFill>
-                  </a:tcPr>
-                </a:tc>
-                <a:tc>
-                  <a:txBody>
-                    <a:bodyPr/>
-                    <a:lstStyle/>
-                    <a:p>
-                      <a:pPr>
-                        <a:defRPr sz="950">
-                          <a:solidFill>
-                            <a:srgbClr val="1E1B4B"/>
-                          </a:solidFill>
-                        </a:defRPr>
-                      </a:pPr>
-                      <a:r>
-                        <a:t>Horizontal scroll on 3 pages</a:t>
-                      </a:r>
-                    </a:p>
-                  </a:txBody>
-                  <a:tcPr>
-                    <a:solidFill>
-                      <a:srgbClr val="FFFFFF"/>
-                    </a:solidFill>
-                  </a:tcPr>
-                </a:tc>
-                <a:tc>
-                  <a:txBody>
-                    <a:bodyPr/>
-                    <a:lstStyle/>
-                    <a:p>
-                      <a:pPr>
-                        <a:defRPr sz="950">
-                          <a:solidFill>
-                            <a:srgbClr val="1E1B4B"/>
-                          </a:solidFill>
-                        </a:defRPr>
-                      </a:pPr>
-                      <a:r>
-                        <a:t>Global box-sizing: border-box</a:t>
+                        <a:t>502 Bad Gateway</a:t>
                       </a:r>
                     </a:p>
                   </a:txBody>
@@ -6040,7 +4481,7 @@
                         </a:defRPr>
                       </a:pPr>
                       <a:r>
-                        <a:t>3</a:t>
+                        <a:t>Zero healthy backends</a:t>
                       </a:r>
                     </a:p>
                   </a:txBody>
@@ -6063,7 +4504,611 @@
                         </a:defRPr>
                       </a:pPr>
                       <a:r>
-                        <a:t>Hero image forced 412px</a:t>
+                        <a:t>503 Service Unavailable — degrades, does not crash</a:t>
+                      </a:r>
+                    </a:p>
+                  </a:txBody>
+                  <a:tcPr>
+                    <a:solidFill>
+                      <a:srgbClr val="FFFFFF"/>
+                    </a:solidFill>
+                  </a:tcPr>
+                </a:tc>
+              </a:tr>
+            </a:tbl>
+          </a:graphicData>
+        </a:graphic>
+      </p:graphicFrame>
+      <p:sp>
+        <p:nvSpPr>
+          <p:cNvPr id="10" name="TextBox 9"/>
+          <p:cNvSpPr txBox="1"/>
+          <p:nvPr/>
+        </p:nvSpPr>
+        <p:spPr>
+          <a:xfrm>
+            <a:off x="548640" y="4794884"/>
+            <a:ext cx="5394960" cy="274320"/>
+          </a:xfrm>
+          <a:prstGeom prst="rect">
+            <a:avLst/>
+          </a:prstGeom>
+          <a:noFill/>
+        </p:spPr>
+        <p:txBody>
+          <a:bodyPr wrap="square">
+            <a:spAutoFit/>
+          </a:bodyPr>
+          <a:lstStyle/>
+          <a:p>
+            <a:r>
+              <a:rPr sz="1500" b="1">
+                <a:solidFill>
+                  <a:srgbClr val="4F46E5"/>
+                </a:solidFill>
+              </a:rPr>
+              <a:t>Verified Live</a:t>
+            </a:r>
+          </a:p>
+        </p:txBody>
+      </p:sp>
+      <p:pic>
+        <p:nvPicPr>
+          <p:cNvPr id="11" name="Picture 10" descr="13-load-balancer.png"/>
+          <p:cNvPicPr>
+            <a:picLocks noChangeAspect="1"/>
+          </p:cNvPicPr>
+          <p:nvPr/>
+        </p:nvPicPr>
+        <p:blipFill>
+          <a:blip r:embed="rId2"/>
+          <a:stretch>
+            <a:fillRect/>
+          </a:stretch>
+        </p:blipFill>
+        <p:spPr>
+          <a:xfrm>
+            <a:off x="6400800" y="1051560"/>
+            <a:ext cx="3847927" cy="2834640"/>
+          </a:xfrm>
+          <a:prstGeom prst="rect">
+            <a:avLst/>
+          </a:prstGeom>
+        </p:spPr>
+      </p:pic>
+      <p:sp>
+        <p:nvSpPr>
+          <p:cNvPr id="12" name="TextBox 11"/>
+          <p:cNvSpPr txBox="1"/>
+          <p:nvPr/>
+        </p:nvSpPr>
+        <p:spPr>
+          <a:xfrm>
+            <a:off x="6400800" y="4014216"/>
+            <a:ext cx="5394960" cy="274320"/>
+          </a:xfrm>
+          <a:prstGeom prst="rect">
+            <a:avLst/>
+          </a:prstGeom>
+          <a:noFill/>
+        </p:spPr>
+        <p:txBody>
+          <a:bodyPr wrap="square">
+            <a:spAutoFit/>
+          </a:bodyPr>
+          <a:lstStyle/>
+          <a:p>
+            <a:r>
+              <a:rPr sz="1150" b="0">
+                <a:solidFill>
+                  <a:srgbClr val="1E1B4B"/>
+                </a:solidFill>
+              </a:rPr>
+              <a:t>A third instance joins a running pool in one health interval and leaves when killed — no restart, no config change.</a:t>
+            </a:r>
+          </a:p>
+        </p:txBody>
+      </p:sp>
+      <p:sp>
+        <p:nvSpPr>
+          <p:cNvPr id="13" name="TextBox 12"/>
+          <p:cNvSpPr txBox="1"/>
+          <p:nvPr/>
+        </p:nvSpPr>
+        <p:spPr>
+          <a:xfrm>
+            <a:off x="548640" y="6446520"/>
+            <a:ext cx="6400800" cy="274320"/>
+          </a:xfrm>
+          <a:prstGeom prst="rect">
+            <a:avLst/>
+          </a:prstGeom>
+          <a:noFill/>
+        </p:spPr>
+        <p:txBody>
+          <a:bodyPr wrap="square">
+            <a:spAutoFit/>
+          </a:bodyPr>
+          <a:lstStyle/>
+          <a:p>
+            <a:r>
+              <a:rPr sz="900" b="0">
+                <a:solidFill>
+                  <a:srgbClr val="8890A8"/>
+                </a:solidFill>
+              </a:rPr>
+              <a:t>Flask E-Commerce — Cloud Computing (UCBX)</a:t>
+            </a:r>
+          </a:p>
+        </p:txBody>
+      </p:sp>
+      <p:sp>
+        <p:nvSpPr>
+          <p:cNvPr id="14" name="TextBox 13"/>
+          <p:cNvSpPr txBox="1"/>
+          <p:nvPr/>
+        </p:nvSpPr>
+        <p:spPr>
+          <a:xfrm>
+            <a:off x="11155680" y="6446520"/>
+            <a:ext cx="548640" cy="274320"/>
+          </a:xfrm>
+          <a:prstGeom prst="rect">
+            <a:avLst/>
+          </a:prstGeom>
+          <a:noFill/>
+        </p:spPr>
+        <p:txBody>
+          <a:bodyPr wrap="square">
+            <a:spAutoFit/>
+          </a:bodyPr>
+          <a:lstStyle/>
+          <a:p>
+            <a:r>
+              <a:rPr sz="900" b="0">
+                <a:solidFill>
+                  <a:srgbClr val="8890A8"/>
+                </a:solidFill>
+              </a:rPr>
+              <a:t>2 / 5</a:t>
+            </a:r>
+          </a:p>
+        </p:txBody>
+      </p:sp>
+    </p:spTree>
+  </p:cSld>
+  <p:clrMapOvr>
+    <a:masterClrMapping/>
+  </p:clrMapOvr>
+</p:sld>
+</file>
+
+<file path=ppt/slides/slide3.xml><?xml version="1.0" encoding="utf-8"?>
+<p:sld xmlns:a="http://schemas.openxmlformats.org/drawingml/2006/main" xmlns:p="http://schemas.openxmlformats.org/presentationml/2006/main" xmlns:r="http://schemas.openxmlformats.org/officeDocument/2006/relationships">
+  <p:cSld>
+    <p:spTree>
+      <p:nvGrpSpPr>
+        <p:cNvPr id="1" name=""/>
+        <p:cNvGrpSpPr/>
+        <p:nvPr/>
+      </p:nvGrpSpPr>
+      <p:grpSpPr/>
+      <p:sp>
+        <p:nvSpPr>
+          <p:cNvPr id="2" name="Rectangle 1"/>
+          <p:cNvSpPr/>
+          <p:nvPr/>
+        </p:nvSpPr>
+        <p:spPr>
+          <a:xfrm>
+            <a:off x="0" y="0"/>
+            <a:ext cx="12191695" cy="82296"/>
+          </a:xfrm>
+          <a:prstGeom prst="rect">
+            <a:avLst/>
+          </a:prstGeom>
+          <a:solidFill>
+            <a:srgbClr val="4F46E5"/>
+          </a:solidFill>
+          <a:ln>
+            <a:noFill/>
+          </a:ln>
+        </p:spPr>
+        <p:style>
+          <a:lnRef idx="1">
+            <a:schemeClr val="accent1"/>
+          </a:lnRef>
+          <a:fillRef idx="3">
+            <a:schemeClr val="accent1"/>
+          </a:fillRef>
+          <a:effectRef idx="2">
+            <a:schemeClr val="accent1"/>
+          </a:effectRef>
+          <a:fontRef idx="minor">
+            <a:schemeClr val="lt1"/>
+          </a:fontRef>
+        </p:style>
+        <p:txBody>
+          <a:bodyPr rtlCol="0" anchor="ctr"/>
+          <a:lstStyle/>
+          <a:p>
+            <a:pPr algn="ctr"/>
+          </a:p>
+        </p:txBody>
+      </p:sp>
+      <p:sp>
+        <p:nvSpPr>
+          <p:cNvPr id="3" name="TextBox 2"/>
+          <p:cNvSpPr txBox="1"/>
+          <p:nvPr/>
+        </p:nvSpPr>
+        <p:spPr>
+          <a:xfrm>
+            <a:off x="548640" y="274320"/>
+            <a:ext cx="11064240" cy="274320"/>
+          </a:xfrm>
+          <a:prstGeom prst="rect">
+            <a:avLst/>
+          </a:prstGeom>
+          <a:noFill/>
+        </p:spPr>
+        <p:txBody>
+          <a:bodyPr wrap="square">
+            <a:spAutoFit/>
+          </a:bodyPr>
+          <a:lstStyle/>
+          <a:p>
+            <a:r>
+              <a:rPr sz="2600" b="1">
+                <a:solidFill>
+                  <a:srgbClr val="1E1B4B"/>
+                </a:solidFill>
+              </a:rPr>
+              <a:t>Slide 3 — Stateless Tier and Fast Image Delivery</a:t>
+            </a:r>
+          </a:p>
+        </p:txBody>
+      </p:sp>
+      <p:sp>
+        <p:nvSpPr>
+          <p:cNvPr id="4" name="TextBox 3"/>
+          <p:cNvSpPr txBox="1"/>
+          <p:nvPr/>
+        </p:nvSpPr>
+        <p:spPr>
+          <a:xfrm>
+            <a:off x="548640" y="1106424"/>
+            <a:ext cx="5394960" cy="274320"/>
+          </a:xfrm>
+          <a:prstGeom prst="rect">
+            <a:avLst/>
+          </a:prstGeom>
+          <a:noFill/>
+        </p:spPr>
+        <p:txBody>
+          <a:bodyPr wrap="square">
+            <a:spAutoFit/>
+          </a:bodyPr>
+          <a:lstStyle/>
+          <a:p>
+            <a:r>
+              <a:rPr sz="1500" b="1">
+                <a:solidFill>
+                  <a:srgbClr val="4F46E5"/>
+                </a:solidFill>
+              </a:rPr>
+              <a:t>Why the App Tier Is Stateless</a:t>
+            </a:r>
+          </a:p>
+        </p:txBody>
+      </p:sp>
+      <p:sp>
+        <p:nvSpPr>
+          <p:cNvPr id="5" name="TextBox 4"/>
+          <p:cNvSpPr txBox="1"/>
+          <p:nvPr/>
+        </p:nvSpPr>
+        <p:spPr>
+          <a:xfrm>
+            <a:off x="548640" y="1391031"/>
+            <a:ext cx="5394960" cy="274320"/>
+          </a:xfrm>
+          <a:prstGeom prst="rect">
+            <a:avLst/>
+          </a:prstGeom>
+          <a:noFill/>
+        </p:spPr>
+        <p:txBody>
+          <a:bodyPr wrap="square">
+            <a:spAutoFit/>
+          </a:bodyPr>
+          <a:lstStyle/>
+          <a:p>
+            <a:r>
+              <a:rPr sz="1150" b="0">
+                <a:solidFill>
+                  <a:srgbClr val="1E1B4B"/>
+                </a:solidFill>
+              </a:rPr>
+              <a:t>Round-robin only works if any instance can serve any request. Flask sessions are signed client-side cookies, so cart and login state travel with the request rather than living on one server.</a:t>
+            </a:r>
+          </a:p>
+        </p:txBody>
+      </p:sp>
+      <p:sp>
+        <p:nvSpPr>
+          <p:cNvPr id="6" name="TextBox 5"/>
+          <p:cNvSpPr txBox="1"/>
+          <p:nvPr/>
+        </p:nvSpPr>
+        <p:spPr>
+          <a:xfrm>
+            <a:off x="548640" y="1661350"/>
+            <a:ext cx="5394960" cy="274320"/>
+          </a:xfrm>
+          <a:prstGeom prst="rect">
+            <a:avLst/>
+          </a:prstGeom>
+          <a:noFill/>
+        </p:spPr>
+        <p:txBody>
+          <a:bodyPr wrap="square">
+            <a:spAutoFit/>
+          </a:bodyPr>
+          <a:lstStyle/>
+          <a:p>
+            <a:r>
+              <a:rPr sz="1150" b="0">
+                <a:solidFill>
+                  <a:srgbClr val="1E1B4B"/>
+                </a:solidFill>
+              </a:rPr>
+              <a:t>The proof: a cart built on instance A, read back from instance B — a different process with a different database — returns the identical cart.</a:t>
+            </a:r>
+          </a:p>
+        </p:txBody>
+      </p:sp>
+      <p:pic>
+        <p:nvPicPr>
+          <p:cNvPr id="7" name="Picture 6" descr="14-stateless-session.png"/>
+          <p:cNvPicPr>
+            <a:picLocks noChangeAspect="1"/>
+          </p:cNvPicPr>
+          <p:nvPr/>
+        </p:nvPicPr>
+        <p:blipFill>
+          <a:blip r:embed="rId2"/>
+          <a:stretch>
+            <a:fillRect/>
+          </a:stretch>
+        </p:blipFill>
+        <p:spPr>
+          <a:xfrm>
+            <a:off x="548640" y="1931669"/>
+            <a:ext cx="5394960" cy="2820092"/>
+          </a:xfrm>
+          <a:prstGeom prst="rect">
+            <a:avLst/>
+          </a:prstGeom>
+        </p:spPr>
+      </p:pic>
+      <p:sp>
+        <p:nvSpPr>
+          <p:cNvPr id="8" name="TextBox 7"/>
+          <p:cNvSpPr txBox="1"/>
+          <p:nvPr/>
+        </p:nvSpPr>
+        <p:spPr>
+          <a:xfrm>
+            <a:off x="548640" y="4879777"/>
+            <a:ext cx="5394960" cy="274320"/>
+          </a:xfrm>
+          <a:prstGeom prst="rect">
+            <a:avLst/>
+          </a:prstGeom>
+          <a:noFill/>
+        </p:spPr>
+        <p:txBody>
+          <a:bodyPr wrap="square">
+            <a:spAutoFit/>
+          </a:bodyPr>
+          <a:lstStyle/>
+          <a:p>
+            <a:r>
+              <a:rPr sz="1150" b="0">
+                <a:solidFill>
+                  <a:srgbClr val="1E1B4B"/>
+                </a:solidFill>
+              </a:rPr>
+              <a:t>This is why the deployment needs no sticky sessions. SECRET_KEY is shared across instances; any of them can verify the signature.</a:t>
+            </a:r>
+          </a:p>
+        </p:txBody>
+      </p:sp>
+      <p:sp>
+        <p:nvSpPr>
+          <p:cNvPr id="9" name="TextBox 8"/>
+          <p:cNvSpPr txBox="1"/>
+          <p:nvPr/>
+        </p:nvSpPr>
+        <p:spPr>
+          <a:xfrm>
+            <a:off x="6400800" y="1106424"/>
+            <a:ext cx="5394960" cy="274320"/>
+          </a:xfrm>
+          <a:prstGeom prst="rect">
+            <a:avLst/>
+          </a:prstGeom>
+          <a:noFill/>
+        </p:spPr>
+        <p:txBody>
+          <a:bodyPr wrap="square">
+            <a:spAutoFit/>
+          </a:bodyPr>
+          <a:lstStyle/>
+          <a:p>
+            <a:r>
+              <a:rPr sz="1500" b="1">
+                <a:solidFill>
+                  <a:srgbClr val="4F46E5"/>
+                </a:solidFill>
+              </a:rPr>
+              <a:t>Fast Image Loading</a:t>
+            </a:r>
+          </a:p>
+        </p:txBody>
+      </p:sp>
+      <p:sp>
+        <p:nvSpPr>
+          <p:cNvPr id="10" name="TextBox 9"/>
+          <p:cNvSpPr txBox="1"/>
+          <p:nvPr/>
+        </p:nvSpPr>
+        <p:spPr>
+          <a:xfrm>
+            <a:off x="6400800" y="1391031"/>
+            <a:ext cx="5394960" cy="274320"/>
+          </a:xfrm>
+          <a:prstGeom prst="rect">
+            <a:avLst/>
+          </a:prstGeom>
+          <a:noFill/>
+        </p:spPr>
+        <p:txBody>
+          <a:bodyPr wrap="square">
+            <a:spAutoFit/>
+          </a:bodyPr>
+          <a:lstStyle/>
+          <a:p>
+            <a:r>
+              <a:rPr sz="1150" b="0">
+                <a:solidFill>
+                  <a:srgbClr val="1E1B4B"/>
+                </a:solidFill>
+              </a:rPr>
+              <a:t>Product images are remote URLs, never served by the app — the application ships zero binary assets, so image bandwidth never touches the instances or the load balancer. That is CDN offload in practice.</a:t>
+            </a:r>
+          </a:p>
+        </p:txBody>
+      </p:sp>
+      <p:sp>
+        <p:nvSpPr>
+          <p:cNvPr id="11" name="TextBox 10"/>
+          <p:cNvSpPr txBox="1"/>
+          <p:nvPr/>
+        </p:nvSpPr>
+        <p:spPr>
+          <a:xfrm>
+            <a:off x="6400800" y="1661350"/>
+            <a:ext cx="5394960" cy="274320"/>
+          </a:xfrm>
+          <a:prstGeom prst="rect">
+            <a:avLst/>
+          </a:prstGeom>
+          <a:noFill/>
+        </p:spPr>
+        <p:txBody>
+          <a:bodyPr wrap="square">
+            <a:spAutoFit/>
+          </a:bodyPr>
+          <a:lstStyle/>
+          <a:p>
+            <a:r>
+              <a:rPr sz="1150" b="0">
+                <a:solidFill>
+                  <a:srgbClr val="1E1B4B"/>
+                </a:solidFill>
+              </a:rPr>
+              <a:t>Delivery was then tuned in the browser:</a:t>
+            </a:r>
+          </a:p>
+        </p:txBody>
+      </p:sp>
+      <p:graphicFrame>
+        <p:nvGraphicFramePr>
+          <p:cNvPr id="12" name="Table 11"/>
+          <p:cNvGraphicFramePr>
+            <a:graphicFrameLocks noGrp="1"/>
+          </p:cNvGraphicFramePr>
+          <p:nvPr/>
+        </p:nvGraphicFramePr>
+        <p:xfrm>
+          <a:off x="6400800" y="1968245"/>
+          <a:ext cx="5394960" cy="713232"/>
+        </p:xfrm>
+        <a:graphic>
+          <a:graphicData uri="http://schemas.openxmlformats.org/drawingml/2006/table">
+            <a:tbl>
+              <a:tblPr firstRow="1" bandRow="1">
+                <a:tableStyleId>{5C22544A-7EE6-4342-B048-85BDC9FD1C3A}</a:tableStyleId>
+              </a:tblPr>
+              <a:tblGrid>
+                <a:gridCol w="2697480"/>
+                <a:gridCol w="2697480"/>
+              </a:tblGrid>
+              <a:tr h="237744">
+                <a:tc>
+                  <a:txBody>
+                    <a:bodyPr/>
+                    <a:lstStyle/>
+                    <a:p>
+                      <a:pPr>
+                        <a:defRPr sz="1000" b="1">
+                          <a:solidFill>
+                            <a:srgbClr val="1E1B4B"/>
+                          </a:solidFill>
+                        </a:defRPr>
+                      </a:pPr>
+                      <a:r>
+                        <a:t>Technique</a:t>
+                      </a:r>
+                    </a:p>
+                  </a:txBody>
+                  <a:tcPr>
+                    <a:solidFill>
+                      <a:srgbClr val="EEF2FF"/>
+                    </a:solidFill>
+                  </a:tcPr>
+                </a:tc>
+                <a:tc>
+                  <a:txBody>
+                    <a:bodyPr/>
+                    <a:lstStyle/>
+                    <a:p>
+                      <a:pPr>
+                        <a:defRPr sz="1000" b="1">
+                          <a:solidFill>
+                            <a:srgbClr val="1E1B4B"/>
+                          </a:solidFill>
+                        </a:defRPr>
+                      </a:pPr>
+                      <a:r>
+                        <a:t>Effect</a:t>
+                      </a:r>
+                    </a:p>
+                  </a:txBody>
+                  <a:tcPr>
+                    <a:solidFill>
+                      <a:srgbClr val="EEF2FF"/>
+                    </a:solidFill>
+                  </a:tcPr>
+                </a:tc>
+              </a:tr>
+              <a:tr h="237744">
+                <a:tc>
+                  <a:txBody>
+                    <a:bodyPr/>
+                    <a:lstStyle/>
+                    <a:p>
+                      <a:pPr>
+                        <a:defRPr sz="950">
+                          <a:solidFill>
+                            <a:srgbClr val="1E1B4B"/>
+                          </a:solidFill>
+                        </a:defRPr>
+                      </a:pPr>
+                      <a:r>
+                        <a:t>loading="lazy"</a:t>
                       </a:r>
                     </a:p>
                   </a:txBody>
@@ -6086,30 +5131,7 @@
                         </a:defRPr>
                       </a:pPr>
                       <a:r>
-                        <a:t>Horizontal scroll</a:t>
-                      </a:r>
-                    </a:p>
-                  </a:txBody>
-                  <a:tcPr>
-                    <a:solidFill>
-                      <a:srgbClr val="FFFFFF"/>
-                    </a:solidFill>
-                  </a:tcPr>
-                </a:tc>
-                <a:tc>
-                  <a:txBody>
-                    <a:bodyPr/>
-                    <a:lstStyle/>
-                    <a:p>
-                      <a:pPr>
-                        <a:defRPr sz="950">
-                          <a:solidFill>
-                            <a:srgbClr val="1E1B4B"/>
-                          </a:solidFill>
-                        </a:defRPr>
-                      </a:pPr>
-                      <a:r>
-                        <a:t>Fluid width with a cap</a:t>
+                        <a:t>Below-the-fold images deferred until scrolled toward</a:t>
                       </a:r>
                     </a:p>
                   </a:txBody>
@@ -6134,7 +5156,7 @@
                         </a:defRPr>
                       </a:pPr>
                       <a:r>
-                        <a:t>4</a:t>
+                        <a:t>decoding="async"</a:t>
                       </a:r>
                     </a:p>
                   </a:txBody>
@@ -6157,147 +5179,7 @@
                         </a:defRPr>
                       </a:pPr>
                       <a:r>
-                        <a:t>Admin tables stretched page</a:t>
-                      </a:r>
-                    </a:p>
-                  </a:txBody>
-                  <a:tcPr>
-                    <a:solidFill>
-                      <a:srgbClr val="FFFFFF"/>
-                    </a:solidFill>
-                  </a:tcPr>
-                </a:tc>
-                <a:tc>
-                  <a:txBody>
-                    <a:bodyPr/>
-                    <a:lstStyle/>
-                    <a:p>
-                      <a:pPr>
-                        <a:defRPr sz="950">
-                          <a:solidFill>
-                            <a:srgbClr val="1E1B4B"/>
-                          </a:solidFill>
-                        </a:defRPr>
-                      </a:pPr>
-                      <a:r>
-                        <a:t>Horizontal scroll</a:t>
-                      </a:r>
-                    </a:p>
-                  </a:txBody>
-                  <a:tcPr>
-                    <a:solidFill>
-                      <a:srgbClr val="FFFFFF"/>
-                    </a:solidFill>
-                  </a:tcPr>
-                </a:tc>
-                <a:tc>
-                  <a:txBody>
-                    <a:bodyPr/>
-                    <a:lstStyle/>
-                    <a:p>
-                      <a:pPr>
-                        <a:defRPr sz="950">
-                          <a:solidFill>
-                            <a:srgbClr val="1E1B4B"/>
-                          </a:solidFill>
-                        </a:defRPr>
-                      </a:pPr>
-                      <a:r>
-                        <a:t>Dedicated scroll container</a:t>
-                      </a:r>
-                    </a:p>
-                  </a:txBody>
-                  <a:tcPr>
-                    <a:solidFill>
-                      <a:srgbClr val="FFFFFF"/>
-                    </a:solidFill>
-                  </a:tcPr>
-                </a:tc>
-              </a:tr>
-              <a:tr h="237744">
-                <a:tc>
-                  <a:txBody>
-                    <a:bodyPr/>
-                    <a:lstStyle/>
-                    <a:p>
-                      <a:pPr>
-                        <a:defRPr sz="950">
-                          <a:solidFill>
-                            <a:srgbClr val="1E1B4B"/>
-                          </a:solidFill>
-                        </a:defRPr>
-                      </a:pPr>
-                      <a:r>
-                        <a:t>5</a:t>
-                      </a:r>
-                    </a:p>
-                  </a:txBody>
-                  <a:tcPr>
-                    <a:solidFill>
-                      <a:srgbClr val="FFFFFF"/>
-                    </a:solidFill>
-                  </a:tcPr>
-                </a:tc>
-                <a:tc>
-                  <a:txBody>
-                    <a:bodyPr/>
-                    <a:lstStyle/>
-                    <a:p>
-                      <a:pPr>
-                        <a:defRPr sz="950">
-                          <a:solidFill>
-                            <a:srgbClr val="1E1B4B"/>
-                          </a:solidFill>
-                        </a:defRPr>
-                      </a:pPr>
-                      <a:r>
-                        <a:t>Catalog 5.8s on Slow 3G</a:t>
-                      </a:r>
-                    </a:p>
-                  </a:txBody>
-                  <a:tcPr>
-                    <a:solidFill>
-                      <a:srgbClr val="FFFFFF"/>
-                    </a:solidFill>
-                  </a:tcPr>
-                </a:tc>
-                <a:tc>
-                  <a:txBody>
-                    <a:bodyPr/>
-                    <a:lstStyle/>
-                    <a:p>
-                      <a:pPr>
-                        <a:defRPr sz="950">
-                          <a:solidFill>
-                            <a:srgbClr val="1E1B4B"/>
-                          </a:solidFill>
-                        </a:defRPr>
-                      </a:pPr>
-                      <a:r>
-                        <a:t>Perceived performance</a:t>
-                      </a:r>
-                    </a:p>
-                  </a:txBody>
-                  <a:tcPr>
-                    <a:solidFill>
-                      <a:srgbClr val="FFFFFF"/>
-                    </a:solidFill>
-                  </a:tcPr>
-                </a:tc>
-                <a:tc>
-                  <a:txBody>
-                    <a:bodyPr/>
-                    <a:lstStyle/>
-                    <a:p>
-                      <a:pPr>
-                        <a:defRPr sz="950">
-                          <a:solidFill>
-                            <a:srgbClr val="1E1B4B"/>
-                          </a:solidFill>
-                        </a:defRPr>
-                      </a:pPr>
-                      <a:r>
-                        <a:t>Lazy-loaded thumbnails</a:t>
+                        <a:t>Decode off the main thread; no render block</a:t>
                       </a:r>
                     </a:p>
                   </a:txBody>
@@ -6314,13 +5196,13 @@
       </p:graphicFrame>
       <p:sp>
         <p:nvSpPr>
-          <p:cNvPr id="6" name="TextBox 5"/>
+          <p:cNvPr id="13" name="TextBox 12"/>
           <p:cNvSpPr txBox="1"/>
           <p:nvPr/>
         </p:nvSpPr>
         <p:spPr>
           <a:xfrm>
-            <a:off x="548640" y="3036951"/>
+            <a:off x="6400800" y="2809493"/>
             <a:ext cx="5394960" cy="274320"/>
           </a:xfrm>
           <a:prstGeom prst="rect">
@@ -6335,126 +5217,27 @@
           <a:lstStyle/>
           <a:p>
             <a:r>
-              <a:rPr sz="1500" b="1">
-                <a:solidFill>
-                  <a:srgbClr val="4F46E5"/>
+              <a:rPr sz="1150" b="0">
+                <a:solidFill>
+                  <a:srgbClr val="1E1B4B"/>
                 </a:solidFill>
               </a:rPr>
-              <a:t>Two Root Causes, Not Five Bugs</a:t>
-            </a:r>
-          </a:p>
-        </p:txBody>
-      </p:sp>
-      <p:sp>
-        <p:nvSpPr>
-          <p:cNvPr id="7" name="TextBox 6"/>
-          <p:cNvSpPr txBox="1"/>
-          <p:nvPr/>
-        </p:nvSpPr>
-        <p:spPr>
-          <a:xfrm>
-            <a:off x="548640" y="3321558"/>
-            <a:ext cx="5394960" cy="274320"/>
-          </a:xfrm>
-          <a:prstGeom prst="rect">
-            <a:avLst/>
-          </a:prstGeom>
-          <a:noFill/>
-        </p:spPr>
-        <p:txBody>
-          <a:bodyPr wrap="square">
-            <a:spAutoFit/>
-          </a:bodyPr>
-          <a:lstStyle/>
-          <a:p>
-            <a:r>
-              <a:rPr sz="1150" b="0">
-                <a:solidFill>
-                  <a:srgbClr val="1E1B4B"/>
-                </a:solidFill>
-              </a:rPr>
-              <a:t>Issues 2–4 share one cause: the default content-box model, where width: 100% plus padding exceeds the parent. One line — box-sizing: border-box — fixed three pages.</a:t>
-            </a:r>
-          </a:p>
-        </p:txBody>
-      </p:sp>
-      <p:sp>
-        <p:nvSpPr>
-          <p:cNvPr id="8" name="TextBox 7"/>
-          <p:cNvSpPr txBox="1"/>
-          <p:nvPr/>
-        </p:nvSpPr>
-        <p:spPr>
-          <a:xfrm>
-            <a:off x="548640" y="3591877"/>
-            <a:ext cx="5394960" cy="274320"/>
-          </a:xfrm>
-          <a:prstGeom prst="rect">
-            <a:avLst/>
-          </a:prstGeom>
-          <a:noFill/>
-        </p:spPr>
-        <p:txBody>
-          <a:bodyPr wrap="square">
-            <a:spAutoFit/>
-          </a:bodyPr>
-          <a:lstStyle/>
-          <a:p>
-            <a:r>
-              <a:rPr sz="1150" b="0">
-                <a:solidFill>
-                  <a:srgbClr val="1E1B4B"/>
-                </a:solidFill>
-              </a:rPr>
-              <a:t>Issue 5 was nine full-size images fetched eagerly, including those far below the fold.</a:t>
-            </a:r>
-          </a:p>
-        </p:txBody>
-      </p:sp>
-      <p:sp>
-        <p:nvSpPr>
-          <p:cNvPr id="9" name="TextBox 8"/>
-          <p:cNvSpPr txBox="1"/>
-          <p:nvPr/>
-        </p:nvSpPr>
-        <p:spPr>
-          <a:xfrm>
-            <a:off x="548640" y="3917060"/>
-            <a:ext cx="5394960" cy="274320"/>
-          </a:xfrm>
-          <a:prstGeom prst="rect">
-            <a:avLst/>
-          </a:prstGeom>
-          <a:noFill/>
-        </p:spPr>
-        <p:txBody>
-          <a:bodyPr wrap="square">
-            <a:spAutoFit/>
-          </a:bodyPr>
-          <a:lstStyle/>
-          <a:p>
-            <a:r>
-              <a:rPr sz="1500" b="1">
-                <a:solidFill>
-                  <a:srgbClr val="4F46E5"/>
-                </a:solidFill>
-              </a:rPr>
-              <a:t>Measured Outcome</a:t>
+              <a:t>Measured on throttled Slow 3G (400 kbps, 400 ms RTT):</a:t>
             </a:r>
           </a:p>
         </p:txBody>
       </p:sp>
       <p:graphicFrame>
         <p:nvGraphicFramePr>
-          <p:cNvPr id="10" name="Table 9"/>
+          <p:cNvPr id="14" name="Table 13"/>
           <p:cNvGraphicFramePr>
             <a:graphicFrameLocks noGrp="1"/>
           </p:cNvGraphicFramePr>
           <p:nvPr/>
         </p:nvGraphicFramePr>
         <p:xfrm>
-          <a:off x="548640" y="4238243"/>
-          <a:ext cx="5394960" cy="950976"/>
+          <a:off x="6400800" y="3116388"/>
+          <a:ext cx="5394960" cy="475488"/>
         </p:xfrm>
         <a:graphic>
           <a:graphicData uri="http://schemas.openxmlformats.org/drawingml/2006/table">
@@ -6552,7 +5335,7 @@
                         </a:defRPr>
                       </a:pPr>
                       <a:r>
-                        <a:t>Catalog load, Slow 3G</a:t>
+                        <a:t>Catalog load (9 images)</a:t>
                       </a:r>
                     </a:p>
                   </a:txBody>
@@ -6598,149 +5381,7 @@
                         </a:defRPr>
                       </a:pPr>
                       <a:r>
-                        <a:t>968 ms (83% faster)</a:t>
-                      </a:r>
-                    </a:p>
-                  </a:txBody>
-                  <a:tcPr>
-                    <a:solidFill>
-                      <a:srgbClr val="FFFFFF"/>
-                    </a:solidFill>
-                  </a:tcPr>
-                </a:tc>
-              </a:tr>
-              <a:tr h="237744">
-                <a:tc>
-                  <a:txBody>
-                    <a:bodyPr/>
-                    <a:lstStyle/>
-                    <a:p>
-                      <a:pPr>
-                        <a:defRPr sz="950">
-                          <a:solidFill>
-                            <a:srgbClr val="1E1B4B"/>
-                          </a:solidFill>
-                        </a:defRPr>
-                      </a:pPr>
-                      <a:r>
-                        <a:t>Pages overflowing at 375px</a:t>
-                      </a:r>
-                    </a:p>
-                  </a:txBody>
-                  <a:tcPr>
-                    <a:solidFill>
-                      <a:srgbClr val="FFFFFF"/>
-                    </a:solidFill>
-                  </a:tcPr>
-                </a:tc>
-                <a:tc>
-                  <a:txBody>
-                    <a:bodyPr/>
-                    <a:lstStyle/>
-                    <a:p>
-                      <a:pPr>
-                        <a:defRPr sz="950">
-                          <a:solidFill>
-                            <a:srgbClr val="1E1B4B"/>
-                          </a:solidFill>
-                        </a:defRPr>
-                      </a:pPr>
-                      <a:r>
-                        <a:t>4 of 12</a:t>
-                      </a:r>
-                    </a:p>
-                  </a:txBody>
-                  <a:tcPr>
-                    <a:solidFill>
-                      <a:srgbClr val="FFFFFF"/>
-                    </a:solidFill>
-                  </a:tcPr>
-                </a:tc>
-                <a:tc>
-                  <a:txBody>
-                    <a:bodyPr/>
-                    <a:lstStyle/>
-                    <a:p>
-                      <a:pPr>
-                        <a:defRPr sz="950">
-                          <a:solidFill>
-                            <a:srgbClr val="1E1B4B"/>
-                          </a:solidFill>
-                        </a:defRPr>
-                      </a:pPr>
-                      <a:r>
-                        <a:t>0 of 12</a:t>
-                      </a:r>
-                    </a:p>
-                  </a:txBody>
-                  <a:tcPr>
-                    <a:solidFill>
-                      <a:srgbClr val="FFFFFF"/>
-                    </a:solidFill>
-                  </a:tcPr>
-                </a:tc>
-              </a:tr>
-              <a:tr h="237744">
-                <a:tc>
-                  <a:txBody>
-                    <a:bodyPr/>
-                    <a:lstStyle/>
-                    <a:p>
-                      <a:pPr>
-                        <a:defRPr sz="950">
-                          <a:solidFill>
-                            <a:srgbClr val="1E1B4B"/>
-                          </a:solidFill>
-                        </a:defRPr>
-                      </a:pPr>
-                      <a:r>
-                        <a:t>Nav overflow at 375px</a:t>
-                      </a:r>
-                    </a:p>
-                  </a:txBody>
-                  <a:tcPr>
-                    <a:solidFill>
-                      <a:srgbClr val="FFFFFF"/>
-                    </a:solidFill>
-                  </a:tcPr>
-                </a:tc>
-                <a:tc>
-                  <a:txBody>
-                    <a:bodyPr/>
-                    <a:lstStyle/>
-                    <a:p>
-                      <a:pPr>
-                        <a:defRPr sz="950">
-                          <a:solidFill>
-                            <a:srgbClr val="1E1B4B"/>
-                          </a:solidFill>
-                        </a:defRPr>
-                      </a:pPr>
-                      <a:r>
-                        <a:t>552px into 343px</a:t>
-                      </a:r>
-                    </a:p>
-                  </a:txBody>
-                  <a:tcPr>
-                    <a:solidFill>
-                      <a:srgbClr val="FFFFFF"/>
-                    </a:solidFill>
-                  </a:tcPr>
-                </a:tc>
-                <a:tc>
-                  <a:txBody>
-                    <a:bodyPr/>
-                    <a:lstStyle/>
-                    <a:p>
-                      <a:pPr>
-                        <a:defRPr sz="950">
-                          <a:solidFill>
-                            <a:srgbClr val="1E1B4B"/>
-                          </a:solidFill>
-                        </a:defRPr>
-                      </a:pPr>
-                      <a:r>
-                        <a:t>No overflow</a:t>
+                        <a:t>968 ms — 83% faster</a:t>
                       </a:r>
                     </a:p>
                   </a:txBody>
@@ -6757,14 +5398,14 @@
       </p:graphicFrame>
       <p:sp>
         <p:nvSpPr>
-          <p:cNvPr id="11" name="TextBox 10"/>
+          <p:cNvPr id="15" name="TextBox 14"/>
           <p:cNvSpPr txBox="1"/>
           <p:nvPr/>
         </p:nvSpPr>
         <p:spPr>
           <a:xfrm>
-            <a:off x="6400800" y="1051560"/>
-            <a:ext cx="5394960" cy="274320"/>
+            <a:off x="548640" y="6446520"/>
+            <a:ext cx="6400800" cy="274320"/>
           </a:xfrm>
           <a:prstGeom prst="rect">
             <a:avLst/>
@@ -6778,26 +5419,26 @@
           <a:lstStyle/>
           <a:p>
             <a:r>
-              <a:rPr sz="1150" b="0">
-                <a:solidFill>
-                  <a:srgbClr val="1E1B4B"/>
+              <a:rPr sz="900" b="0">
+                <a:solidFill>
+                  <a:srgbClr val="8890A8"/>
                 </a:solidFill>
               </a:rPr>
-              <a:t>Every fix was re-verified by the same instrumented measurement that found it — not by looking again.</a:t>
-            </a:r>
-          </a:p>
-        </p:txBody>
-      </p:sp>
-      <p:sp>
-        <p:nvSpPr>
-          <p:cNvPr id="12" name="TextBox 11"/>
+              <a:t>Flask E-Commerce — Cloud Computing (UCBX)</a:t>
+            </a:r>
+          </a:p>
+        </p:txBody>
+      </p:sp>
+      <p:sp>
+        <p:nvSpPr>
+          <p:cNvPr id="16" name="TextBox 15"/>
           <p:cNvSpPr txBox="1"/>
           <p:nvPr/>
         </p:nvSpPr>
         <p:spPr>
           <a:xfrm>
-            <a:off x="548640" y="6446520"/>
-            <a:ext cx="6400800" cy="274320"/>
+            <a:off x="11155680" y="6446520"/>
+            <a:ext cx="548640" cy="274320"/>
           </a:xfrm>
           <a:prstGeom prst="rect">
             <a:avLst/>
@@ -6816,40 +5457,7 @@
                   <a:srgbClr val="8890A8"/>
                 </a:solidFill>
               </a:rPr>
-              <a:t>Flask E-Commerce — Cloud Computing (UCBX)</a:t>
-            </a:r>
-          </a:p>
-        </p:txBody>
-      </p:sp>
-      <p:sp>
-        <p:nvSpPr>
-          <p:cNvPr id="13" name="TextBox 12"/>
-          <p:cNvSpPr txBox="1"/>
-          <p:nvPr/>
-        </p:nvSpPr>
-        <p:spPr>
-          <a:xfrm>
-            <a:off x="11155680" y="6446520"/>
-            <a:ext cx="548640" cy="274320"/>
-          </a:xfrm>
-          <a:prstGeom prst="rect">
-            <a:avLst/>
-          </a:prstGeom>
-          <a:noFill/>
-        </p:spPr>
-        <p:txBody>
-          <a:bodyPr wrap="square">
-            <a:spAutoFit/>
-          </a:bodyPr>
-          <a:lstStyle/>
-          <a:p>
-            <a:r>
-              <a:rPr sz="900" b="0">
-                <a:solidFill>
-                  <a:srgbClr val="8890A8"/>
-                </a:solidFill>
-              </a:rPr>
-              <a:t>4 / 5</a:t>
+              <a:t>3 / 5</a:t>
             </a:r>
           </a:p>
         </p:txBody>
@@ -6862,7 +5470,7 @@
 </p:sld>
 </file>
 
-<file path=ppt/slides/slide5.xml><?xml version="1.0" encoding="utf-8"?>
+<file path=ppt/slides/slide4.xml><?xml version="1.0" encoding="utf-8"?>
 <p:sld xmlns:a="http://schemas.openxmlformats.org/drawingml/2006/main" xmlns:p="http://schemas.openxmlformats.org/presentationml/2006/main" xmlns:r="http://schemas.openxmlformats.org/officeDocument/2006/relationships">
   <p:cSld>
     <p:spTree>
@@ -6943,7 +5551,7 @@
                   <a:srgbClr val="1E1B4B"/>
                 </a:solidFill>
               </a:rPr>
-              <a:t>Slide 5 — Proof: Elastic Capacity in Action</a:t>
+              <a:t>Slide 4 — Security and Role-Based Access Control</a:t>
             </a:r>
           </a:p>
         </p:txBody>
@@ -6976,7 +5584,7 @@
                   <a:srgbClr val="4F46E5"/>
                 </a:solidFill>
               </a:rPr>
-              <a:t>The Claim, Demonstrated</a:t>
+              <a:t>Roles: How They Work</a:t>
             </a:r>
           </a:p>
         </p:txBody>
@@ -7009,44 +5617,20 @@
                   <a:srgbClr val="1E1B4B"/>
                 </a:solidFill>
               </a:rPr>
-              <a:t>Slide 1 promised capacity that follows demand. This is that behavior, captured live — a third instance joining and leaving a running pool with no restart and no configuration change.</a:t>
-            </a:r>
-          </a:p>
-        </p:txBody>
-      </p:sp>
-      <p:pic>
-        <p:nvPicPr>
-          <p:cNvPr id="6" name="Picture 5" descr="13-load-balancer.png"/>
-          <p:cNvPicPr>
-            <a:picLocks noChangeAspect="1"/>
-          </p:cNvPicPr>
-          <p:nvPr/>
-        </p:nvPicPr>
-        <p:blipFill>
-          <a:blip r:embed="rId2"/>
-          <a:stretch>
-            <a:fillRect/>
-          </a:stretch>
-        </p:blipFill>
-        <p:spPr>
-          <a:xfrm>
-            <a:off x="548640" y="1661350"/>
-            <a:ext cx="3847927" cy="2834640"/>
-          </a:xfrm>
-          <a:prstGeom prst="rect">
-            <a:avLst/>
-          </a:prstGeom>
-        </p:spPr>
-      </p:pic>
-      <p:sp>
-        <p:nvSpPr>
-          <p:cNvPr id="7" name="TextBox 6"/>
+              <a:t>A single is_admin flag on User, enforced by an @admin_required decorator that aborts with 403 for anyone unauthenticated or non-admin.</a:t>
+            </a:r>
+          </a:p>
+        </p:txBody>
+      </p:sp>
+      <p:sp>
+        <p:nvSpPr>
+          <p:cNvPr id="6" name="TextBox 5"/>
           <p:cNvSpPr txBox="1"/>
           <p:nvPr/>
         </p:nvSpPr>
         <p:spPr>
           <a:xfrm>
-            <a:off x="548640" y="4678870"/>
+            <a:off x="548640" y="1661350"/>
             <a:ext cx="5394960" cy="274320"/>
           </a:xfrm>
           <a:prstGeom prst="rect">
@@ -7055,32 +5639,176 @@
           <a:noFill/>
         </p:spPr>
         <p:txBody>
+          <a:bodyPr wrap="none">
+            <a:spAutoFit/>
+          </a:bodyPr>
+          <a:lstStyle/>
+          <a:p>
+            <a:r>
+              <a:rPr sz="850">
+                <a:solidFill>
+                  <a:srgbClr val="555F7A"/>
+                </a:solidFill>
+                <a:latin typeface="Menlo"/>
+              </a:rPr>
+              <a:t>def admin_required(f):</a:t>
+            </a:r>
+          </a:p>
+          <a:p>
+            <a:r>
+              <a:rPr sz="850">
+                <a:solidFill>
+                  <a:srgbClr val="555F7A"/>
+                </a:solidFill>
+                <a:latin typeface="Menlo"/>
+              </a:rPr>
+              <a:t>    @wraps(f)</a:t>
+            </a:r>
+          </a:p>
+          <a:p>
+            <a:r>
+              <a:rPr sz="850">
+                <a:solidFill>
+                  <a:srgbClr val="555F7A"/>
+                </a:solidFill>
+                <a:latin typeface="Menlo"/>
+              </a:rPr>
+              <a:t>    def decorated_function(*args, **kwargs):</a:t>
+            </a:r>
+          </a:p>
+          <a:p>
+            <a:r>
+              <a:rPr sz="850">
+                <a:solidFill>
+                  <a:srgbClr val="555F7A"/>
+                </a:solidFill>
+                <a:latin typeface="Menlo"/>
+              </a:rPr>
+              <a:t>        if (not current_user.is_authenticated</a:t>
+            </a:r>
+          </a:p>
+          <a:p>
+            <a:r>
+              <a:rPr sz="850">
+                <a:solidFill>
+                  <a:srgbClr val="555F7A"/>
+                </a:solidFill>
+                <a:latin typeface="Menlo"/>
+              </a:rPr>
+              <a:t>                or not current_user.is_admin):</a:t>
+            </a:r>
+          </a:p>
+          <a:p>
+            <a:r>
+              <a:rPr sz="850">
+                <a:solidFill>
+                  <a:srgbClr val="555F7A"/>
+                </a:solidFill>
+                <a:latin typeface="Menlo"/>
+              </a:rPr>
+              <a:t>            abort(403)</a:t>
+            </a:r>
+          </a:p>
+          <a:p>
+            <a:r>
+              <a:rPr sz="850">
+                <a:solidFill>
+                  <a:srgbClr val="555F7A"/>
+                </a:solidFill>
+                <a:latin typeface="Menlo"/>
+              </a:rPr>
+              <a:t>        return f(*args, **kwargs)</a:t>
+            </a:r>
+          </a:p>
+          <a:p>
+            <a:r>
+              <a:rPr sz="850">
+                <a:solidFill>
+                  <a:srgbClr val="555F7A"/>
+                </a:solidFill>
+                <a:latin typeface="Menlo"/>
+              </a:rPr>
+              <a:t>    return decorated_function</a:t>
+            </a:r>
+          </a:p>
+        </p:txBody>
+      </p:sp>
+      <p:sp>
+        <p:nvSpPr>
+          <p:cNvPr id="7" name="TextBox 6"/>
+          <p:cNvSpPr txBox="1"/>
+          <p:nvPr/>
+        </p:nvSpPr>
+        <p:spPr>
+          <a:xfrm>
+            <a:off x="548640" y="2895790"/>
+            <a:ext cx="5394960" cy="274320"/>
+          </a:xfrm>
+          <a:prstGeom prst="rect">
+            <a:avLst/>
+          </a:prstGeom>
+          <a:noFill/>
+        </p:spPr>
+        <p:txBody>
           <a:bodyPr wrap="square">
             <a:spAutoFit/>
           </a:bodyPr>
           <a:lstStyle/>
           <a:p>
             <a:r>
+              <a:rPr sz="1150" b="0">
+                <a:solidFill>
+                  <a:srgbClr val="1E1B4B"/>
+                </a:solidFill>
+              </a:rPr>
+              <a:t>Coverage: 12 admin-gated routes · 10 login-gated routes.</a:t>
+            </a:r>
+          </a:p>
+        </p:txBody>
+      </p:sp>
+      <p:sp>
+        <p:nvSpPr>
+          <p:cNvPr id="8" name="TextBox 7"/>
+          <p:cNvSpPr txBox="1"/>
+          <p:nvPr/>
+        </p:nvSpPr>
+        <p:spPr>
+          <a:xfrm>
+            <a:off x="548640" y="3220973"/>
+            <a:ext cx="5394960" cy="274320"/>
+          </a:xfrm>
+          <a:prstGeom prst="rect">
+            <a:avLst/>
+          </a:prstGeom>
+          <a:noFill/>
+        </p:spPr>
+        <p:txBody>
+          <a:bodyPr wrap="square">
+            <a:spAutoFit/>
+          </a:bodyPr>
+          <a:lstStyle/>
+          <a:p>
+            <a:r>
               <a:rPr sz="1500" b="1">
                 <a:solidFill>
                   <a:srgbClr val="4F46E5"/>
                 </a:solidFill>
               </a:rPr>
-              <a:t>What the Log Shows</a:t>
+              <a:t>Four Tiers of Authorization</a:t>
             </a:r>
           </a:p>
         </p:txBody>
       </p:sp>
       <p:graphicFrame>
         <p:nvGraphicFramePr>
-          <p:cNvPr id="8" name="Table 7"/>
+          <p:cNvPr id="9" name="Table 8"/>
           <p:cNvGraphicFramePr>
             <a:graphicFrameLocks noGrp="1"/>
           </p:cNvGraphicFramePr>
           <p:nvPr/>
         </p:nvGraphicFramePr>
         <p:xfrm>
-          <a:off x="548640" y="5000053"/>
+          <a:off x="548640" y="3542156"/>
           <a:ext cx="5394960" cy="1188720"/>
         </p:xfrm>
         <a:graphic>
@@ -7108,7 +5836,7 @@
                         </a:defRPr>
                       </a:pPr>
                       <a:r>
-                        <a:t>Phase</a:t>
+                        <a:t>Tier</a:t>
                       </a:r>
                     </a:p>
                   </a:txBody>
@@ -7131,7 +5859,7 @@
                         </a:defRPr>
                       </a:pPr>
                       <a:r>
-                        <a:t>Event</a:t>
+                        <a:t>Rule</a:t>
                       </a:r>
                     </a:p>
                   </a:txBody>
@@ -7154,7 +5882,7 @@
                         </a:defRPr>
                       </a:pPr>
                       <a:r>
-                        <a:t>Behavior</a:t>
+                        <a:t>Example</a:t>
                       </a:r>
                     </a:p>
                   </a:txBody>
@@ -7179,7 +5907,7 @@
                         </a:defRPr>
                       </a:pPr>
                       <a:r>
-                        <a:t>Steady state</a:t>
+                        <a:t>Public</a:t>
                       </a:r>
                     </a:p>
                   </a:txBody>
@@ -7202,7 +5930,7 @@
                         </a:defRPr>
                       </a:pPr>
                       <a:r>
-                        <a:t>2 backends</a:t>
+                        <a:t>No auth</a:t>
                       </a:r>
                     </a:p>
                   </a:txBody>
@@ -7225,7 +5953,7 @@
                         </a:defRPr>
                       </a:pPr>
                       <a:r>
-                        <a:t>Requests alternate 5001 / 5002</a:t>
+                        <a:t>Catalog, product detail</a:t>
                       </a:r>
                     </a:p>
                   </a:txBody>
@@ -7250,7 +5978,7 @@
                         </a:defRPr>
                       </a:pPr>
                       <a:r>
-                        <a:t>Scale up</a:t>
+                        <a:t>Authenticated</a:t>
                       </a:r>
                     </a:p>
                   </a:txBody>
@@ -7273,7 +6001,7 @@
                         </a:defRPr>
                       </a:pPr>
                       <a:r>
-                        <a:t>Instance started on :5003</a:t>
+                        <a:t>@login_required</a:t>
                       </a:r>
                     </a:p>
                   </a:txBody>
@@ -7296,7 +6024,7 @@
                         </a:defRPr>
                       </a:pPr>
                       <a:r>
-                        <a:t>Detected in one 5s interval, joins rotation</a:t>
+                        <a:t>Cart, checkout, order history</a:t>
                       </a:r>
                     </a:p>
                   </a:txBody>
@@ -7321,7 +6049,7 @@
                         </a:defRPr>
                       </a:pPr>
                       <a:r>
-                        <a:t>Scale down</a:t>
+                        <a:t>Ownership</a:t>
                       </a:r>
                     </a:p>
                   </a:txBody>
@@ -7344,7 +6072,7 @@
                         </a:defRPr>
                       </a:pPr>
                       <a:r>
-                        <a:t>:5003 killed</a:t>
+                        <a:t>Must own the record</a:t>
                       </a:r>
                     </a:p>
                   </a:txBody>
@@ -7367,7 +6095,7 @@
                         </a:defRPr>
                       </a:pPr>
                       <a:r>
-                        <a:t>Evicted; traffic returns to 2 backends</a:t>
+                        <a:t>/orders/&lt;id&gt; — 403 on another user's order</a:t>
                       </a:r>
                     </a:p>
                   </a:txBody>
@@ -7392,7 +6120,7 @@
                         </a:defRPr>
                       </a:pPr>
                       <a:r>
-                        <a:t>Total failure</a:t>
+                        <a:t>Admin</a:t>
                       </a:r>
                     </a:p>
                   </a:txBody>
@@ -7415,7 +6143,7 @@
                         </a:defRPr>
                       </a:pPr>
                       <a:r>
-                        <a:t>All backends down</a:t>
+                        <a:t>@admin_required</a:t>
                       </a:r>
                     </a:p>
                   </a:txBody>
@@ -7438,7 +6166,7 @@
                         </a:defRPr>
                       </a:pPr>
                       <a:r>
-                        <a:t>HTTP 503 — degrades, does not crash</a:t>
+                        <a:t>Product CRUD, user promotion, complaints</a:t>
                       </a:r>
                     </a:p>
                   </a:txBody>
@@ -7455,13 +6183,13 @@
       </p:graphicFrame>
       <p:sp>
         <p:nvSpPr>
-          <p:cNvPr id="9" name="TextBox 8"/>
+          <p:cNvPr id="10" name="TextBox 9"/>
           <p:cNvSpPr txBox="1"/>
           <p:nvPr/>
         </p:nvSpPr>
         <p:spPr>
           <a:xfrm>
-            <a:off x="6400800" y="1106424"/>
+            <a:off x="548640" y="4858892"/>
             <a:ext cx="5394960" cy="274320"/>
           </a:xfrm>
           <a:prstGeom prst="rect">
@@ -7476,26 +6204,797 @@
           <a:lstStyle/>
           <a:p>
             <a:r>
+              <a:rPr sz="1150" b="0">
+                <a:solidFill>
+                  <a:srgbClr val="1E1B4B"/>
+                </a:solidFill>
+              </a:rPr>
+              <a:t>Ownership is checked, not just login. A logged-in user requesting another's order is refused — verified in all three browser engines.</a:t>
+            </a:r>
+          </a:p>
+        </p:txBody>
+      </p:sp>
+      <p:sp>
+        <p:nvSpPr>
+          <p:cNvPr id="11" name="TextBox 10"/>
+          <p:cNvSpPr txBox="1"/>
+          <p:nvPr/>
+        </p:nvSpPr>
+        <p:spPr>
+          <a:xfrm>
+            <a:off x="6400800" y="1106424"/>
+            <a:ext cx="5394960" cy="274320"/>
+          </a:xfrm>
+          <a:prstGeom prst="rect">
+            <a:avLst/>
+          </a:prstGeom>
+          <a:noFill/>
+        </p:spPr>
+        <p:txBody>
+          <a:bodyPr wrap="square">
+            <a:spAutoFit/>
+          </a:bodyPr>
+          <a:lstStyle/>
+          <a:p>
+            <a:r>
               <a:rPr sz="1500" b="1">
                 <a:solidFill>
                   <a:srgbClr val="4F46E5"/>
                 </a:solidFill>
               </a:rPr>
-              <a:t>Verification at Four Levels</a:t>
+              <a:t>Bootstrapping the First Admin</a:t>
+            </a:r>
+          </a:p>
+        </p:txBody>
+      </p:sp>
+      <p:sp>
+        <p:nvSpPr>
+          <p:cNvPr id="12" name="TextBox 11"/>
+          <p:cNvSpPr txBox="1"/>
+          <p:nvPr/>
+        </p:nvSpPr>
+        <p:spPr>
+          <a:xfrm>
+            <a:off x="6400800" y="1391031"/>
+            <a:ext cx="5394960" cy="274320"/>
+          </a:xfrm>
+          <a:prstGeom prst="rect">
+            <a:avLst/>
+          </a:prstGeom>
+          <a:noFill/>
+        </p:spPr>
+        <p:txBody>
+          <a:bodyPr wrap="square">
+            <a:spAutoFit/>
+          </a:bodyPr>
+          <a:lstStyle/>
+          <a:p>
+            <a:r>
+              <a:rPr sz="1150" b="0">
+                <a:solidFill>
+                  <a:srgbClr val="1E1B4B"/>
+                </a:solidFill>
+              </a:rPr>
+              <a:t>Registration never sets is_admin, and the promotion UI is itself admin-gated — so a fresh database has no path to an admin through the web. flask create-admin &lt;email&gt; breaks the cycle from the CLI. No privilege escalation path exists through the application.</a:t>
+            </a:r>
+          </a:p>
+        </p:txBody>
+      </p:sp>
+      <p:sp>
+        <p:nvSpPr>
+          <p:cNvPr id="13" name="TextBox 12"/>
+          <p:cNvSpPr txBox="1"/>
+          <p:nvPr/>
+        </p:nvSpPr>
+        <p:spPr>
+          <a:xfrm>
+            <a:off x="6400800" y="1716214"/>
+            <a:ext cx="5394960" cy="274320"/>
+          </a:xfrm>
+          <a:prstGeom prst="rect">
+            <a:avLst/>
+          </a:prstGeom>
+          <a:noFill/>
+        </p:spPr>
+        <p:txBody>
+          <a:bodyPr wrap="square">
+            <a:spAutoFit/>
+          </a:bodyPr>
+          <a:lstStyle/>
+          <a:p>
+            <a:r>
+              <a:rPr sz="1500" b="1">
+                <a:solidFill>
+                  <a:srgbClr val="4F46E5"/>
+                </a:solidFill>
+              </a:rPr>
+              <a:t>Defense in Depth</a:t>
+            </a:r>
+          </a:p>
+        </p:txBody>
+      </p:sp>
+      <p:sp>
+        <p:nvSpPr>
+          <p:cNvPr id="14" name="TextBox 13"/>
+          <p:cNvSpPr txBox="1"/>
+          <p:nvPr/>
+        </p:nvSpPr>
+        <p:spPr>
+          <a:xfrm>
+            <a:off x="6400800" y="2000821"/>
+            <a:ext cx="5394960" cy="274320"/>
+          </a:xfrm>
+          <a:prstGeom prst="rect">
+            <a:avLst/>
+          </a:prstGeom>
+          <a:noFill/>
+        </p:spPr>
+        <p:txBody>
+          <a:bodyPr wrap="square">
+            <a:spAutoFit/>
+          </a:bodyPr>
+          <a:lstStyle/>
+          <a:p>
+            <a:r>
+              <a:rPr sz="1150" b="0">
+                <a:solidFill>
+                  <a:srgbClr val="1E1B4B"/>
+                </a:solidFill>
+              </a:rPr>
+              <a:t>CSRF on every state-changing POST — a missing token returns 400 · PBKDF2-SHA256 password hashing, 8-char minimum · Field whitelisting blocks mass assignment · Signed, single-use, 1-hour reset tokens · Identical response for known and unknown emails, preventing account enumeration</a:t>
+            </a:r>
+          </a:p>
+        </p:txBody>
+      </p:sp>
+      <p:sp>
+        <p:nvSpPr>
+          <p:cNvPr id="15" name="TextBox 14"/>
+          <p:cNvSpPr txBox="1"/>
+          <p:nvPr/>
+        </p:nvSpPr>
+        <p:spPr>
+          <a:xfrm>
+            <a:off x="548640" y="6446520"/>
+            <a:ext cx="6400800" cy="274320"/>
+          </a:xfrm>
+          <a:prstGeom prst="rect">
+            <a:avLst/>
+          </a:prstGeom>
+          <a:noFill/>
+        </p:spPr>
+        <p:txBody>
+          <a:bodyPr wrap="square">
+            <a:spAutoFit/>
+          </a:bodyPr>
+          <a:lstStyle/>
+          <a:p>
+            <a:r>
+              <a:rPr sz="900" b="0">
+                <a:solidFill>
+                  <a:srgbClr val="8890A8"/>
+                </a:solidFill>
+              </a:rPr>
+              <a:t>Flask E-Commerce — Cloud Computing (UCBX)</a:t>
+            </a:r>
+          </a:p>
+        </p:txBody>
+      </p:sp>
+      <p:sp>
+        <p:nvSpPr>
+          <p:cNvPr id="16" name="TextBox 15"/>
+          <p:cNvSpPr txBox="1"/>
+          <p:nvPr/>
+        </p:nvSpPr>
+        <p:spPr>
+          <a:xfrm>
+            <a:off x="11155680" y="6446520"/>
+            <a:ext cx="548640" cy="274320"/>
+          </a:xfrm>
+          <a:prstGeom prst="rect">
+            <a:avLst/>
+          </a:prstGeom>
+          <a:noFill/>
+        </p:spPr>
+        <p:txBody>
+          <a:bodyPr wrap="square">
+            <a:spAutoFit/>
+          </a:bodyPr>
+          <a:lstStyle/>
+          <a:p>
+            <a:r>
+              <a:rPr sz="900" b="0">
+                <a:solidFill>
+                  <a:srgbClr val="8890A8"/>
+                </a:solidFill>
+              </a:rPr>
+              <a:t>4 / 5</a:t>
+            </a:r>
+          </a:p>
+        </p:txBody>
+      </p:sp>
+    </p:spTree>
+  </p:cSld>
+  <p:clrMapOvr>
+    <a:masterClrMapping/>
+  </p:clrMapOvr>
+</p:sld>
+</file>
+
+<file path=ppt/slides/slide5.xml><?xml version="1.0" encoding="utf-8"?>
+<p:sld xmlns:a="http://schemas.openxmlformats.org/drawingml/2006/main" xmlns:p="http://schemas.openxmlformats.org/presentationml/2006/main" xmlns:r="http://schemas.openxmlformats.org/officeDocument/2006/relationships">
+  <p:cSld>
+    <p:spTree>
+      <p:nvGrpSpPr>
+        <p:cNvPr id="1" name=""/>
+        <p:cNvGrpSpPr/>
+        <p:nvPr/>
+      </p:nvGrpSpPr>
+      <p:grpSpPr/>
+      <p:sp>
+        <p:nvSpPr>
+          <p:cNvPr id="2" name="Rectangle 1"/>
+          <p:cNvSpPr/>
+          <p:nvPr/>
+        </p:nvSpPr>
+        <p:spPr>
+          <a:xfrm>
+            <a:off x="0" y="0"/>
+            <a:ext cx="12191695" cy="82296"/>
+          </a:xfrm>
+          <a:prstGeom prst="rect">
+            <a:avLst/>
+          </a:prstGeom>
+          <a:solidFill>
+            <a:srgbClr val="4F46E5"/>
+          </a:solidFill>
+          <a:ln>
+            <a:noFill/>
+          </a:ln>
+        </p:spPr>
+        <p:style>
+          <a:lnRef idx="1">
+            <a:schemeClr val="accent1"/>
+          </a:lnRef>
+          <a:fillRef idx="3">
+            <a:schemeClr val="accent1"/>
+          </a:fillRef>
+          <a:effectRef idx="2">
+            <a:schemeClr val="accent1"/>
+          </a:effectRef>
+          <a:fontRef idx="minor">
+            <a:schemeClr val="lt1"/>
+          </a:fontRef>
+        </p:style>
+        <p:txBody>
+          <a:bodyPr rtlCol="0" anchor="ctr"/>
+          <a:lstStyle/>
+          <a:p>
+            <a:pPr algn="ctr"/>
+          </a:p>
+        </p:txBody>
+      </p:sp>
+      <p:sp>
+        <p:nvSpPr>
+          <p:cNvPr id="3" name="TextBox 2"/>
+          <p:cNvSpPr txBox="1"/>
+          <p:nvPr/>
+        </p:nvSpPr>
+        <p:spPr>
+          <a:xfrm>
+            <a:off x="548640" y="274320"/>
+            <a:ext cx="11064240" cy="274320"/>
+          </a:xfrm>
+          <a:prstGeom prst="rect">
+            <a:avLst/>
+          </a:prstGeom>
+          <a:noFill/>
+        </p:spPr>
+        <p:txBody>
+          <a:bodyPr wrap="square">
+            <a:spAutoFit/>
+          </a:bodyPr>
+          <a:lstStyle/>
+          <a:p>
+            <a:r>
+              <a:rPr sz="2600" b="1">
+                <a:solidFill>
+                  <a:srgbClr val="1E1B4B"/>
+                </a:solidFill>
+              </a:rPr>
+              <a:t>Slide 5 — SQLite Today, Managed Cloud Database Next</a:t>
+            </a:r>
+          </a:p>
+        </p:txBody>
+      </p:sp>
+      <p:sp>
+        <p:nvSpPr>
+          <p:cNvPr id="4" name="TextBox 3"/>
+          <p:cNvSpPr txBox="1"/>
+          <p:nvPr/>
+        </p:nvSpPr>
+        <p:spPr>
+          <a:xfrm>
+            <a:off x="548640" y="1106424"/>
+            <a:ext cx="5394960" cy="274320"/>
+          </a:xfrm>
+          <a:prstGeom prst="rect">
+            <a:avLst/>
+          </a:prstGeom>
+          <a:noFill/>
+        </p:spPr>
+        <p:txBody>
+          <a:bodyPr wrap="square">
+            <a:spAutoFit/>
+          </a:bodyPr>
+          <a:lstStyle/>
+          <a:p>
+            <a:r>
+              <a:rPr sz="1500" b="1">
+                <a:solidFill>
+                  <a:srgbClr val="4F46E5"/>
+                </a:solidFill>
+              </a:rPr>
+              <a:t>Why SQLite Is the Current Data Tier</a:t>
+            </a:r>
+          </a:p>
+        </p:txBody>
+      </p:sp>
+      <p:sp>
+        <p:nvSpPr>
+          <p:cNvPr id="5" name="TextBox 4"/>
+          <p:cNvSpPr txBox="1"/>
+          <p:nvPr/>
+        </p:nvSpPr>
+        <p:spPr>
+          <a:xfrm>
+            <a:off x="548640" y="1391031"/>
+            <a:ext cx="5394960" cy="274320"/>
+          </a:xfrm>
+          <a:prstGeom prst="rect">
+            <a:avLst/>
+          </a:prstGeom>
+          <a:noFill/>
+        </p:spPr>
+        <p:txBody>
+          <a:bodyPr wrap="square">
+            <a:spAutoFit/>
+          </a:bodyPr>
+          <a:lstStyle/>
+          <a:p>
+            <a:r>
+              <a:rPr sz="1150" b="0">
+                <a:solidFill>
+                  <a:srgbClr val="1E1B4B"/>
+                </a:solidFill>
+              </a:rPr>
+              <a:t>Pointing several instances at one SQLite file produced database is locked under concurrent writes — SQLite allows a single writer. Each instance therefore owns its own database file.</a:t>
+            </a:r>
+          </a:p>
+        </p:txBody>
+      </p:sp>
+      <p:sp>
+        <p:nvSpPr>
+          <p:cNvPr id="6" name="TextBox 5"/>
+          <p:cNvSpPr txBox="1"/>
+          <p:nvPr/>
+        </p:nvSpPr>
+        <p:spPr>
+          <a:xfrm>
+            <a:off x="548640" y="1661350"/>
+            <a:ext cx="5394960" cy="274320"/>
+          </a:xfrm>
+          <a:prstGeom prst="rect">
+            <a:avLst/>
+          </a:prstGeom>
+          <a:noFill/>
+        </p:spPr>
+        <p:txBody>
+          <a:bodyPr wrap="square">
+            <a:spAutoFit/>
+          </a:bodyPr>
+          <a:lstStyle/>
+          <a:p>
+            <a:r>
+              <a:rPr sz="1150" b="0">
+                <a:solidFill>
+                  <a:srgbClr val="1E1B4B"/>
+                </a:solidFill>
+              </a:rPr>
+              <a:t>This was the deliberate trade-off:</a:t>
             </a:r>
           </a:p>
         </p:txBody>
       </p:sp>
       <p:graphicFrame>
         <p:nvGraphicFramePr>
-          <p:cNvPr id="10" name="Table 9"/>
+          <p:cNvPr id="7" name="Table 6"/>
           <p:cNvGraphicFramePr>
             <a:graphicFrameLocks noGrp="1"/>
           </p:cNvGraphicFramePr>
           <p:nvPr/>
         </p:nvGraphicFramePr>
         <p:xfrm>
-          <a:off x="6400800" y="1427607"/>
+          <a:off x="548640" y="1968245"/>
+          <a:ext cx="5394960" cy="713232"/>
+        </p:xfrm>
+        <a:graphic>
+          <a:graphicData uri="http://schemas.openxmlformats.org/drawingml/2006/table">
+            <a:tbl>
+              <a:tblPr firstRow="1" bandRow="1">
+                <a:tableStyleId>{5C22544A-7EE6-4342-B048-85BDC9FD1C3A}</a:tableStyleId>
+              </a:tblPr>
+              <a:tblGrid>
+                <a:gridCol w="2697480"/>
+                <a:gridCol w="2697480"/>
+              </a:tblGrid>
+              <a:tr h="237744">
+                <a:tc>
+                  <a:txBody>
+                    <a:bodyPr/>
+                    <a:lstStyle/>
+                    <a:p>
+                      <a:pPr>
+                        <a:defRPr sz="1000" b="1">
+                          <a:solidFill>
+                            <a:srgbClr val="1E1B4B"/>
+                          </a:solidFill>
+                        </a:defRPr>
+                      </a:pPr>
+                      <a:r>
+                        <a:t>Gained</a:t>
+                      </a:r>
+                    </a:p>
+                  </a:txBody>
+                  <a:tcPr>
+                    <a:solidFill>
+                      <a:srgbClr val="EEF2FF"/>
+                    </a:solidFill>
+                  </a:tcPr>
+                </a:tc>
+                <a:tc>
+                  <a:txBody>
+                    <a:bodyPr/>
+                    <a:lstStyle/>
+                    <a:p>
+                      <a:pPr>
+                        <a:defRPr sz="1000" b="1">
+                          <a:solidFill>
+                            <a:srgbClr val="1E1B4B"/>
+                          </a:solidFill>
+                        </a:defRPr>
+                      </a:pPr>
+                      <a:r>
+                        <a:t>Given up</a:t>
+                      </a:r>
+                    </a:p>
+                  </a:txBody>
+                  <a:tcPr>
+                    <a:solidFill>
+                      <a:srgbClr val="EEF2FF"/>
+                    </a:solidFill>
+                  </a:tcPr>
+                </a:tc>
+              </a:tr>
+              <a:tr h="237744">
+                <a:tc>
+                  <a:txBody>
+                    <a:bodyPr/>
+                    <a:lstStyle/>
+                    <a:p>
+                      <a:pPr>
+                        <a:defRPr sz="950">
+                          <a:solidFill>
+                            <a:srgbClr val="1E1B4B"/>
+                          </a:solidFill>
+                        </a:defRPr>
+                      </a:pPr>
+                      <a:r>
+                        <a:t>Multi-instance load balancing runs anywhere, zero setup</a:t>
+                      </a:r>
+                    </a:p>
+                  </a:txBody>
+                  <a:tcPr>
+                    <a:solidFill>
+                      <a:srgbClr val="FFFFFF"/>
+                    </a:solidFill>
+                  </a:tcPr>
+                </a:tc>
+                <a:tc>
+                  <a:txBody>
+                    <a:bodyPr/>
+                    <a:lstStyle/>
+                    <a:p>
+                      <a:pPr>
+                        <a:defRPr sz="950">
+                          <a:solidFill>
+                            <a:srgbClr val="1E1B4B"/>
+                          </a:solidFill>
+                        </a:defRPr>
+                      </a:pPr>
+                      <a:r>
+                        <a:t>Data is per-instance, not shared</a:t>
+                      </a:r>
+                    </a:p>
+                  </a:txBody>
+                  <a:tcPr>
+                    <a:solidFill>
+                      <a:srgbClr val="FFFFFF"/>
+                    </a:solidFill>
+                  </a:tcPr>
+                </a:tc>
+              </a:tr>
+              <a:tr h="237744">
+                <a:tc>
+                  <a:txBody>
+                    <a:bodyPr/>
+                    <a:lstStyle/>
+                    <a:p>
+                      <a:pPr>
+                        <a:defRPr sz="950">
+                          <a:solidFill>
+                            <a:srgbClr val="1E1B4B"/>
+                          </a:solidFill>
+                        </a:defRPr>
+                      </a:pPr>
+                      <a:r>
+                        <a:t>No external service to provision for a course demo</a:t>
+                      </a:r>
+                    </a:p>
+                  </a:txBody>
+                  <a:tcPr>
+                    <a:solidFill>
+                      <a:srgbClr val="FFFFFF"/>
+                    </a:solidFill>
+                  </a:tcPr>
+                </a:tc>
+                <a:tc>
+                  <a:txBody>
+                    <a:bodyPr/>
+                    <a:lstStyle/>
+                    <a:p>
+                      <a:pPr>
+                        <a:defRPr sz="950">
+                          <a:solidFill>
+                            <a:srgbClr val="1E1B4B"/>
+                          </a:solidFill>
+                        </a:defRPr>
+                      </a:pPr>
+                      <a:r>
+                        <a:t>Order written on A is invisible on B</a:t>
+                      </a:r>
+                    </a:p>
+                  </a:txBody>
+                  <a:tcPr>
+                    <a:solidFill>
+                      <a:srgbClr val="FFFFFF"/>
+                    </a:solidFill>
+                  </a:tcPr>
+                </a:tc>
+              </a:tr>
+            </a:tbl>
+          </a:graphicData>
+        </a:graphic>
+      </p:graphicFrame>
+      <p:sp>
+        <p:nvSpPr>
+          <p:cNvPr id="8" name="TextBox 7"/>
+          <p:cNvSpPr txBox="1"/>
+          <p:nvPr/>
+        </p:nvSpPr>
+        <p:spPr>
+          <a:xfrm>
+            <a:off x="548640" y="2809493"/>
+            <a:ext cx="5394960" cy="274320"/>
+          </a:xfrm>
+          <a:prstGeom prst="rect">
+            <a:avLst/>
+          </a:prstGeom>
+          <a:noFill/>
+        </p:spPr>
+        <p:txBody>
+          <a:bodyPr wrap="square">
+            <a:spAutoFit/>
+          </a:bodyPr>
+          <a:lstStyle/>
+          <a:p>
+            <a:r>
+              <a:rPr sz="1150" b="0">
+                <a:solidFill>
+                  <a:srgbClr val="1E1B4B"/>
+                </a:solidFill>
+              </a:rPr>
+              <a:t>Stated plainly rather than hidden: the app tier scales correctly; the data tier is the deliberate simulation boundary of this project.</a:t>
+            </a:r>
+          </a:p>
+        </p:txBody>
+      </p:sp>
+      <p:sp>
+        <p:nvSpPr>
+          <p:cNvPr id="9" name="TextBox 8"/>
+          <p:cNvSpPr txBox="1"/>
+          <p:nvPr/>
+        </p:nvSpPr>
+        <p:spPr>
+          <a:xfrm>
+            <a:off x="548640" y="3134676"/>
+            <a:ext cx="5394960" cy="274320"/>
+          </a:xfrm>
+          <a:prstGeom prst="rect">
+            <a:avLst/>
+          </a:prstGeom>
+          <a:noFill/>
+        </p:spPr>
+        <p:txBody>
+          <a:bodyPr wrap="square">
+            <a:spAutoFit/>
+          </a:bodyPr>
+          <a:lstStyle/>
+          <a:p>
+            <a:r>
+              <a:rPr sz="1500" b="1">
+                <a:solidFill>
+                  <a:srgbClr val="4F46E5"/>
+                </a:solidFill>
+              </a:rPr>
+              <a:t>Why the Application Is Already Portable</a:t>
+            </a:r>
+          </a:p>
+        </p:txBody>
+      </p:sp>
+      <p:sp>
+        <p:nvSpPr>
+          <p:cNvPr id="10" name="TextBox 9"/>
+          <p:cNvSpPr txBox="1"/>
+          <p:nvPr/>
+        </p:nvSpPr>
+        <p:spPr>
+          <a:xfrm>
+            <a:off x="548640" y="3419283"/>
+            <a:ext cx="5394960" cy="274320"/>
+          </a:xfrm>
+          <a:prstGeom prst="rect">
+            <a:avLst/>
+          </a:prstGeom>
+          <a:noFill/>
+        </p:spPr>
+        <p:txBody>
+          <a:bodyPr wrap="square">
+            <a:spAutoFit/>
+          </a:bodyPr>
+          <a:lstStyle/>
+          <a:p>
+            <a:r>
+              <a:rPr sz="1150" b="0">
+                <a:solidFill>
+                  <a:srgbClr val="1E1B4B"/>
+                </a:solidFill>
+              </a:rPr>
+              <a:t>The constraint is the storage engine, not the code. SQLAlchemy abstracts the dialect and the connection string is already an environment variable:</a:t>
+            </a:r>
+          </a:p>
+        </p:txBody>
+      </p:sp>
+      <p:sp>
+        <p:nvSpPr>
+          <p:cNvPr id="11" name="TextBox 10"/>
+          <p:cNvSpPr txBox="1"/>
+          <p:nvPr/>
+        </p:nvSpPr>
+        <p:spPr>
+          <a:xfrm>
+            <a:off x="548640" y="3689602"/>
+            <a:ext cx="5394960" cy="274320"/>
+          </a:xfrm>
+          <a:prstGeom prst="rect">
+            <a:avLst/>
+          </a:prstGeom>
+          <a:noFill/>
+        </p:spPr>
+        <p:txBody>
+          <a:bodyPr wrap="none">
+            <a:spAutoFit/>
+          </a:bodyPr>
+          <a:lstStyle/>
+          <a:p>
+            <a:r>
+              <a:rPr sz="850">
+                <a:solidFill>
+                  <a:srgbClr val="555F7A"/>
+                </a:solidFill>
+                <a:latin typeface="Menlo"/>
+              </a:rPr>
+              <a:t>DATABASE_URL=sqlite:///app1.db                      # today</a:t>
+            </a:r>
+          </a:p>
+          <a:p>
+            <a:r>
+              <a:rPr sz="850">
+                <a:solidFill>
+                  <a:srgbClr val="555F7A"/>
+                </a:solidFill>
+                <a:latin typeface="Menlo"/>
+              </a:rPr>
+              <a:t>DATABASE_URL=postgresql://user:pw@rds-host/shop     # one variable away</a:t>
+            </a:r>
+          </a:p>
+        </p:txBody>
+      </p:sp>
+      <p:sp>
+        <p:nvSpPr>
+          <p:cNvPr id="12" name="TextBox 11"/>
+          <p:cNvSpPr txBox="1"/>
+          <p:nvPr/>
+        </p:nvSpPr>
+        <p:spPr>
+          <a:xfrm>
+            <a:off x="548640" y="4101082"/>
+            <a:ext cx="5394960" cy="274320"/>
+          </a:xfrm>
+          <a:prstGeom prst="rect">
+            <a:avLst/>
+          </a:prstGeom>
+          <a:noFill/>
+        </p:spPr>
+        <p:txBody>
+          <a:bodyPr wrap="square">
+            <a:spAutoFit/>
+          </a:bodyPr>
+          <a:lstStyle/>
+          <a:p>
+            <a:r>
+              <a:rPr sz="1150" b="0">
+                <a:solidFill>
+                  <a:srgbClr val="1E1B4B"/>
+                </a:solidFill>
+              </a:rPr>
+              <a:t>psycopg2-binary already ships in requirements.txt. No application code changes to move to PostgreSQL.</a:t>
+            </a:r>
+          </a:p>
+        </p:txBody>
+      </p:sp>
+      <p:sp>
+        <p:nvSpPr>
+          <p:cNvPr id="13" name="TextBox 12"/>
+          <p:cNvSpPr txBox="1"/>
+          <p:nvPr/>
+        </p:nvSpPr>
+        <p:spPr>
+          <a:xfrm>
+            <a:off x="548640" y="4426265"/>
+            <a:ext cx="5394960" cy="274320"/>
+          </a:xfrm>
+          <a:prstGeom prst="rect">
+            <a:avLst/>
+          </a:prstGeom>
+          <a:noFill/>
+        </p:spPr>
+        <p:txBody>
+          <a:bodyPr wrap="square">
+            <a:spAutoFit/>
+          </a:bodyPr>
+          <a:lstStyle/>
+          <a:p>
+            <a:r>
+              <a:rPr sz="1500" b="1">
+                <a:solidFill>
+                  <a:srgbClr val="4F46E5"/>
+                </a:solidFill>
+              </a:rPr>
+              <a:t>Future Improvement: Managed Cloud Database</a:t>
+            </a:r>
+          </a:p>
+        </p:txBody>
+      </p:sp>
+      <p:graphicFrame>
+        <p:nvGraphicFramePr>
+          <p:cNvPr id="14" name="Table 13"/>
+          <p:cNvGraphicFramePr>
+            <a:graphicFrameLocks noGrp="1"/>
+          </p:cNvGraphicFramePr>
+          <p:nvPr/>
+        </p:nvGraphicFramePr>
+        <p:xfrm>
+          <a:off x="548640" y="4747448"/>
           <a:ext cx="5394960" cy="1188720"/>
         </p:xfrm>
         <a:graphic>
@@ -7523,7 +7022,7 @@
                         </a:defRPr>
                       </a:pPr>
                       <a:r>
-                        <a:t>Level</a:t>
+                        <a:t>Step</a:t>
                       </a:r>
                     </a:p>
                   </a:txBody>
@@ -7546,7 +7045,7 @@
                         </a:defRPr>
                       </a:pPr>
                       <a:r>
-                        <a:t>Method</a:t>
+                        <a:t>Change</a:t>
                       </a:r>
                     </a:p>
                   </a:txBody>
@@ -7569,7 +7068,7 @@
                         </a:defRPr>
                       </a:pPr>
                       <a:r>
-                        <a:t>Result</a:t>
+                        <a:t>Unlocks</a:t>
                       </a:r>
                     </a:p>
                   </a:txBody>
@@ -7594,7 +7093,7 @@
                         </a:defRPr>
                       </a:pPr>
                       <a:r>
-                        <a:t>Unit / integration</a:t>
+                        <a:t>1</a:t>
                       </a:r>
                     </a:p>
                   </a:txBody>
@@ -7617,7 +7116,7 @@
                         </a:defRPr>
                       </a:pPr>
                       <a:r>
-                        <a:t>pytest, in-memory SQLite</a:t>
+                        <a:t>Point every instance at one managed PostgreSQL (RDS/Cloud SQL)</a:t>
                       </a:r>
                     </a:p>
                   </a:txBody>
@@ -7640,7 +7139,7 @@
                         </a:defRPr>
                       </a:pPr>
                       <a:r>
-                        <a:t>131 passing</a:t>
+                        <a:t>Shared state — any instance serves any user identically</a:t>
                       </a:r>
                     </a:p>
                   </a:txBody>
@@ -7665,7 +7164,7 @@
                         </a:defRPr>
                       </a:pPr>
                       <a:r>
-                        <a:t>Cross-browser</a:t>
+                        <a:t>2</a:t>
                       </a:r>
                     </a:p>
                   </a:txBody>
@@ -7688,7 +7187,7 @@
                         </a:defRPr>
                       </a:pPr>
                       <a:r>
-                        <a:t>Real purchase flow: Chromium, Firefox, WebKit</a:t>
+                        <a:t>Enable Flask-Migrate (already a dependency)</a:t>
                       </a:r>
                     </a:p>
                   </a:txBody>
@@ -7711,7 +7210,7 @@
                         </a:defRPr>
                       </a:pPr>
                       <a:r>
-                        <a:t>99/99 passing</a:t>
+                        <a:t>Versioned schema across deploys</a:t>
                       </a:r>
                     </a:p>
                   </a:txBody>
@@ -7736,7 +7235,7 @@
                         </a:defRPr>
                       </a:pPr>
                       <a:r>
-                        <a:t>Responsive</a:t>
+                        <a:t>3</a:t>
                       </a:r>
                     </a:p>
                   </a:txBody>
@@ -7759,7 +7258,7 @@
                         </a:defRPr>
                       </a:pPr>
                       <a:r>
-                        <a:t>scrollWidth measured, 12 pages × 3 widths</a:t>
+                        <a:t>Add a read replica</a:t>
                       </a:r>
                     </a:p>
                   </a:txBody>
@@ -7782,7 +7281,7 @@
                         </a:defRPr>
                       </a:pPr>
                       <a:r>
-                        <a:t>Zero overflow</a:t>
+                        <a:t>Read scaling for the catalog</a:t>
                       </a:r>
                     </a:p>
                   </a:txBody>
@@ -7807,7 +7306,7 @@
                         </a:defRPr>
                       </a:pPr>
                       <a:r>
-                        <a:t>Infrastructure</a:t>
+                        <a:t>4</a:t>
                       </a:r>
                     </a:p>
                   </a:txBody>
@@ -7830,7 +7329,7 @@
                         </a:defRPr>
                       </a:pPr>
                       <a:r>
-                        <a:t>Scale up, scale down, total failure</a:t>
+                        <a:t>Move sessions to Redis</a:t>
                       </a:r>
                     </a:p>
                   </a:txBody>
@@ -7853,7 +7352,7 @@
                         </a:defRPr>
                       </a:pPr>
                       <a:r>
-                        <a:t>All scenarios pass</a:t>
+                        <a:t>Server-side revocation, larger session payloads</a:t>
                       </a:r>
                     </a:p>
                   </a:txBody>
@@ -7870,13 +7369,13 @@
       </p:graphicFrame>
       <p:sp>
         <p:nvSpPr>
-          <p:cNvPr id="11" name="TextBox 10"/>
+          <p:cNvPr id="15" name="TextBox 14"/>
           <p:cNvSpPr txBox="1"/>
           <p:nvPr/>
         </p:nvSpPr>
         <p:spPr>
           <a:xfrm>
-            <a:off x="6400800" y="2799207"/>
+            <a:off x="6400800" y="1051560"/>
             <a:ext cx="5394960" cy="274320"/>
           </a:xfrm>
           <a:prstGeom prst="rect">
@@ -7891,25 +7390,25 @@
           <a:lstStyle/>
           <a:p>
             <a:r>
-              <a:rPr sz="1500" b="1">
-                <a:solidFill>
-                  <a:srgbClr val="4F46E5"/>
+              <a:rPr sz="1150" b="0">
+                <a:solidFill>
+                  <a:srgbClr val="1E1B4B"/>
                 </a:solidFill>
               </a:rPr>
-              <a:t>Bottom Line</a:t>
-            </a:r>
-          </a:p>
-        </p:txBody>
-      </p:sp>
-      <p:sp>
-        <p:nvSpPr>
-          <p:cNvPr id="12" name="TextBox 11"/>
+              <a:t>Step 1 alone removes the only limitation on this slide — and it is a configuration change, not a rewrite.</a:t>
+            </a:r>
+          </a:p>
+        </p:txBody>
+      </p:sp>
+      <p:sp>
+        <p:nvSpPr>
+          <p:cNvPr id="16" name="TextBox 15"/>
           <p:cNvSpPr txBox="1"/>
           <p:nvPr/>
         </p:nvSpPr>
         <p:spPr>
           <a:xfrm>
-            <a:off x="6400800" y="3083814"/>
+            <a:off x="6400800" y="1376743"/>
             <a:ext cx="5394960" cy="274320"/>
           </a:xfrm>
           <a:prstGeom prst="rect">
@@ -7924,25 +7423,25 @@
           <a:lstStyle/>
           <a:p>
             <a:r>
-              <a:rPr sz="1150" b="0">
-                <a:solidFill>
-                  <a:srgbClr val="1E1B4B"/>
+              <a:rPr sz="1500" b="1">
+                <a:solidFill>
+                  <a:srgbClr val="4F46E5"/>
                 </a:solidFill>
               </a:rPr>
-              <a:t>A small seller's storefront survives its best day — capacity joins in seconds, failure is absorbed rather than propagated, and every claim here is backed by a test that can be re-run.</a:t>
-            </a:r>
-          </a:p>
-        </p:txBody>
-      </p:sp>
-      <p:sp>
-        <p:nvSpPr>
-          <p:cNvPr id="13" name="TextBox 12"/>
+              <a:t>Verified End to End</a:t>
+            </a:r>
+          </a:p>
+        </p:txBody>
+      </p:sp>
+      <p:sp>
+        <p:nvSpPr>
+          <p:cNvPr id="17" name="TextBox 16"/>
           <p:cNvSpPr txBox="1"/>
           <p:nvPr/>
         </p:nvSpPr>
         <p:spPr>
           <a:xfrm>
-            <a:off x="6400800" y="3354133"/>
+            <a:off x="6400800" y="1661350"/>
             <a:ext cx="5394960" cy="274320"/>
           </a:xfrm>
           <a:prstGeom prst="rect">
@@ -7962,21 +7461,21 @@
                   <a:srgbClr val="1E1B4B"/>
                 </a:solidFill>
               </a:rPr>
-              <a:t>Repository: https://github.com/tlycode/tanner-young-cloud-project</a:t>
-            </a:r>
-          </a:p>
-        </p:txBody>
-      </p:sp>
-      <p:sp>
-        <p:nvSpPr>
-          <p:cNvPr id="14" name="TextBox 13"/>
+              <a:t>131 pytest tests · 99/99 cross-browser checks (Chromium, Firefox, WebKit) · zero layout overflow, 12 pages × 3 widths · load balancer: round-robin, scale-up, scale-down, 502 retry, 503 total failure</a:t>
+            </a:r>
+          </a:p>
+        </p:txBody>
+      </p:sp>
+      <p:sp>
+        <p:nvSpPr>
+          <p:cNvPr id="18" name="TextBox 17"/>
           <p:cNvSpPr txBox="1"/>
           <p:nvPr/>
         </p:nvSpPr>
         <p:spPr>
           <a:xfrm>
-            <a:off x="548640" y="6446520"/>
-            <a:ext cx="6400800" cy="274320"/>
+            <a:off x="6400800" y="1931669"/>
+            <a:ext cx="5394960" cy="274320"/>
           </a:xfrm>
           <a:prstGeom prst="rect">
             <a:avLst/>
@@ -7990,6 +7489,39 @@
           <a:lstStyle/>
           <a:p>
             <a:r>
+              <a:rPr sz="1150" b="0">
+                <a:solidFill>
+                  <a:srgbClr val="1E1B4B"/>
+                </a:solidFill>
+              </a:rPr>
+              <a:t>Repository: https://github.com/tlycode/tanner-young-cloud-project</a:t>
+            </a:r>
+          </a:p>
+        </p:txBody>
+      </p:sp>
+      <p:sp>
+        <p:nvSpPr>
+          <p:cNvPr id="19" name="TextBox 18"/>
+          <p:cNvSpPr txBox="1"/>
+          <p:nvPr/>
+        </p:nvSpPr>
+        <p:spPr>
+          <a:xfrm>
+            <a:off x="548640" y="6446520"/>
+            <a:ext cx="6400800" cy="274320"/>
+          </a:xfrm>
+          <a:prstGeom prst="rect">
+            <a:avLst/>
+          </a:prstGeom>
+          <a:noFill/>
+        </p:spPr>
+        <p:txBody>
+          <a:bodyPr wrap="square">
+            <a:spAutoFit/>
+          </a:bodyPr>
+          <a:lstStyle/>
+          <a:p>
+            <a:r>
               <a:rPr sz="900" b="0">
                 <a:solidFill>
                   <a:srgbClr val="8890A8"/>
@@ -8002,7 +7534,7 @@
       </p:sp>
       <p:sp>
         <p:nvSpPr>
-          <p:cNvPr id="15" name="TextBox 14"/>
+          <p:cNvPr id="20" name="TextBox 19"/>
           <p:cNvSpPr txBox="1"/>
           <p:nvPr/>
         </p:nvSpPr>

--- a/docs/slides/final-presentation.pptx
+++ b/docs/slides/final-presentation.pptx
@@ -5,13 +5,13 @@
     <p:sldMasterId id="2147483648" r:id="rId1"/>
   </p:sldMasterIdLst>
   <p:sldIdLst>
-    <p:sldId id="256" r:id="rId7"/>
-    <p:sldId id="257" r:id="rId8"/>
-    <p:sldId id="258" r:id="rId9"/>
-    <p:sldId id="259" r:id="rId10"/>
-    <p:sldId id="260" r:id="rId11"/>
+    <p:sldId id="256" r:id="rId2"/>
+    <p:sldId id="257" r:id="rId3"/>
+    <p:sldId id="258" r:id="rId4"/>
+    <p:sldId id="259" r:id="rId5"/>
+    <p:sldId id="260" r:id="rId6"/>
   </p:sldIdLst>
-  <p:sldSz cx="12191695" cy="6858000" type="screen4x3"/>
+  <p:sldSz cx="12192000" cy="6858000"/>
   <p:notesSz cx="6858000" cy="9144000"/>
   <p:defaultTextStyle>
     <a:defPPr>
@@ -108,6 +108,22 @@
       </a:defRPr>
     </a:lvl9pPr>
   </p:defaultTextStyle>
+  <p:extLst>
+    <p:ext uri="{EFAFB233-063F-42B5-8137-9DF3F51BA10A}">
+      <p15:sldGuideLst xmlns:p15="http://schemas.microsoft.com/office/powerpoint/2012/main">
+        <p15:guide id="1" orient="horz" pos="2160">
+          <p15:clr>
+            <a:srgbClr val="A4A3A4"/>
+          </p15:clr>
+        </p15:guide>
+        <p15:guide id="2" pos="2880">
+          <p15:clr>
+            <a:srgbClr val="A4A3A4"/>
+          </p15:clr>
+        </p15:guide>
+      </p15:sldGuideLst>
+    </p:ext>
+  </p:extLst>
 </p:presentation>
 </file>
 
@@ -149,10 +165,9 @@
           <a:lstStyle/>
           <a:p>
             <a:r>
-              <a:rPr lang="en-US" smtClean="0"/>
+              <a:rPr lang="en-US"/>
               <a:t>Click to edit Master title style</a:t>
             </a:r>
-            <a:endParaRPr lang="en-US"/>
           </a:p>
         </p:txBody>
       </p:sp>
@@ -268,10 +283,9 @@
           </a:lstStyle>
           <a:p>
             <a:r>
-              <a:rPr lang="en-US" smtClean="0"/>
+              <a:rPr lang="en-US"/>
               <a:t>Click to edit Master subtitle style</a:t>
             </a:r>
-            <a:endParaRPr lang="en-US"/>
           </a:p>
         </p:txBody>
       </p:sp>
@@ -292,7 +306,7 @@
           <a:p>
             <a:fld id="{5BCAD085-E8A6-8845-BD4E-CB4CCA059FC4}" type="datetimeFigureOut">
               <a:rPr lang="en-US" smtClean="0"/>
-              <a:t>1/27/13</a:t>
+              <a:t>8/25/26</a:t>
             </a:fld>
             <a:endParaRPr lang="en-US"/>
           </a:p>
@@ -386,10 +400,9 @@
           <a:lstStyle/>
           <a:p>
             <a:r>
-              <a:rPr lang="en-US" smtClean="0"/>
+              <a:rPr lang="en-US"/>
               <a:t>Click to edit Master title style</a:t>
             </a:r>
-            <a:endParaRPr lang="en-US"/>
           </a:p>
         </p:txBody>
       </p:sp>
@@ -410,38 +423,37 @@
           <a:p>
             <a:pPr lvl="0"/>
             <a:r>
-              <a:rPr lang="en-US" smtClean="0"/>
+              <a:rPr lang="en-US"/>
               <a:t>Click to edit Master text styles</a:t>
             </a:r>
           </a:p>
           <a:p>
             <a:pPr lvl="1"/>
             <a:r>
-              <a:rPr lang="en-US" smtClean="0"/>
+              <a:rPr lang="en-US"/>
               <a:t>Second level</a:t>
             </a:r>
           </a:p>
           <a:p>
             <a:pPr lvl="2"/>
             <a:r>
-              <a:rPr lang="en-US" smtClean="0"/>
+              <a:rPr lang="en-US"/>
               <a:t>Third level</a:t>
             </a:r>
           </a:p>
           <a:p>
             <a:pPr lvl="3"/>
             <a:r>
-              <a:rPr lang="en-US" smtClean="0"/>
+              <a:rPr lang="en-US"/>
               <a:t>Fourth level</a:t>
             </a:r>
           </a:p>
           <a:p>
             <a:pPr lvl="4"/>
             <a:r>
-              <a:rPr lang="en-US" smtClean="0"/>
+              <a:rPr lang="en-US"/>
               <a:t>Fifth level</a:t>
             </a:r>
-            <a:endParaRPr lang="en-US"/>
           </a:p>
         </p:txBody>
       </p:sp>
@@ -462,7 +474,7 @@
           <a:p>
             <a:fld id="{5BCAD085-E8A6-8845-BD4E-CB4CCA059FC4}" type="datetimeFigureOut">
               <a:rPr lang="en-US" smtClean="0"/>
-              <a:t>1/27/13</a:t>
+              <a:t>8/25/26</a:t>
             </a:fld>
             <a:endParaRPr lang="en-US"/>
           </a:p>
@@ -561,10 +573,9 @@
           <a:lstStyle/>
           <a:p>
             <a:r>
-              <a:rPr lang="en-US" smtClean="0"/>
+              <a:rPr lang="en-US"/>
               <a:t>Click to edit Master title style</a:t>
             </a:r>
-            <a:endParaRPr lang="en-US"/>
           </a:p>
         </p:txBody>
       </p:sp>
@@ -590,38 +601,37 @@
           <a:p>
             <a:pPr lvl="0"/>
             <a:r>
-              <a:rPr lang="en-US" smtClean="0"/>
+              <a:rPr lang="en-US"/>
               <a:t>Click to edit Master text styles</a:t>
             </a:r>
           </a:p>
           <a:p>
             <a:pPr lvl="1"/>
             <a:r>
-              <a:rPr lang="en-US" smtClean="0"/>
+              <a:rPr lang="en-US"/>
               <a:t>Second level</a:t>
             </a:r>
           </a:p>
           <a:p>
             <a:pPr lvl="2"/>
             <a:r>
-              <a:rPr lang="en-US" smtClean="0"/>
+              <a:rPr lang="en-US"/>
               <a:t>Third level</a:t>
             </a:r>
           </a:p>
           <a:p>
             <a:pPr lvl="3"/>
             <a:r>
-              <a:rPr lang="en-US" smtClean="0"/>
+              <a:rPr lang="en-US"/>
               <a:t>Fourth level</a:t>
             </a:r>
           </a:p>
           <a:p>
             <a:pPr lvl="4"/>
             <a:r>
-              <a:rPr lang="en-US" smtClean="0"/>
+              <a:rPr lang="en-US"/>
               <a:t>Fifth level</a:t>
             </a:r>
-            <a:endParaRPr lang="en-US"/>
           </a:p>
         </p:txBody>
       </p:sp>
@@ -642,7 +652,7 @@
           <a:p>
             <a:fld id="{5BCAD085-E8A6-8845-BD4E-CB4CCA059FC4}" type="datetimeFigureOut">
               <a:rPr lang="en-US" smtClean="0"/>
-              <a:t>1/27/13</a:t>
+              <a:t>8/25/26</a:t>
             </a:fld>
             <a:endParaRPr lang="en-US"/>
           </a:p>
@@ -736,10 +746,9 @@
           <a:lstStyle/>
           <a:p>
             <a:r>
-              <a:rPr lang="en-US" smtClean="0"/>
+              <a:rPr lang="en-US"/>
               <a:t>Click to edit Master title style</a:t>
             </a:r>
-            <a:endParaRPr lang="en-US"/>
           </a:p>
         </p:txBody>
       </p:sp>
@@ -760,38 +769,37 @@
           <a:p>
             <a:pPr lvl="0"/>
             <a:r>
-              <a:rPr lang="en-US" smtClean="0"/>
+              <a:rPr lang="en-US"/>
               <a:t>Click to edit Master text styles</a:t>
             </a:r>
           </a:p>
           <a:p>
             <a:pPr lvl="1"/>
             <a:r>
-              <a:rPr lang="en-US" smtClean="0"/>
+              <a:rPr lang="en-US"/>
               <a:t>Second level</a:t>
             </a:r>
           </a:p>
           <a:p>
             <a:pPr lvl="2"/>
             <a:r>
-              <a:rPr lang="en-US" smtClean="0"/>
+              <a:rPr lang="en-US"/>
               <a:t>Third level</a:t>
             </a:r>
           </a:p>
           <a:p>
             <a:pPr lvl="3"/>
             <a:r>
-              <a:rPr lang="en-US" smtClean="0"/>
+              <a:rPr lang="en-US"/>
               <a:t>Fourth level</a:t>
             </a:r>
           </a:p>
           <a:p>
             <a:pPr lvl="4"/>
             <a:r>
-              <a:rPr lang="en-US" smtClean="0"/>
+              <a:rPr lang="en-US"/>
               <a:t>Fifth level</a:t>
             </a:r>
-            <a:endParaRPr lang="en-US"/>
           </a:p>
         </p:txBody>
       </p:sp>
@@ -812,7 +820,7 @@
           <a:p>
             <a:fld id="{5BCAD085-E8A6-8845-BD4E-CB4CCA059FC4}" type="datetimeFigureOut">
               <a:rPr lang="en-US" smtClean="0"/>
-              <a:t>1/27/13</a:t>
+              <a:t>8/25/26</a:t>
             </a:fld>
             <a:endParaRPr lang="en-US"/>
           </a:p>
@@ -915,10 +923,9 @@
           </a:lstStyle>
           <a:p>
             <a:r>
-              <a:rPr lang="en-US" smtClean="0"/>
+              <a:rPr lang="en-US"/>
               <a:t>Click to edit Master title style</a:t>
             </a:r>
-            <a:endParaRPr lang="en-US"/>
           </a:p>
         </p:txBody>
       </p:sp>
@@ -1035,7 +1042,7 @@
           <a:p>
             <a:pPr lvl="0"/>
             <a:r>
-              <a:rPr lang="en-US" smtClean="0"/>
+              <a:rPr lang="en-US"/>
               <a:t>Click to edit Master text styles</a:t>
             </a:r>
           </a:p>
@@ -1058,7 +1065,7 @@
           <a:p>
             <a:fld id="{5BCAD085-E8A6-8845-BD4E-CB4CCA059FC4}" type="datetimeFigureOut">
               <a:rPr lang="en-US" smtClean="0"/>
-              <a:t>1/27/13</a:t>
+              <a:t>8/25/26</a:t>
             </a:fld>
             <a:endParaRPr lang="en-US"/>
           </a:p>
@@ -1152,10 +1159,9 @@
           <a:lstStyle/>
           <a:p>
             <a:r>
-              <a:rPr lang="en-US" smtClean="0"/>
+              <a:rPr lang="en-US"/>
               <a:t>Click to edit Master title style</a:t>
             </a:r>
-            <a:endParaRPr lang="en-US"/>
           </a:p>
         </p:txBody>
       </p:sp>
@@ -1209,38 +1215,37 @@
           <a:p>
             <a:pPr lvl="0"/>
             <a:r>
-              <a:rPr lang="en-US" smtClean="0"/>
+              <a:rPr lang="en-US"/>
               <a:t>Click to edit Master text styles</a:t>
             </a:r>
           </a:p>
           <a:p>
             <a:pPr lvl="1"/>
             <a:r>
-              <a:rPr lang="en-US" smtClean="0"/>
+              <a:rPr lang="en-US"/>
               <a:t>Second level</a:t>
             </a:r>
           </a:p>
           <a:p>
             <a:pPr lvl="2"/>
             <a:r>
-              <a:rPr lang="en-US" smtClean="0"/>
+              <a:rPr lang="en-US"/>
               <a:t>Third level</a:t>
             </a:r>
           </a:p>
           <a:p>
             <a:pPr lvl="3"/>
             <a:r>
-              <a:rPr lang="en-US" smtClean="0"/>
+              <a:rPr lang="en-US"/>
               <a:t>Fourth level</a:t>
             </a:r>
           </a:p>
           <a:p>
             <a:pPr lvl="4"/>
             <a:r>
-              <a:rPr lang="en-US" smtClean="0"/>
+              <a:rPr lang="en-US"/>
               <a:t>Fifth level</a:t>
             </a:r>
-            <a:endParaRPr lang="en-US"/>
           </a:p>
         </p:txBody>
       </p:sp>
@@ -1294,38 +1299,37 @@
           <a:p>
             <a:pPr lvl="0"/>
             <a:r>
-              <a:rPr lang="en-US" smtClean="0"/>
+              <a:rPr lang="en-US"/>
               <a:t>Click to edit Master text styles</a:t>
             </a:r>
           </a:p>
           <a:p>
             <a:pPr lvl="1"/>
             <a:r>
-              <a:rPr lang="en-US" smtClean="0"/>
+              <a:rPr lang="en-US"/>
               <a:t>Second level</a:t>
             </a:r>
           </a:p>
           <a:p>
             <a:pPr lvl="2"/>
             <a:r>
-              <a:rPr lang="en-US" smtClean="0"/>
+              <a:rPr lang="en-US"/>
               <a:t>Third level</a:t>
             </a:r>
           </a:p>
           <a:p>
             <a:pPr lvl="3"/>
             <a:r>
-              <a:rPr lang="en-US" smtClean="0"/>
+              <a:rPr lang="en-US"/>
               <a:t>Fourth level</a:t>
             </a:r>
           </a:p>
           <a:p>
             <a:pPr lvl="4"/>
             <a:r>
-              <a:rPr lang="en-US" smtClean="0"/>
+              <a:rPr lang="en-US"/>
               <a:t>Fifth level</a:t>
             </a:r>
-            <a:endParaRPr lang="en-US"/>
           </a:p>
         </p:txBody>
       </p:sp>
@@ -1346,7 +1350,7 @@
           <a:p>
             <a:fld id="{5BCAD085-E8A6-8845-BD4E-CB4CCA059FC4}" type="datetimeFigureOut">
               <a:rPr lang="en-US" smtClean="0"/>
-              <a:t>1/27/13</a:t>
+              <a:t>8/25/26</a:t>
             </a:fld>
             <a:endParaRPr lang="en-US"/>
           </a:p>
@@ -1444,10 +1448,9 @@
           </a:lstStyle>
           <a:p>
             <a:r>
-              <a:rPr lang="en-US" smtClean="0"/>
+              <a:rPr lang="en-US"/>
               <a:t>Click to edit Master title style</a:t>
             </a:r>
-            <a:endParaRPr lang="en-US"/>
           </a:p>
         </p:txBody>
       </p:sp>
@@ -1510,7 +1513,7 @@
           <a:p>
             <a:pPr lvl="0"/>
             <a:r>
-              <a:rPr lang="en-US" smtClean="0"/>
+              <a:rPr lang="en-US"/>
               <a:t>Click to edit Master text styles</a:t>
             </a:r>
           </a:p>
@@ -1566,38 +1569,37 @@
           <a:p>
             <a:pPr lvl="0"/>
             <a:r>
-              <a:rPr lang="en-US" smtClean="0"/>
+              <a:rPr lang="en-US"/>
               <a:t>Click to edit Master text styles</a:t>
             </a:r>
           </a:p>
           <a:p>
             <a:pPr lvl="1"/>
             <a:r>
-              <a:rPr lang="en-US" smtClean="0"/>
+              <a:rPr lang="en-US"/>
               <a:t>Second level</a:t>
             </a:r>
           </a:p>
           <a:p>
             <a:pPr lvl="2"/>
             <a:r>
-              <a:rPr lang="en-US" smtClean="0"/>
+              <a:rPr lang="en-US"/>
               <a:t>Third level</a:t>
             </a:r>
           </a:p>
           <a:p>
             <a:pPr lvl="3"/>
             <a:r>
-              <a:rPr lang="en-US" smtClean="0"/>
+              <a:rPr lang="en-US"/>
               <a:t>Fourth level</a:t>
             </a:r>
           </a:p>
           <a:p>
             <a:pPr lvl="4"/>
             <a:r>
-              <a:rPr lang="en-US" smtClean="0"/>
+              <a:rPr lang="en-US"/>
               <a:t>Fifth level</a:t>
             </a:r>
-            <a:endParaRPr lang="en-US"/>
           </a:p>
         </p:txBody>
       </p:sp>
@@ -1660,7 +1662,7 @@
           <a:p>
             <a:pPr lvl="0"/>
             <a:r>
-              <a:rPr lang="en-US" smtClean="0"/>
+              <a:rPr lang="en-US"/>
               <a:t>Click to edit Master text styles</a:t>
             </a:r>
           </a:p>
@@ -1716,38 +1718,37 @@
           <a:p>
             <a:pPr lvl="0"/>
             <a:r>
-              <a:rPr lang="en-US" smtClean="0"/>
+              <a:rPr lang="en-US"/>
               <a:t>Click to edit Master text styles</a:t>
             </a:r>
           </a:p>
           <a:p>
             <a:pPr lvl="1"/>
             <a:r>
-              <a:rPr lang="en-US" smtClean="0"/>
+              <a:rPr lang="en-US"/>
               <a:t>Second level</a:t>
             </a:r>
           </a:p>
           <a:p>
             <a:pPr lvl="2"/>
             <a:r>
-              <a:rPr lang="en-US" smtClean="0"/>
+              <a:rPr lang="en-US"/>
               <a:t>Third level</a:t>
             </a:r>
           </a:p>
           <a:p>
             <a:pPr lvl="3"/>
             <a:r>
-              <a:rPr lang="en-US" smtClean="0"/>
+              <a:rPr lang="en-US"/>
               <a:t>Fourth level</a:t>
             </a:r>
           </a:p>
           <a:p>
             <a:pPr lvl="4"/>
             <a:r>
-              <a:rPr lang="en-US" smtClean="0"/>
+              <a:rPr lang="en-US"/>
               <a:t>Fifth level</a:t>
             </a:r>
-            <a:endParaRPr lang="en-US"/>
           </a:p>
         </p:txBody>
       </p:sp>
@@ -1768,7 +1769,7 @@
           <a:p>
             <a:fld id="{5BCAD085-E8A6-8845-BD4E-CB4CCA059FC4}" type="datetimeFigureOut">
               <a:rPr lang="en-US" smtClean="0"/>
-              <a:t>1/27/13</a:t>
+              <a:t>8/25/26</a:t>
             </a:fld>
             <a:endParaRPr lang="en-US"/>
           </a:p>
@@ -1862,10 +1863,9 @@
           <a:lstStyle/>
           <a:p>
             <a:r>
-              <a:rPr lang="en-US" smtClean="0"/>
+              <a:rPr lang="en-US"/>
               <a:t>Click to edit Master title style</a:t>
             </a:r>
-            <a:endParaRPr lang="en-US"/>
           </a:p>
         </p:txBody>
       </p:sp>
@@ -1886,7 +1886,7 @@
           <a:p>
             <a:fld id="{5BCAD085-E8A6-8845-BD4E-CB4CCA059FC4}" type="datetimeFigureOut">
               <a:rPr lang="en-US" smtClean="0"/>
-              <a:t>1/27/13</a:t>
+              <a:t>8/25/26</a:t>
             </a:fld>
             <a:endParaRPr lang="en-US"/>
           </a:p>
@@ -1981,7 +1981,7 @@
           <a:p>
             <a:fld id="{5BCAD085-E8A6-8845-BD4E-CB4CCA059FC4}" type="datetimeFigureOut">
               <a:rPr lang="en-US" smtClean="0"/>
-              <a:t>1/27/13</a:t>
+              <a:t>8/25/26</a:t>
             </a:fld>
             <a:endParaRPr lang="en-US"/>
           </a:p>
@@ -2084,10 +2084,9 @@
           </a:lstStyle>
           <a:p>
             <a:r>
-              <a:rPr lang="en-US" smtClean="0"/>
+              <a:rPr lang="en-US"/>
               <a:t>Click to edit Master title style</a:t>
             </a:r>
-            <a:endParaRPr lang="en-US"/>
           </a:p>
         </p:txBody>
       </p:sp>
@@ -2141,38 +2140,37 @@
           <a:p>
             <a:pPr lvl="0"/>
             <a:r>
-              <a:rPr lang="en-US" smtClean="0"/>
+              <a:rPr lang="en-US"/>
               <a:t>Click to edit Master text styles</a:t>
             </a:r>
           </a:p>
           <a:p>
             <a:pPr lvl="1"/>
             <a:r>
-              <a:rPr lang="en-US" smtClean="0"/>
+              <a:rPr lang="en-US"/>
               <a:t>Second level</a:t>
             </a:r>
           </a:p>
           <a:p>
             <a:pPr lvl="2"/>
             <a:r>
-              <a:rPr lang="en-US" smtClean="0"/>
+              <a:rPr lang="en-US"/>
               <a:t>Third level</a:t>
             </a:r>
           </a:p>
           <a:p>
             <a:pPr lvl="3"/>
             <a:r>
-              <a:rPr lang="en-US" smtClean="0"/>
+              <a:rPr lang="en-US"/>
               <a:t>Fourth level</a:t>
             </a:r>
           </a:p>
           <a:p>
             <a:pPr lvl="4"/>
             <a:r>
-              <a:rPr lang="en-US" smtClean="0"/>
+              <a:rPr lang="en-US"/>
               <a:t>Fifth level</a:t>
             </a:r>
-            <a:endParaRPr lang="en-US"/>
           </a:p>
         </p:txBody>
       </p:sp>
@@ -2235,7 +2233,7 @@
           <a:p>
             <a:pPr lvl="0"/>
             <a:r>
-              <a:rPr lang="en-US" smtClean="0"/>
+              <a:rPr lang="en-US"/>
               <a:t>Click to edit Master text styles</a:t>
             </a:r>
           </a:p>
@@ -2258,7 +2256,7 @@
           <a:p>
             <a:fld id="{5BCAD085-E8A6-8845-BD4E-CB4CCA059FC4}" type="datetimeFigureOut">
               <a:rPr lang="en-US" smtClean="0"/>
-              <a:t>1/27/13</a:t>
+              <a:t>8/25/26</a:t>
             </a:fld>
             <a:endParaRPr lang="en-US"/>
           </a:p>
@@ -2361,10 +2359,9 @@
           </a:lstStyle>
           <a:p>
             <a:r>
-              <a:rPr lang="en-US" smtClean="0"/>
+              <a:rPr lang="en-US"/>
               <a:t>Click to edit Master title style</a:t>
             </a:r>
-            <a:endParaRPr lang="en-US"/>
           </a:p>
         </p:txBody>
       </p:sp>
@@ -2488,7 +2485,7 @@
           <a:p>
             <a:pPr lvl="0"/>
             <a:r>
-              <a:rPr lang="en-US" smtClean="0"/>
+              <a:rPr lang="en-US"/>
               <a:t>Click to edit Master text styles</a:t>
             </a:r>
           </a:p>
@@ -2511,7 +2508,7 @@
           <a:p>
             <a:fld id="{5BCAD085-E8A6-8845-BD4E-CB4CCA059FC4}" type="datetimeFigureOut">
               <a:rPr lang="en-US" smtClean="0"/>
-              <a:t>1/27/13</a:t>
+              <a:t>8/25/26</a:t>
             </a:fld>
             <a:endParaRPr lang="en-US"/>
           </a:p>
@@ -2620,10 +2617,9 @@
           <a:lstStyle/>
           <a:p>
             <a:r>
-              <a:rPr lang="en-US" smtClean="0"/>
+              <a:rPr lang="en-US"/>
               <a:t>Click to edit Master title style</a:t>
             </a:r>
-            <a:endParaRPr lang="en-US"/>
           </a:p>
         </p:txBody>
       </p:sp>
@@ -2654,38 +2650,37 @@
           <a:p>
             <a:pPr lvl="0"/>
             <a:r>
-              <a:rPr lang="en-US" smtClean="0"/>
+              <a:rPr lang="en-US"/>
               <a:t>Click to edit Master text styles</a:t>
             </a:r>
           </a:p>
           <a:p>
             <a:pPr lvl="1"/>
             <a:r>
-              <a:rPr lang="en-US" smtClean="0"/>
+              <a:rPr lang="en-US"/>
               <a:t>Second level</a:t>
             </a:r>
           </a:p>
           <a:p>
             <a:pPr lvl="2"/>
             <a:r>
-              <a:rPr lang="en-US" smtClean="0"/>
+              <a:rPr lang="en-US"/>
               <a:t>Third level</a:t>
             </a:r>
           </a:p>
           <a:p>
             <a:pPr lvl="3"/>
             <a:r>
-              <a:rPr lang="en-US" smtClean="0"/>
+              <a:rPr lang="en-US"/>
               <a:t>Fourth level</a:t>
             </a:r>
           </a:p>
           <a:p>
             <a:pPr lvl="4"/>
             <a:r>
-              <a:rPr lang="en-US" smtClean="0"/>
+              <a:rPr lang="en-US"/>
               <a:t>Fifth level</a:t>
             </a:r>
-            <a:endParaRPr lang="en-US"/>
           </a:p>
         </p:txBody>
       </p:sp>
@@ -2724,7 +2719,7 @@
           <a:p>
             <a:fld id="{5BCAD085-E8A6-8845-BD4E-CB4CCA059FC4}" type="datetimeFigureOut">
               <a:rPr lang="en-US" smtClean="0"/>
-              <a:t>1/27/13</a:t>
+              <a:t>8/25/26</a:t>
             </a:fld>
             <a:endParaRPr lang="en-US"/>
           </a:p>
@@ -3083,7 +3078,7 @@
 </file>
 
 <file path=ppt/slides/slide1.xml><?xml version="1.0" encoding="utf-8"?>
-<p:sld xmlns:a="http://schemas.openxmlformats.org/drawingml/2006/main" xmlns:p="http://schemas.openxmlformats.org/presentationml/2006/main" xmlns:r="http://schemas.openxmlformats.org/officeDocument/2006/relationships">
+<p:sld xmlns:a="http://schemas.openxmlformats.org/drawingml/2006/main" xmlns:r="http://schemas.openxmlformats.org/officeDocument/2006/relationships" xmlns:p="http://schemas.openxmlformats.org/presentationml/2006/main">
   <p:cSld>
     <p:spTree>
       <p:nvGrpSpPr>
@@ -3091,7 +3086,14 @@
         <p:cNvGrpSpPr/>
         <p:nvPr/>
       </p:nvGrpSpPr>
-      <p:grpSpPr/>
+      <p:grpSpPr>
+        <a:xfrm>
+          <a:off x="0" y="0"/>
+          <a:ext cx="0" cy="0"/>
+          <a:chOff x="0" y="0"/>
+          <a:chExt cx="0" cy="0"/>
+        </a:xfrm>
+      </p:grpSpPr>
       <p:sp>
         <p:nvSpPr>
           <p:cNvPr id="2" name="Rectangle 1"/>
@@ -3132,6 +3134,7 @@
           <a:lstStyle/>
           <a:p>
             <a:pPr algn="ctr"/>
+            <a:endParaRPr/>
           </a:p>
         </p:txBody>
       </p:sp>
@@ -3242,7 +3245,7 @@
         </p:nvSpPr>
         <p:spPr>
           <a:xfrm>
-            <a:off x="548640" y="1661350"/>
+            <a:off x="548640" y="2018843"/>
             <a:ext cx="5394960" cy="274320"/>
           </a:xfrm>
           <a:prstGeom prst="rect">
@@ -3275,7 +3278,7 @@
         </p:nvSpPr>
         <p:spPr>
           <a:xfrm>
-            <a:off x="548640" y="1986533"/>
+            <a:off x="548640" y="2694011"/>
             <a:ext cx="5394960" cy="274320"/>
           </a:xfrm>
           <a:prstGeom prst="rect">
@@ -3308,7 +3311,7 @@
         </p:nvSpPr>
         <p:spPr>
           <a:xfrm>
-            <a:off x="548640" y="2271140"/>
+            <a:off x="548640" y="3125422"/>
             <a:ext cx="5394960" cy="274320"/>
           </a:xfrm>
           <a:prstGeom prst="rect">
@@ -3339,11 +3342,17 @@
           <p:cNvGraphicFramePr>
             <a:graphicFrameLocks noGrp="1"/>
           </p:cNvGraphicFramePr>
-          <p:nvPr/>
+          <p:nvPr>
+            <p:extLst>
+              <p:ext uri="{D42A27DB-BD31-4B8C-83A1-F6EECF244321}">
+                <p14:modId xmlns:p14="http://schemas.microsoft.com/office/powerpoint/2010/main" val="1629435378"/>
+              </p:ext>
+            </p:extLst>
+          </p:nvPr>
         </p:nvGraphicFramePr>
         <p:xfrm>
-          <a:off x="548640" y="2578035"/>
-          <a:ext cx="5394960" cy="950976"/>
+          <a:off x="548640" y="3613023"/>
+          <a:ext cx="5394960" cy="1386840"/>
         </p:xfrm>
         <a:graphic>
           <a:graphicData uri="http://schemas.openxmlformats.org/drawingml/2006/table">
@@ -3352,9 +3361,27 @@
                 <a:tableStyleId>{5C22544A-7EE6-4342-B048-85BDC9FD1C3A}</a:tableStyleId>
               </a:tblPr>
               <a:tblGrid>
-                <a:gridCol w="1798320"/>
-                <a:gridCol w="1798320"/>
-                <a:gridCol w="1798320"/>
+                <a:gridCol w="1798320">
+                  <a:extLst>
+                    <a:ext uri="{9D8B030D-6E8A-4147-A177-3AD203B41FA5}">
+                      <a16:colId xmlns:a16="http://schemas.microsoft.com/office/drawing/2014/main" val="20000"/>
+                    </a:ext>
+                  </a:extLst>
+                </a:gridCol>
+                <a:gridCol w="1798320">
+                  <a:extLst>
+                    <a:ext uri="{9D8B030D-6E8A-4147-A177-3AD203B41FA5}">
+                      <a16:colId xmlns:a16="http://schemas.microsoft.com/office/drawing/2014/main" val="20001"/>
+                    </a:ext>
+                  </a:extLst>
+                </a:gridCol>
+                <a:gridCol w="1798320">
+                  <a:extLst>
+                    <a:ext uri="{9D8B030D-6E8A-4147-A177-3AD203B41FA5}">
+                      <a16:colId xmlns:a16="http://schemas.microsoft.com/office/drawing/2014/main" val="20002"/>
+                    </a:ext>
+                  </a:extLst>
+                </a:gridCol>
               </a:tblGrid>
               <a:tr h="237744">
                 <a:tc>
@@ -3426,6 +3453,11 @@
                     </a:solidFill>
                   </a:tcPr>
                 </a:tc>
+                <a:extLst>
+                  <a:ext uri="{0D108BD9-81ED-4DB2-BD59-A6C34878D82A}">
+                    <a16:rowId xmlns:a16="http://schemas.microsoft.com/office/drawing/2014/main" val="10000"/>
+                  </a:ext>
+                </a:extLst>
               </a:tr>
               <a:tr h="237744">
                 <a:tc>
@@ -3497,6 +3529,11 @@
                     </a:solidFill>
                   </a:tcPr>
                 </a:tc>
+                <a:extLst>
+                  <a:ext uri="{0D108BD9-81ED-4DB2-BD59-A6C34878D82A}">
+                    <a16:rowId xmlns:a16="http://schemas.microsoft.com/office/drawing/2014/main" val="10001"/>
+                  </a:ext>
+                </a:extLst>
               </a:tr>
               <a:tr h="237744">
                 <a:tc>
@@ -3568,6 +3605,11 @@
                     </a:solidFill>
                   </a:tcPr>
                 </a:tc>
+                <a:extLst>
+                  <a:ext uri="{0D108BD9-81ED-4DB2-BD59-A6C34878D82A}">
+                    <a16:rowId xmlns:a16="http://schemas.microsoft.com/office/drawing/2014/main" val="10002"/>
+                  </a:ext>
+                </a:extLst>
               </a:tr>
               <a:tr h="237744">
                 <a:tc>
@@ -3639,6 +3681,11 @@
                     </a:solidFill>
                   </a:tcPr>
                 </a:tc>
+                <a:extLst>
+                  <a:ext uri="{0D108BD9-81ED-4DB2-BD59-A6C34878D82A}">
+                    <a16:rowId xmlns:a16="http://schemas.microsoft.com/office/drawing/2014/main" val="10003"/>
+                  </a:ext>
+                </a:extLst>
               </a:tr>
             </a:tbl>
           </a:graphicData>
@@ -3652,7 +3699,7 @@
         </p:nvSpPr>
         <p:spPr>
           <a:xfrm>
-            <a:off x="548640" y="3711891"/>
+            <a:off x="6502873" y="1106424"/>
             <a:ext cx="5394960" cy="274320"/>
           </a:xfrm>
           <a:prstGeom prst="rect">
@@ -3685,8 +3732,8 @@
         </p:nvSpPr>
         <p:spPr>
           <a:xfrm>
-            <a:off x="548640" y="3996498"/>
-            <a:ext cx="5394960" cy="274320"/>
+            <a:off x="6502873" y="1466699"/>
+            <a:ext cx="5394960" cy="1508105"/>
           </a:xfrm>
           <a:prstGeom prst="rect">
             <a:avLst/>
@@ -3705,7 +3752,152 @@
                   <a:srgbClr val="1E1B4B"/>
                 </a:solidFill>
               </a:rPr>
-              <a:t>Load balancing · health checking · auto-scaling simulation · stateless application tier · CDN-offloaded assets · role-based access control · containerization · CI/CD</a:t>
+              <a:t>Load balancing </a:t>
+            </a:r>
+            <a:endParaRPr lang="en-US" sz="1150">
+              <a:solidFill>
+                <a:srgbClr val="1E1B4B"/>
+              </a:solidFill>
+            </a:endParaRPr>
+          </a:p>
+          <a:p>
+            <a:r>
+              <a:rPr lang="en-US" sz="1150" b="0">
+                <a:solidFill>
+                  <a:srgbClr val="1E1B4B"/>
+                </a:solidFill>
+              </a:rPr>
+              <a:t>H</a:t>
+            </a:r>
+            <a:r>
+              <a:rPr sz="1150" b="0">
+                <a:solidFill>
+                  <a:srgbClr val="1E1B4B"/>
+                </a:solidFill>
+              </a:rPr>
+              <a:t>ealth checking </a:t>
+            </a:r>
+            <a:endParaRPr lang="en-US" sz="1150">
+              <a:solidFill>
+                <a:srgbClr val="1E1B4B"/>
+              </a:solidFill>
+            </a:endParaRPr>
+          </a:p>
+          <a:p>
+            <a:r>
+              <a:rPr lang="en-US" sz="1150" b="0">
+                <a:solidFill>
+                  <a:srgbClr val="1E1B4B"/>
+                </a:solidFill>
+              </a:rPr>
+              <a:t>A</a:t>
+            </a:r>
+            <a:r>
+              <a:rPr sz="1150" b="0">
+                <a:solidFill>
+                  <a:srgbClr val="1E1B4B"/>
+                </a:solidFill>
+              </a:rPr>
+              <a:t>uto-scaling simulation </a:t>
+            </a:r>
+            <a:endParaRPr lang="en-US" sz="1150" b="0">
+              <a:solidFill>
+                <a:srgbClr val="1E1B4B"/>
+              </a:solidFill>
+            </a:endParaRPr>
+          </a:p>
+          <a:p>
+            <a:r>
+              <a:rPr lang="en-US" sz="1150">
+                <a:solidFill>
+                  <a:srgbClr val="1E1B4B"/>
+                </a:solidFill>
+              </a:rPr>
+              <a:t>S</a:t>
+            </a:r>
+            <a:r>
+              <a:rPr sz="1150" b="0">
+                <a:solidFill>
+                  <a:srgbClr val="1E1B4B"/>
+                </a:solidFill>
+              </a:rPr>
+              <a:t>tateless application tier </a:t>
+            </a:r>
+            <a:endParaRPr lang="en-US" sz="1150" b="0">
+              <a:solidFill>
+                <a:srgbClr val="1E1B4B"/>
+              </a:solidFill>
+            </a:endParaRPr>
+          </a:p>
+          <a:p>
+            <a:r>
+              <a:rPr sz="1150" b="0">
+                <a:solidFill>
+                  <a:srgbClr val="1E1B4B"/>
+                </a:solidFill>
+              </a:rPr>
+              <a:t>CDN-offloaded assets </a:t>
+            </a:r>
+            <a:endParaRPr lang="en-US" sz="1150" b="0">
+              <a:solidFill>
+                <a:srgbClr val="1E1B4B"/>
+              </a:solidFill>
+            </a:endParaRPr>
+          </a:p>
+          <a:p>
+            <a:r>
+              <a:rPr lang="en-US" sz="1150" b="0">
+                <a:solidFill>
+                  <a:srgbClr val="1E1B4B"/>
+                </a:solidFill>
+              </a:rPr>
+              <a:t>R</a:t>
+            </a:r>
+            <a:r>
+              <a:rPr sz="1150" b="0">
+                <a:solidFill>
+                  <a:srgbClr val="1E1B4B"/>
+                </a:solidFill>
+              </a:rPr>
+              <a:t>ole-based access control </a:t>
+            </a:r>
+            <a:endParaRPr lang="en-US" sz="1150" b="0">
+              <a:solidFill>
+                <a:srgbClr val="1E1B4B"/>
+              </a:solidFill>
+            </a:endParaRPr>
+          </a:p>
+          <a:p>
+            <a:r>
+              <a:rPr lang="en-US" sz="1150" b="0">
+                <a:solidFill>
+                  <a:srgbClr val="1E1B4B"/>
+                </a:solidFill>
+              </a:rPr>
+              <a:t>C</a:t>
+            </a:r>
+            <a:r>
+              <a:rPr sz="1150" b="0">
+                <a:solidFill>
+                  <a:srgbClr val="1E1B4B"/>
+                </a:solidFill>
+              </a:rPr>
+              <a:t>ontainerization </a:t>
+            </a:r>
+            <a:endParaRPr lang="en-US" sz="1150" b="0">
+              <a:solidFill>
+                <a:srgbClr val="1E1B4B"/>
+              </a:solidFill>
+            </a:endParaRPr>
+          </a:p>
+          <a:p>
+            <a:r>
+              <a:rPr sz="1150" b="0">
+                <a:solidFill>
+                  <a:srgbClr val="1E1B4B"/>
+                </a:solidFill>
+              </a:rPr>
+              <a:t>CI/CD</a:t>
             </a:r>
           </a:p>
         </p:txBody>
@@ -3718,7 +3910,7 @@
         </p:nvSpPr>
         <p:spPr>
           <a:xfrm>
-            <a:off x="548640" y="4266817"/>
+            <a:off x="6502873" y="3060759"/>
             <a:ext cx="5394960" cy="274320"/>
           </a:xfrm>
           <a:prstGeom prst="rect">
@@ -3818,7 +4010,7 @@
 </file>
 
 <file path=ppt/slides/slide2.xml><?xml version="1.0" encoding="utf-8"?>
-<p:sld xmlns:a="http://schemas.openxmlformats.org/drawingml/2006/main" xmlns:p="http://schemas.openxmlformats.org/presentationml/2006/main" xmlns:r="http://schemas.openxmlformats.org/officeDocument/2006/relationships">
+<p:sld xmlns:a="http://schemas.openxmlformats.org/drawingml/2006/main" xmlns:r="http://schemas.openxmlformats.org/officeDocument/2006/relationships" xmlns:p="http://schemas.openxmlformats.org/presentationml/2006/main">
   <p:cSld>
     <p:spTree>
       <p:nvGrpSpPr>
@@ -3826,7 +4018,14 @@
         <p:cNvGrpSpPr/>
         <p:nvPr/>
       </p:nvGrpSpPr>
-      <p:grpSpPr/>
+      <p:grpSpPr>
+        <a:xfrm>
+          <a:off x="0" y="0"/>
+          <a:ext cx="0" cy="0"/>
+          <a:chOff x="0" y="0"/>
+          <a:chExt cx="0" cy="0"/>
+        </a:xfrm>
+      </p:grpSpPr>
       <p:sp>
         <p:nvSpPr>
           <p:cNvPr id="2" name="Rectangle 1"/>
@@ -3867,6 +4066,7 @@
           <a:lstStyle/>
           <a:p>
             <a:pPr algn="ctr"/>
+            <a:endParaRPr/>
           </a:p>
         </p:txBody>
       </p:sp>
@@ -3975,11 +4175,17 @@
           <p:cNvGraphicFramePr>
             <a:graphicFrameLocks noGrp="1"/>
           </p:cNvGraphicFramePr>
-          <p:nvPr/>
+          <p:nvPr>
+            <p:extLst>
+              <p:ext uri="{D42A27DB-BD31-4B8C-83A1-F6EECF244321}">
+                <p14:modId xmlns:p14="http://schemas.microsoft.com/office/powerpoint/2010/main" val="3607273962"/>
+              </p:ext>
+            </p:extLst>
+          </p:nvPr>
         </p:nvGraphicFramePr>
         <p:xfrm>
-          <a:off x="548640" y="1697926"/>
-          <a:ext cx="5394960" cy="1188720"/>
+          <a:off x="548640" y="1824218"/>
+          <a:ext cx="5394960" cy="1624584"/>
         </p:xfrm>
         <a:graphic>
           <a:graphicData uri="http://schemas.openxmlformats.org/drawingml/2006/table">
@@ -3988,8 +4194,20 @@
                 <a:tableStyleId>{5C22544A-7EE6-4342-B048-85BDC9FD1C3A}</a:tableStyleId>
               </a:tblPr>
               <a:tblGrid>
-                <a:gridCol w="2697480"/>
-                <a:gridCol w="2697480"/>
+                <a:gridCol w="2697480">
+                  <a:extLst>
+                    <a:ext uri="{9D8B030D-6E8A-4147-A177-3AD203B41FA5}">
+                      <a16:colId xmlns:a16="http://schemas.microsoft.com/office/drawing/2014/main" val="20000"/>
+                    </a:ext>
+                  </a:extLst>
+                </a:gridCol>
+                <a:gridCol w="2697480">
+                  <a:extLst>
+                    <a:ext uri="{9D8B030D-6E8A-4147-A177-3AD203B41FA5}">
+                      <a16:colId xmlns:a16="http://schemas.microsoft.com/office/drawing/2014/main" val="20001"/>
+                    </a:ext>
+                  </a:extLst>
+                </a:gridCol>
               </a:tblGrid>
               <a:tr h="237744">
                 <a:tc>
@@ -4038,6 +4256,11 @@
                     </a:solidFill>
                   </a:tcPr>
                 </a:tc>
+                <a:extLst>
+                  <a:ext uri="{0D108BD9-81ED-4DB2-BD59-A6C34878D82A}">
+                    <a16:rowId xmlns:a16="http://schemas.microsoft.com/office/drawing/2014/main" val="10000"/>
+                  </a:ext>
+                </a:extLst>
               </a:tr>
               <a:tr h="237744">
                 <a:tc>
@@ -4086,6 +4309,11 @@
                     </a:solidFill>
                   </a:tcPr>
                 </a:tc>
+                <a:extLst>
+                  <a:ext uri="{0D108BD9-81ED-4DB2-BD59-A6C34878D82A}">
+                    <a16:rowId xmlns:a16="http://schemas.microsoft.com/office/drawing/2014/main" val="10001"/>
+                  </a:ext>
+                </a:extLst>
               </a:tr>
               <a:tr h="237744">
                 <a:tc>
@@ -4134,6 +4362,11 @@
                     </a:solidFill>
                   </a:tcPr>
                 </a:tc>
+                <a:extLst>
+                  <a:ext uri="{0D108BD9-81ED-4DB2-BD59-A6C34878D82A}">
+                    <a16:rowId xmlns:a16="http://schemas.microsoft.com/office/drawing/2014/main" val="10002"/>
+                  </a:ext>
+                </a:extLst>
               </a:tr>
               <a:tr h="237744">
                 <a:tc>
@@ -4182,6 +4415,11 @@
                     </a:solidFill>
                   </a:tcPr>
                 </a:tc>
+                <a:extLst>
+                  <a:ext uri="{0D108BD9-81ED-4DB2-BD59-A6C34878D82A}">
+                    <a16:rowId xmlns:a16="http://schemas.microsoft.com/office/drawing/2014/main" val="10003"/>
+                  </a:ext>
+                </a:extLst>
               </a:tr>
               <a:tr h="237744">
                 <a:tc>
@@ -4230,6 +4468,11 @@
                     </a:solidFill>
                   </a:tcPr>
                 </a:tc>
+                <a:extLst>
+                  <a:ext uri="{0D108BD9-81ED-4DB2-BD59-A6C34878D82A}">
+                    <a16:rowId xmlns:a16="http://schemas.microsoft.com/office/drawing/2014/main" val="10004"/>
+                  </a:ext>
+                </a:extLst>
               </a:tr>
             </a:tbl>
           </a:graphicData>
@@ -4243,7 +4486,7 @@
         </p:nvSpPr>
         <p:spPr>
           <a:xfrm>
-            <a:off x="548640" y="3014662"/>
+            <a:off x="548640" y="3471825"/>
             <a:ext cx="5394960" cy="274320"/>
           </a:xfrm>
           <a:prstGeom prst="rect">
@@ -4276,7 +4519,7 @@
         </p:nvSpPr>
         <p:spPr>
           <a:xfrm>
-            <a:off x="548640" y="3339845"/>
+            <a:off x="548640" y="4057651"/>
             <a:ext cx="5394960" cy="274320"/>
           </a:xfrm>
           <a:prstGeom prst="rect">
@@ -4307,11 +4550,17 @@
           <p:cNvGraphicFramePr>
             <a:graphicFrameLocks noGrp="1"/>
           </p:cNvGraphicFramePr>
-          <p:nvPr/>
+          <p:nvPr>
+            <p:extLst>
+              <p:ext uri="{D42A27DB-BD31-4B8C-83A1-F6EECF244321}">
+                <p14:modId xmlns:p14="http://schemas.microsoft.com/office/powerpoint/2010/main" val="820017221"/>
+              </p:ext>
+            </p:extLst>
+          </p:nvPr>
         </p:nvGraphicFramePr>
         <p:xfrm>
-          <a:off x="548640" y="3661028"/>
-          <a:ext cx="5394960" cy="950976"/>
+          <a:off x="548640" y="4481286"/>
+          <a:ext cx="5394960" cy="1100328"/>
         </p:xfrm>
         <a:graphic>
           <a:graphicData uri="http://schemas.openxmlformats.org/drawingml/2006/table">
@@ -4320,10 +4569,22 @@
                 <a:tableStyleId>{5C22544A-7EE6-4342-B048-85BDC9FD1C3A}</a:tableStyleId>
               </a:tblPr>
               <a:tblGrid>
-                <a:gridCol w="2697480"/>
-                <a:gridCol w="2697480"/>
+                <a:gridCol w="2697480">
+                  <a:extLst>
+                    <a:ext uri="{9D8B030D-6E8A-4147-A177-3AD203B41FA5}">
+                      <a16:colId xmlns:a16="http://schemas.microsoft.com/office/drawing/2014/main" val="20000"/>
+                    </a:ext>
+                  </a:extLst>
+                </a:gridCol>
+                <a:gridCol w="2697480">
+                  <a:extLst>
+                    <a:ext uri="{9D8B030D-6E8A-4147-A177-3AD203B41FA5}">
+                      <a16:colId xmlns:a16="http://schemas.microsoft.com/office/drawing/2014/main" val="20001"/>
+                    </a:ext>
+                  </a:extLst>
+                </a:gridCol>
               </a:tblGrid>
-              <a:tr h="237744">
+              <a:tr h="241172">
                 <a:tc>
                   <a:txBody>
                     <a:bodyPr/>
@@ -4370,6 +4631,11 @@
                     </a:solidFill>
                   </a:tcPr>
                 </a:tc>
+                <a:extLst>
+                  <a:ext uri="{0D108BD9-81ED-4DB2-BD59-A6C34878D82A}">
+                    <a16:rowId xmlns:a16="http://schemas.microsoft.com/office/drawing/2014/main" val="10000"/>
+                  </a:ext>
+                </a:extLst>
               </a:tr>
               <a:tr h="237744">
                 <a:tc>
@@ -4418,6 +4684,11 @@
                     </a:solidFill>
                   </a:tcPr>
                 </a:tc>
+                <a:extLst>
+                  <a:ext uri="{0D108BD9-81ED-4DB2-BD59-A6C34878D82A}">
+                    <a16:rowId xmlns:a16="http://schemas.microsoft.com/office/drawing/2014/main" val="10001"/>
+                  </a:ext>
+                </a:extLst>
               </a:tr>
               <a:tr h="237744">
                 <a:tc>
@@ -4466,6 +4737,11 @@
                     </a:solidFill>
                   </a:tcPr>
                 </a:tc>
+                <a:extLst>
+                  <a:ext uri="{0D108BD9-81ED-4DB2-BD59-A6C34878D82A}">
+                    <a16:rowId xmlns:a16="http://schemas.microsoft.com/office/drawing/2014/main" val="10002"/>
+                  </a:ext>
+                </a:extLst>
               </a:tr>
               <a:tr h="237744">
                 <a:tc>
@@ -4514,6 +4790,11 @@
                     </a:solidFill>
                   </a:tcPr>
                 </a:tc>
+                <a:extLst>
+                  <a:ext uri="{0D108BD9-81ED-4DB2-BD59-A6C34878D82A}">
+                    <a16:rowId xmlns:a16="http://schemas.microsoft.com/office/drawing/2014/main" val="10003"/>
+                  </a:ext>
+                </a:extLst>
               </a:tr>
             </a:tbl>
           </a:graphicData>
@@ -4527,7 +4808,7 @@
         </p:nvSpPr>
         <p:spPr>
           <a:xfrm>
-            <a:off x="548640" y="4794884"/>
+            <a:off x="6400800" y="1106424"/>
             <a:ext cx="5394960" cy="274320"/>
           </a:xfrm>
           <a:prstGeom prst="rect">
@@ -4568,7 +4849,7 @@
         </p:blipFill>
         <p:spPr>
           <a:xfrm>
-            <a:off x="6400800" y="1051560"/>
+            <a:off x="6400800" y="1497331"/>
             <a:ext cx="3847927" cy="2834640"/>
           </a:xfrm>
           <a:prstGeom prst="rect">
@@ -4584,7 +4865,7 @@
         </p:nvSpPr>
         <p:spPr>
           <a:xfrm>
-            <a:off x="6400800" y="4014216"/>
+            <a:off x="6400800" y="4448558"/>
             <a:ext cx="5394960" cy="274320"/>
           </a:xfrm>
           <a:prstGeom prst="rect">
@@ -4684,7 +4965,7 @@
 </file>
 
 <file path=ppt/slides/slide3.xml><?xml version="1.0" encoding="utf-8"?>
-<p:sld xmlns:a="http://schemas.openxmlformats.org/drawingml/2006/main" xmlns:p="http://schemas.openxmlformats.org/presentationml/2006/main" xmlns:r="http://schemas.openxmlformats.org/officeDocument/2006/relationships">
+<p:sld xmlns:a="http://schemas.openxmlformats.org/drawingml/2006/main" xmlns:r="http://schemas.openxmlformats.org/officeDocument/2006/relationships" xmlns:p="http://schemas.openxmlformats.org/presentationml/2006/main">
   <p:cSld>
     <p:spTree>
       <p:nvGrpSpPr>
@@ -4692,7 +4973,14 @@
         <p:cNvGrpSpPr/>
         <p:nvPr/>
       </p:nvGrpSpPr>
-      <p:grpSpPr/>
+      <p:grpSpPr>
+        <a:xfrm>
+          <a:off x="0" y="0"/>
+          <a:ext cx="0" cy="0"/>
+          <a:chOff x="0" y="0"/>
+          <a:chExt cx="0" cy="0"/>
+        </a:xfrm>
+      </p:grpSpPr>
       <p:sp>
         <p:nvSpPr>
           <p:cNvPr id="2" name="Rectangle 1"/>
@@ -4733,6 +5021,7 @@
           <a:lstStyle/>
           <a:p>
             <a:pPr algn="ctr"/>
+            <a:endParaRPr/>
           </a:p>
         </p:txBody>
       </p:sp>
@@ -4843,7 +5132,7 @@
         </p:nvSpPr>
         <p:spPr>
           <a:xfrm>
-            <a:off x="548640" y="1661350"/>
+            <a:off x="548640" y="1978669"/>
             <a:ext cx="5394960" cy="274320"/>
           </a:xfrm>
           <a:prstGeom prst="rect">
@@ -4884,7 +5173,7 @@
         </p:blipFill>
         <p:spPr>
           <a:xfrm>
-            <a:off x="548640" y="1931669"/>
+            <a:off x="548640" y="2447438"/>
             <a:ext cx="5394960" cy="2820092"/>
           </a:xfrm>
           <a:prstGeom prst="rect">
@@ -4900,7 +5189,7 @@
         </p:nvSpPr>
         <p:spPr>
           <a:xfrm>
-            <a:off x="548640" y="4879777"/>
+            <a:off x="548640" y="5461980"/>
             <a:ext cx="5394960" cy="274320"/>
           </a:xfrm>
           <a:prstGeom prst="rect">
@@ -4999,7 +5288,7 @@
         </p:nvSpPr>
         <p:spPr>
           <a:xfrm>
-            <a:off x="6400800" y="1661350"/>
+            <a:off x="6400800" y="2141860"/>
             <a:ext cx="5394960" cy="274320"/>
           </a:xfrm>
           <a:prstGeom prst="rect">
@@ -5030,11 +5319,17 @@
           <p:cNvGraphicFramePr>
             <a:graphicFrameLocks noGrp="1"/>
           </p:cNvGraphicFramePr>
-          <p:nvPr/>
+          <p:nvPr>
+            <p:extLst>
+              <p:ext uri="{D42A27DB-BD31-4B8C-83A1-F6EECF244321}">
+                <p14:modId xmlns:p14="http://schemas.microsoft.com/office/powerpoint/2010/main" val="3329160871"/>
+              </p:ext>
+            </p:extLst>
+          </p:nvPr>
         </p:nvGraphicFramePr>
         <p:xfrm>
-          <a:off x="6400800" y="1968245"/>
-          <a:ext cx="5394960" cy="713232"/>
+          <a:off x="6400800" y="2426467"/>
+          <a:ext cx="5394960" cy="862584"/>
         </p:xfrm>
         <a:graphic>
           <a:graphicData uri="http://schemas.openxmlformats.org/drawingml/2006/table">
@@ -5043,8 +5338,20 @@
                 <a:tableStyleId>{5C22544A-7EE6-4342-B048-85BDC9FD1C3A}</a:tableStyleId>
               </a:tblPr>
               <a:tblGrid>
-                <a:gridCol w="2697480"/>
-                <a:gridCol w="2697480"/>
+                <a:gridCol w="2697480">
+                  <a:extLst>
+                    <a:ext uri="{9D8B030D-6E8A-4147-A177-3AD203B41FA5}">
+                      <a16:colId xmlns:a16="http://schemas.microsoft.com/office/drawing/2014/main" val="20000"/>
+                    </a:ext>
+                  </a:extLst>
+                </a:gridCol>
+                <a:gridCol w="2697480">
+                  <a:extLst>
+                    <a:ext uri="{9D8B030D-6E8A-4147-A177-3AD203B41FA5}">
+                      <a16:colId xmlns:a16="http://schemas.microsoft.com/office/drawing/2014/main" val="20001"/>
+                    </a:ext>
+                  </a:extLst>
+                </a:gridCol>
               </a:tblGrid>
               <a:tr h="237744">
                 <a:tc>
@@ -5093,6 +5400,11 @@
                     </a:solidFill>
                   </a:tcPr>
                 </a:tc>
+                <a:extLst>
+                  <a:ext uri="{0D108BD9-81ED-4DB2-BD59-A6C34878D82A}">
+                    <a16:rowId xmlns:a16="http://schemas.microsoft.com/office/drawing/2014/main" val="10000"/>
+                  </a:ext>
+                </a:extLst>
               </a:tr>
               <a:tr h="237744">
                 <a:tc>
@@ -5141,6 +5453,11 @@
                     </a:solidFill>
                   </a:tcPr>
                 </a:tc>
+                <a:extLst>
+                  <a:ext uri="{0D108BD9-81ED-4DB2-BD59-A6C34878D82A}">
+                    <a16:rowId xmlns:a16="http://schemas.microsoft.com/office/drawing/2014/main" val="10001"/>
+                  </a:ext>
+                </a:extLst>
               </a:tr>
               <a:tr h="237744">
                 <a:tc>
@@ -5189,6 +5506,11 @@
                     </a:solidFill>
                   </a:tcPr>
                 </a:tc>
+                <a:extLst>
+                  <a:ext uri="{0D108BD9-81ED-4DB2-BD59-A6C34878D82A}">
+                    <a16:rowId xmlns:a16="http://schemas.microsoft.com/office/drawing/2014/main" val="10002"/>
+                  </a:ext>
+                </a:extLst>
               </a:tr>
             </a:tbl>
           </a:graphicData>
@@ -5202,7 +5524,7 @@
         </p:nvSpPr>
         <p:spPr>
           <a:xfrm>
-            <a:off x="6400800" y="2809493"/>
+            <a:off x="6400800" y="3361849"/>
             <a:ext cx="5394960" cy="274320"/>
           </a:xfrm>
           <a:prstGeom prst="rect">
@@ -5233,11 +5555,17 @@
           <p:cNvGraphicFramePr>
             <a:graphicFrameLocks noGrp="1"/>
           </p:cNvGraphicFramePr>
-          <p:nvPr/>
+          <p:nvPr>
+            <p:extLst>
+              <p:ext uri="{D42A27DB-BD31-4B8C-83A1-F6EECF244321}">
+                <p14:modId xmlns:p14="http://schemas.microsoft.com/office/powerpoint/2010/main" val="2296200322"/>
+              </p:ext>
+            </p:extLst>
+          </p:nvPr>
         </p:nvGraphicFramePr>
         <p:xfrm>
-          <a:off x="6400800" y="3116388"/>
-          <a:ext cx="5394960" cy="475488"/>
+          <a:off x="6400800" y="3709511"/>
+          <a:ext cx="5394960" cy="481584"/>
         </p:xfrm>
         <a:graphic>
           <a:graphicData uri="http://schemas.openxmlformats.org/drawingml/2006/table">
@@ -5246,9 +5574,27 @@
                 <a:tableStyleId>{5C22544A-7EE6-4342-B048-85BDC9FD1C3A}</a:tableStyleId>
               </a:tblPr>
               <a:tblGrid>
-                <a:gridCol w="1798320"/>
-                <a:gridCol w="1798320"/>
-                <a:gridCol w="1798320"/>
+                <a:gridCol w="1798320">
+                  <a:extLst>
+                    <a:ext uri="{9D8B030D-6E8A-4147-A177-3AD203B41FA5}">
+                      <a16:colId xmlns:a16="http://schemas.microsoft.com/office/drawing/2014/main" val="20000"/>
+                    </a:ext>
+                  </a:extLst>
+                </a:gridCol>
+                <a:gridCol w="1798320">
+                  <a:extLst>
+                    <a:ext uri="{9D8B030D-6E8A-4147-A177-3AD203B41FA5}">
+                      <a16:colId xmlns:a16="http://schemas.microsoft.com/office/drawing/2014/main" val="20001"/>
+                    </a:ext>
+                  </a:extLst>
+                </a:gridCol>
+                <a:gridCol w="1798320">
+                  <a:extLst>
+                    <a:ext uri="{9D8B030D-6E8A-4147-A177-3AD203B41FA5}">
+                      <a16:colId xmlns:a16="http://schemas.microsoft.com/office/drawing/2014/main" val="20002"/>
+                    </a:ext>
+                  </a:extLst>
+                </a:gridCol>
               </a:tblGrid>
               <a:tr h="237744">
                 <a:tc>
@@ -5320,6 +5666,11 @@
                     </a:solidFill>
                   </a:tcPr>
                 </a:tc>
+                <a:extLst>
+                  <a:ext uri="{0D108BD9-81ED-4DB2-BD59-A6C34878D82A}">
+                    <a16:rowId xmlns:a16="http://schemas.microsoft.com/office/drawing/2014/main" val="10000"/>
+                  </a:ext>
+                </a:extLst>
               </a:tr>
               <a:tr h="237744">
                 <a:tc>
@@ -5391,6 +5742,11 @@
                     </a:solidFill>
                   </a:tcPr>
                 </a:tc>
+                <a:extLst>
+                  <a:ext uri="{0D108BD9-81ED-4DB2-BD59-A6C34878D82A}">
+                    <a16:rowId xmlns:a16="http://schemas.microsoft.com/office/drawing/2014/main" val="10001"/>
+                  </a:ext>
+                </a:extLst>
               </a:tr>
             </a:tbl>
           </a:graphicData>
@@ -5471,7 +5827,7 @@
 </file>
 
 <file path=ppt/slides/slide4.xml><?xml version="1.0" encoding="utf-8"?>
-<p:sld xmlns:a="http://schemas.openxmlformats.org/drawingml/2006/main" xmlns:p="http://schemas.openxmlformats.org/presentationml/2006/main" xmlns:r="http://schemas.openxmlformats.org/officeDocument/2006/relationships">
+<p:sld xmlns:a="http://schemas.openxmlformats.org/drawingml/2006/main" xmlns:r="http://schemas.openxmlformats.org/officeDocument/2006/relationships" xmlns:p="http://schemas.openxmlformats.org/presentationml/2006/main">
   <p:cSld>
     <p:spTree>
       <p:nvGrpSpPr>
@@ -5479,7 +5835,14 @@
         <p:cNvGrpSpPr/>
         <p:nvPr/>
       </p:nvGrpSpPr>
-      <p:grpSpPr/>
+      <p:grpSpPr>
+        <a:xfrm>
+          <a:off x="0" y="0"/>
+          <a:ext cx="0" cy="0"/>
+          <a:chOff x="0" y="0"/>
+          <a:chExt cx="0" cy="0"/>
+        </a:xfrm>
+      </p:grpSpPr>
       <p:sp>
         <p:nvSpPr>
           <p:cNvPr id="2" name="Rectangle 1"/>
@@ -5520,6 +5883,7 @@
           <a:lstStyle/>
           <a:p>
             <a:pPr algn="ctr"/>
+            <a:endParaRPr/>
           </a:p>
         </p:txBody>
       </p:sp>
@@ -5630,7 +5994,7 @@
         </p:nvSpPr>
         <p:spPr>
           <a:xfrm>
-            <a:off x="548640" y="1661350"/>
+            <a:off x="548640" y="1880807"/>
             <a:ext cx="5394960" cy="274320"/>
           </a:xfrm>
           <a:prstGeom prst="rect">
@@ -5741,7 +6105,7 @@
         </p:nvSpPr>
         <p:spPr>
           <a:xfrm>
-            <a:off x="548640" y="2895790"/>
+            <a:off x="548640" y="3134678"/>
             <a:ext cx="5394960" cy="274320"/>
           </a:xfrm>
           <a:prstGeom prst="rect">
@@ -5774,7 +6138,7 @@
         </p:nvSpPr>
         <p:spPr>
           <a:xfrm>
-            <a:off x="548640" y="3220973"/>
+            <a:off x="548640" y="3807047"/>
             <a:ext cx="5394960" cy="274320"/>
           </a:xfrm>
           <a:prstGeom prst="rect">
@@ -5805,11 +6169,17 @@
           <p:cNvGraphicFramePr>
             <a:graphicFrameLocks noGrp="1"/>
           </p:cNvGraphicFramePr>
-          <p:nvPr/>
+          <p:nvPr>
+            <p:extLst>
+              <p:ext uri="{D42A27DB-BD31-4B8C-83A1-F6EECF244321}">
+                <p14:modId xmlns:p14="http://schemas.microsoft.com/office/powerpoint/2010/main" val="4101949488"/>
+              </p:ext>
+            </p:extLst>
+          </p:nvPr>
         </p:nvGraphicFramePr>
         <p:xfrm>
-          <a:off x="548640" y="3542156"/>
-          <a:ext cx="5394960" cy="1188720"/>
+          <a:off x="548640" y="4230243"/>
+          <a:ext cx="5394960" cy="1481328"/>
         </p:xfrm>
         <a:graphic>
           <a:graphicData uri="http://schemas.openxmlformats.org/drawingml/2006/table">
@@ -5818,9 +6188,27 @@
                 <a:tableStyleId>{5C22544A-7EE6-4342-B048-85BDC9FD1C3A}</a:tableStyleId>
               </a:tblPr>
               <a:tblGrid>
-                <a:gridCol w="1798320"/>
-                <a:gridCol w="1798320"/>
-                <a:gridCol w="1798320"/>
+                <a:gridCol w="1798320">
+                  <a:extLst>
+                    <a:ext uri="{9D8B030D-6E8A-4147-A177-3AD203B41FA5}">
+                      <a16:colId xmlns:a16="http://schemas.microsoft.com/office/drawing/2014/main" val="20000"/>
+                    </a:ext>
+                  </a:extLst>
+                </a:gridCol>
+                <a:gridCol w="1798320">
+                  <a:extLst>
+                    <a:ext uri="{9D8B030D-6E8A-4147-A177-3AD203B41FA5}">
+                      <a16:colId xmlns:a16="http://schemas.microsoft.com/office/drawing/2014/main" val="20001"/>
+                    </a:ext>
+                  </a:extLst>
+                </a:gridCol>
+                <a:gridCol w="1798320">
+                  <a:extLst>
+                    <a:ext uri="{9D8B030D-6E8A-4147-A177-3AD203B41FA5}">
+                      <a16:colId xmlns:a16="http://schemas.microsoft.com/office/drawing/2014/main" val="20002"/>
+                    </a:ext>
+                  </a:extLst>
+                </a:gridCol>
               </a:tblGrid>
               <a:tr h="237744">
                 <a:tc>
@@ -5892,6 +6280,11 @@
                     </a:solidFill>
                   </a:tcPr>
                 </a:tc>
+                <a:extLst>
+                  <a:ext uri="{0D108BD9-81ED-4DB2-BD59-A6C34878D82A}">
+                    <a16:rowId xmlns:a16="http://schemas.microsoft.com/office/drawing/2014/main" val="10000"/>
+                  </a:ext>
+                </a:extLst>
               </a:tr>
               <a:tr h="237744">
                 <a:tc>
@@ -5963,6 +6356,11 @@
                     </a:solidFill>
                   </a:tcPr>
                 </a:tc>
+                <a:extLst>
+                  <a:ext uri="{0D108BD9-81ED-4DB2-BD59-A6C34878D82A}">
+                    <a16:rowId xmlns:a16="http://schemas.microsoft.com/office/drawing/2014/main" val="10001"/>
+                  </a:ext>
+                </a:extLst>
               </a:tr>
               <a:tr h="237744">
                 <a:tc>
@@ -6034,6 +6432,11 @@
                     </a:solidFill>
                   </a:tcPr>
                 </a:tc>
+                <a:extLst>
+                  <a:ext uri="{0D108BD9-81ED-4DB2-BD59-A6C34878D82A}">
+                    <a16:rowId xmlns:a16="http://schemas.microsoft.com/office/drawing/2014/main" val="10002"/>
+                  </a:ext>
+                </a:extLst>
               </a:tr>
               <a:tr h="237744">
                 <a:tc>
@@ -6105,6 +6508,11 @@
                     </a:solidFill>
                   </a:tcPr>
                 </a:tc>
+                <a:extLst>
+                  <a:ext uri="{0D108BD9-81ED-4DB2-BD59-A6C34878D82A}">
+                    <a16:rowId xmlns:a16="http://schemas.microsoft.com/office/drawing/2014/main" val="10003"/>
+                  </a:ext>
+                </a:extLst>
               </a:tr>
               <a:tr h="237744">
                 <a:tc>
@@ -6176,6 +6584,11 @@
                     </a:solidFill>
                   </a:tcPr>
                 </a:tc>
+                <a:extLst>
+                  <a:ext uri="{0D108BD9-81ED-4DB2-BD59-A6C34878D82A}">
+                    <a16:rowId xmlns:a16="http://schemas.microsoft.com/office/drawing/2014/main" val="10004"/>
+                  </a:ext>
+                </a:extLst>
               </a:tr>
             </a:tbl>
           </a:graphicData>
@@ -6189,7 +6602,7 @@
         </p:nvSpPr>
         <p:spPr>
           <a:xfrm>
-            <a:off x="548640" y="4858892"/>
+            <a:off x="548640" y="5699570"/>
             <a:ext cx="5394960" cy="274320"/>
           </a:xfrm>
           <a:prstGeom prst="rect">
@@ -6288,7 +6701,7 @@
         </p:nvSpPr>
         <p:spPr>
           <a:xfrm>
-            <a:off x="6400800" y="1716214"/>
+            <a:off x="6400800" y="2205133"/>
             <a:ext cx="5394960" cy="274320"/>
           </a:xfrm>
           <a:prstGeom prst="rect">
@@ -6321,7 +6734,7 @@
         </p:nvSpPr>
         <p:spPr>
           <a:xfrm>
-            <a:off x="6400800" y="2000821"/>
+            <a:off x="6400800" y="2479453"/>
             <a:ext cx="5394960" cy="274320"/>
           </a:xfrm>
           <a:prstGeom prst="rect">
@@ -6421,7 +6834,7 @@
 </file>
 
 <file path=ppt/slides/slide5.xml><?xml version="1.0" encoding="utf-8"?>
-<p:sld xmlns:a="http://schemas.openxmlformats.org/drawingml/2006/main" xmlns:p="http://schemas.openxmlformats.org/presentationml/2006/main" xmlns:r="http://schemas.openxmlformats.org/officeDocument/2006/relationships">
+<p:sld xmlns:a="http://schemas.openxmlformats.org/drawingml/2006/main" xmlns:r="http://schemas.openxmlformats.org/officeDocument/2006/relationships" xmlns:p="http://schemas.openxmlformats.org/presentationml/2006/main">
   <p:cSld>
     <p:spTree>
       <p:nvGrpSpPr>
@@ -6429,7 +6842,14 @@
         <p:cNvGrpSpPr/>
         <p:nvPr/>
       </p:nvGrpSpPr>
-      <p:grpSpPr/>
+      <p:grpSpPr>
+        <a:xfrm>
+          <a:off x="0" y="0"/>
+          <a:ext cx="0" cy="0"/>
+          <a:chOff x="0" y="0"/>
+          <a:chExt cx="0" cy="0"/>
+        </a:xfrm>
+      </p:grpSpPr>
       <p:sp>
         <p:nvSpPr>
           <p:cNvPr id="2" name="Rectangle 1"/>
@@ -6470,6 +6890,7 @@
           <a:lstStyle/>
           <a:p>
             <a:pPr algn="ctr"/>
+            <a:endParaRPr/>
           </a:p>
         </p:txBody>
       </p:sp>
@@ -6580,7 +7001,7 @@
         </p:nvSpPr>
         <p:spPr>
           <a:xfrm>
-            <a:off x="548640" y="1661350"/>
+            <a:off x="548640" y="1948796"/>
             <a:ext cx="5394960" cy="274320"/>
           </a:xfrm>
           <a:prstGeom prst="rect">
@@ -6611,11 +7032,17 @@
           <p:cNvGraphicFramePr>
             <a:graphicFrameLocks noGrp="1"/>
           </p:cNvGraphicFramePr>
-          <p:nvPr/>
+          <p:nvPr>
+            <p:extLst>
+              <p:ext uri="{D42A27DB-BD31-4B8C-83A1-F6EECF244321}">
+                <p14:modId xmlns:p14="http://schemas.microsoft.com/office/powerpoint/2010/main" val="1391235262"/>
+              </p:ext>
+            </p:extLst>
+          </p:nvPr>
         </p:nvGraphicFramePr>
         <p:xfrm>
-          <a:off x="548640" y="1968245"/>
-          <a:ext cx="5394960" cy="713232"/>
+          <a:off x="548640" y="2219556"/>
+          <a:ext cx="5394960" cy="862584"/>
         </p:xfrm>
         <a:graphic>
           <a:graphicData uri="http://schemas.openxmlformats.org/drawingml/2006/table">
@@ -6624,8 +7051,20 @@
                 <a:tableStyleId>{5C22544A-7EE6-4342-B048-85BDC9FD1C3A}</a:tableStyleId>
               </a:tblPr>
               <a:tblGrid>
-                <a:gridCol w="2697480"/>
-                <a:gridCol w="2697480"/>
+                <a:gridCol w="2697480">
+                  <a:extLst>
+                    <a:ext uri="{9D8B030D-6E8A-4147-A177-3AD203B41FA5}">
+                      <a16:colId xmlns:a16="http://schemas.microsoft.com/office/drawing/2014/main" val="20000"/>
+                    </a:ext>
+                  </a:extLst>
+                </a:gridCol>
+                <a:gridCol w="2697480">
+                  <a:extLst>
+                    <a:ext uri="{9D8B030D-6E8A-4147-A177-3AD203B41FA5}">
+                      <a16:colId xmlns:a16="http://schemas.microsoft.com/office/drawing/2014/main" val="20001"/>
+                    </a:ext>
+                  </a:extLst>
+                </a:gridCol>
               </a:tblGrid>
               <a:tr h="237744">
                 <a:tc>
@@ -6674,6 +7113,11 @@
                     </a:solidFill>
                   </a:tcPr>
                 </a:tc>
+                <a:extLst>
+                  <a:ext uri="{0D108BD9-81ED-4DB2-BD59-A6C34878D82A}">
+                    <a16:rowId xmlns:a16="http://schemas.microsoft.com/office/drawing/2014/main" val="10000"/>
+                  </a:ext>
+                </a:extLst>
               </a:tr>
               <a:tr h="237744">
                 <a:tc>
@@ -6722,6 +7166,11 @@
                     </a:solidFill>
                   </a:tcPr>
                 </a:tc>
+                <a:extLst>
+                  <a:ext uri="{0D108BD9-81ED-4DB2-BD59-A6C34878D82A}">
+                    <a16:rowId xmlns:a16="http://schemas.microsoft.com/office/drawing/2014/main" val="10001"/>
+                  </a:ext>
+                </a:extLst>
               </a:tr>
               <a:tr h="237744">
                 <a:tc>
@@ -6770,6 +7219,11 @@
                     </a:solidFill>
                   </a:tcPr>
                 </a:tc>
+                <a:extLst>
+                  <a:ext uri="{0D108BD9-81ED-4DB2-BD59-A6C34878D82A}">
+                    <a16:rowId xmlns:a16="http://schemas.microsoft.com/office/drawing/2014/main" val="10002"/>
+                  </a:ext>
+                </a:extLst>
               </a:tr>
             </a:tbl>
           </a:graphicData>
@@ -6783,7 +7237,7 @@
         </p:nvSpPr>
         <p:spPr>
           <a:xfrm>
-            <a:off x="548640" y="2809493"/>
+            <a:off x="548640" y="3075239"/>
             <a:ext cx="5394960" cy="274320"/>
           </a:xfrm>
           <a:prstGeom prst="rect">
@@ -6816,7 +7270,7 @@
         </p:nvSpPr>
         <p:spPr>
           <a:xfrm>
-            <a:off x="548640" y="3134676"/>
+            <a:off x="548640" y="3644456"/>
             <a:ext cx="5394960" cy="274320"/>
           </a:xfrm>
           <a:prstGeom prst="rect">
@@ -6849,7 +7303,7 @@
         </p:nvSpPr>
         <p:spPr>
           <a:xfrm>
-            <a:off x="548640" y="3419283"/>
+            <a:off x="548640" y="3946661"/>
             <a:ext cx="5394960" cy="274320"/>
           </a:xfrm>
           <a:prstGeom prst="rect">
@@ -6882,7 +7336,7 @@
         </p:nvSpPr>
         <p:spPr>
           <a:xfrm>
-            <a:off x="548640" y="3689602"/>
+            <a:off x="548640" y="4399057"/>
             <a:ext cx="5394960" cy="274320"/>
           </a:xfrm>
           <a:prstGeom prst="rect">
@@ -6927,7 +7381,7 @@
         </p:nvSpPr>
         <p:spPr>
           <a:xfrm>
-            <a:off x="548640" y="4101082"/>
+            <a:off x="548640" y="4830281"/>
             <a:ext cx="5394960" cy="274320"/>
           </a:xfrm>
           <a:prstGeom prst="rect">
@@ -6960,7 +7414,7 @@
         </p:nvSpPr>
         <p:spPr>
           <a:xfrm>
-            <a:off x="548640" y="4426265"/>
+            <a:off x="6309360" y="1109283"/>
             <a:ext cx="5394960" cy="274320"/>
           </a:xfrm>
           <a:prstGeom prst="rect">
@@ -6991,11 +7445,17 @@
           <p:cNvGraphicFramePr>
             <a:graphicFrameLocks noGrp="1"/>
           </p:cNvGraphicFramePr>
-          <p:nvPr/>
+          <p:nvPr>
+            <p:extLst>
+              <p:ext uri="{D42A27DB-BD31-4B8C-83A1-F6EECF244321}">
+                <p14:modId xmlns:p14="http://schemas.microsoft.com/office/powerpoint/2010/main" val="3130294314"/>
+              </p:ext>
+            </p:extLst>
+          </p:nvPr>
         </p:nvGraphicFramePr>
         <p:xfrm>
-          <a:off x="548640" y="4747448"/>
-          <a:ext cx="5394960" cy="1188720"/>
+          <a:off x="6309360" y="1409893"/>
+          <a:ext cx="5394960" cy="1769364"/>
         </p:xfrm>
         <a:graphic>
           <a:graphicData uri="http://schemas.openxmlformats.org/drawingml/2006/table">
@@ -7004,11 +7464,29 @@
                 <a:tableStyleId>{5C22544A-7EE6-4342-B048-85BDC9FD1C3A}</a:tableStyleId>
               </a:tblPr>
               <a:tblGrid>
-                <a:gridCol w="1798320"/>
-                <a:gridCol w="1798320"/>
-                <a:gridCol w="1798320"/>
+                <a:gridCol w="1798320">
+                  <a:extLst>
+                    <a:ext uri="{9D8B030D-6E8A-4147-A177-3AD203B41FA5}">
+                      <a16:colId xmlns:a16="http://schemas.microsoft.com/office/drawing/2014/main" val="20000"/>
+                    </a:ext>
+                  </a:extLst>
+                </a:gridCol>
+                <a:gridCol w="1798320">
+                  <a:extLst>
+                    <a:ext uri="{9D8B030D-6E8A-4147-A177-3AD203B41FA5}">
+                      <a16:colId xmlns:a16="http://schemas.microsoft.com/office/drawing/2014/main" val="20001"/>
+                    </a:ext>
+                  </a:extLst>
+                </a:gridCol>
+                <a:gridCol w="1798320">
+                  <a:extLst>
+                    <a:ext uri="{9D8B030D-6E8A-4147-A177-3AD203B41FA5}">
+                      <a16:colId xmlns:a16="http://schemas.microsoft.com/office/drawing/2014/main" val="20002"/>
+                    </a:ext>
+                  </a:extLst>
+                </a:gridCol>
               </a:tblGrid>
-              <a:tr h="237744">
+              <a:tr h="227921">
                 <a:tc>
                   <a:txBody>
                     <a:bodyPr/>
@@ -7078,6 +7556,11 @@
                     </a:solidFill>
                   </a:tcPr>
                 </a:tc>
+                <a:extLst>
+                  <a:ext uri="{0D108BD9-81ED-4DB2-BD59-A6C34878D82A}">
+                    <a16:rowId xmlns:a16="http://schemas.microsoft.com/office/drawing/2014/main" val="10000"/>
+                  </a:ext>
+                </a:extLst>
               </a:tr>
               <a:tr h="237744">
                 <a:tc>
@@ -7149,6 +7632,11 @@
                     </a:solidFill>
                   </a:tcPr>
                 </a:tc>
+                <a:extLst>
+                  <a:ext uri="{0D108BD9-81ED-4DB2-BD59-A6C34878D82A}">
+                    <a16:rowId xmlns:a16="http://schemas.microsoft.com/office/drawing/2014/main" val="10001"/>
+                  </a:ext>
+                </a:extLst>
               </a:tr>
               <a:tr h="237744">
                 <a:tc>
@@ -7220,6 +7708,11 @@
                     </a:solidFill>
                   </a:tcPr>
                 </a:tc>
+                <a:extLst>
+                  <a:ext uri="{0D108BD9-81ED-4DB2-BD59-A6C34878D82A}">
+                    <a16:rowId xmlns:a16="http://schemas.microsoft.com/office/drawing/2014/main" val="10002"/>
+                  </a:ext>
+                </a:extLst>
               </a:tr>
               <a:tr h="237744">
                 <a:tc>
@@ -7291,6 +7784,11 @@
                     </a:solidFill>
                   </a:tcPr>
                 </a:tc>
+                <a:extLst>
+                  <a:ext uri="{0D108BD9-81ED-4DB2-BD59-A6C34878D82A}">
+                    <a16:rowId xmlns:a16="http://schemas.microsoft.com/office/drawing/2014/main" val="10003"/>
+                  </a:ext>
+                </a:extLst>
               </a:tr>
               <a:tr h="237744">
                 <a:tc>
@@ -7362,6 +7860,11 @@
                     </a:solidFill>
                   </a:tcPr>
                 </a:tc>
+                <a:extLst>
+                  <a:ext uri="{0D108BD9-81ED-4DB2-BD59-A6C34878D82A}">
+                    <a16:rowId xmlns:a16="http://schemas.microsoft.com/office/drawing/2014/main" val="10004"/>
+                  </a:ext>
+                </a:extLst>
               </a:tr>
             </a:tbl>
           </a:graphicData>
@@ -7375,7 +7878,7 @@
         </p:nvSpPr>
         <p:spPr>
           <a:xfrm>
-            <a:off x="6400800" y="1051560"/>
+            <a:off x="6309360" y="3220212"/>
             <a:ext cx="5394960" cy="274320"/>
           </a:xfrm>
           <a:prstGeom prst="rect">
@@ -7408,7 +7911,7 @@
         </p:nvSpPr>
         <p:spPr>
           <a:xfrm>
-            <a:off x="6400800" y="1376743"/>
+            <a:off x="6309360" y="3809501"/>
             <a:ext cx="5394960" cy="274320"/>
           </a:xfrm>
           <a:prstGeom prst="rect">
@@ -7441,7 +7944,7 @@
         </p:nvSpPr>
         <p:spPr>
           <a:xfrm>
-            <a:off x="6400800" y="1661350"/>
+            <a:off x="6309360" y="4101082"/>
             <a:ext cx="5394960" cy="274320"/>
           </a:xfrm>
           <a:prstGeom prst="rect">
@@ -7474,7 +7977,7 @@
         </p:nvSpPr>
         <p:spPr>
           <a:xfrm>
-            <a:off x="6400800" y="1931669"/>
+            <a:off x="6400800" y="6242492"/>
             <a:ext cx="5394960" cy="274320"/>
           </a:xfrm>
           <a:prstGeom prst="rect">
